--- a/Fashion-insta.pptx
+++ b/Fashion-insta.pptx
@@ -19,20 +19,20 @@
     <p:sldId id="2570" r:id="rId10"/>
     <p:sldId id="2571" r:id="rId11"/>
     <p:sldId id="2572" r:id="rId12"/>
-    <p:sldId id="2573" r:id="rId13"/>
-    <p:sldId id="2587" r:id="rId14"/>
-    <p:sldId id="2582" r:id="rId15"/>
-    <p:sldId id="2583" r:id="rId16"/>
-    <p:sldId id="2584" r:id="rId17"/>
-    <p:sldId id="2586" r:id="rId18"/>
-    <p:sldId id="2575" r:id="rId19"/>
-    <p:sldId id="2579" r:id="rId20"/>
-    <p:sldId id="2576" r:id="rId21"/>
-    <p:sldId id="2578" r:id="rId22"/>
-    <p:sldId id="2577" r:id="rId23"/>
-    <p:sldId id="2574" r:id="rId24"/>
-    <p:sldId id="2562" r:id="rId25"/>
-    <p:sldId id="2563" r:id="rId26"/>
+    <p:sldId id="2589" r:id="rId13"/>
+    <p:sldId id="2573" r:id="rId14"/>
+    <p:sldId id="2575" r:id="rId15"/>
+    <p:sldId id="2576" r:id="rId16"/>
+    <p:sldId id="2578" r:id="rId17"/>
+    <p:sldId id="2577" r:id="rId18"/>
+    <p:sldId id="2588" r:id="rId19"/>
+    <p:sldId id="2587" r:id="rId20"/>
+    <p:sldId id="2582" r:id="rId21"/>
+    <p:sldId id="2583" r:id="rId22"/>
+    <p:sldId id="2584" r:id="rId23"/>
+    <p:sldId id="2586" r:id="rId24"/>
+    <p:sldId id="2563" r:id="rId25"/>
+    <p:sldId id="2562" r:id="rId26"/>
   </p:sldIdLst>
   <p:sldSz cx="12192000" cy="6858000"/>
   <p:notesSz cx="6858000" cy="9144000"/>
@@ -155,7 +155,21 @@
             <p14:sldId id="2570"/>
             <p14:sldId id="2571"/>
             <p14:sldId id="2572"/>
+            <p14:sldId id="2589"/>
             <p14:sldId id="2573"/>
+          </p14:sldIdLst>
+        </p14:section>
+        <p14:section name="Agile Methodology" id="{63B8A95C-F4DD-4B6B-A4A7-F4838C859E12}">
+          <p14:sldIdLst>
+            <p14:sldId id="2575"/>
+            <p14:sldId id="2576"/>
+            <p14:sldId id="2578"/>
+            <p14:sldId id="2577"/>
+          </p14:sldIdLst>
+        </p14:section>
+        <p14:section name="project backlog" id="{A124CF26-4632-4190-8BE2-DA99244727BA}">
+          <p14:sldIdLst>
+            <p14:sldId id="2588"/>
           </p14:sldIdLst>
         </p14:section>
         <p14:section name="Risks &amp; Mitigation" id="{82BFFD12-573C-4B41-884C-1445E3A3E1D0}">
@@ -171,20 +185,10 @@
             <p14:sldId id="2586"/>
           </p14:sldIdLst>
         </p14:section>
-        <p14:section name="Agile Methodology" id="{63B8A95C-F4DD-4B6B-A4A7-F4838C859E12}">
-          <p14:sldIdLst>
-            <p14:sldId id="2575"/>
-            <p14:sldId id="2579"/>
-            <p14:sldId id="2576"/>
-            <p14:sldId id="2578"/>
-            <p14:sldId id="2577"/>
-            <p14:sldId id="2574"/>
-            <p14:sldId id="2562"/>
-          </p14:sldIdLst>
-        </p14:section>
         <p14:section name="Conclusion" id="{E5600DF5-97B2-466C-9B48-C6FD0F788D67}">
           <p14:sldIdLst>
             <p14:sldId id="2563"/>
+            <p14:sldId id="2562"/>
           </p14:sldIdLst>
         </p14:section>
       </p14:sectionLst>
@@ -2438,753 +2442,6 @@
 </file>
 
 <file path=ppt/diagrams/colors4.xml><?xml version="1.0" encoding="utf-8"?>
-<dgm:colorsDef xmlns:dgm="http://schemas.openxmlformats.org/drawingml/2006/diagram" xmlns:a="http://schemas.openxmlformats.org/drawingml/2006/main" uniqueId="urn:microsoft.com/office/officeart/2005/8/colors/accent3_2">
-  <dgm:title val=""/>
-  <dgm:desc val=""/>
-  <dgm:catLst>
-    <dgm:cat type="accent3" pri="11200"/>
-  </dgm:catLst>
-  <dgm:styleLbl name="node0">
-    <dgm:fillClrLst meth="repeat">
-      <a:schemeClr val="accent3"/>
-    </dgm:fillClrLst>
-    <dgm:linClrLst meth="repeat">
-      <a:schemeClr val="lt1"/>
-    </dgm:linClrLst>
-    <dgm:effectClrLst/>
-    <dgm:txLinClrLst/>
-    <dgm:txFillClrLst/>
-    <dgm:txEffectClrLst/>
-  </dgm:styleLbl>
-  <dgm:styleLbl name="node1">
-    <dgm:fillClrLst meth="repeat">
-      <a:schemeClr val="accent3"/>
-    </dgm:fillClrLst>
-    <dgm:linClrLst meth="repeat">
-      <a:schemeClr val="lt1"/>
-    </dgm:linClrLst>
-    <dgm:effectClrLst/>
-    <dgm:txLinClrLst/>
-    <dgm:txFillClrLst/>
-    <dgm:txEffectClrLst/>
-  </dgm:styleLbl>
-  <dgm:styleLbl name="alignNode1">
-    <dgm:fillClrLst meth="repeat">
-      <a:schemeClr val="accent3"/>
-    </dgm:fillClrLst>
-    <dgm:linClrLst meth="repeat">
-      <a:schemeClr val="accent3"/>
-    </dgm:linClrLst>
-    <dgm:effectClrLst/>
-    <dgm:txLinClrLst/>
-    <dgm:txFillClrLst/>
-    <dgm:txEffectClrLst/>
-  </dgm:styleLbl>
-  <dgm:styleLbl name="lnNode1">
-    <dgm:fillClrLst meth="repeat">
-      <a:schemeClr val="accent3"/>
-    </dgm:fillClrLst>
-    <dgm:linClrLst meth="repeat">
-      <a:schemeClr val="lt1"/>
-    </dgm:linClrLst>
-    <dgm:effectClrLst/>
-    <dgm:txLinClrLst/>
-    <dgm:txFillClrLst/>
-    <dgm:txEffectClrLst/>
-  </dgm:styleLbl>
-  <dgm:styleLbl name="vennNode1">
-    <dgm:fillClrLst meth="repeat">
-      <a:schemeClr val="accent3">
-        <a:alpha val="50000"/>
-      </a:schemeClr>
-    </dgm:fillClrLst>
-    <dgm:linClrLst meth="repeat">
-      <a:schemeClr val="lt1"/>
-    </dgm:linClrLst>
-    <dgm:effectClrLst/>
-    <dgm:txLinClrLst/>
-    <dgm:txFillClrLst/>
-    <dgm:txEffectClrLst/>
-  </dgm:styleLbl>
-  <dgm:styleLbl name="node2">
-    <dgm:fillClrLst meth="repeat">
-      <a:schemeClr val="accent3"/>
-    </dgm:fillClrLst>
-    <dgm:linClrLst meth="repeat">
-      <a:schemeClr val="lt1"/>
-    </dgm:linClrLst>
-    <dgm:effectClrLst/>
-    <dgm:txLinClrLst/>
-    <dgm:txFillClrLst/>
-    <dgm:txEffectClrLst/>
-  </dgm:styleLbl>
-  <dgm:styleLbl name="node3">
-    <dgm:fillClrLst meth="repeat">
-      <a:schemeClr val="accent3"/>
-    </dgm:fillClrLst>
-    <dgm:linClrLst meth="repeat">
-      <a:schemeClr val="lt1"/>
-    </dgm:linClrLst>
-    <dgm:effectClrLst/>
-    <dgm:txLinClrLst/>
-    <dgm:txFillClrLst/>
-    <dgm:txEffectClrLst/>
-  </dgm:styleLbl>
-  <dgm:styleLbl name="node4">
-    <dgm:fillClrLst meth="repeat">
-      <a:schemeClr val="accent3"/>
-    </dgm:fillClrLst>
-    <dgm:linClrLst meth="repeat">
-      <a:schemeClr val="lt1"/>
-    </dgm:linClrLst>
-    <dgm:effectClrLst/>
-    <dgm:txLinClrLst/>
-    <dgm:txFillClrLst/>
-    <dgm:txEffectClrLst/>
-  </dgm:styleLbl>
-  <dgm:styleLbl name="fgImgPlace1">
-    <dgm:fillClrLst meth="repeat">
-      <a:schemeClr val="accent3">
-        <a:tint val="50000"/>
-      </a:schemeClr>
-    </dgm:fillClrLst>
-    <dgm:linClrLst meth="repeat">
-      <a:schemeClr val="lt1"/>
-    </dgm:linClrLst>
-    <dgm:effectClrLst/>
-    <dgm:txLinClrLst/>
-    <dgm:txFillClrLst meth="repeat">
-      <a:schemeClr val="lt1"/>
-    </dgm:txFillClrLst>
-    <dgm:txEffectClrLst/>
-  </dgm:styleLbl>
-  <dgm:styleLbl name="alignImgPlace1">
-    <dgm:fillClrLst meth="repeat">
-      <a:schemeClr val="accent3">
-        <a:tint val="50000"/>
-      </a:schemeClr>
-    </dgm:fillClrLst>
-    <dgm:linClrLst meth="repeat">
-      <a:schemeClr val="lt1"/>
-    </dgm:linClrLst>
-    <dgm:effectClrLst/>
-    <dgm:txLinClrLst/>
-    <dgm:txFillClrLst meth="repeat">
-      <a:schemeClr val="lt1"/>
-    </dgm:txFillClrLst>
-    <dgm:txEffectClrLst/>
-  </dgm:styleLbl>
-  <dgm:styleLbl name="bgImgPlace1">
-    <dgm:fillClrLst meth="repeat">
-      <a:schemeClr val="accent3">
-        <a:tint val="50000"/>
-      </a:schemeClr>
-    </dgm:fillClrLst>
-    <dgm:linClrLst meth="repeat">
-      <a:schemeClr val="lt1"/>
-    </dgm:linClrLst>
-    <dgm:effectClrLst/>
-    <dgm:txLinClrLst/>
-    <dgm:txFillClrLst meth="repeat">
-      <a:schemeClr val="lt1"/>
-    </dgm:txFillClrLst>
-    <dgm:txEffectClrLst/>
-  </dgm:styleLbl>
-  <dgm:styleLbl name="sibTrans2D1">
-    <dgm:fillClrLst meth="repeat">
-      <a:schemeClr val="accent3">
-        <a:tint val="60000"/>
-      </a:schemeClr>
-    </dgm:fillClrLst>
-    <dgm:linClrLst meth="repeat">
-      <a:schemeClr val="accent3">
-        <a:tint val="60000"/>
-      </a:schemeClr>
-    </dgm:linClrLst>
-    <dgm:effectClrLst/>
-    <dgm:txLinClrLst/>
-    <dgm:txFillClrLst/>
-    <dgm:txEffectClrLst/>
-  </dgm:styleLbl>
-  <dgm:styleLbl name="fgSibTrans2D1">
-    <dgm:fillClrLst meth="repeat">
-      <a:schemeClr val="accent3">
-        <a:tint val="60000"/>
-      </a:schemeClr>
-    </dgm:fillClrLst>
-    <dgm:linClrLst meth="repeat">
-      <a:schemeClr val="accent3">
-        <a:tint val="60000"/>
-      </a:schemeClr>
-    </dgm:linClrLst>
-    <dgm:effectClrLst/>
-    <dgm:txLinClrLst/>
-    <dgm:txFillClrLst/>
-    <dgm:txEffectClrLst/>
-  </dgm:styleLbl>
-  <dgm:styleLbl name="bgSibTrans2D1">
-    <dgm:fillClrLst meth="repeat">
-      <a:schemeClr val="accent3">
-        <a:tint val="60000"/>
-      </a:schemeClr>
-    </dgm:fillClrLst>
-    <dgm:linClrLst meth="repeat">
-      <a:schemeClr val="accent3">
-        <a:tint val="60000"/>
-      </a:schemeClr>
-    </dgm:linClrLst>
-    <dgm:effectClrLst/>
-    <dgm:txLinClrLst/>
-    <dgm:txFillClrLst/>
-    <dgm:txEffectClrLst/>
-  </dgm:styleLbl>
-  <dgm:styleLbl name="sibTrans1D1">
-    <dgm:fillClrLst meth="repeat">
-      <a:schemeClr val="accent3"/>
-    </dgm:fillClrLst>
-    <dgm:linClrLst meth="repeat">
-      <a:schemeClr val="accent3"/>
-    </dgm:linClrLst>
-    <dgm:effectClrLst/>
-    <dgm:txLinClrLst/>
-    <dgm:txFillClrLst meth="repeat">
-      <a:schemeClr val="tx1"/>
-    </dgm:txFillClrLst>
-    <dgm:txEffectClrLst/>
-  </dgm:styleLbl>
-  <dgm:styleLbl name="callout">
-    <dgm:fillClrLst meth="repeat">
-      <a:schemeClr val="accent3"/>
-    </dgm:fillClrLst>
-    <dgm:linClrLst meth="repeat">
-      <a:schemeClr val="accent3">
-        <a:tint val="50000"/>
-      </a:schemeClr>
-    </dgm:linClrLst>
-    <dgm:effectClrLst/>
-    <dgm:txLinClrLst/>
-    <dgm:txFillClrLst meth="repeat">
-      <a:schemeClr val="tx1"/>
-    </dgm:txFillClrLst>
-    <dgm:txEffectClrLst/>
-  </dgm:styleLbl>
-  <dgm:styleLbl name="asst0">
-    <dgm:fillClrLst meth="repeat">
-      <a:schemeClr val="accent3"/>
-    </dgm:fillClrLst>
-    <dgm:linClrLst meth="repeat">
-      <a:schemeClr val="lt1"/>
-    </dgm:linClrLst>
-    <dgm:effectClrLst/>
-    <dgm:txLinClrLst/>
-    <dgm:txFillClrLst/>
-    <dgm:txEffectClrLst/>
-  </dgm:styleLbl>
-  <dgm:styleLbl name="asst1">
-    <dgm:fillClrLst meth="repeat">
-      <a:schemeClr val="accent3"/>
-    </dgm:fillClrLst>
-    <dgm:linClrLst meth="repeat">
-      <a:schemeClr val="lt1"/>
-    </dgm:linClrLst>
-    <dgm:effectClrLst/>
-    <dgm:txLinClrLst/>
-    <dgm:txFillClrLst/>
-    <dgm:txEffectClrLst/>
-  </dgm:styleLbl>
-  <dgm:styleLbl name="asst2">
-    <dgm:fillClrLst meth="repeat">
-      <a:schemeClr val="accent3"/>
-    </dgm:fillClrLst>
-    <dgm:linClrLst meth="repeat">
-      <a:schemeClr val="lt1"/>
-    </dgm:linClrLst>
-    <dgm:effectClrLst/>
-    <dgm:txLinClrLst/>
-    <dgm:txFillClrLst/>
-    <dgm:txEffectClrLst/>
-  </dgm:styleLbl>
-  <dgm:styleLbl name="asst3">
-    <dgm:fillClrLst meth="repeat">
-      <a:schemeClr val="accent3"/>
-    </dgm:fillClrLst>
-    <dgm:linClrLst meth="repeat">
-      <a:schemeClr val="lt1"/>
-    </dgm:linClrLst>
-    <dgm:effectClrLst/>
-    <dgm:txLinClrLst/>
-    <dgm:txFillClrLst/>
-    <dgm:txEffectClrLst/>
-  </dgm:styleLbl>
-  <dgm:styleLbl name="asst4">
-    <dgm:fillClrLst meth="repeat">
-      <a:schemeClr val="accent3"/>
-    </dgm:fillClrLst>
-    <dgm:linClrLst meth="repeat">
-      <a:schemeClr val="lt1"/>
-    </dgm:linClrLst>
-    <dgm:effectClrLst/>
-    <dgm:txLinClrLst/>
-    <dgm:txFillClrLst/>
-    <dgm:txEffectClrLst/>
-  </dgm:styleLbl>
-  <dgm:styleLbl name="parChTrans2D1">
-    <dgm:fillClrLst meth="repeat">
-      <a:schemeClr val="accent3">
-        <a:tint val="60000"/>
-      </a:schemeClr>
-    </dgm:fillClrLst>
-    <dgm:linClrLst meth="repeat">
-      <a:schemeClr val="accent3">
-        <a:tint val="60000"/>
-      </a:schemeClr>
-    </dgm:linClrLst>
-    <dgm:effectClrLst/>
-    <dgm:txLinClrLst/>
-    <dgm:txFillClrLst meth="repeat">
-      <a:schemeClr val="lt1"/>
-    </dgm:txFillClrLst>
-    <dgm:txEffectClrLst/>
-  </dgm:styleLbl>
-  <dgm:styleLbl name="parChTrans2D2">
-    <dgm:fillClrLst meth="repeat">
-      <a:schemeClr val="accent3"/>
-    </dgm:fillClrLst>
-    <dgm:linClrLst meth="repeat">
-      <a:schemeClr val="accent3"/>
-    </dgm:linClrLst>
-    <dgm:effectClrLst/>
-    <dgm:txLinClrLst/>
-    <dgm:txFillClrLst meth="repeat">
-      <a:schemeClr val="lt1"/>
-    </dgm:txFillClrLst>
-    <dgm:txEffectClrLst/>
-  </dgm:styleLbl>
-  <dgm:styleLbl name="parChTrans2D3">
-    <dgm:fillClrLst meth="repeat">
-      <a:schemeClr val="accent3"/>
-    </dgm:fillClrLst>
-    <dgm:linClrLst meth="repeat">
-      <a:schemeClr val="accent3"/>
-    </dgm:linClrLst>
-    <dgm:effectClrLst/>
-    <dgm:txLinClrLst/>
-    <dgm:txFillClrLst meth="repeat">
-      <a:schemeClr val="lt1"/>
-    </dgm:txFillClrLst>
-    <dgm:txEffectClrLst/>
-  </dgm:styleLbl>
-  <dgm:styleLbl name="parChTrans2D4">
-    <dgm:fillClrLst meth="repeat">
-      <a:schemeClr val="accent3"/>
-    </dgm:fillClrLst>
-    <dgm:linClrLst meth="repeat">
-      <a:schemeClr val="accent3"/>
-    </dgm:linClrLst>
-    <dgm:effectClrLst/>
-    <dgm:txLinClrLst/>
-    <dgm:txFillClrLst meth="repeat">
-      <a:schemeClr val="lt1"/>
-    </dgm:txFillClrLst>
-    <dgm:txEffectClrLst/>
-  </dgm:styleLbl>
-  <dgm:styleLbl name="parChTrans1D1">
-    <dgm:fillClrLst meth="repeat">
-      <a:schemeClr val="accent3"/>
-    </dgm:fillClrLst>
-    <dgm:linClrLst meth="repeat">
-      <a:schemeClr val="accent3">
-        <a:shade val="60000"/>
-      </a:schemeClr>
-    </dgm:linClrLst>
-    <dgm:effectClrLst/>
-    <dgm:txLinClrLst/>
-    <dgm:txFillClrLst meth="repeat">
-      <a:schemeClr val="tx1"/>
-    </dgm:txFillClrLst>
-    <dgm:txEffectClrLst/>
-  </dgm:styleLbl>
-  <dgm:styleLbl name="parChTrans1D2">
-    <dgm:fillClrLst meth="repeat">
-      <a:schemeClr val="accent3"/>
-    </dgm:fillClrLst>
-    <dgm:linClrLst meth="repeat">
-      <a:schemeClr val="accent3">
-        <a:shade val="60000"/>
-      </a:schemeClr>
-    </dgm:linClrLst>
-    <dgm:effectClrLst/>
-    <dgm:txLinClrLst/>
-    <dgm:txFillClrLst meth="repeat">
-      <a:schemeClr val="tx1"/>
-    </dgm:txFillClrLst>
-    <dgm:txEffectClrLst/>
-  </dgm:styleLbl>
-  <dgm:styleLbl name="parChTrans1D3">
-    <dgm:fillClrLst meth="repeat">
-      <a:schemeClr val="accent3"/>
-    </dgm:fillClrLst>
-    <dgm:linClrLst meth="repeat">
-      <a:schemeClr val="accent3">
-        <a:shade val="80000"/>
-      </a:schemeClr>
-    </dgm:linClrLst>
-    <dgm:effectClrLst/>
-    <dgm:txLinClrLst/>
-    <dgm:txFillClrLst meth="repeat">
-      <a:schemeClr val="tx1"/>
-    </dgm:txFillClrLst>
-    <dgm:txEffectClrLst/>
-  </dgm:styleLbl>
-  <dgm:styleLbl name="parChTrans1D4">
-    <dgm:fillClrLst meth="repeat">
-      <a:schemeClr val="accent3"/>
-    </dgm:fillClrLst>
-    <dgm:linClrLst meth="repeat">
-      <a:schemeClr val="accent3">
-        <a:shade val="80000"/>
-      </a:schemeClr>
-    </dgm:linClrLst>
-    <dgm:effectClrLst/>
-    <dgm:txLinClrLst/>
-    <dgm:txFillClrLst meth="repeat">
-      <a:schemeClr val="tx1"/>
-    </dgm:txFillClrLst>
-    <dgm:txEffectClrLst/>
-  </dgm:styleLbl>
-  <dgm:styleLbl name="fgAcc1">
-    <dgm:fillClrLst meth="repeat">
-      <a:schemeClr val="lt1">
-        <a:alpha val="90000"/>
-      </a:schemeClr>
-    </dgm:fillClrLst>
-    <dgm:linClrLst meth="repeat">
-      <a:schemeClr val="accent3"/>
-    </dgm:linClrLst>
-    <dgm:effectClrLst/>
-    <dgm:txLinClrLst/>
-    <dgm:txFillClrLst meth="repeat">
-      <a:schemeClr val="dk1"/>
-    </dgm:txFillClrLst>
-    <dgm:txEffectClrLst/>
-  </dgm:styleLbl>
-  <dgm:styleLbl name="conFgAcc1">
-    <dgm:fillClrLst meth="repeat">
-      <a:schemeClr val="lt1">
-        <a:alpha val="90000"/>
-      </a:schemeClr>
-    </dgm:fillClrLst>
-    <dgm:linClrLst meth="repeat">
-      <a:schemeClr val="accent3"/>
-    </dgm:linClrLst>
-    <dgm:effectClrLst/>
-    <dgm:txLinClrLst/>
-    <dgm:txFillClrLst meth="repeat">
-      <a:schemeClr val="dk1"/>
-    </dgm:txFillClrLst>
-    <dgm:txEffectClrLst/>
-  </dgm:styleLbl>
-  <dgm:styleLbl name="alignAcc1">
-    <dgm:fillClrLst meth="repeat">
-      <a:schemeClr val="lt1">
-        <a:alpha val="90000"/>
-      </a:schemeClr>
-    </dgm:fillClrLst>
-    <dgm:linClrLst meth="repeat">
-      <a:schemeClr val="accent3"/>
-    </dgm:linClrLst>
-    <dgm:effectClrLst/>
-    <dgm:txLinClrLst/>
-    <dgm:txFillClrLst meth="repeat">
-      <a:schemeClr val="dk1"/>
-    </dgm:txFillClrLst>
-    <dgm:txEffectClrLst/>
-  </dgm:styleLbl>
-  <dgm:styleLbl name="trAlignAcc1">
-    <dgm:fillClrLst meth="repeat">
-      <a:schemeClr val="lt1">
-        <a:alpha val="40000"/>
-      </a:schemeClr>
-    </dgm:fillClrLst>
-    <dgm:linClrLst meth="repeat">
-      <a:schemeClr val="accent3"/>
-    </dgm:linClrLst>
-    <dgm:effectClrLst/>
-    <dgm:txLinClrLst/>
-    <dgm:txFillClrLst meth="repeat">
-      <a:schemeClr val="dk1"/>
-    </dgm:txFillClrLst>
-    <dgm:txEffectClrLst/>
-  </dgm:styleLbl>
-  <dgm:styleLbl name="bgAcc1">
-    <dgm:fillClrLst meth="repeat">
-      <a:schemeClr val="lt1">
-        <a:alpha val="90000"/>
-      </a:schemeClr>
-    </dgm:fillClrLst>
-    <dgm:linClrLst meth="repeat">
-      <a:schemeClr val="accent3"/>
-    </dgm:linClrLst>
-    <dgm:effectClrLst/>
-    <dgm:txLinClrLst/>
-    <dgm:txFillClrLst meth="repeat">
-      <a:schemeClr val="dk1"/>
-    </dgm:txFillClrLst>
-    <dgm:txEffectClrLst/>
-  </dgm:styleLbl>
-  <dgm:styleLbl name="solidFgAcc1">
-    <dgm:fillClrLst meth="repeat">
-      <a:schemeClr val="lt1"/>
-    </dgm:fillClrLst>
-    <dgm:linClrLst meth="repeat">
-      <a:schemeClr val="accent3"/>
-    </dgm:linClrLst>
-    <dgm:effectClrLst/>
-    <dgm:txLinClrLst/>
-    <dgm:txFillClrLst meth="repeat">
-      <a:schemeClr val="dk1"/>
-    </dgm:txFillClrLst>
-    <dgm:txEffectClrLst/>
-  </dgm:styleLbl>
-  <dgm:styleLbl name="solidAlignAcc1">
-    <dgm:fillClrLst meth="repeat">
-      <a:schemeClr val="lt1"/>
-    </dgm:fillClrLst>
-    <dgm:linClrLst meth="repeat">
-      <a:schemeClr val="accent3"/>
-    </dgm:linClrLst>
-    <dgm:effectClrLst/>
-    <dgm:txLinClrLst/>
-    <dgm:txFillClrLst meth="repeat">
-      <a:schemeClr val="dk1"/>
-    </dgm:txFillClrLst>
-    <dgm:txEffectClrLst/>
-  </dgm:styleLbl>
-  <dgm:styleLbl name="solidBgAcc1">
-    <dgm:fillClrLst meth="repeat">
-      <a:schemeClr val="lt1"/>
-    </dgm:fillClrLst>
-    <dgm:linClrLst meth="repeat">
-      <a:schemeClr val="accent3"/>
-    </dgm:linClrLst>
-    <dgm:effectClrLst/>
-    <dgm:txLinClrLst/>
-    <dgm:txFillClrLst meth="repeat">
-      <a:schemeClr val="dk1"/>
-    </dgm:txFillClrLst>
-    <dgm:txEffectClrLst/>
-  </dgm:styleLbl>
-  <dgm:styleLbl name="fgAccFollowNode1">
-    <dgm:fillClrLst meth="repeat">
-      <a:schemeClr val="accent3">
-        <a:alpha val="90000"/>
-        <a:tint val="40000"/>
-      </a:schemeClr>
-    </dgm:fillClrLst>
-    <dgm:linClrLst meth="repeat">
-      <a:schemeClr val="accent3">
-        <a:alpha val="90000"/>
-        <a:tint val="40000"/>
-      </a:schemeClr>
-    </dgm:linClrLst>
-    <dgm:effectClrLst/>
-    <dgm:txLinClrLst/>
-    <dgm:txFillClrLst meth="repeat">
-      <a:schemeClr val="dk1"/>
-    </dgm:txFillClrLst>
-    <dgm:txEffectClrLst/>
-  </dgm:styleLbl>
-  <dgm:styleLbl name="alignAccFollowNode1">
-    <dgm:fillClrLst meth="repeat">
-      <a:schemeClr val="accent3">
-        <a:alpha val="90000"/>
-        <a:tint val="40000"/>
-      </a:schemeClr>
-    </dgm:fillClrLst>
-    <dgm:linClrLst meth="repeat">
-      <a:schemeClr val="accent3">
-        <a:alpha val="90000"/>
-        <a:tint val="40000"/>
-      </a:schemeClr>
-    </dgm:linClrLst>
-    <dgm:effectClrLst/>
-    <dgm:txLinClrLst/>
-    <dgm:txFillClrLst meth="repeat">
-      <a:schemeClr val="dk1"/>
-    </dgm:txFillClrLst>
-    <dgm:txEffectClrLst/>
-  </dgm:styleLbl>
-  <dgm:styleLbl name="bgAccFollowNode1">
-    <dgm:fillClrLst meth="repeat">
-      <a:schemeClr val="accent3">
-        <a:alpha val="90000"/>
-        <a:tint val="40000"/>
-      </a:schemeClr>
-    </dgm:fillClrLst>
-    <dgm:linClrLst meth="repeat">
-      <a:schemeClr val="accent3">
-        <a:alpha val="90000"/>
-        <a:tint val="40000"/>
-      </a:schemeClr>
-    </dgm:linClrLst>
-    <dgm:effectClrLst/>
-    <dgm:txLinClrLst/>
-    <dgm:txFillClrLst meth="repeat">
-      <a:schemeClr val="dk1"/>
-    </dgm:txFillClrLst>
-    <dgm:txEffectClrLst/>
-  </dgm:styleLbl>
-  <dgm:styleLbl name="fgAcc0">
-    <dgm:fillClrLst meth="repeat">
-      <a:schemeClr val="lt1">
-        <a:alpha val="90000"/>
-      </a:schemeClr>
-    </dgm:fillClrLst>
-    <dgm:linClrLst meth="repeat">
-      <a:schemeClr val="accent3"/>
-    </dgm:linClrLst>
-    <dgm:effectClrLst/>
-    <dgm:txLinClrLst/>
-    <dgm:txFillClrLst meth="repeat">
-      <a:schemeClr val="dk1"/>
-    </dgm:txFillClrLst>
-    <dgm:txEffectClrLst/>
-  </dgm:styleLbl>
-  <dgm:styleLbl name="fgAcc2">
-    <dgm:fillClrLst meth="repeat">
-      <a:schemeClr val="lt1">
-        <a:alpha val="90000"/>
-      </a:schemeClr>
-    </dgm:fillClrLst>
-    <dgm:linClrLst meth="repeat">
-      <a:schemeClr val="accent3"/>
-    </dgm:linClrLst>
-    <dgm:effectClrLst/>
-    <dgm:txLinClrLst/>
-    <dgm:txFillClrLst meth="repeat">
-      <a:schemeClr val="dk1"/>
-    </dgm:txFillClrLst>
-    <dgm:txEffectClrLst/>
-  </dgm:styleLbl>
-  <dgm:styleLbl name="fgAcc3">
-    <dgm:fillClrLst meth="repeat">
-      <a:schemeClr val="lt1">
-        <a:alpha val="90000"/>
-      </a:schemeClr>
-    </dgm:fillClrLst>
-    <dgm:linClrLst meth="repeat">
-      <a:schemeClr val="accent3"/>
-    </dgm:linClrLst>
-    <dgm:effectClrLst/>
-    <dgm:txLinClrLst/>
-    <dgm:txFillClrLst meth="repeat">
-      <a:schemeClr val="dk1"/>
-    </dgm:txFillClrLst>
-    <dgm:txEffectClrLst/>
-  </dgm:styleLbl>
-  <dgm:styleLbl name="fgAcc4">
-    <dgm:fillClrLst meth="repeat">
-      <a:schemeClr val="lt1">
-        <a:alpha val="90000"/>
-      </a:schemeClr>
-    </dgm:fillClrLst>
-    <dgm:linClrLst meth="repeat">
-      <a:schemeClr val="accent3"/>
-    </dgm:linClrLst>
-    <dgm:effectClrLst/>
-    <dgm:txLinClrLst/>
-    <dgm:txFillClrLst meth="repeat">
-      <a:schemeClr val="dk1"/>
-    </dgm:txFillClrLst>
-    <dgm:txEffectClrLst/>
-  </dgm:styleLbl>
-  <dgm:styleLbl name="bgShp">
-    <dgm:fillClrLst meth="repeat">
-      <a:schemeClr val="accent3">
-        <a:tint val="40000"/>
-      </a:schemeClr>
-    </dgm:fillClrLst>
-    <dgm:linClrLst meth="repeat">
-      <a:schemeClr val="accent3"/>
-    </dgm:linClrLst>
-    <dgm:effectClrLst/>
-    <dgm:txLinClrLst/>
-    <dgm:txFillClrLst meth="repeat">
-      <a:schemeClr val="dk1"/>
-    </dgm:txFillClrLst>
-    <dgm:txEffectClrLst/>
-  </dgm:styleLbl>
-  <dgm:styleLbl name="dkBgShp">
-    <dgm:fillClrLst meth="repeat">
-      <a:schemeClr val="accent3">
-        <a:shade val="80000"/>
-      </a:schemeClr>
-    </dgm:fillClrLst>
-    <dgm:linClrLst meth="repeat">
-      <a:schemeClr val="accent3"/>
-    </dgm:linClrLst>
-    <dgm:effectClrLst/>
-    <dgm:txLinClrLst/>
-    <dgm:txFillClrLst meth="repeat">
-      <a:schemeClr val="lt1"/>
-    </dgm:txFillClrLst>
-    <dgm:txEffectClrLst/>
-  </dgm:styleLbl>
-  <dgm:styleLbl name="trBgShp">
-    <dgm:fillClrLst meth="repeat">
-      <a:schemeClr val="accent3">
-        <a:tint val="50000"/>
-        <a:alpha val="40000"/>
-      </a:schemeClr>
-    </dgm:fillClrLst>
-    <dgm:linClrLst meth="repeat">
-      <a:schemeClr val="accent3"/>
-    </dgm:linClrLst>
-    <dgm:effectClrLst/>
-    <dgm:txLinClrLst/>
-    <dgm:txFillClrLst meth="repeat">
-      <a:schemeClr val="lt1"/>
-    </dgm:txFillClrLst>
-    <dgm:txEffectClrLst/>
-  </dgm:styleLbl>
-  <dgm:styleLbl name="fgShp">
-    <dgm:fillClrLst meth="repeat">
-      <a:schemeClr val="accent3">
-        <a:tint val="60000"/>
-      </a:schemeClr>
-    </dgm:fillClrLst>
-    <dgm:linClrLst meth="repeat">
-      <a:schemeClr val="lt1"/>
-    </dgm:linClrLst>
-    <dgm:effectClrLst/>
-    <dgm:txLinClrLst/>
-    <dgm:txFillClrLst meth="repeat">
-      <a:schemeClr val="dk1"/>
-    </dgm:txFillClrLst>
-    <dgm:txEffectClrLst/>
-  </dgm:styleLbl>
-  <dgm:styleLbl name="revTx">
-    <dgm:fillClrLst meth="repeat">
-      <a:schemeClr val="lt1">
-        <a:alpha val="0"/>
-      </a:schemeClr>
-    </dgm:fillClrLst>
-    <dgm:linClrLst meth="repeat">
-      <a:schemeClr val="dk1">
-        <a:alpha val="0"/>
-      </a:schemeClr>
-    </dgm:linClrLst>
-    <dgm:effectClrLst/>
-    <dgm:txLinClrLst/>
-    <dgm:txFillClrLst meth="repeat">
-      <a:schemeClr val="tx1"/>
-    </dgm:txFillClrLst>
-    <dgm:txEffectClrLst/>
-  </dgm:styleLbl>
-</dgm:colorsDef>
-</file>
-
-<file path=ppt/diagrams/colors5.xml><?xml version="1.0" encoding="utf-8"?>
 <dgm:colorsDef xmlns:dgm="http://schemas.openxmlformats.org/drawingml/2006/diagram" xmlns:a="http://schemas.openxmlformats.org/drawingml/2006/main" uniqueId="urn:microsoft.com/office/officeart/2005/8/colors/accent1_2">
   <dgm:title val=""/>
   <dgm:desc val=""/>
@@ -3953,7 +3210,7 @@
         <a:lstStyle/>
         <a:p>
           <a:r>
-            <a:rPr lang="en-US"/>
+            <a:rPr lang="en-US" dirty="0"/>
             <a:t>Project goal tied to Company Vision</a:t>
           </a:r>
         </a:p>
@@ -4475,7 +3732,7 @@
             </a:lnSpc>
           </a:pPr>
           <a:r>
-            <a:rPr lang="en-US"/>
+            <a:rPr lang="en-US" dirty="0"/>
             <a:t>Shoppers struggle to browse the large fashion catalog, making it difficult to decide what to buy. </a:t>
           </a:r>
         </a:p>
@@ -4987,901 +4244,6 @@
 <file path=ppt/diagrams/data4.xml><?xml version="1.0" encoding="utf-8"?>
 <dgm:dataModel xmlns:dgm="http://schemas.openxmlformats.org/drawingml/2006/diagram" xmlns:a="http://schemas.openxmlformats.org/drawingml/2006/main">
   <dgm:ptLst>
-    <dgm:pt modelId="{19018B62-A783-4DCA-8F21-D36D4E240450}" type="doc">
-      <dgm:prSet loTypeId="urn:microsoft.com/office/officeart/2005/8/layout/vList5" loCatId="list" qsTypeId="urn:microsoft.com/office/officeart/2005/8/quickstyle/simple5" qsCatId="simple" csTypeId="urn:microsoft.com/office/officeart/2005/8/colors/accent3_2" csCatId="accent3"/>
-      <dgm:spPr/>
-      <dgm:t>
-        <a:bodyPr/>
-        <a:lstStyle/>
-        <a:p>
-          <a:endParaRPr lang="en-US"/>
-        </a:p>
-      </dgm:t>
-    </dgm:pt>
-    <dgm:pt modelId="{3AA5D8C8-7225-4223-94F1-9885F733679E}">
-      <dgm:prSet/>
-      <dgm:spPr/>
-      <dgm:t>
-        <a:bodyPr/>
-        <a:lstStyle/>
-        <a:p>
-          <a:pPr>
-            <a:lnSpc>
-              <a:spcPct val="100000"/>
-            </a:lnSpc>
-          </a:pPr>
-          <a:r>
-            <a:rPr lang="en-US"/>
-            <a:t>User Consent</a:t>
-          </a:r>
-        </a:p>
-      </dgm:t>
-    </dgm:pt>
-    <dgm:pt modelId="{1FF53D6A-8E7B-43EF-8FF4-D43879A5736B}" type="parTrans" cxnId="{6E39F792-F11B-4D2A-AB03-8ECDD1533EA6}">
-      <dgm:prSet/>
-      <dgm:spPr/>
-      <dgm:t>
-        <a:bodyPr/>
-        <a:lstStyle/>
-        <a:p>
-          <a:endParaRPr lang="en-US"/>
-        </a:p>
-      </dgm:t>
-    </dgm:pt>
-    <dgm:pt modelId="{73657A3B-85DD-4D55-865F-5FBDFDF0EC00}" type="sibTrans" cxnId="{6E39F792-F11B-4D2A-AB03-8ECDD1533EA6}">
-      <dgm:prSet/>
-      <dgm:spPr/>
-      <dgm:t>
-        <a:bodyPr/>
-        <a:lstStyle/>
-        <a:p>
-          <a:endParaRPr lang="en-US"/>
-        </a:p>
-      </dgm:t>
-    </dgm:pt>
-    <dgm:pt modelId="{5E933601-78A5-4DE7-BB07-C82A54D5CF86}">
-      <dgm:prSet/>
-      <dgm:spPr/>
-      <dgm:t>
-        <a:bodyPr/>
-        <a:lstStyle/>
-        <a:p>
-          <a:pPr>
-            <a:lnSpc>
-              <a:spcPct val="100000"/>
-            </a:lnSpc>
-          </a:pPr>
-          <a:r>
-            <a:rPr lang="en-US"/>
-            <a:t>Obtain clear and explicit consent from users before collecting personal data.</a:t>
-          </a:r>
-        </a:p>
-      </dgm:t>
-    </dgm:pt>
-    <dgm:pt modelId="{B6AB329B-42B3-44E5-87FB-3C1D75EDC88D}" type="parTrans" cxnId="{2CA0B928-6444-4BDF-A25A-A05C89532776}">
-      <dgm:prSet/>
-      <dgm:spPr/>
-      <dgm:t>
-        <a:bodyPr/>
-        <a:lstStyle/>
-        <a:p>
-          <a:endParaRPr lang="en-US"/>
-        </a:p>
-      </dgm:t>
-    </dgm:pt>
-    <dgm:pt modelId="{19D5B4F4-1422-4EEE-8934-AE8B49B735E1}" type="sibTrans" cxnId="{2CA0B928-6444-4BDF-A25A-A05C89532776}">
-      <dgm:prSet/>
-      <dgm:spPr/>
-      <dgm:t>
-        <a:bodyPr/>
-        <a:lstStyle/>
-        <a:p>
-          <a:endParaRPr lang="en-US"/>
-        </a:p>
-      </dgm:t>
-    </dgm:pt>
-    <dgm:pt modelId="{C5103B79-92FE-44C7-AF53-268FC431C97C}">
-      <dgm:prSet/>
-      <dgm:spPr/>
-      <dgm:t>
-        <a:bodyPr/>
-        <a:lstStyle/>
-        <a:p>
-          <a:pPr>
-            <a:lnSpc>
-              <a:spcPct val="100000"/>
-            </a:lnSpc>
-          </a:pPr>
-          <a:r>
-            <a:rPr lang="en-US"/>
-            <a:t>Allow users to withdraw from consent at any time</a:t>
-          </a:r>
-        </a:p>
-      </dgm:t>
-    </dgm:pt>
-    <dgm:pt modelId="{6D9573BA-0819-4585-9F58-D8E664D4E347}" type="parTrans" cxnId="{75BDC591-D4A9-4F2D-9783-530F21B1CA33}">
-      <dgm:prSet/>
-      <dgm:spPr/>
-      <dgm:t>
-        <a:bodyPr/>
-        <a:lstStyle/>
-        <a:p>
-          <a:endParaRPr lang="en-US"/>
-        </a:p>
-      </dgm:t>
-    </dgm:pt>
-    <dgm:pt modelId="{37D0E739-426C-4288-9192-26190DEEE850}" type="sibTrans" cxnId="{75BDC591-D4A9-4F2D-9783-530F21B1CA33}">
-      <dgm:prSet/>
-      <dgm:spPr/>
-      <dgm:t>
-        <a:bodyPr/>
-        <a:lstStyle/>
-        <a:p>
-          <a:endParaRPr lang="en-US"/>
-        </a:p>
-      </dgm:t>
-    </dgm:pt>
-    <dgm:pt modelId="{DE9DD595-478B-47A6-825F-7E95B38F4E5E}">
-      <dgm:prSet/>
-      <dgm:spPr/>
-      <dgm:t>
-        <a:bodyPr/>
-        <a:lstStyle/>
-        <a:p>
-          <a:pPr>
-            <a:lnSpc>
-              <a:spcPct val="100000"/>
-            </a:lnSpc>
-          </a:pPr>
-          <a:r>
-            <a:rPr lang="en-US"/>
-            <a:t>Data Minimization</a:t>
-          </a:r>
-        </a:p>
-      </dgm:t>
-    </dgm:pt>
-    <dgm:pt modelId="{5B786A4A-862D-49A0-BF68-25FB9D27329E}" type="parTrans" cxnId="{C9D9195A-D92C-4971-BA32-8FD30F02F1DE}">
-      <dgm:prSet/>
-      <dgm:spPr/>
-      <dgm:t>
-        <a:bodyPr/>
-        <a:lstStyle/>
-        <a:p>
-          <a:endParaRPr lang="en-US"/>
-        </a:p>
-      </dgm:t>
-    </dgm:pt>
-    <dgm:pt modelId="{6330B91E-FED1-4EB8-83BF-53179E3FFD31}" type="sibTrans" cxnId="{C9D9195A-D92C-4971-BA32-8FD30F02F1DE}">
-      <dgm:prSet/>
-      <dgm:spPr/>
-      <dgm:t>
-        <a:bodyPr/>
-        <a:lstStyle/>
-        <a:p>
-          <a:endParaRPr lang="en-US"/>
-        </a:p>
-      </dgm:t>
-    </dgm:pt>
-    <dgm:pt modelId="{4C25D962-3695-4D81-9ABD-DED2AE87DBE9}">
-      <dgm:prSet/>
-      <dgm:spPr/>
-      <dgm:t>
-        <a:bodyPr/>
-        <a:lstStyle/>
-        <a:p>
-          <a:pPr>
-            <a:lnSpc>
-              <a:spcPct val="100000"/>
-            </a:lnSpc>
-          </a:pPr>
-          <a:r>
-            <a:rPr lang="en-US"/>
-            <a:t>Collect only the data necessary for app’s functionality.</a:t>
-          </a:r>
-        </a:p>
-      </dgm:t>
-    </dgm:pt>
-    <dgm:pt modelId="{A9C210A8-5137-4964-8261-D0B3DC1E939B}" type="parTrans" cxnId="{C5EE27D7-3A69-455E-AE0F-80952393308B}">
-      <dgm:prSet/>
-      <dgm:spPr/>
-      <dgm:t>
-        <a:bodyPr/>
-        <a:lstStyle/>
-        <a:p>
-          <a:endParaRPr lang="en-US"/>
-        </a:p>
-      </dgm:t>
-    </dgm:pt>
-    <dgm:pt modelId="{56D57805-AE70-4ABF-9BD7-BE1CE81ED724}" type="sibTrans" cxnId="{C5EE27D7-3A69-455E-AE0F-80952393308B}">
-      <dgm:prSet/>
-      <dgm:spPr/>
-      <dgm:t>
-        <a:bodyPr/>
-        <a:lstStyle/>
-        <a:p>
-          <a:endParaRPr lang="en-US"/>
-        </a:p>
-      </dgm:t>
-    </dgm:pt>
-    <dgm:pt modelId="{CDAC686E-039B-4BC9-BFA0-339DB7D50A1F}">
-      <dgm:prSet/>
-      <dgm:spPr/>
-      <dgm:t>
-        <a:bodyPr/>
-        <a:lstStyle/>
-        <a:p>
-          <a:pPr>
-            <a:lnSpc>
-              <a:spcPct val="100000"/>
-            </a:lnSpc>
-          </a:pPr>
-          <a:r>
-            <a:rPr lang="en-US"/>
-            <a:t>Avoid storing unnecessary personal information.</a:t>
-          </a:r>
-        </a:p>
-      </dgm:t>
-    </dgm:pt>
-    <dgm:pt modelId="{3B61145E-67FC-4737-A579-CBAED6EC8192}" type="parTrans" cxnId="{9DEC6FCB-0A3A-4A2F-B7DE-7B34ABA2852D}">
-      <dgm:prSet/>
-      <dgm:spPr/>
-      <dgm:t>
-        <a:bodyPr/>
-        <a:lstStyle/>
-        <a:p>
-          <a:endParaRPr lang="en-US"/>
-        </a:p>
-      </dgm:t>
-    </dgm:pt>
-    <dgm:pt modelId="{FFA6310B-13EA-4D7E-ABDC-3F75C9CA1901}" type="sibTrans" cxnId="{9DEC6FCB-0A3A-4A2F-B7DE-7B34ABA2852D}">
-      <dgm:prSet/>
-      <dgm:spPr/>
-      <dgm:t>
-        <a:bodyPr/>
-        <a:lstStyle/>
-        <a:p>
-          <a:endParaRPr lang="en-US"/>
-        </a:p>
-      </dgm:t>
-    </dgm:pt>
-    <dgm:pt modelId="{0A9C68FB-4819-4934-B813-A8DB5EA14807}">
-      <dgm:prSet/>
-      <dgm:spPr/>
-      <dgm:t>
-        <a:bodyPr/>
-        <a:lstStyle/>
-        <a:p>
-          <a:pPr>
-            <a:lnSpc>
-              <a:spcPct val="100000"/>
-            </a:lnSpc>
-          </a:pPr>
-          <a:r>
-            <a:rPr lang="en-US"/>
-            <a:t>User Rights</a:t>
-          </a:r>
-        </a:p>
-      </dgm:t>
-    </dgm:pt>
-    <dgm:pt modelId="{C9C4CF4B-0AF2-4D36-AD85-720326CA14C4}" type="parTrans" cxnId="{84092BE2-196A-4D0C-991E-F51EE54FD0B4}">
-      <dgm:prSet/>
-      <dgm:spPr/>
-      <dgm:t>
-        <a:bodyPr/>
-        <a:lstStyle/>
-        <a:p>
-          <a:endParaRPr lang="en-US"/>
-        </a:p>
-      </dgm:t>
-    </dgm:pt>
-    <dgm:pt modelId="{DED44234-600E-4930-8AEF-BDAD11EF74F0}" type="sibTrans" cxnId="{84092BE2-196A-4D0C-991E-F51EE54FD0B4}">
-      <dgm:prSet/>
-      <dgm:spPr/>
-      <dgm:t>
-        <a:bodyPr/>
-        <a:lstStyle/>
-        <a:p>
-          <a:endParaRPr lang="en-US"/>
-        </a:p>
-      </dgm:t>
-    </dgm:pt>
-    <dgm:pt modelId="{67EE0F34-C6A4-436E-84CD-BA1EC2C7DB7B}">
-      <dgm:prSet/>
-      <dgm:spPr/>
-      <dgm:t>
-        <a:bodyPr/>
-        <a:lstStyle/>
-        <a:p>
-          <a:pPr>
-            <a:lnSpc>
-              <a:spcPct val="100000"/>
-            </a:lnSpc>
-          </a:pPr>
-          <a:r>
-            <a:rPr lang="en-US"/>
-            <a:t>Provide users with access to their data and the ability to correct or delete it.</a:t>
-          </a:r>
-        </a:p>
-      </dgm:t>
-    </dgm:pt>
-    <dgm:pt modelId="{69098DC3-9AE3-42C0-8DA8-F06C91D96D59}" type="parTrans" cxnId="{72737475-FF1D-4C12-B6EC-451C48C07C77}">
-      <dgm:prSet/>
-      <dgm:spPr/>
-      <dgm:t>
-        <a:bodyPr/>
-        <a:lstStyle/>
-        <a:p>
-          <a:endParaRPr lang="en-US"/>
-        </a:p>
-      </dgm:t>
-    </dgm:pt>
-    <dgm:pt modelId="{5B02F794-72E1-4D50-AFA2-88AD2BBC5615}" type="sibTrans" cxnId="{72737475-FF1D-4C12-B6EC-451C48C07C77}">
-      <dgm:prSet/>
-      <dgm:spPr/>
-      <dgm:t>
-        <a:bodyPr/>
-        <a:lstStyle/>
-        <a:p>
-          <a:endParaRPr lang="en-US"/>
-        </a:p>
-      </dgm:t>
-    </dgm:pt>
-    <dgm:pt modelId="{E0414680-4CEC-4252-AF64-842D1CC8BCB1}">
-      <dgm:prSet/>
-      <dgm:spPr/>
-      <dgm:t>
-        <a:bodyPr/>
-        <a:lstStyle/>
-        <a:p>
-          <a:pPr>
-            <a:lnSpc>
-              <a:spcPct val="100000"/>
-            </a:lnSpc>
-          </a:pPr>
-          <a:r>
-            <a:rPr lang="en-US"/>
-            <a:t>Enable users to download their data (data portability).</a:t>
-          </a:r>
-        </a:p>
-      </dgm:t>
-    </dgm:pt>
-    <dgm:pt modelId="{0ABF0636-F6A9-4479-A09A-FE6A5696EF92}" type="parTrans" cxnId="{CBE54139-8B8E-43FF-AB9C-B29B7F6FBAB9}">
-      <dgm:prSet/>
-      <dgm:spPr/>
-      <dgm:t>
-        <a:bodyPr/>
-        <a:lstStyle/>
-        <a:p>
-          <a:endParaRPr lang="en-US"/>
-        </a:p>
-      </dgm:t>
-    </dgm:pt>
-    <dgm:pt modelId="{2927170A-DD94-441E-96C7-B98A9682468A}" type="sibTrans" cxnId="{CBE54139-8B8E-43FF-AB9C-B29B7F6FBAB9}">
-      <dgm:prSet/>
-      <dgm:spPr/>
-      <dgm:t>
-        <a:bodyPr/>
-        <a:lstStyle/>
-        <a:p>
-          <a:endParaRPr lang="en-US"/>
-        </a:p>
-      </dgm:t>
-    </dgm:pt>
-    <dgm:pt modelId="{DB5CAB13-7EB3-4921-BBBC-77CDDE1DC712}">
-      <dgm:prSet/>
-      <dgm:spPr/>
-      <dgm:t>
-        <a:bodyPr/>
-        <a:lstStyle/>
-        <a:p>
-          <a:pPr>
-            <a:lnSpc>
-              <a:spcPct val="100000"/>
-            </a:lnSpc>
-          </a:pPr>
-          <a:r>
-            <a:rPr lang="en-US"/>
-            <a:t>Security Measures</a:t>
-          </a:r>
-        </a:p>
-      </dgm:t>
-    </dgm:pt>
-    <dgm:pt modelId="{B39B734B-8C8C-49B0-BEF9-BE3DA976DCD2}" type="parTrans" cxnId="{DC217879-AED6-4E07-B661-77C85526394D}">
-      <dgm:prSet/>
-      <dgm:spPr/>
-      <dgm:t>
-        <a:bodyPr/>
-        <a:lstStyle/>
-        <a:p>
-          <a:endParaRPr lang="en-US"/>
-        </a:p>
-      </dgm:t>
-    </dgm:pt>
-    <dgm:pt modelId="{D18708A8-CD32-4910-8AEC-D58FE4642F70}" type="sibTrans" cxnId="{DC217879-AED6-4E07-B661-77C85526394D}">
-      <dgm:prSet/>
-      <dgm:spPr/>
-      <dgm:t>
-        <a:bodyPr/>
-        <a:lstStyle/>
-        <a:p>
-          <a:endParaRPr lang="en-US"/>
-        </a:p>
-      </dgm:t>
-    </dgm:pt>
-    <dgm:pt modelId="{331246C4-8BFA-40FD-BE89-CA0AA2316061}">
-      <dgm:prSet/>
-      <dgm:spPr/>
-      <dgm:t>
-        <a:bodyPr/>
-        <a:lstStyle/>
-        <a:p>
-          <a:pPr>
-            <a:lnSpc>
-              <a:spcPct val="100000"/>
-            </a:lnSpc>
-          </a:pPr>
-          <a:r>
-            <a:rPr lang="en-US"/>
-            <a:t>Implement strong encryption for data storage and transmission.</a:t>
-          </a:r>
-        </a:p>
-      </dgm:t>
-    </dgm:pt>
-    <dgm:pt modelId="{552E96FB-3F6C-4C8A-9065-0F6EEAB1D70B}" type="parTrans" cxnId="{57CDD0C3-3A9F-4ACF-9A0B-3A957B69CFF4}">
-      <dgm:prSet/>
-      <dgm:spPr/>
-      <dgm:t>
-        <a:bodyPr/>
-        <a:lstStyle/>
-        <a:p>
-          <a:endParaRPr lang="en-US"/>
-        </a:p>
-      </dgm:t>
-    </dgm:pt>
-    <dgm:pt modelId="{F6AC4213-F92F-47BD-857E-18F5588D2984}" type="sibTrans" cxnId="{57CDD0C3-3A9F-4ACF-9A0B-3A957B69CFF4}">
-      <dgm:prSet/>
-      <dgm:spPr/>
-      <dgm:t>
-        <a:bodyPr/>
-        <a:lstStyle/>
-        <a:p>
-          <a:endParaRPr lang="en-US"/>
-        </a:p>
-      </dgm:t>
-    </dgm:pt>
-    <dgm:pt modelId="{B24AA518-A11E-4E08-862D-CDE6B44FAD65}">
-      <dgm:prSet/>
-      <dgm:spPr/>
-      <dgm:t>
-        <a:bodyPr/>
-        <a:lstStyle/>
-        <a:p>
-          <a:pPr>
-            <a:lnSpc>
-              <a:spcPct val="100000"/>
-            </a:lnSpc>
-          </a:pPr>
-          <a:r>
-            <a:rPr lang="en-US"/>
-            <a:t>Regularly test and update security protocols.</a:t>
-          </a:r>
-        </a:p>
-      </dgm:t>
-    </dgm:pt>
-    <dgm:pt modelId="{C6A02B29-A582-4E29-8A9E-8FA376CEF3D1}" type="parTrans" cxnId="{898FCDD7-BBE7-4125-8187-ED4ABBF79BE4}">
-      <dgm:prSet/>
-      <dgm:spPr/>
-      <dgm:t>
-        <a:bodyPr/>
-        <a:lstStyle/>
-        <a:p>
-          <a:endParaRPr lang="en-US"/>
-        </a:p>
-      </dgm:t>
-    </dgm:pt>
-    <dgm:pt modelId="{AFEAAAF4-7146-4C87-A01C-61B017A8431C}" type="sibTrans" cxnId="{898FCDD7-BBE7-4125-8187-ED4ABBF79BE4}">
-      <dgm:prSet/>
-      <dgm:spPr/>
-      <dgm:t>
-        <a:bodyPr/>
-        <a:lstStyle/>
-        <a:p>
-          <a:endParaRPr lang="en-US"/>
-        </a:p>
-      </dgm:t>
-    </dgm:pt>
-    <dgm:pt modelId="{89D3C448-C1B9-421D-91E2-94DD068526E7}">
-      <dgm:prSet/>
-      <dgm:spPr/>
-      <dgm:t>
-        <a:bodyPr/>
-        <a:lstStyle/>
-        <a:p>
-          <a:pPr>
-            <a:lnSpc>
-              <a:spcPct val="100000"/>
-            </a:lnSpc>
-          </a:pPr>
-          <a:r>
-            <a:rPr lang="en-US"/>
-            <a:t>Data Breach Notification</a:t>
-          </a:r>
-        </a:p>
-      </dgm:t>
-    </dgm:pt>
-    <dgm:pt modelId="{7D8971F2-BA2C-45D8-92E3-DAFA1D90B07B}" type="parTrans" cxnId="{20F0B5D0-9DCA-4704-86C4-42917C7B250D}">
-      <dgm:prSet/>
-      <dgm:spPr/>
-      <dgm:t>
-        <a:bodyPr/>
-        <a:lstStyle/>
-        <a:p>
-          <a:endParaRPr lang="en-US"/>
-        </a:p>
-      </dgm:t>
-    </dgm:pt>
-    <dgm:pt modelId="{8E06A966-806A-4CE7-8E94-CC43280D6253}" type="sibTrans" cxnId="{20F0B5D0-9DCA-4704-86C4-42917C7B250D}">
-      <dgm:prSet/>
-      <dgm:spPr/>
-      <dgm:t>
-        <a:bodyPr/>
-        <a:lstStyle/>
-        <a:p>
-          <a:endParaRPr lang="en-US"/>
-        </a:p>
-      </dgm:t>
-    </dgm:pt>
-    <dgm:pt modelId="{D75E5F6B-8872-4EFD-85A2-2D2E99F5744F}">
-      <dgm:prSet/>
-      <dgm:spPr/>
-      <dgm:t>
-        <a:bodyPr/>
-        <a:lstStyle/>
-        <a:p>
-          <a:pPr>
-            <a:lnSpc>
-              <a:spcPct val="100000"/>
-            </a:lnSpc>
-          </a:pPr>
-          <a:r>
-            <a:rPr lang="en-US"/>
-            <a:t>Notify authorities and affected users within 72hrs of data breach.</a:t>
-          </a:r>
-        </a:p>
-      </dgm:t>
-    </dgm:pt>
-    <dgm:pt modelId="{A2EA3957-9226-4494-B55D-D5D1EC986BFF}" type="parTrans" cxnId="{A13FD415-6C4D-49A8-B0A7-4EA3FFC16DC0}">
-      <dgm:prSet/>
-      <dgm:spPr/>
-      <dgm:t>
-        <a:bodyPr/>
-        <a:lstStyle/>
-        <a:p>
-          <a:endParaRPr lang="en-US"/>
-        </a:p>
-      </dgm:t>
-    </dgm:pt>
-    <dgm:pt modelId="{DE3394A0-B839-4F9C-9ED8-8659510876ED}" type="sibTrans" cxnId="{A13FD415-6C4D-49A8-B0A7-4EA3FFC16DC0}">
-      <dgm:prSet/>
-      <dgm:spPr/>
-      <dgm:t>
-        <a:bodyPr/>
-        <a:lstStyle/>
-        <a:p>
-          <a:endParaRPr lang="en-US"/>
-        </a:p>
-      </dgm:t>
-    </dgm:pt>
-    <dgm:pt modelId="{3F50512D-256E-40E3-82C9-E3E11828E3C4}">
-      <dgm:prSet/>
-      <dgm:spPr/>
-      <dgm:t>
-        <a:bodyPr/>
-        <a:lstStyle/>
-        <a:p>
-          <a:pPr>
-            <a:lnSpc>
-              <a:spcPct val="100000"/>
-            </a:lnSpc>
-          </a:pPr>
-          <a:r>
-            <a:rPr lang="en-US"/>
-            <a:t>Third-Party Compliance</a:t>
-          </a:r>
-        </a:p>
-      </dgm:t>
-    </dgm:pt>
-    <dgm:pt modelId="{B15820C4-FBAB-42B9-B64B-D8C71B07BCC3}" type="parTrans" cxnId="{763212D4-4DFA-4A83-9A5B-D5D24DEF33AA}">
-      <dgm:prSet/>
-      <dgm:spPr/>
-      <dgm:t>
-        <a:bodyPr/>
-        <a:lstStyle/>
-        <a:p>
-          <a:endParaRPr lang="en-US"/>
-        </a:p>
-      </dgm:t>
-    </dgm:pt>
-    <dgm:pt modelId="{3A3BEE4A-E216-4985-B4E2-4412F7AE342B}" type="sibTrans" cxnId="{763212D4-4DFA-4A83-9A5B-D5D24DEF33AA}">
-      <dgm:prSet/>
-      <dgm:spPr/>
-      <dgm:t>
-        <a:bodyPr/>
-        <a:lstStyle/>
-        <a:p>
-          <a:endParaRPr lang="en-US"/>
-        </a:p>
-      </dgm:t>
-    </dgm:pt>
-    <dgm:pt modelId="{8350A9C6-6324-4A59-BE7D-1F25759E005A}">
-      <dgm:prSet/>
-      <dgm:spPr/>
-      <dgm:t>
-        <a:bodyPr/>
-        <a:lstStyle/>
-        <a:p>
-          <a:pPr>
-            <a:lnSpc>
-              <a:spcPct val="100000"/>
-            </a:lnSpc>
-          </a:pPr>
-          <a:r>
-            <a:rPr lang="en-US"/>
-            <a:t>Ensure all partners and vendors comply with GDPR standards.</a:t>
-          </a:r>
-        </a:p>
-      </dgm:t>
-    </dgm:pt>
-    <dgm:pt modelId="{469CC067-F972-4268-B24C-F27275E9B182}" type="parTrans" cxnId="{B8149BD2-6728-4EAF-8F27-CEDF8CD4B94D}">
-      <dgm:prSet/>
-      <dgm:spPr/>
-      <dgm:t>
-        <a:bodyPr/>
-        <a:lstStyle/>
-        <a:p>
-          <a:endParaRPr lang="en-US"/>
-        </a:p>
-      </dgm:t>
-    </dgm:pt>
-    <dgm:pt modelId="{D73D77ED-C1DC-4449-A15B-259855414473}" type="sibTrans" cxnId="{B8149BD2-6728-4EAF-8F27-CEDF8CD4B94D}">
-      <dgm:prSet/>
-      <dgm:spPr/>
-      <dgm:t>
-        <a:bodyPr/>
-        <a:lstStyle/>
-        <a:p>
-          <a:endParaRPr lang="en-US"/>
-        </a:p>
-      </dgm:t>
-    </dgm:pt>
-    <dgm:pt modelId="{1CC5F134-01DC-4641-94B3-8CCFCE590356}" type="pres">
-      <dgm:prSet presAssocID="{19018B62-A783-4DCA-8F21-D36D4E240450}" presName="Name0" presStyleCnt="0">
-        <dgm:presLayoutVars>
-          <dgm:dir/>
-          <dgm:animLvl val="lvl"/>
-          <dgm:resizeHandles val="exact"/>
-        </dgm:presLayoutVars>
-      </dgm:prSet>
-      <dgm:spPr/>
-    </dgm:pt>
-    <dgm:pt modelId="{77C76100-55CD-4C4A-8644-392B5CBAB3BC}" type="pres">
-      <dgm:prSet presAssocID="{3AA5D8C8-7225-4223-94F1-9885F733679E}" presName="linNode" presStyleCnt="0"/>
-      <dgm:spPr/>
-    </dgm:pt>
-    <dgm:pt modelId="{A6A5FE38-6070-493F-92A2-2F4904C87450}" type="pres">
-      <dgm:prSet presAssocID="{3AA5D8C8-7225-4223-94F1-9885F733679E}" presName="parentText" presStyleLbl="node1" presStyleIdx="0" presStyleCnt="6">
-        <dgm:presLayoutVars>
-          <dgm:chMax val="1"/>
-          <dgm:bulletEnabled val="1"/>
-        </dgm:presLayoutVars>
-      </dgm:prSet>
-      <dgm:spPr/>
-    </dgm:pt>
-    <dgm:pt modelId="{3DC694D5-128A-435D-B863-859BBFCB547A}" type="pres">
-      <dgm:prSet presAssocID="{3AA5D8C8-7225-4223-94F1-9885F733679E}" presName="descendantText" presStyleLbl="alignAccFollowNode1" presStyleIdx="0" presStyleCnt="6">
-        <dgm:presLayoutVars>
-          <dgm:bulletEnabled val="1"/>
-        </dgm:presLayoutVars>
-      </dgm:prSet>
-      <dgm:spPr/>
-    </dgm:pt>
-    <dgm:pt modelId="{4CD058E3-616D-4CBD-93D0-5674D4B3E16A}" type="pres">
-      <dgm:prSet presAssocID="{73657A3B-85DD-4D55-865F-5FBDFDF0EC00}" presName="sp" presStyleCnt="0"/>
-      <dgm:spPr/>
-    </dgm:pt>
-    <dgm:pt modelId="{F83B5878-7BE8-4E43-9F48-1E38CE175205}" type="pres">
-      <dgm:prSet presAssocID="{DE9DD595-478B-47A6-825F-7E95B38F4E5E}" presName="linNode" presStyleCnt="0"/>
-      <dgm:spPr/>
-    </dgm:pt>
-    <dgm:pt modelId="{88824116-76D2-48AA-B94F-297837F53D8F}" type="pres">
-      <dgm:prSet presAssocID="{DE9DD595-478B-47A6-825F-7E95B38F4E5E}" presName="parentText" presStyleLbl="node1" presStyleIdx="1" presStyleCnt="6">
-        <dgm:presLayoutVars>
-          <dgm:chMax val="1"/>
-          <dgm:bulletEnabled val="1"/>
-        </dgm:presLayoutVars>
-      </dgm:prSet>
-      <dgm:spPr/>
-    </dgm:pt>
-    <dgm:pt modelId="{88717465-A54A-4BFA-BC6A-0CF0E58951A9}" type="pres">
-      <dgm:prSet presAssocID="{DE9DD595-478B-47A6-825F-7E95B38F4E5E}" presName="descendantText" presStyleLbl="alignAccFollowNode1" presStyleIdx="1" presStyleCnt="6">
-        <dgm:presLayoutVars>
-          <dgm:bulletEnabled val="1"/>
-        </dgm:presLayoutVars>
-      </dgm:prSet>
-      <dgm:spPr/>
-    </dgm:pt>
-    <dgm:pt modelId="{A18CA8FC-7778-42CD-B8E6-439452941591}" type="pres">
-      <dgm:prSet presAssocID="{6330B91E-FED1-4EB8-83BF-53179E3FFD31}" presName="sp" presStyleCnt="0"/>
-      <dgm:spPr/>
-    </dgm:pt>
-    <dgm:pt modelId="{B32F4029-A01F-4A9A-A047-16F7B4F799CE}" type="pres">
-      <dgm:prSet presAssocID="{0A9C68FB-4819-4934-B813-A8DB5EA14807}" presName="linNode" presStyleCnt="0"/>
-      <dgm:spPr/>
-    </dgm:pt>
-    <dgm:pt modelId="{7DA18F8B-A9B0-4BE7-AE38-B787D3E8C76B}" type="pres">
-      <dgm:prSet presAssocID="{0A9C68FB-4819-4934-B813-A8DB5EA14807}" presName="parentText" presStyleLbl="node1" presStyleIdx="2" presStyleCnt="6">
-        <dgm:presLayoutVars>
-          <dgm:chMax val="1"/>
-          <dgm:bulletEnabled val="1"/>
-        </dgm:presLayoutVars>
-      </dgm:prSet>
-      <dgm:spPr/>
-    </dgm:pt>
-    <dgm:pt modelId="{879B648D-1F2E-464D-8507-56729E0018C9}" type="pres">
-      <dgm:prSet presAssocID="{0A9C68FB-4819-4934-B813-A8DB5EA14807}" presName="descendantText" presStyleLbl="alignAccFollowNode1" presStyleIdx="2" presStyleCnt="6">
-        <dgm:presLayoutVars>
-          <dgm:bulletEnabled val="1"/>
-        </dgm:presLayoutVars>
-      </dgm:prSet>
-      <dgm:spPr/>
-    </dgm:pt>
-    <dgm:pt modelId="{070D31A3-0C27-41AC-9D56-B46AC8F90553}" type="pres">
-      <dgm:prSet presAssocID="{DED44234-600E-4930-8AEF-BDAD11EF74F0}" presName="sp" presStyleCnt="0"/>
-      <dgm:spPr/>
-    </dgm:pt>
-    <dgm:pt modelId="{4C83BA40-7625-4BAB-BBDB-5EACA45C150E}" type="pres">
-      <dgm:prSet presAssocID="{DB5CAB13-7EB3-4921-BBBC-77CDDE1DC712}" presName="linNode" presStyleCnt="0"/>
-      <dgm:spPr/>
-    </dgm:pt>
-    <dgm:pt modelId="{A6475DE5-6358-40C7-A591-0DEAAC3D595F}" type="pres">
-      <dgm:prSet presAssocID="{DB5CAB13-7EB3-4921-BBBC-77CDDE1DC712}" presName="parentText" presStyleLbl="node1" presStyleIdx="3" presStyleCnt="6">
-        <dgm:presLayoutVars>
-          <dgm:chMax val="1"/>
-          <dgm:bulletEnabled val="1"/>
-        </dgm:presLayoutVars>
-      </dgm:prSet>
-      <dgm:spPr/>
-    </dgm:pt>
-    <dgm:pt modelId="{D7907136-9324-46BD-B380-972E212B479E}" type="pres">
-      <dgm:prSet presAssocID="{DB5CAB13-7EB3-4921-BBBC-77CDDE1DC712}" presName="descendantText" presStyleLbl="alignAccFollowNode1" presStyleIdx="3" presStyleCnt="6">
-        <dgm:presLayoutVars>
-          <dgm:bulletEnabled val="1"/>
-        </dgm:presLayoutVars>
-      </dgm:prSet>
-      <dgm:spPr/>
-    </dgm:pt>
-    <dgm:pt modelId="{231156E8-27F1-4716-A762-01E35E243D15}" type="pres">
-      <dgm:prSet presAssocID="{D18708A8-CD32-4910-8AEC-D58FE4642F70}" presName="sp" presStyleCnt="0"/>
-      <dgm:spPr/>
-    </dgm:pt>
-    <dgm:pt modelId="{08B6E0CD-49DE-4B63-9034-0D005C93F62D}" type="pres">
-      <dgm:prSet presAssocID="{89D3C448-C1B9-421D-91E2-94DD068526E7}" presName="linNode" presStyleCnt="0"/>
-      <dgm:spPr/>
-    </dgm:pt>
-    <dgm:pt modelId="{D961C21F-CAF6-4346-8B26-44D0AC1C1B0A}" type="pres">
-      <dgm:prSet presAssocID="{89D3C448-C1B9-421D-91E2-94DD068526E7}" presName="parentText" presStyleLbl="node1" presStyleIdx="4" presStyleCnt="6">
-        <dgm:presLayoutVars>
-          <dgm:chMax val="1"/>
-          <dgm:bulletEnabled val="1"/>
-        </dgm:presLayoutVars>
-      </dgm:prSet>
-      <dgm:spPr/>
-    </dgm:pt>
-    <dgm:pt modelId="{4210F9EA-D5C4-4A56-A8E8-4953A4A03790}" type="pres">
-      <dgm:prSet presAssocID="{89D3C448-C1B9-421D-91E2-94DD068526E7}" presName="descendantText" presStyleLbl="alignAccFollowNode1" presStyleIdx="4" presStyleCnt="6">
-        <dgm:presLayoutVars>
-          <dgm:bulletEnabled val="1"/>
-        </dgm:presLayoutVars>
-      </dgm:prSet>
-      <dgm:spPr/>
-    </dgm:pt>
-    <dgm:pt modelId="{98BCA269-8393-41E0-963B-B043C5421F49}" type="pres">
-      <dgm:prSet presAssocID="{8E06A966-806A-4CE7-8E94-CC43280D6253}" presName="sp" presStyleCnt="0"/>
-      <dgm:spPr/>
-    </dgm:pt>
-    <dgm:pt modelId="{64421C92-3D77-4DB4-8A43-2C4EB8EE0F79}" type="pres">
-      <dgm:prSet presAssocID="{3F50512D-256E-40E3-82C9-E3E11828E3C4}" presName="linNode" presStyleCnt="0"/>
-      <dgm:spPr/>
-    </dgm:pt>
-    <dgm:pt modelId="{170B5681-4DF3-4802-9072-AAD83CDC0678}" type="pres">
-      <dgm:prSet presAssocID="{3F50512D-256E-40E3-82C9-E3E11828E3C4}" presName="parentText" presStyleLbl="node1" presStyleIdx="5" presStyleCnt="6">
-        <dgm:presLayoutVars>
-          <dgm:chMax val="1"/>
-          <dgm:bulletEnabled val="1"/>
-        </dgm:presLayoutVars>
-      </dgm:prSet>
-      <dgm:spPr/>
-    </dgm:pt>
-    <dgm:pt modelId="{1BF3A97A-1DBE-46F2-9C55-4863710F64A4}" type="pres">
-      <dgm:prSet presAssocID="{3F50512D-256E-40E3-82C9-E3E11828E3C4}" presName="descendantText" presStyleLbl="alignAccFollowNode1" presStyleIdx="5" presStyleCnt="6">
-        <dgm:presLayoutVars>
-          <dgm:bulletEnabled val="1"/>
-        </dgm:presLayoutVars>
-      </dgm:prSet>
-      <dgm:spPr/>
-    </dgm:pt>
-  </dgm:ptLst>
-  <dgm:cxnLst>
-    <dgm:cxn modelId="{AFC42805-2B46-452D-ADD4-E96EFD225F9C}" type="presOf" srcId="{67EE0F34-C6A4-436E-84CD-BA1EC2C7DB7B}" destId="{879B648D-1F2E-464D-8507-56729E0018C9}" srcOrd="0" destOrd="0" presId="urn:microsoft.com/office/officeart/2005/8/layout/vList5"/>
-    <dgm:cxn modelId="{C98AEC14-394B-4F49-A0FF-F38320CA7611}" type="presOf" srcId="{C5103B79-92FE-44C7-AF53-268FC431C97C}" destId="{3DC694D5-128A-435D-B863-859BBFCB547A}" srcOrd="0" destOrd="1" presId="urn:microsoft.com/office/officeart/2005/8/layout/vList5"/>
-    <dgm:cxn modelId="{A13FD415-6C4D-49A8-B0A7-4EA3FFC16DC0}" srcId="{89D3C448-C1B9-421D-91E2-94DD068526E7}" destId="{D75E5F6B-8872-4EFD-85A2-2D2E99F5744F}" srcOrd="0" destOrd="0" parTransId="{A2EA3957-9226-4494-B55D-D5D1EC986BFF}" sibTransId="{DE3394A0-B839-4F9C-9ED8-8659510876ED}"/>
-    <dgm:cxn modelId="{07D02A21-BA0A-4584-94C4-E963D3750CDC}" type="presOf" srcId="{E0414680-4CEC-4252-AF64-842D1CC8BCB1}" destId="{879B648D-1F2E-464D-8507-56729E0018C9}" srcOrd="0" destOrd="1" presId="urn:microsoft.com/office/officeart/2005/8/layout/vList5"/>
-    <dgm:cxn modelId="{2CA0B928-6444-4BDF-A25A-A05C89532776}" srcId="{3AA5D8C8-7225-4223-94F1-9885F733679E}" destId="{5E933601-78A5-4DE7-BB07-C82A54D5CF86}" srcOrd="0" destOrd="0" parTransId="{B6AB329B-42B3-44E5-87FB-3C1D75EDC88D}" sibTransId="{19D5B4F4-1422-4EEE-8934-AE8B49B735E1}"/>
-    <dgm:cxn modelId="{A0708C2C-56AF-454C-A71F-10D08A9B2B63}" type="presOf" srcId="{3AA5D8C8-7225-4223-94F1-9885F733679E}" destId="{A6A5FE38-6070-493F-92A2-2F4904C87450}" srcOrd="0" destOrd="0" presId="urn:microsoft.com/office/officeart/2005/8/layout/vList5"/>
-    <dgm:cxn modelId="{804E9738-6ABD-4E93-809B-56A89FBC8173}" type="presOf" srcId="{3F50512D-256E-40E3-82C9-E3E11828E3C4}" destId="{170B5681-4DF3-4802-9072-AAD83CDC0678}" srcOrd="0" destOrd="0" presId="urn:microsoft.com/office/officeart/2005/8/layout/vList5"/>
-    <dgm:cxn modelId="{CBE54139-8B8E-43FF-AB9C-B29B7F6FBAB9}" srcId="{0A9C68FB-4819-4934-B813-A8DB5EA14807}" destId="{E0414680-4CEC-4252-AF64-842D1CC8BCB1}" srcOrd="1" destOrd="0" parTransId="{0ABF0636-F6A9-4479-A09A-FE6A5696EF92}" sibTransId="{2927170A-DD94-441E-96C7-B98A9682468A}"/>
-    <dgm:cxn modelId="{7C4B753A-9DE2-4194-B861-0C05E9A3AC34}" type="presOf" srcId="{CDAC686E-039B-4BC9-BFA0-339DB7D50A1F}" destId="{88717465-A54A-4BFA-BC6A-0CF0E58951A9}" srcOrd="0" destOrd="1" presId="urn:microsoft.com/office/officeart/2005/8/layout/vList5"/>
-    <dgm:cxn modelId="{46D4813C-7CEE-4CB6-96CB-66C3C866D13E}" type="presOf" srcId="{4C25D962-3695-4D81-9ABD-DED2AE87DBE9}" destId="{88717465-A54A-4BFA-BC6A-0CF0E58951A9}" srcOrd="0" destOrd="0" presId="urn:microsoft.com/office/officeart/2005/8/layout/vList5"/>
-    <dgm:cxn modelId="{D8DE0F4B-9D66-4B87-8B07-DC4EE5E6BF2D}" type="presOf" srcId="{8350A9C6-6324-4A59-BE7D-1F25759E005A}" destId="{1BF3A97A-1DBE-46F2-9C55-4863710F64A4}" srcOrd="0" destOrd="0" presId="urn:microsoft.com/office/officeart/2005/8/layout/vList5"/>
-    <dgm:cxn modelId="{72737475-FF1D-4C12-B6EC-451C48C07C77}" srcId="{0A9C68FB-4819-4934-B813-A8DB5EA14807}" destId="{67EE0F34-C6A4-436E-84CD-BA1EC2C7DB7B}" srcOrd="0" destOrd="0" parTransId="{69098DC3-9AE3-42C0-8DA8-F06C91D96D59}" sibTransId="{5B02F794-72E1-4D50-AFA2-88AD2BBC5615}"/>
-    <dgm:cxn modelId="{DC217879-AED6-4E07-B661-77C85526394D}" srcId="{19018B62-A783-4DCA-8F21-D36D4E240450}" destId="{DB5CAB13-7EB3-4921-BBBC-77CDDE1DC712}" srcOrd="3" destOrd="0" parTransId="{B39B734B-8C8C-49B0-BEF9-BE3DA976DCD2}" sibTransId="{D18708A8-CD32-4910-8AEC-D58FE4642F70}"/>
-    <dgm:cxn modelId="{C9D9195A-D92C-4971-BA32-8FD30F02F1DE}" srcId="{19018B62-A783-4DCA-8F21-D36D4E240450}" destId="{DE9DD595-478B-47A6-825F-7E95B38F4E5E}" srcOrd="1" destOrd="0" parTransId="{5B786A4A-862D-49A0-BF68-25FB9D27329E}" sibTransId="{6330B91E-FED1-4EB8-83BF-53179E3FFD31}"/>
-    <dgm:cxn modelId="{75BDC591-D4A9-4F2D-9783-530F21B1CA33}" srcId="{3AA5D8C8-7225-4223-94F1-9885F733679E}" destId="{C5103B79-92FE-44C7-AF53-268FC431C97C}" srcOrd="1" destOrd="0" parTransId="{6D9573BA-0819-4585-9F58-D8E664D4E347}" sibTransId="{37D0E739-426C-4288-9192-26190DEEE850}"/>
-    <dgm:cxn modelId="{6E39F792-F11B-4D2A-AB03-8ECDD1533EA6}" srcId="{19018B62-A783-4DCA-8F21-D36D4E240450}" destId="{3AA5D8C8-7225-4223-94F1-9885F733679E}" srcOrd="0" destOrd="0" parTransId="{1FF53D6A-8E7B-43EF-8FF4-D43879A5736B}" sibTransId="{73657A3B-85DD-4D55-865F-5FBDFDF0EC00}"/>
-    <dgm:cxn modelId="{D9A853A1-7ED6-4685-977B-EB3B652CF956}" type="presOf" srcId="{19018B62-A783-4DCA-8F21-D36D4E240450}" destId="{1CC5F134-01DC-4641-94B3-8CCFCE590356}" srcOrd="0" destOrd="0" presId="urn:microsoft.com/office/officeart/2005/8/layout/vList5"/>
-    <dgm:cxn modelId="{2CCFB4A3-A501-4323-9CB5-B21EFD2038E1}" type="presOf" srcId="{DB5CAB13-7EB3-4921-BBBC-77CDDE1DC712}" destId="{A6475DE5-6358-40C7-A591-0DEAAC3D595F}" srcOrd="0" destOrd="0" presId="urn:microsoft.com/office/officeart/2005/8/layout/vList5"/>
-    <dgm:cxn modelId="{A5EF18A7-41C3-4CD5-AFDB-C5FB31D8593C}" type="presOf" srcId="{B24AA518-A11E-4E08-862D-CDE6B44FAD65}" destId="{D7907136-9324-46BD-B380-972E212B479E}" srcOrd="0" destOrd="1" presId="urn:microsoft.com/office/officeart/2005/8/layout/vList5"/>
-    <dgm:cxn modelId="{C69ED9B7-BD8D-4563-9AFD-52CA8F341A94}" type="presOf" srcId="{89D3C448-C1B9-421D-91E2-94DD068526E7}" destId="{D961C21F-CAF6-4346-8B26-44D0AC1C1B0A}" srcOrd="0" destOrd="0" presId="urn:microsoft.com/office/officeart/2005/8/layout/vList5"/>
-    <dgm:cxn modelId="{825799BD-C7F4-400F-B052-345CC3B10CBD}" type="presOf" srcId="{D75E5F6B-8872-4EFD-85A2-2D2E99F5744F}" destId="{4210F9EA-D5C4-4A56-A8E8-4953A4A03790}" srcOrd="0" destOrd="0" presId="urn:microsoft.com/office/officeart/2005/8/layout/vList5"/>
-    <dgm:cxn modelId="{57CDD0C3-3A9F-4ACF-9A0B-3A957B69CFF4}" srcId="{DB5CAB13-7EB3-4921-BBBC-77CDDE1DC712}" destId="{331246C4-8BFA-40FD-BE89-CA0AA2316061}" srcOrd="0" destOrd="0" parTransId="{552E96FB-3F6C-4C8A-9065-0F6EEAB1D70B}" sibTransId="{F6AC4213-F92F-47BD-857E-18F5588D2984}"/>
-    <dgm:cxn modelId="{9DEC6FCB-0A3A-4A2F-B7DE-7B34ABA2852D}" srcId="{DE9DD595-478B-47A6-825F-7E95B38F4E5E}" destId="{CDAC686E-039B-4BC9-BFA0-339DB7D50A1F}" srcOrd="1" destOrd="0" parTransId="{3B61145E-67FC-4737-A579-CBAED6EC8192}" sibTransId="{FFA6310B-13EA-4D7E-ABDC-3F75C9CA1901}"/>
-    <dgm:cxn modelId="{80B829CE-A140-4EB9-A4C3-436740A2CCB4}" type="presOf" srcId="{5E933601-78A5-4DE7-BB07-C82A54D5CF86}" destId="{3DC694D5-128A-435D-B863-859BBFCB547A}" srcOrd="0" destOrd="0" presId="urn:microsoft.com/office/officeart/2005/8/layout/vList5"/>
-    <dgm:cxn modelId="{20F0B5D0-9DCA-4704-86C4-42917C7B250D}" srcId="{19018B62-A783-4DCA-8F21-D36D4E240450}" destId="{89D3C448-C1B9-421D-91E2-94DD068526E7}" srcOrd="4" destOrd="0" parTransId="{7D8971F2-BA2C-45D8-92E3-DAFA1D90B07B}" sibTransId="{8E06A966-806A-4CE7-8E94-CC43280D6253}"/>
-    <dgm:cxn modelId="{B8149BD2-6728-4EAF-8F27-CEDF8CD4B94D}" srcId="{3F50512D-256E-40E3-82C9-E3E11828E3C4}" destId="{8350A9C6-6324-4A59-BE7D-1F25759E005A}" srcOrd="0" destOrd="0" parTransId="{469CC067-F972-4268-B24C-F27275E9B182}" sibTransId="{D73D77ED-C1DC-4449-A15B-259855414473}"/>
-    <dgm:cxn modelId="{763212D4-4DFA-4A83-9A5B-D5D24DEF33AA}" srcId="{19018B62-A783-4DCA-8F21-D36D4E240450}" destId="{3F50512D-256E-40E3-82C9-E3E11828E3C4}" srcOrd="5" destOrd="0" parTransId="{B15820C4-FBAB-42B9-B64B-D8C71B07BCC3}" sibTransId="{3A3BEE4A-E216-4985-B4E2-4412F7AE342B}"/>
-    <dgm:cxn modelId="{C5EE27D7-3A69-455E-AE0F-80952393308B}" srcId="{DE9DD595-478B-47A6-825F-7E95B38F4E5E}" destId="{4C25D962-3695-4D81-9ABD-DED2AE87DBE9}" srcOrd="0" destOrd="0" parTransId="{A9C210A8-5137-4964-8261-D0B3DC1E939B}" sibTransId="{56D57805-AE70-4ABF-9BD7-BE1CE81ED724}"/>
-    <dgm:cxn modelId="{898FCDD7-BBE7-4125-8187-ED4ABBF79BE4}" srcId="{DB5CAB13-7EB3-4921-BBBC-77CDDE1DC712}" destId="{B24AA518-A11E-4E08-862D-CDE6B44FAD65}" srcOrd="1" destOrd="0" parTransId="{C6A02B29-A582-4E29-8A9E-8FA376CEF3D1}" sibTransId="{AFEAAAF4-7146-4C87-A01C-61B017A8431C}"/>
-    <dgm:cxn modelId="{F4D76AD9-7766-45CF-BE9E-CFEA8CA2058F}" type="presOf" srcId="{331246C4-8BFA-40FD-BE89-CA0AA2316061}" destId="{D7907136-9324-46BD-B380-972E212B479E}" srcOrd="0" destOrd="0" presId="urn:microsoft.com/office/officeart/2005/8/layout/vList5"/>
-    <dgm:cxn modelId="{84092BE2-196A-4D0C-991E-F51EE54FD0B4}" srcId="{19018B62-A783-4DCA-8F21-D36D4E240450}" destId="{0A9C68FB-4819-4934-B813-A8DB5EA14807}" srcOrd="2" destOrd="0" parTransId="{C9C4CF4B-0AF2-4D36-AD85-720326CA14C4}" sibTransId="{DED44234-600E-4930-8AEF-BDAD11EF74F0}"/>
-    <dgm:cxn modelId="{7D8D53EA-B956-415B-929D-9A91B133EF35}" type="presOf" srcId="{DE9DD595-478B-47A6-825F-7E95B38F4E5E}" destId="{88824116-76D2-48AA-B94F-297837F53D8F}" srcOrd="0" destOrd="0" presId="urn:microsoft.com/office/officeart/2005/8/layout/vList5"/>
-    <dgm:cxn modelId="{23854BEC-5171-4748-9A32-EEC537F646B3}" type="presOf" srcId="{0A9C68FB-4819-4934-B813-A8DB5EA14807}" destId="{7DA18F8B-A9B0-4BE7-AE38-B787D3E8C76B}" srcOrd="0" destOrd="0" presId="urn:microsoft.com/office/officeart/2005/8/layout/vList5"/>
-    <dgm:cxn modelId="{0CE9FEC0-B74F-41E2-8095-0D48B6123376}" type="presParOf" srcId="{1CC5F134-01DC-4641-94B3-8CCFCE590356}" destId="{77C76100-55CD-4C4A-8644-392B5CBAB3BC}" srcOrd="0" destOrd="0" presId="urn:microsoft.com/office/officeart/2005/8/layout/vList5"/>
-    <dgm:cxn modelId="{565DF3D2-7306-4189-AC1A-A4FF818158D2}" type="presParOf" srcId="{77C76100-55CD-4C4A-8644-392B5CBAB3BC}" destId="{A6A5FE38-6070-493F-92A2-2F4904C87450}" srcOrd="0" destOrd="0" presId="urn:microsoft.com/office/officeart/2005/8/layout/vList5"/>
-    <dgm:cxn modelId="{089AB962-B019-410A-9A37-670381D963D8}" type="presParOf" srcId="{77C76100-55CD-4C4A-8644-392B5CBAB3BC}" destId="{3DC694D5-128A-435D-B863-859BBFCB547A}" srcOrd="1" destOrd="0" presId="urn:microsoft.com/office/officeart/2005/8/layout/vList5"/>
-    <dgm:cxn modelId="{05F8219B-65CA-489D-BE97-3B525C93A9E2}" type="presParOf" srcId="{1CC5F134-01DC-4641-94B3-8CCFCE590356}" destId="{4CD058E3-616D-4CBD-93D0-5674D4B3E16A}" srcOrd="1" destOrd="0" presId="urn:microsoft.com/office/officeart/2005/8/layout/vList5"/>
-    <dgm:cxn modelId="{C2D561F0-D555-491C-A515-5BE99D594F1E}" type="presParOf" srcId="{1CC5F134-01DC-4641-94B3-8CCFCE590356}" destId="{F83B5878-7BE8-4E43-9F48-1E38CE175205}" srcOrd="2" destOrd="0" presId="urn:microsoft.com/office/officeart/2005/8/layout/vList5"/>
-    <dgm:cxn modelId="{8B215B60-0732-45F6-9251-0CEEEC6FE2E3}" type="presParOf" srcId="{F83B5878-7BE8-4E43-9F48-1E38CE175205}" destId="{88824116-76D2-48AA-B94F-297837F53D8F}" srcOrd="0" destOrd="0" presId="urn:microsoft.com/office/officeart/2005/8/layout/vList5"/>
-    <dgm:cxn modelId="{5FD71506-850F-4722-BE68-2E578FC8D715}" type="presParOf" srcId="{F83B5878-7BE8-4E43-9F48-1E38CE175205}" destId="{88717465-A54A-4BFA-BC6A-0CF0E58951A9}" srcOrd="1" destOrd="0" presId="urn:microsoft.com/office/officeart/2005/8/layout/vList5"/>
-    <dgm:cxn modelId="{D3FAD62F-FE6A-4B05-A8B6-ABBC0593E929}" type="presParOf" srcId="{1CC5F134-01DC-4641-94B3-8CCFCE590356}" destId="{A18CA8FC-7778-42CD-B8E6-439452941591}" srcOrd="3" destOrd="0" presId="urn:microsoft.com/office/officeart/2005/8/layout/vList5"/>
-    <dgm:cxn modelId="{B2B38E4E-AFEC-4873-A07E-8130128340DC}" type="presParOf" srcId="{1CC5F134-01DC-4641-94B3-8CCFCE590356}" destId="{B32F4029-A01F-4A9A-A047-16F7B4F799CE}" srcOrd="4" destOrd="0" presId="urn:microsoft.com/office/officeart/2005/8/layout/vList5"/>
-    <dgm:cxn modelId="{B7C30DF9-1928-4A5E-923D-D02423AA6337}" type="presParOf" srcId="{B32F4029-A01F-4A9A-A047-16F7B4F799CE}" destId="{7DA18F8B-A9B0-4BE7-AE38-B787D3E8C76B}" srcOrd="0" destOrd="0" presId="urn:microsoft.com/office/officeart/2005/8/layout/vList5"/>
-    <dgm:cxn modelId="{4EBAD822-BCF7-4D79-9013-0C308DF2448E}" type="presParOf" srcId="{B32F4029-A01F-4A9A-A047-16F7B4F799CE}" destId="{879B648D-1F2E-464D-8507-56729E0018C9}" srcOrd="1" destOrd="0" presId="urn:microsoft.com/office/officeart/2005/8/layout/vList5"/>
-    <dgm:cxn modelId="{CA2E8E6D-B442-4017-86C0-79FBDD390F4E}" type="presParOf" srcId="{1CC5F134-01DC-4641-94B3-8CCFCE590356}" destId="{070D31A3-0C27-41AC-9D56-B46AC8F90553}" srcOrd="5" destOrd="0" presId="urn:microsoft.com/office/officeart/2005/8/layout/vList5"/>
-    <dgm:cxn modelId="{EAD72351-0DDC-4DB3-BBD8-D82D4D65A76F}" type="presParOf" srcId="{1CC5F134-01DC-4641-94B3-8CCFCE590356}" destId="{4C83BA40-7625-4BAB-BBDB-5EACA45C150E}" srcOrd="6" destOrd="0" presId="urn:microsoft.com/office/officeart/2005/8/layout/vList5"/>
-    <dgm:cxn modelId="{11E2874A-BF46-4DDF-89C7-BA94D90AE43F}" type="presParOf" srcId="{4C83BA40-7625-4BAB-BBDB-5EACA45C150E}" destId="{A6475DE5-6358-40C7-A591-0DEAAC3D595F}" srcOrd="0" destOrd="0" presId="urn:microsoft.com/office/officeart/2005/8/layout/vList5"/>
-    <dgm:cxn modelId="{944C210E-6FF7-4E4A-97D0-F0673AF558CF}" type="presParOf" srcId="{4C83BA40-7625-4BAB-BBDB-5EACA45C150E}" destId="{D7907136-9324-46BD-B380-972E212B479E}" srcOrd="1" destOrd="0" presId="urn:microsoft.com/office/officeart/2005/8/layout/vList5"/>
-    <dgm:cxn modelId="{3DF64764-471E-47C2-A52D-9699D6CFE9FE}" type="presParOf" srcId="{1CC5F134-01DC-4641-94B3-8CCFCE590356}" destId="{231156E8-27F1-4716-A762-01E35E243D15}" srcOrd="7" destOrd="0" presId="urn:microsoft.com/office/officeart/2005/8/layout/vList5"/>
-    <dgm:cxn modelId="{E2A56EE2-A34A-4A6C-B81F-C336C0060C79}" type="presParOf" srcId="{1CC5F134-01DC-4641-94B3-8CCFCE590356}" destId="{08B6E0CD-49DE-4B63-9034-0D005C93F62D}" srcOrd="8" destOrd="0" presId="urn:microsoft.com/office/officeart/2005/8/layout/vList5"/>
-    <dgm:cxn modelId="{C710B1E6-104A-4ECB-B6EC-142E78F03541}" type="presParOf" srcId="{08B6E0CD-49DE-4B63-9034-0D005C93F62D}" destId="{D961C21F-CAF6-4346-8B26-44D0AC1C1B0A}" srcOrd="0" destOrd="0" presId="urn:microsoft.com/office/officeart/2005/8/layout/vList5"/>
-    <dgm:cxn modelId="{A629BE90-E749-4E8C-A933-F63C5C4EAE55}" type="presParOf" srcId="{08B6E0CD-49DE-4B63-9034-0D005C93F62D}" destId="{4210F9EA-D5C4-4A56-A8E8-4953A4A03790}" srcOrd="1" destOrd="0" presId="urn:microsoft.com/office/officeart/2005/8/layout/vList5"/>
-    <dgm:cxn modelId="{5C0448E2-D035-4F10-858C-EFE815861B28}" type="presParOf" srcId="{1CC5F134-01DC-4641-94B3-8CCFCE590356}" destId="{98BCA269-8393-41E0-963B-B043C5421F49}" srcOrd="9" destOrd="0" presId="urn:microsoft.com/office/officeart/2005/8/layout/vList5"/>
-    <dgm:cxn modelId="{DF3549D9-74E6-4116-B9DC-2B700B8A4EE8}" type="presParOf" srcId="{1CC5F134-01DC-4641-94B3-8CCFCE590356}" destId="{64421C92-3D77-4DB4-8A43-2C4EB8EE0F79}" srcOrd="10" destOrd="0" presId="urn:microsoft.com/office/officeart/2005/8/layout/vList5"/>
-    <dgm:cxn modelId="{86404CA5-18BC-4604-BBE8-195F84FE7A8E}" type="presParOf" srcId="{64421C92-3D77-4DB4-8A43-2C4EB8EE0F79}" destId="{170B5681-4DF3-4802-9072-AAD83CDC0678}" srcOrd="0" destOrd="0" presId="urn:microsoft.com/office/officeart/2005/8/layout/vList5"/>
-    <dgm:cxn modelId="{C37FA341-F304-41D1-A58E-64EF98DEB8F2}" type="presParOf" srcId="{64421C92-3D77-4DB4-8A43-2C4EB8EE0F79}" destId="{1BF3A97A-1DBE-46F2-9C55-4863710F64A4}" srcOrd="1" destOrd="0" presId="urn:microsoft.com/office/officeart/2005/8/layout/vList5"/>
-  </dgm:cxnLst>
-  <dgm:bg/>
-  <dgm:whole/>
-  <dgm:extLst>
-    <a:ext uri="http://schemas.microsoft.com/office/drawing/2008/diagram">
-      <dsp:dataModelExt xmlns:dsp="http://schemas.microsoft.com/office/drawing/2008/diagram" relId="rId6" minVer="http://schemas.openxmlformats.org/drawingml/2006/diagram"/>
-    </a:ext>
-  </dgm:extLst>
-</dgm:dataModel>
-</file>
-
-<file path=ppt/diagrams/data5.xml><?xml version="1.0" encoding="utf-8"?>
-<dgm:dataModel xmlns:dgm="http://schemas.openxmlformats.org/drawingml/2006/diagram" xmlns:a="http://schemas.openxmlformats.org/drawingml/2006/main">
-  <dgm:ptLst>
     <dgm:pt modelId="{2CA1048A-87B5-4F33-AD56-83C94840B080}" type="doc">
       <dgm:prSet loTypeId="urn:microsoft.com/office/officeart/2024/3/layout/hArchList1" loCatId="List" qsTypeId="urn:microsoft.com/office/officeart/2005/8/quickstyle/simple1" qsCatId="simple" csTypeId="urn:microsoft.com/office/officeart/2005/8/colors/accent1_2" csCatId="accent1" phldr="1"/>
       <dgm:spPr/>
@@ -6423,7 +4785,7 @@
             <a:buNone/>
           </a:pPr>
           <a:r>
-            <a:rPr lang="en-US" sz="1900" kern="1200"/>
+            <a:rPr lang="en-US" sz="1900" kern="1200" dirty="0"/>
             <a:t>Project goal tied to Company Vision</a:t>
           </a:r>
         </a:p>
@@ -7060,8 +5422,8 @@
       </dsp:nvSpPr>
       <dsp:spPr>
         <a:xfrm>
-          <a:off x="984015" y="1429"/>
-          <a:ext cx="3823861" cy="2428151"/>
+          <a:off x="1329" y="676288"/>
+          <a:ext cx="4666163" cy="2963013"/>
         </a:xfrm>
         <a:prstGeom prst="roundRect">
           <a:avLst>
@@ -7139,8 +5501,8 @@
       </dsp:nvSpPr>
       <dsp:spPr>
         <a:xfrm>
-          <a:off x="1408888" y="405058"/>
-          <a:ext cx="3823861" cy="2428151"/>
+          <a:off x="519792" y="1168827"/>
+          <a:ext cx="4666163" cy="2963013"/>
         </a:xfrm>
         <a:prstGeom prst="roundRect">
           <a:avLst>
@@ -7183,12 +5545,12 @@
         <a:fontRef idx="minor"/>
       </dsp:style>
       <dsp:txBody>
-        <a:bodyPr spcFirstLastPara="0" vert="horz" wrap="square" lIns="99060" tIns="99060" rIns="99060" bIns="99060" numCol="1" spcCol="1270" anchor="ctr" anchorCtr="0">
+        <a:bodyPr spcFirstLastPara="0" vert="horz" wrap="square" lIns="121920" tIns="121920" rIns="121920" bIns="121920" numCol="1" spcCol="1270" anchor="ctr" anchorCtr="0">
           <a:noAutofit/>
         </a:bodyPr>
         <a:lstStyle/>
         <a:p>
-          <a:pPr marL="0" lvl="0" indent="0" algn="ctr" defTabSz="1155700">
+          <a:pPr marL="0" lvl="0" indent="0" algn="ctr" defTabSz="1422400">
             <a:lnSpc>
               <a:spcPct val="100000"/>
             </a:lnSpc>
@@ -7201,14 +5563,14 @@
             <a:buNone/>
           </a:pPr>
           <a:r>
-            <a:rPr lang="en-US" sz="2600" kern="1200"/>
+            <a:rPr lang="en-US" sz="3200" kern="1200" dirty="0"/>
             <a:t>Shoppers struggle to browse the large fashion catalog, making it difficult to decide what to buy. </a:t>
           </a:r>
         </a:p>
       </dsp:txBody>
       <dsp:txXfrm>
-        <a:off x="1480006" y="476176"/>
-        <a:ext cx="3681625" cy="2285915"/>
+        <a:off x="606576" y="1255611"/>
+        <a:ext cx="4492595" cy="2789445"/>
       </dsp:txXfrm>
     </dsp:sp>
     <dsp:sp modelId="{A800ADFB-5526-486F-9B73-47A1294E23DD}">
@@ -7218,8 +5580,8 @@
       </dsp:nvSpPr>
       <dsp:spPr>
         <a:xfrm>
-          <a:off x="5657623" y="1429"/>
-          <a:ext cx="3823861" cy="2428151"/>
+          <a:off x="5704418" y="676288"/>
+          <a:ext cx="4666163" cy="2963013"/>
         </a:xfrm>
         <a:prstGeom prst="roundRect">
           <a:avLst>
@@ -7297,8 +5659,8 @@
       </dsp:nvSpPr>
       <dsp:spPr>
         <a:xfrm>
-          <a:off x="6082497" y="405058"/>
-          <a:ext cx="3823861" cy="2428151"/>
+          <a:off x="6222880" y="1168827"/>
+          <a:ext cx="4666163" cy="2963013"/>
         </a:xfrm>
         <a:prstGeom prst="roundRect">
           <a:avLst>
@@ -7341,12 +5703,12 @@
         <a:fontRef idx="minor"/>
       </dsp:style>
       <dsp:txBody>
-        <a:bodyPr spcFirstLastPara="0" vert="horz" wrap="square" lIns="99060" tIns="99060" rIns="99060" bIns="99060" numCol="1" spcCol="1270" anchor="ctr" anchorCtr="0">
+        <a:bodyPr spcFirstLastPara="0" vert="horz" wrap="square" lIns="121920" tIns="121920" rIns="121920" bIns="121920" numCol="1" spcCol="1270" anchor="ctr" anchorCtr="0">
           <a:noAutofit/>
         </a:bodyPr>
         <a:lstStyle/>
         <a:p>
-          <a:pPr marL="0" lvl="0" indent="0" algn="ctr" defTabSz="1155700">
+          <a:pPr marL="0" lvl="0" indent="0" algn="ctr" defTabSz="1422400">
             <a:lnSpc>
               <a:spcPct val="100000"/>
             </a:lnSpc>
@@ -7359,14 +5721,14 @@
             <a:buNone/>
           </a:pPr>
           <a:r>
-            <a:rPr lang="en-US" sz="2600" kern="1200"/>
+            <a:rPr lang="en-US" sz="3200" kern="1200"/>
             <a:t>Poor customer experience and reduced customer satisfaction ultimately results in lower sales.</a:t>
           </a:r>
         </a:p>
       </dsp:txBody>
       <dsp:txXfrm>
-        <a:off x="6153615" y="476176"/>
-        <a:ext cx="3681625" cy="2285915"/>
+        <a:off x="6309664" y="1255611"/>
+        <a:ext cx="4492595" cy="2789445"/>
       </dsp:txXfrm>
     </dsp:sp>
   </dsp:spTree>
@@ -7966,1200 +6328,6 @@
 </file>
 
 <file path=ppt/diagrams/drawing4.xml><?xml version="1.0" encoding="utf-8"?>
-<dsp:drawing xmlns:dgm="http://schemas.openxmlformats.org/drawingml/2006/diagram" xmlns:dsp="http://schemas.microsoft.com/office/drawing/2008/diagram" xmlns:a="http://schemas.openxmlformats.org/drawingml/2006/main">
-  <dsp:spTree>
-    <dsp:nvGrpSpPr>
-      <dsp:cNvPr id="0" name=""/>
-      <dsp:cNvGrpSpPr/>
-    </dsp:nvGrpSpPr>
-    <dsp:grpSpPr/>
-    <dsp:sp modelId="{3DC694D5-128A-435D-B863-859BBFCB547A}">
-      <dsp:nvSpPr>
-        <dsp:cNvPr id="0" name=""/>
-        <dsp:cNvSpPr/>
-      </dsp:nvSpPr>
-      <dsp:spPr>
-        <a:xfrm rot="5400000">
-          <a:off x="7251266" y="-3166469"/>
-          <a:ext cx="627509" cy="7120020"/>
-        </a:xfrm>
-        <a:prstGeom prst="round2SameRect">
-          <a:avLst/>
-        </a:prstGeom>
-        <a:solidFill>
-          <a:schemeClr val="accent3">
-            <a:alpha val="90000"/>
-            <a:tint val="40000"/>
-            <a:hueOff val="0"/>
-            <a:satOff val="0"/>
-            <a:lumOff val="0"/>
-            <a:alphaOff val="0"/>
-          </a:schemeClr>
-        </a:solidFill>
-        <a:ln w="6350" cap="flat" cmpd="sng" algn="ctr">
-          <a:solidFill>
-            <a:schemeClr val="accent3">
-              <a:alpha val="90000"/>
-              <a:tint val="40000"/>
-              <a:hueOff val="0"/>
-              <a:satOff val="0"/>
-              <a:lumOff val="0"/>
-              <a:alphaOff val="0"/>
-            </a:schemeClr>
-          </a:solidFill>
-          <a:prstDash val="solid"/>
-          <a:miter lim="800000"/>
-        </a:ln>
-        <a:effectLst/>
-      </dsp:spPr>
-      <dsp:style>
-        <a:lnRef idx="1">
-          <a:scrgbClr r="0" g="0" b="0"/>
-        </a:lnRef>
-        <a:fillRef idx="1">
-          <a:scrgbClr r="0" g="0" b="0"/>
-        </a:fillRef>
-        <a:effectRef idx="2">
-          <a:scrgbClr r="0" g="0" b="0"/>
-        </a:effectRef>
-        <a:fontRef idx="minor"/>
-      </dsp:style>
-      <dsp:txBody>
-        <a:bodyPr spcFirstLastPara="0" vert="horz" wrap="square" lIns="57150" tIns="28575" rIns="57150" bIns="28575" numCol="1" spcCol="1270" anchor="ctr" anchorCtr="0">
-          <a:noAutofit/>
-        </a:bodyPr>
-        <a:lstStyle/>
-        <a:p>
-          <a:pPr marL="114300" lvl="1" indent="-114300" algn="l" defTabSz="666750">
-            <a:lnSpc>
-              <a:spcPct val="100000"/>
-            </a:lnSpc>
-            <a:spcBef>
-              <a:spcPct val="0"/>
-            </a:spcBef>
-            <a:spcAft>
-              <a:spcPct val="15000"/>
-            </a:spcAft>
-            <a:buChar char="•"/>
-          </a:pPr>
-          <a:r>
-            <a:rPr lang="en-US" sz="1500" kern="1200"/>
-            <a:t>Obtain clear and explicit consent from users before collecting personal data.</a:t>
-          </a:r>
-        </a:p>
-        <a:p>
-          <a:pPr marL="114300" lvl="1" indent="-114300" algn="l" defTabSz="666750">
-            <a:lnSpc>
-              <a:spcPct val="100000"/>
-            </a:lnSpc>
-            <a:spcBef>
-              <a:spcPct val="0"/>
-            </a:spcBef>
-            <a:spcAft>
-              <a:spcPct val="15000"/>
-            </a:spcAft>
-            <a:buChar char="•"/>
-          </a:pPr>
-          <a:r>
-            <a:rPr lang="en-US" sz="1500" kern="1200"/>
-            <a:t>Allow users to withdraw from consent at any time</a:t>
-          </a:r>
-        </a:p>
-      </dsp:txBody>
-      <dsp:txXfrm rot="-5400000">
-        <a:off x="4005011" y="110418"/>
-        <a:ext cx="7089388" cy="566245"/>
-      </dsp:txXfrm>
-    </dsp:sp>
-    <dsp:sp modelId="{A6A5FE38-6070-493F-92A2-2F4904C87450}">
-      <dsp:nvSpPr>
-        <dsp:cNvPr id="0" name=""/>
-        <dsp:cNvSpPr/>
-      </dsp:nvSpPr>
-      <dsp:spPr>
-        <a:xfrm>
-          <a:off x="0" y="1347"/>
-          <a:ext cx="4005011" cy="784387"/>
-        </a:xfrm>
-        <a:prstGeom prst="roundRect">
-          <a:avLst/>
-        </a:prstGeom>
-        <a:gradFill rotWithShape="0">
-          <a:gsLst>
-            <a:gs pos="0">
-              <a:schemeClr val="accent3">
-                <a:hueOff val="0"/>
-                <a:satOff val="0"/>
-                <a:lumOff val="0"/>
-                <a:alphaOff val="0"/>
-                <a:satMod val="103000"/>
-                <a:lumMod val="102000"/>
-                <a:tint val="94000"/>
-              </a:schemeClr>
-            </a:gs>
-            <a:gs pos="50000">
-              <a:schemeClr val="accent3">
-                <a:hueOff val="0"/>
-                <a:satOff val="0"/>
-                <a:lumOff val="0"/>
-                <a:alphaOff val="0"/>
-                <a:satMod val="110000"/>
-                <a:lumMod val="100000"/>
-                <a:shade val="100000"/>
-              </a:schemeClr>
-            </a:gs>
-            <a:gs pos="100000">
-              <a:schemeClr val="accent3">
-                <a:hueOff val="0"/>
-                <a:satOff val="0"/>
-                <a:lumOff val="0"/>
-                <a:alphaOff val="0"/>
-                <a:lumMod val="99000"/>
-                <a:satMod val="120000"/>
-                <a:shade val="78000"/>
-              </a:schemeClr>
-            </a:gs>
-          </a:gsLst>
-          <a:lin ang="5400000" scaled="0"/>
-        </a:gradFill>
-        <a:ln>
-          <a:noFill/>
-        </a:ln>
-        <a:effectLst>
-          <a:outerShdw blurRad="57150" dist="19050" dir="5400000" algn="ctr" rotWithShape="0">
-            <a:srgbClr val="000000">
-              <a:alpha val="63000"/>
-            </a:srgbClr>
-          </a:outerShdw>
-        </a:effectLst>
-      </dsp:spPr>
-      <dsp:style>
-        <a:lnRef idx="0">
-          <a:scrgbClr r="0" g="0" b="0"/>
-        </a:lnRef>
-        <a:fillRef idx="3">
-          <a:scrgbClr r="0" g="0" b="0"/>
-        </a:fillRef>
-        <a:effectRef idx="3">
-          <a:scrgbClr r="0" g="0" b="0"/>
-        </a:effectRef>
-        <a:fontRef idx="minor">
-          <a:schemeClr val="lt1"/>
-        </a:fontRef>
-      </dsp:style>
-      <dsp:txBody>
-        <a:bodyPr spcFirstLastPara="0" vert="horz" wrap="square" lIns="95250" tIns="47625" rIns="95250" bIns="47625" numCol="1" spcCol="1270" anchor="ctr" anchorCtr="0">
-          <a:noAutofit/>
-        </a:bodyPr>
-        <a:lstStyle/>
-        <a:p>
-          <a:pPr marL="0" lvl="0" indent="0" algn="ctr" defTabSz="1111250">
-            <a:lnSpc>
-              <a:spcPct val="100000"/>
-            </a:lnSpc>
-            <a:spcBef>
-              <a:spcPct val="0"/>
-            </a:spcBef>
-            <a:spcAft>
-              <a:spcPct val="35000"/>
-            </a:spcAft>
-            <a:buNone/>
-          </a:pPr>
-          <a:r>
-            <a:rPr lang="en-US" sz="2500" kern="1200"/>
-            <a:t>User Consent</a:t>
-          </a:r>
-        </a:p>
-      </dsp:txBody>
-      <dsp:txXfrm>
-        <a:off x="38291" y="39638"/>
-        <a:ext cx="3928429" cy="707805"/>
-      </dsp:txXfrm>
-    </dsp:sp>
-    <dsp:sp modelId="{88717465-A54A-4BFA-BC6A-0CF0E58951A9}">
-      <dsp:nvSpPr>
-        <dsp:cNvPr id="0" name=""/>
-        <dsp:cNvSpPr/>
-      </dsp:nvSpPr>
-      <dsp:spPr>
-        <a:xfrm rot="5400000">
-          <a:off x="7251266" y="-2342862"/>
-          <a:ext cx="627509" cy="7120020"/>
-        </a:xfrm>
-        <a:prstGeom prst="round2SameRect">
-          <a:avLst/>
-        </a:prstGeom>
-        <a:solidFill>
-          <a:schemeClr val="accent3">
-            <a:alpha val="90000"/>
-            <a:tint val="40000"/>
-            <a:hueOff val="0"/>
-            <a:satOff val="0"/>
-            <a:lumOff val="0"/>
-            <a:alphaOff val="0"/>
-          </a:schemeClr>
-        </a:solidFill>
-        <a:ln w="6350" cap="flat" cmpd="sng" algn="ctr">
-          <a:solidFill>
-            <a:schemeClr val="accent3">
-              <a:alpha val="90000"/>
-              <a:tint val="40000"/>
-              <a:hueOff val="0"/>
-              <a:satOff val="0"/>
-              <a:lumOff val="0"/>
-              <a:alphaOff val="0"/>
-            </a:schemeClr>
-          </a:solidFill>
-          <a:prstDash val="solid"/>
-          <a:miter lim="800000"/>
-        </a:ln>
-        <a:effectLst/>
-      </dsp:spPr>
-      <dsp:style>
-        <a:lnRef idx="1">
-          <a:scrgbClr r="0" g="0" b="0"/>
-        </a:lnRef>
-        <a:fillRef idx="1">
-          <a:scrgbClr r="0" g="0" b="0"/>
-        </a:fillRef>
-        <a:effectRef idx="2">
-          <a:scrgbClr r="0" g="0" b="0"/>
-        </a:effectRef>
-        <a:fontRef idx="minor"/>
-      </dsp:style>
-      <dsp:txBody>
-        <a:bodyPr spcFirstLastPara="0" vert="horz" wrap="square" lIns="57150" tIns="28575" rIns="57150" bIns="28575" numCol="1" spcCol="1270" anchor="ctr" anchorCtr="0">
-          <a:noAutofit/>
-        </a:bodyPr>
-        <a:lstStyle/>
-        <a:p>
-          <a:pPr marL="114300" lvl="1" indent="-114300" algn="l" defTabSz="666750">
-            <a:lnSpc>
-              <a:spcPct val="100000"/>
-            </a:lnSpc>
-            <a:spcBef>
-              <a:spcPct val="0"/>
-            </a:spcBef>
-            <a:spcAft>
-              <a:spcPct val="15000"/>
-            </a:spcAft>
-            <a:buChar char="•"/>
-          </a:pPr>
-          <a:r>
-            <a:rPr lang="en-US" sz="1500" kern="1200"/>
-            <a:t>Collect only the data necessary for app’s functionality.</a:t>
-          </a:r>
-        </a:p>
-        <a:p>
-          <a:pPr marL="114300" lvl="1" indent="-114300" algn="l" defTabSz="666750">
-            <a:lnSpc>
-              <a:spcPct val="100000"/>
-            </a:lnSpc>
-            <a:spcBef>
-              <a:spcPct val="0"/>
-            </a:spcBef>
-            <a:spcAft>
-              <a:spcPct val="15000"/>
-            </a:spcAft>
-            <a:buChar char="•"/>
-          </a:pPr>
-          <a:r>
-            <a:rPr lang="en-US" sz="1500" kern="1200"/>
-            <a:t>Avoid storing unnecessary personal information.</a:t>
-          </a:r>
-        </a:p>
-      </dsp:txBody>
-      <dsp:txXfrm rot="-5400000">
-        <a:off x="4005011" y="934025"/>
-        <a:ext cx="7089388" cy="566245"/>
-      </dsp:txXfrm>
-    </dsp:sp>
-    <dsp:sp modelId="{88824116-76D2-48AA-B94F-297837F53D8F}">
-      <dsp:nvSpPr>
-        <dsp:cNvPr id="0" name=""/>
-        <dsp:cNvSpPr/>
-      </dsp:nvSpPr>
-      <dsp:spPr>
-        <a:xfrm>
-          <a:off x="0" y="824954"/>
-          <a:ext cx="4005011" cy="784387"/>
-        </a:xfrm>
-        <a:prstGeom prst="roundRect">
-          <a:avLst/>
-        </a:prstGeom>
-        <a:gradFill rotWithShape="0">
-          <a:gsLst>
-            <a:gs pos="0">
-              <a:schemeClr val="accent3">
-                <a:hueOff val="0"/>
-                <a:satOff val="0"/>
-                <a:lumOff val="0"/>
-                <a:alphaOff val="0"/>
-                <a:satMod val="103000"/>
-                <a:lumMod val="102000"/>
-                <a:tint val="94000"/>
-              </a:schemeClr>
-            </a:gs>
-            <a:gs pos="50000">
-              <a:schemeClr val="accent3">
-                <a:hueOff val="0"/>
-                <a:satOff val="0"/>
-                <a:lumOff val="0"/>
-                <a:alphaOff val="0"/>
-                <a:satMod val="110000"/>
-                <a:lumMod val="100000"/>
-                <a:shade val="100000"/>
-              </a:schemeClr>
-            </a:gs>
-            <a:gs pos="100000">
-              <a:schemeClr val="accent3">
-                <a:hueOff val="0"/>
-                <a:satOff val="0"/>
-                <a:lumOff val="0"/>
-                <a:alphaOff val="0"/>
-                <a:lumMod val="99000"/>
-                <a:satMod val="120000"/>
-                <a:shade val="78000"/>
-              </a:schemeClr>
-            </a:gs>
-          </a:gsLst>
-          <a:lin ang="5400000" scaled="0"/>
-        </a:gradFill>
-        <a:ln>
-          <a:noFill/>
-        </a:ln>
-        <a:effectLst>
-          <a:outerShdw blurRad="57150" dist="19050" dir="5400000" algn="ctr" rotWithShape="0">
-            <a:srgbClr val="000000">
-              <a:alpha val="63000"/>
-            </a:srgbClr>
-          </a:outerShdw>
-        </a:effectLst>
-      </dsp:spPr>
-      <dsp:style>
-        <a:lnRef idx="0">
-          <a:scrgbClr r="0" g="0" b="0"/>
-        </a:lnRef>
-        <a:fillRef idx="3">
-          <a:scrgbClr r="0" g="0" b="0"/>
-        </a:fillRef>
-        <a:effectRef idx="3">
-          <a:scrgbClr r="0" g="0" b="0"/>
-        </a:effectRef>
-        <a:fontRef idx="minor">
-          <a:schemeClr val="lt1"/>
-        </a:fontRef>
-      </dsp:style>
-      <dsp:txBody>
-        <a:bodyPr spcFirstLastPara="0" vert="horz" wrap="square" lIns="95250" tIns="47625" rIns="95250" bIns="47625" numCol="1" spcCol="1270" anchor="ctr" anchorCtr="0">
-          <a:noAutofit/>
-        </a:bodyPr>
-        <a:lstStyle/>
-        <a:p>
-          <a:pPr marL="0" lvl="0" indent="0" algn="ctr" defTabSz="1111250">
-            <a:lnSpc>
-              <a:spcPct val="100000"/>
-            </a:lnSpc>
-            <a:spcBef>
-              <a:spcPct val="0"/>
-            </a:spcBef>
-            <a:spcAft>
-              <a:spcPct val="35000"/>
-            </a:spcAft>
-            <a:buNone/>
-          </a:pPr>
-          <a:r>
-            <a:rPr lang="en-US" sz="2500" kern="1200"/>
-            <a:t>Data Minimization</a:t>
-          </a:r>
-        </a:p>
-      </dsp:txBody>
-      <dsp:txXfrm>
-        <a:off x="38291" y="863245"/>
-        <a:ext cx="3928429" cy="707805"/>
-      </dsp:txXfrm>
-    </dsp:sp>
-    <dsp:sp modelId="{879B648D-1F2E-464D-8507-56729E0018C9}">
-      <dsp:nvSpPr>
-        <dsp:cNvPr id="0" name=""/>
-        <dsp:cNvSpPr/>
-      </dsp:nvSpPr>
-      <dsp:spPr>
-        <a:xfrm rot="5400000">
-          <a:off x="7251266" y="-1519255"/>
-          <a:ext cx="627509" cy="7120020"/>
-        </a:xfrm>
-        <a:prstGeom prst="round2SameRect">
-          <a:avLst/>
-        </a:prstGeom>
-        <a:solidFill>
-          <a:schemeClr val="accent3">
-            <a:alpha val="90000"/>
-            <a:tint val="40000"/>
-            <a:hueOff val="0"/>
-            <a:satOff val="0"/>
-            <a:lumOff val="0"/>
-            <a:alphaOff val="0"/>
-          </a:schemeClr>
-        </a:solidFill>
-        <a:ln w="6350" cap="flat" cmpd="sng" algn="ctr">
-          <a:solidFill>
-            <a:schemeClr val="accent3">
-              <a:alpha val="90000"/>
-              <a:tint val="40000"/>
-              <a:hueOff val="0"/>
-              <a:satOff val="0"/>
-              <a:lumOff val="0"/>
-              <a:alphaOff val="0"/>
-            </a:schemeClr>
-          </a:solidFill>
-          <a:prstDash val="solid"/>
-          <a:miter lim="800000"/>
-        </a:ln>
-        <a:effectLst/>
-      </dsp:spPr>
-      <dsp:style>
-        <a:lnRef idx="1">
-          <a:scrgbClr r="0" g="0" b="0"/>
-        </a:lnRef>
-        <a:fillRef idx="1">
-          <a:scrgbClr r="0" g="0" b="0"/>
-        </a:fillRef>
-        <a:effectRef idx="2">
-          <a:scrgbClr r="0" g="0" b="0"/>
-        </a:effectRef>
-        <a:fontRef idx="minor"/>
-      </dsp:style>
-      <dsp:txBody>
-        <a:bodyPr spcFirstLastPara="0" vert="horz" wrap="square" lIns="57150" tIns="28575" rIns="57150" bIns="28575" numCol="1" spcCol="1270" anchor="ctr" anchorCtr="0">
-          <a:noAutofit/>
-        </a:bodyPr>
-        <a:lstStyle/>
-        <a:p>
-          <a:pPr marL="114300" lvl="1" indent="-114300" algn="l" defTabSz="666750">
-            <a:lnSpc>
-              <a:spcPct val="100000"/>
-            </a:lnSpc>
-            <a:spcBef>
-              <a:spcPct val="0"/>
-            </a:spcBef>
-            <a:spcAft>
-              <a:spcPct val="15000"/>
-            </a:spcAft>
-            <a:buChar char="•"/>
-          </a:pPr>
-          <a:r>
-            <a:rPr lang="en-US" sz="1500" kern="1200"/>
-            <a:t>Provide users with access to their data and the ability to correct or delete it.</a:t>
-          </a:r>
-        </a:p>
-        <a:p>
-          <a:pPr marL="114300" lvl="1" indent="-114300" algn="l" defTabSz="666750">
-            <a:lnSpc>
-              <a:spcPct val="100000"/>
-            </a:lnSpc>
-            <a:spcBef>
-              <a:spcPct val="0"/>
-            </a:spcBef>
-            <a:spcAft>
-              <a:spcPct val="15000"/>
-            </a:spcAft>
-            <a:buChar char="•"/>
-          </a:pPr>
-          <a:r>
-            <a:rPr lang="en-US" sz="1500" kern="1200"/>
-            <a:t>Enable users to download their data (data portability).</a:t>
-          </a:r>
-        </a:p>
-      </dsp:txBody>
-      <dsp:txXfrm rot="-5400000">
-        <a:off x="4005011" y="1757632"/>
-        <a:ext cx="7089388" cy="566245"/>
-      </dsp:txXfrm>
-    </dsp:sp>
-    <dsp:sp modelId="{7DA18F8B-A9B0-4BE7-AE38-B787D3E8C76B}">
-      <dsp:nvSpPr>
-        <dsp:cNvPr id="0" name=""/>
-        <dsp:cNvSpPr/>
-      </dsp:nvSpPr>
-      <dsp:spPr>
-        <a:xfrm>
-          <a:off x="0" y="1648560"/>
-          <a:ext cx="4005011" cy="784387"/>
-        </a:xfrm>
-        <a:prstGeom prst="roundRect">
-          <a:avLst/>
-        </a:prstGeom>
-        <a:gradFill rotWithShape="0">
-          <a:gsLst>
-            <a:gs pos="0">
-              <a:schemeClr val="accent3">
-                <a:hueOff val="0"/>
-                <a:satOff val="0"/>
-                <a:lumOff val="0"/>
-                <a:alphaOff val="0"/>
-                <a:satMod val="103000"/>
-                <a:lumMod val="102000"/>
-                <a:tint val="94000"/>
-              </a:schemeClr>
-            </a:gs>
-            <a:gs pos="50000">
-              <a:schemeClr val="accent3">
-                <a:hueOff val="0"/>
-                <a:satOff val="0"/>
-                <a:lumOff val="0"/>
-                <a:alphaOff val="0"/>
-                <a:satMod val="110000"/>
-                <a:lumMod val="100000"/>
-                <a:shade val="100000"/>
-              </a:schemeClr>
-            </a:gs>
-            <a:gs pos="100000">
-              <a:schemeClr val="accent3">
-                <a:hueOff val="0"/>
-                <a:satOff val="0"/>
-                <a:lumOff val="0"/>
-                <a:alphaOff val="0"/>
-                <a:lumMod val="99000"/>
-                <a:satMod val="120000"/>
-                <a:shade val="78000"/>
-              </a:schemeClr>
-            </a:gs>
-          </a:gsLst>
-          <a:lin ang="5400000" scaled="0"/>
-        </a:gradFill>
-        <a:ln>
-          <a:noFill/>
-        </a:ln>
-        <a:effectLst>
-          <a:outerShdw blurRad="57150" dist="19050" dir="5400000" algn="ctr" rotWithShape="0">
-            <a:srgbClr val="000000">
-              <a:alpha val="63000"/>
-            </a:srgbClr>
-          </a:outerShdw>
-        </a:effectLst>
-      </dsp:spPr>
-      <dsp:style>
-        <a:lnRef idx="0">
-          <a:scrgbClr r="0" g="0" b="0"/>
-        </a:lnRef>
-        <a:fillRef idx="3">
-          <a:scrgbClr r="0" g="0" b="0"/>
-        </a:fillRef>
-        <a:effectRef idx="3">
-          <a:scrgbClr r="0" g="0" b="0"/>
-        </a:effectRef>
-        <a:fontRef idx="minor">
-          <a:schemeClr val="lt1"/>
-        </a:fontRef>
-      </dsp:style>
-      <dsp:txBody>
-        <a:bodyPr spcFirstLastPara="0" vert="horz" wrap="square" lIns="95250" tIns="47625" rIns="95250" bIns="47625" numCol="1" spcCol="1270" anchor="ctr" anchorCtr="0">
-          <a:noAutofit/>
-        </a:bodyPr>
-        <a:lstStyle/>
-        <a:p>
-          <a:pPr marL="0" lvl="0" indent="0" algn="ctr" defTabSz="1111250">
-            <a:lnSpc>
-              <a:spcPct val="100000"/>
-            </a:lnSpc>
-            <a:spcBef>
-              <a:spcPct val="0"/>
-            </a:spcBef>
-            <a:spcAft>
-              <a:spcPct val="35000"/>
-            </a:spcAft>
-            <a:buNone/>
-          </a:pPr>
-          <a:r>
-            <a:rPr lang="en-US" sz="2500" kern="1200"/>
-            <a:t>User Rights</a:t>
-          </a:r>
-        </a:p>
-      </dsp:txBody>
-      <dsp:txXfrm>
-        <a:off x="38291" y="1686851"/>
-        <a:ext cx="3928429" cy="707805"/>
-      </dsp:txXfrm>
-    </dsp:sp>
-    <dsp:sp modelId="{D7907136-9324-46BD-B380-972E212B479E}">
-      <dsp:nvSpPr>
-        <dsp:cNvPr id="0" name=""/>
-        <dsp:cNvSpPr/>
-      </dsp:nvSpPr>
-      <dsp:spPr>
-        <a:xfrm rot="5400000">
-          <a:off x="7251266" y="-695648"/>
-          <a:ext cx="627509" cy="7120020"/>
-        </a:xfrm>
-        <a:prstGeom prst="round2SameRect">
-          <a:avLst/>
-        </a:prstGeom>
-        <a:solidFill>
-          <a:schemeClr val="accent3">
-            <a:alpha val="90000"/>
-            <a:tint val="40000"/>
-            <a:hueOff val="0"/>
-            <a:satOff val="0"/>
-            <a:lumOff val="0"/>
-            <a:alphaOff val="0"/>
-          </a:schemeClr>
-        </a:solidFill>
-        <a:ln w="6350" cap="flat" cmpd="sng" algn="ctr">
-          <a:solidFill>
-            <a:schemeClr val="accent3">
-              <a:alpha val="90000"/>
-              <a:tint val="40000"/>
-              <a:hueOff val="0"/>
-              <a:satOff val="0"/>
-              <a:lumOff val="0"/>
-              <a:alphaOff val="0"/>
-            </a:schemeClr>
-          </a:solidFill>
-          <a:prstDash val="solid"/>
-          <a:miter lim="800000"/>
-        </a:ln>
-        <a:effectLst/>
-      </dsp:spPr>
-      <dsp:style>
-        <a:lnRef idx="1">
-          <a:scrgbClr r="0" g="0" b="0"/>
-        </a:lnRef>
-        <a:fillRef idx="1">
-          <a:scrgbClr r="0" g="0" b="0"/>
-        </a:fillRef>
-        <a:effectRef idx="2">
-          <a:scrgbClr r="0" g="0" b="0"/>
-        </a:effectRef>
-        <a:fontRef idx="minor"/>
-      </dsp:style>
-      <dsp:txBody>
-        <a:bodyPr spcFirstLastPara="0" vert="horz" wrap="square" lIns="57150" tIns="28575" rIns="57150" bIns="28575" numCol="1" spcCol="1270" anchor="ctr" anchorCtr="0">
-          <a:noAutofit/>
-        </a:bodyPr>
-        <a:lstStyle/>
-        <a:p>
-          <a:pPr marL="114300" lvl="1" indent="-114300" algn="l" defTabSz="666750">
-            <a:lnSpc>
-              <a:spcPct val="100000"/>
-            </a:lnSpc>
-            <a:spcBef>
-              <a:spcPct val="0"/>
-            </a:spcBef>
-            <a:spcAft>
-              <a:spcPct val="15000"/>
-            </a:spcAft>
-            <a:buChar char="•"/>
-          </a:pPr>
-          <a:r>
-            <a:rPr lang="en-US" sz="1500" kern="1200"/>
-            <a:t>Implement strong encryption for data storage and transmission.</a:t>
-          </a:r>
-        </a:p>
-        <a:p>
-          <a:pPr marL="114300" lvl="1" indent="-114300" algn="l" defTabSz="666750">
-            <a:lnSpc>
-              <a:spcPct val="100000"/>
-            </a:lnSpc>
-            <a:spcBef>
-              <a:spcPct val="0"/>
-            </a:spcBef>
-            <a:spcAft>
-              <a:spcPct val="15000"/>
-            </a:spcAft>
-            <a:buChar char="•"/>
-          </a:pPr>
-          <a:r>
-            <a:rPr lang="en-US" sz="1500" kern="1200"/>
-            <a:t>Regularly test and update security protocols.</a:t>
-          </a:r>
-        </a:p>
-      </dsp:txBody>
-      <dsp:txXfrm rot="-5400000">
-        <a:off x="4005011" y="2581239"/>
-        <a:ext cx="7089388" cy="566245"/>
-      </dsp:txXfrm>
-    </dsp:sp>
-    <dsp:sp modelId="{A6475DE5-6358-40C7-A591-0DEAAC3D595F}">
-      <dsp:nvSpPr>
-        <dsp:cNvPr id="0" name=""/>
-        <dsp:cNvSpPr/>
-      </dsp:nvSpPr>
-      <dsp:spPr>
-        <a:xfrm>
-          <a:off x="0" y="2472167"/>
-          <a:ext cx="4005011" cy="784387"/>
-        </a:xfrm>
-        <a:prstGeom prst="roundRect">
-          <a:avLst/>
-        </a:prstGeom>
-        <a:gradFill rotWithShape="0">
-          <a:gsLst>
-            <a:gs pos="0">
-              <a:schemeClr val="accent3">
-                <a:hueOff val="0"/>
-                <a:satOff val="0"/>
-                <a:lumOff val="0"/>
-                <a:alphaOff val="0"/>
-                <a:satMod val="103000"/>
-                <a:lumMod val="102000"/>
-                <a:tint val="94000"/>
-              </a:schemeClr>
-            </a:gs>
-            <a:gs pos="50000">
-              <a:schemeClr val="accent3">
-                <a:hueOff val="0"/>
-                <a:satOff val="0"/>
-                <a:lumOff val="0"/>
-                <a:alphaOff val="0"/>
-                <a:satMod val="110000"/>
-                <a:lumMod val="100000"/>
-                <a:shade val="100000"/>
-              </a:schemeClr>
-            </a:gs>
-            <a:gs pos="100000">
-              <a:schemeClr val="accent3">
-                <a:hueOff val="0"/>
-                <a:satOff val="0"/>
-                <a:lumOff val="0"/>
-                <a:alphaOff val="0"/>
-                <a:lumMod val="99000"/>
-                <a:satMod val="120000"/>
-                <a:shade val="78000"/>
-              </a:schemeClr>
-            </a:gs>
-          </a:gsLst>
-          <a:lin ang="5400000" scaled="0"/>
-        </a:gradFill>
-        <a:ln>
-          <a:noFill/>
-        </a:ln>
-        <a:effectLst>
-          <a:outerShdw blurRad="57150" dist="19050" dir="5400000" algn="ctr" rotWithShape="0">
-            <a:srgbClr val="000000">
-              <a:alpha val="63000"/>
-            </a:srgbClr>
-          </a:outerShdw>
-        </a:effectLst>
-      </dsp:spPr>
-      <dsp:style>
-        <a:lnRef idx="0">
-          <a:scrgbClr r="0" g="0" b="0"/>
-        </a:lnRef>
-        <a:fillRef idx="3">
-          <a:scrgbClr r="0" g="0" b="0"/>
-        </a:fillRef>
-        <a:effectRef idx="3">
-          <a:scrgbClr r="0" g="0" b="0"/>
-        </a:effectRef>
-        <a:fontRef idx="minor">
-          <a:schemeClr val="lt1"/>
-        </a:fontRef>
-      </dsp:style>
-      <dsp:txBody>
-        <a:bodyPr spcFirstLastPara="0" vert="horz" wrap="square" lIns="95250" tIns="47625" rIns="95250" bIns="47625" numCol="1" spcCol="1270" anchor="ctr" anchorCtr="0">
-          <a:noAutofit/>
-        </a:bodyPr>
-        <a:lstStyle/>
-        <a:p>
-          <a:pPr marL="0" lvl="0" indent="0" algn="ctr" defTabSz="1111250">
-            <a:lnSpc>
-              <a:spcPct val="100000"/>
-            </a:lnSpc>
-            <a:spcBef>
-              <a:spcPct val="0"/>
-            </a:spcBef>
-            <a:spcAft>
-              <a:spcPct val="35000"/>
-            </a:spcAft>
-            <a:buNone/>
-          </a:pPr>
-          <a:r>
-            <a:rPr lang="en-US" sz="2500" kern="1200"/>
-            <a:t>Security Measures</a:t>
-          </a:r>
-        </a:p>
-      </dsp:txBody>
-      <dsp:txXfrm>
-        <a:off x="38291" y="2510458"/>
-        <a:ext cx="3928429" cy="707805"/>
-      </dsp:txXfrm>
-    </dsp:sp>
-    <dsp:sp modelId="{4210F9EA-D5C4-4A56-A8E8-4953A4A03790}">
-      <dsp:nvSpPr>
-        <dsp:cNvPr id="0" name=""/>
-        <dsp:cNvSpPr/>
-      </dsp:nvSpPr>
-      <dsp:spPr>
-        <a:xfrm rot="5400000">
-          <a:off x="7251266" y="127957"/>
-          <a:ext cx="627509" cy="7120020"/>
-        </a:xfrm>
-        <a:prstGeom prst="round2SameRect">
-          <a:avLst/>
-        </a:prstGeom>
-        <a:solidFill>
-          <a:schemeClr val="accent3">
-            <a:alpha val="90000"/>
-            <a:tint val="40000"/>
-            <a:hueOff val="0"/>
-            <a:satOff val="0"/>
-            <a:lumOff val="0"/>
-            <a:alphaOff val="0"/>
-          </a:schemeClr>
-        </a:solidFill>
-        <a:ln w="6350" cap="flat" cmpd="sng" algn="ctr">
-          <a:solidFill>
-            <a:schemeClr val="accent3">
-              <a:alpha val="90000"/>
-              <a:tint val="40000"/>
-              <a:hueOff val="0"/>
-              <a:satOff val="0"/>
-              <a:lumOff val="0"/>
-              <a:alphaOff val="0"/>
-            </a:schemeClr>
-          </a:solidFill>
-          <a:prstDash val="solid"/>
-          <a:miter lim="800000"/>
-        </a:ln>
-        <a:effectLst/>
-      </dsp:spPr>
-      <dsp:style>
-        <a:lnRef idx="1">
-          <a:scrgbClr r="0" g="0" b="0"/>
-        </a:lnRef>
-        <a:fillRef idx="1">
-          <a:scrgbClr r="0" g="0" b="0"/>
-        </a:fillRef>
-        <a:effectRef idx="2">
-          <a:scrgbClr r="0" g="0" b="0"/>
-        </a:effectRef>
-        <a:fontRef idx="minor"/>
-      </dsp:style>
-      <dsp:txBody>
-        <a:bodyPr spcFirstLastPara="0" vert="horz" wrap="square" lIns="57150" tIns="28575" rIns="57150" bIns="28575" numCol="1" spcCol="1270" anchor="ctr" anchorCtr="0">
-          <a:noAutofit/>
-        </a:bodyPr>
-        <a:lstStyle/>
-        <a:p>
-          <a:pPr marL="114300" lvl="1" indent="-114300" algn="l" defTabSz="666750">
-            <a:lnSpc>
-              <a:spcPct val="100000"/>
-            </a:lnSpc>
-            <a:spcBef>
-              <a:spcPct val="0"/>
-            </a:spcBef>
-            <a:spcAft>
-              <a:spcPct val="15000"/>
-            </a:spcAft>
-            <a:buChar char="•"/>
-          </a:pPr>
-          <a:r>
-            <a:rPr lang="en-US" sz="1500" kern="1200"/>
-            <a:t>Notify authorities and affected users within 72hrs of data breach.</a:t>
-          </a:r>
-        </a:p>
-      </dsp:txBody>
-      <dsp:txXfrm rot="-5400000">
-        <a:off x="4005011" y="3404844"/>
-        <a:ext cx="7089388" cy="566245"/>
-      </dsp:txXfrm>
-    </dsp:sp>
-    <dsp:sp modelId="{D961C21F-CAF6-4346-8B26-44D0AC1C1B0A}">
-      <dsp:nvSpPr>
-        <dsp:cNvPr id="0" name=""/>
-        <dsp:cNvSpPr/>
-      </dsp:nvSpPr>
-      <dsp:spPr>
-        <a:xfrm>
-          <a:off x="0" y="3295774"/>
-          <a:ext cx="4005011" cy="784387"/>
-        </a:xfrm>
-        <a:prstGeom prst="roundRect">
-          <a:avLst/>
-        </a:prstGeom>
-        <a:gradFill rotWithShape="0">
-          <a:gsLst>
-            <a:gs pos="0">
-              <a:schemeClr val="accent3">
-                <a:hueOff val="0"/>
-                <a:satOff val="0"/>
-                <a:lumOff val="0"/>
-                <a:alphaOff val="0"/>
-                <a:satMod val="103000"/>
-                <a:lumMod val="102000"/>
-                <a:tint val="94000"/>
-              </a:schemeClr>
-            </a:gs>
-            <a:gs pos="50000">
-              <a:schemeClr val="accent3">
-                <a:hueOff val="0"/>
-                <a:satOff val="0"/>
-                <a:lumOff val="0"/>
-                <a:alphaOff val="0"/>
-                <a:satMod val="110000"/>
-                <a:lumMod val="100000"/>
-                <a:shade val="100000"/>
-              </a:schemeClr>
-            </a:gs>
-            <a:gs pos="100000">
-              <a:schemeClr val="accent3">
-                <a:hueOff val="0"/>
-                <a:satOff val="0"/>
-                <a:lumOff val="0"/>
-                <a:alphaOff val="0"/>
-                <a:lumMod val="99000"/>
-                <a:satMod val="120000"/>
-                <a:shade val="78000"/>
-              </a:schemeClr>
-            </a:gs>
-          </a:gsLst>
-          <a:lin ang="5400000" scaled="0"/>
-        </a:gradFill>
-        <a:ln>
-          <a:noFill/>
-        </a:ln>
-        <a:effectLst>
-          <a:outerShdw blurRad="57150" dist="19050" dir="5400000" algn="ctr" rotWithShape="0">
-            <a:srgbClr val="000000">
-              <a:alpha val="63000"/>
-            </a:srgbClr>
-          </a:outerShdw>
-        </a:effectLst>
-      </dsp:spPr>
-      <dsp:style>
-        <a:lnRef idx="0">
-          <a:scrgbClr r="0" g="0" b="0"/>
-        </a:lnRef>
-        <a:fillRef idx="3">
-          <a:scrgbClr r="0" g="0" b="0"/>
-        </a:fillRef>
-        <a:effectRef idx="3">
-          <a:scrgbClr r="0" g="0" b="0"/>
-        </a:effectRef>
-        <a:fontRef idx="minor">
-          <a:schemeClr val="lt1"/>
-        </a:fontRef>
-      </dsp:style>
-      <dsp:txBody>
-        <a:bodyPr spcFirstLastPara="0" vert="horz" wrap="square" lIns="95250" tIns="47625" rIns="95250" bIns="47625" numCol="1" spcCol="1270" anchor="ctr" anchorCtr="0">
-          <a:noAutofit/>
-        </a:bodyPr>
-        <a:lstStyle/>
-        <a:p>
-          <a:pPr marL="0" lvl="0" indent="0" algn="ctr" defTabSz="1111250">
-            <a:lnSpc>
-              <a:spcPct val="100000"/>
-            </a:lnSpc>
-            <a:spcBef>
-              <a:spcPct val="0"/>
-            </a:spcBef>
-            <a:spcAft>
-              <a:spcPct val="35000"/>
-            </a:spcAft>
-            <a:buNone/>
-          </a:pPr>
-          <a:r>
-            <a:rPr lang="en-US" sz="2500" kern="1200"/>
-            <a:t>Data Breach Notification</a:t>
-          </a:r>
-        </a:p>
-      </dsp:txBody>
-      <dsp:txXfrm>
-        <a:off x="38291" y="3334065"/>
-        <a:ext cx="3928429" cy="707805"/>
-      </dsp:txXfrm>
-    </dsp:sp>
-    <dsp:sp modelId="{1BF3A97A-1DBE-46F2-9C55-4863710F64A4}">
-      <dsp:nvSpPr>
-        <dsp:cNvPr id="0" name=""/>
-        <dsp:cNvSpPr/>
-      </dsp:nvSpPr>
-      <dsp:spPr>
-        <a:xfrm rot="5400000">
-          <a:off x="7251266" y="951564"/>
-          <a:ext cx="627509" cy="7120020"/>
-        </a:xfrm>
-        <a:prstGeom prst="round2SameRect">
-          <a:avLst/>
-        </a:prstGeom>
-        <a:solidFill>
-          <a:schemeClr val="accent3">
-            <a:alpha val="90000"/>
-            <a:tint val="40000"/>
-            <a:hueOff val="0"/>
-            <a:satOff val="0"/>
-            <a:lumOff val="0"/>
-            <a:alphaOff val="0"/>
-          </a:schemeClr>
-        </a:solidFill>
-        <a:ln w="6350" cap="flat" cmpd="sng" algn="ctr">
-          <a:solidFill>
-            <a:schemeClr val="accent3">
-              <a:alpha val="90000"/>
-              <a:tint val="40000"/>
-              <a:hueOff val="0"/>
-              <a:satOff val="0"/>
-              <a:lumOff val="0"/>
-              <a:alphaOff val="0"/>
-            </a:schemeClr>
-          </a:solidFill>
-          <a:prstDash val="solid"/>
-          <a:miter lim="800000"/>
-        </a:ln>
-        <a:effectLst/>
-      </dsp:spPr>
-      <dsp:style>
-        <a:lnRef idx="1">
-          <a:scrgbClr r="0" g="0" b="0"/>
-        </a:lnRef>
-        <a:fillRef idx="1">
-          <a:scrgbClr r="0" g="0" b="0"/>
-        </a:fillRef>
-        <a:effectRef idx="2">
-          <a:scrgbClr r="0" g="0" b="0"/>
-        </a:effectRef>
-        <a:fontRef idx="minor"/>
-      </dsp:style>
-      <dsp:txBody>
-        <a:bodyPr spcFirstLastPara="0" vert="horz" wrap="square" lIns="57150" tIns="28575" rIns="57150" bIns="28575" numCol="1" spcCol="1270" anchor="ctr" anchorCtr="0">
-          <a:noAutofit/>
-        </a:bodyPr>
-        <a:lstStyle/>
-        <a:p>
-          <a:pPr marL="114300" lvl="1" indent="-114300" algn="l" defTabSz="666750">
-            <a:lnSpc>
-              <a:spcPct val="100000"/>
-            </a:lnSpc>
-            <a:spcBef>
-              <a:spcPct val="0"/>
-            </a:spcBef>
-            <a:spcAft>
-              <a:spcPct val="15000"/>
-            </a:spcAft>
-            <a:buChar char="•"/>
-          </a:pPr>
-          <a:r>
-            <a:rPr lang="en-US" sz="1500" kern="1200"/>
-            <a:t>Ensure all partners and vendors comply with GDPR standards.</a:t>
-          </a:r>
-        </a:p>
-      </dsp:txBody>
-      <dsp:txXfrm rot="-5400000">
-        <a:off x="4005011" y="4228451"/>
-        <a:ext cx="7089388" cy="566245"/>
-      </dsp:txXfrm>
-    </dsp:sp>
-    <dsp:sp modelId="{170B5681-4DF3-4802-9072-AAD83CDC0678}">
-      <dsp:nvSpPr>
-        <dsp:cNvPr id="0" name=""/>
-        <dsp:cNvSpPr/>
-      </dsp:nvSpPr>
-      <dsp:spPr>
-        <a:xfrm>
-          <a:off x="0" y="4119381"/>
-          <a:ext cx="4005011" cy="784387"/>
-        </a:xfrm>
-        <a:prstGeom prst="roundRect">
-          <a:avLst/>
-        </a:prstGeom>
-        <a:gradFill rotWithShape="0">
-          <a:gsLst>
-            <a:gs pos="0">
-              <a:schemeClr val="accent3">
-                <a:hueOff val="0"/>
-                <a:satOff val="0"/>
-                <a:lumOff val="0"/>
-                <a:alphaOff val="0"/>
-                <a:satMod val="103000"/>
-                <a:lumMod val="102000"/>
-                <a:tint val="94000"/>
-              </a:schemeClr>
-            </a:gs>
-            <a:gs pos="50000">
-              <a:schemeClr val="accent3">
-                <a:hueOff val="0"/>
-                <a:satOff val="0"/>
-                <a:lumOff val="0"/>
-                <a:alphaOff val="0"/>
-                <a:satMod val="110000"/>
-                <a:lumMod val="100000"/>
-                <a:shade val="100000"/>
-              </a:schemeClr>
-            </a:gs>
-            <a:gs pos="100000">
-              <a:schemeClr val="accent3">
-                <a:hueOff val="0"/>
-                <a:satOff val="0"/>
-                <a:lumOff val="0"/>
-                <a:alphaOff val="0"/>
-                <a:lumMod val="99000"/>
-                <a:satMod val="120000"/>
-                <a:shade val="78000"/>
-              </a:schemeClr>
-            </a:gs>
-          </a:gsLst>
-          <a:lin ang="5400000" scaled="0"/>
-        </a:gradFill>
-        <a:ln>
-          <a:noFill/>
-        </a:ln>
-        <a:effectLst>
-          <a:outerShdw blurRad="57150" dist="19050" dir="5400000" algn="ctr" rotWithShape="0">
-            <a:srgbClr val="000000">
-              <a:alpha val="63000"/>
-            </a:srgbClr>
-          </a:outerShdw>
-        </a:effectLst>
-      </dsp:spPr>
-      <dsp:style>
-        <a:lnRef idx="0">
-          <a:scrgbClr r="0" g="0" b="0"/>
-        </a:lnRef>
-        <a:fillRef idx="3">
-          <a:scrgbClr r="0" g="0" b="0"/>
-        </a:fillRef>
-        <a:effectRef idx="3">
-          <a:scrgbClr r="0" g="0" b="0"/>
-        </a:effectRef>
-        <a:fontRef idx="minor">
-          <a:schemeClr val="lt1"/>
-        </a:fontRef>
-      </dsp:style>
-      <dsp:txBody>
-        <a:bodyPr spcFirstLastPara="0" vert="horz" wrap="square" lIns="95250" tIns="47625" rIns="95250" bIns="47625" numCol="1" spcCol="1270" anchor="ctr" anchorCtr="0">
-          <a:noAutofit/>
-        </a:bodyPr>
-        <a:lstStyle/>
-        <a:p>
-          <a:pPr marL="0" lvl="0" indent="0" algn="ctr" defTabSz="1111250">
-            <a:lnSpc>
-              <a:spcPct val="100000"/>
-            </a:lnSpc>
-            <a:spcBef>
-              <a:spcPct val="0"/>
-            </a:spcBef>
-            <a:spcAft>
-              <a:spcPct val="35000"/>
-            </a:spcAft>
-            <a:buNone/>
-          </a:pPr>
-          <a:r>
-            <a:rPr lang="en-US" sz="2500" kern="1200"/>
-            <a:t>Third-Party Compliance</a:t>
-          </a:r>
-        </a:p>
-      </dsp:txBody>
-      <dsp:txXfrm>
-        <a:off x="38291" y="4157672"/>
-        <a:ext cx="3928429" cy="707805"/>
-      </dsp:txXfrm>
-    </dsp:sp>
-  </dsp:spTree>
-</dsp:drawing>
-</file>
-
-<file path=ppt/diagrams/drawing5.xml><?xml version="1.0" encoding="utf-8"?>
 <dsp:drawing xmlns:dgm="http://schemas.openxmlformats.org/drawingml/2006/diagram" xmlns:dsp="http://schemas.microsoft.com/office/drawing/2008/diagram" xmlns:a="http://schemas.openxmlformats.org/drawingml/2006/main">
   <dsp:spTree>
     <dsp:nvGrpSpPr>
@@ -10590,239 +7758,6 @@
 </file>
 
 <file path=ppt/diagrams/layout4.xml><?xml version="1.0" encoding="utf-8"?>
-<dgm:layoutDef xmlns:dgm="http://schemas.openxmlformats.org/drawingml/2006/diagram" xmlns:a="http://schemas.openxmlformats.org/drawingml/2006/main" uniqueId="urn:microsoft.com/office/officeart/2005/8/layout/vList5">
-  <dgm:title val=""/>
-  <dgm:desc val=""/>
-  <dgm:catLst>
-    <dgm:cat type="list" pri="15000"/>
-    <dgm:cat type="convert" pri="2000"/>
-  </dgm:catLst>
-  <dgm:sampData>
-    <dgm:dataModel>
-      <dgm:ptLst>
-        <dgm:pt modelId="0" type="doc"/>
-        <dgm:pt modelId="1">
-          <dgm:prSet phldr="1"/>
-        </dgm:pt>
-        <dgm:pt modelId="11">
-          <dgm:prSet phldr="1"/>
-        </dgm:pt>
-        <dgm:pt modelId="12">
-          <dgm:prSet phldr="1"/>
-        </dgm:pt>
-        <dgm:pt modelId="2">
-          <dgm:prSet phldr="1"/>
-        </dgm:pt>
-        <dgm:pt modelId="21">
-          <dgm:prSet phldr="1"/>
-        </dgm:pt>
-        <dgm:pt modelId="22">
-          <dgm:prSet phldr="1"/>
-        </dgm:pt>
-        <dgm:pt modelId="3">
-          <dgm:prSet phldr="1"/>
-        </dgm:pt>
-        <dgm:pt modelId="31">
-          <dgm:prSet phldr="1"/>
-        </dgm:pt>
-        <dgm:pt modelId="32">
-          <dgm:prSet phldr="1"/>
-        </dgm:pt>
-      </dgm:ptLst>
-      <dgm:cxnLst>
-        <dgm:cxn modelId="4" srcId="0" destId="1" srcOrd="0" destOrd="0"/>
-        <dgm:cxn modelId="5" srcId="0" destId="2" srcOrd="1" destOrd="0"/>
-        <dgm:cxn modelId="6" srcId="0" destId="3" srcOrd="2" destOrd="0"/>
-        <dgm:cxn modelId="13" srcId="1" destId="11" srcOrd="0" destOrd="0"/>
-        <dgm:cxn modelId="14" srcId="1" destId="12" srcOrd="1" destOrd="0"/>
-        <dgm:cxn modelId="23" srcId="2" destId="21" srcOrd="0" destOrd="0"/>
-        <dgm:cxn modelId="24" srcId="2" destId="22" srcOrd="1" destOrd="0"/>
-        <dgm:cxn modelId="33" srcId="3" destId="31" srcOrd="0" destOrd="0"/>
-        <dgm:cxn modelId="34" srcId="3" destId="32" srcOrd="1" destOrd="0"/>
-      </dgm:cxnLst>
-      <dgm:bg/>
-      <dgm:whole/>
-    </dgm:dataModel>
-  </dgm:sampData>
-  <dgm:styleData>
-    <dgm:dataModel>
-      <dgm:ptLst>
-        <dgm:pt modelId="0" type="doc"/>
-        <dgm:pt modelId="1"/>
-        <dgm:pt modelId="11"/>
-        <dgm:pt modelId="2"/>
-        <dgm:pt modelId="21"/>
-      </dgm:ptLst>
-      <dgm:cxnLst>
-        <dgm:cxn modelId="4" srcId="0" destId="1" srcOrd="0" destOrd="0"/>
-        <dgm:cxn modelId="5" srcId="0" destId="2" srcOrd="1" destOrd="0"/>
-        <dgm:cxn modelId="13" srcId="1" destId="11" srcOrd="0" destOrd="0"/>
-        <dgm:cxn modelId="23" srcId="2" destId="21" srcOrd="0" destOrd="0"/>
-      </dgm:cxnLst>
-      <dgm:bg/>
-      <dgm:whole/>
-    </dgm:dataModel>
-  </dgm:styleData>
-  <dgm:clrData>
-    <dgm:dataModel>
-      <dgm:ptLst>
-        <dgm:pt modelId="0" type="doc"/>
-        <dgm:pt modelId="1"/>
-        <dgm:pt modelId="11"/>
-        <dgm:pt modelId="2"/>
-        <dgm:pt modelId="21"/>
-        <dgm:pt modelId="3"/>
-        <dgm:pt modelId="31"/>
-        <dgm:pt modelId="4"/>
-        <dgm:pt modelId="41"/>
-      </dgm:ptLst>
-      <dgm:cxnLst>
-        <dgm:cxn modelId="5" srcId="0" destId="1" srcOrd="0" destOrd="0"/>
-        <dgm:cxn modelId="6" srcId="0" destId="2" srcOrd="1" destOrd="0"/>
-        <dgm:cxn modelId="7" srcId="0" destId="3" srcOrd="2" destOrd="0"/>
-        <dgm:cxn modelId="8" srcId="0" destId="4" srcOrd="3" destOrd="0"/>
-        <dgm:cxn modelId="13" srcId="1" destId="11" srcOrd="0" destOrd="0"/>
-        <dgm:cxn modelId="23" srcId="2" destId="21" srcOrd="0" destOrd="0"/>
-        <dgm:cxn modelId="33" srcId="3" destId="31" srcOrd="0" destOrd="0"/>
-        <dgm:cxn modelId="43" srcId="4" destId="41" srcOrd="0" destOrd="0"/>
-      </dgm:cxnLst>
-      <dgm:bg/>
-      <dgm:whole/>
-    </dgm:dataModel>
-  </dgm:clrData>
-  <dgm:layoutNode name="Name0">
-    <dgm:varLst>
-      <dgm:dir/>
-      <dgm:animLvl val="lvl"/>
-      <dgm:resizeHandles val="exact"/>
-    </dgm:varLst>
-    <dgm:choose name="Name1">
-      <dgm:if name="Name2" func="var" arg="dir" op="equ" val="norm">
-        <dgm:alg type="lin">
-          <dgm:param type="linDir" val="fromT"/>
-          <dgm:param type="nodeHorzAlign" val="l"/>
-        </dgm:alg>
-      </dgm:if>
-      <dgm:else name="Name3">
-        <dgm:alg type="lin">
-          <dgm:param type="linDir" val="fromT"/>
-          <dgm:param type="nodeHorzAlign" val="r"/>
-        </dgm:alg>
-      </dgm:else>
-    </dgm:choose>
-    <dgm:shape xmlns:r="http://schemas.openxmlformats.org/officeDocument/2006/relationships" r:blip="">
-      <dgm:adjLst/>
-    </dgm:shape>
-    <dgm:presOf/>
-    <dgm:constrLst>
-      <dgm:constr type="h" for="ch" forName="linNode" refType="h"/>
-      <dgm:constr type="w" for="ch" forName="linNode" refType="w"/>
-      <dgm:constr type="h" for="ch" forName="sp" refType="h" fact="0.05"/>
-      <dgm:constr type="primFontSz" for="des" forName="parentText" op="equ" val="65"/>
-      <dgm:constr type="secFontSz" for="des" forName="descendantText" op="equ"/>
-    </dgm:constrLst>
-    <dgm:ruleLst/>
-    <dgm:forEach name="Name4" axis="ch" ptType="node">
-      <dgm:layoutNode name="linNode">
-        <dgm:choose name="Name5">
-          <dgm:if name="Name6" func="var" arg="dir" op="equ" val="norm">
-            <dgm:alg type="lin">
-              <dgm:param type="linDir" val="fromL"/>
-            </dgm:alg>
-          </dgm:if>
-          <dgm:else name="Name7">
-            <dgm:alg type="lin">
-              <dgm:param type="linDir" val="fromR"/>
-            </dgm:alg>
-          </dgm:else>
-        </dgm:choose>
-        <dgm:shape xmlns:r="http://schemas.openxmlformats.org/officeDocument/2006/relationships" r:blip="">
-          <dgm:adjLst/>
-        </dgm:shape>
-        <dgm:presOf/>
-        <dgm:constrLst>
-          <dgm:constr type="w" for="ch" forName="parentText" refType="w" fact="0.36"/>
-          <dgm:constr type="w" for="ch" forName="descendantText" refType="w" fact="0.64"/>
-          <dgm:constr type="h" for="ch" forName="parentText" refType="h"/>
-          <dgm:constr type="h" for="ch" forName="descendantText" refType="h" refFor="ch" refForName="parentText" fact="0.8"/>
-        </dgm:constrLst>
-        <dgm:ruleLst/>
-        <dgm:layoutNode name="parentText">
-          <dgm:varLst>
-            <dgm:chMax val="1"/>
-            <dgm:bulletEnabled val="1"/>
-          </dgm:varLst>
-          <dgm:alg type="tx"/>
-          <dgm:shape xmlns:r="http://schemas.openxmlformats.org/officeDocument/2006/relationships" type="roundRect" r:blip="" zOrderOff="3">
-            <dgm:adjLst/>
-          </dgm:shape>
-          <dgm:presOf axis="self" ptType="node"/>
-          <dgm:constrLst>
-            <dgm:constr type="tMarg" refType="primFontSz" fact="0.15"/>
-            <dgm:constr type="bMarg" refType="primFontSz" fact="0.15"/>
-            <dgm:constr type="lMarg" refType="primFontSz" fact="0.3"/>
-            <dgm:constr type="rMarg" refType="primFontSz" fact="0.3"/>
-          </dgm:constrLst>
-          <dgm:ruleLst>
-            <dgm:rule type="primFontSz" val="5" fact="NaN" max="NaN"/>
-          </dgm:ruleLst>
-        </dgm:layoutNode>
-        <dgm:choose name="Name8">
-          <dgm:if name="Name9" axis="ch" ptType="node" func="cnt" op="gte" val="1">
-            <dgm:layoutNode name="descendantText" styleLbl="alignAccFollowNode1">
-              <dgm:varLst>
-                <dgm:bulletEnabled val="1"/>
-              </dgm:varLst>
-              <dgm:alg type="tx">
-                <dgm:param type="stBulletLvl" val="1"/>
-                <dgm:param type="txAnchorVertCh" val="mid"/>
-              </dgm:alg>
-              <dgm:choose name="Name10">
-                <dgm:if name="Name11" func="var" arg="dir" op="equ" val="norm">
-                  <dgm:shape xmlns:r="http://schemas.openxmlformats.org/officeDocument/2006/relationships" rot="90" type="round2SameRect" r:blip="">
-                    <dgm:adjLst/>
-                  </dgm:shape>
-                </dgm:if>
-                <dgm:else name="Name12">
-                  <dgm:shape xmlns:r="http://schemas.openxmlformats.org/officeDocument/2006/relationships" rot="-90" type="round2SameRect" r:blip="">
-                    <dgm:adjLst/>
-                  </dgm:shape>
-                </dgm:else>
-              </dgm:choose>
-              <dgm:presOf axis="des" ptType="node"/>
-              <dgm:constrLst>
-                <dgm:constr type="secFontSz" val="65"/>
-                <dgm:constr type="primFontSz" refType="secFontSz"/>
-                <dgm:constr type="lMarg" refType="secFontSz" fact="0.3"/>
-                <dgm:constr type="rMarg" refType="secFontSz" fact="0.3"/>
-                <dgm:constr type="tMarg" refType="secFontSz" fact="0.15"/>
-                <dgm:constr type="bMarg" refType="secFontSz" fact="0.15"/>
-              </dgm:constrLst>
-              <dgm:ruleLst>
-                <dgm:rule type="secFontSz" val="5" fact="NaN" max="NaN"/>
-              </dgm:ruleLst>
-            </dgm:layoutNode>
-          </dgm:if>
-          <dgm:else name="Name13"/>
-        </dgm:choose>
-      </dgm:layoutNode>
-      <dgm:forEach name="Name14" axis="followSib" ptType="sibTrans" cnt="1">
-        <dgm:layoutNode name="sp">
-          <dgm:alg type="sp"/>
-          <dgm:shape xmlns:r="http://schemas.openxmlformats.org/officeDocument/2006/relationships" r:blip="">
-            <dgm:adjLst/>
-          </dgm:shape>
-          <dgm:presOf/>
-          <dgm:constrLst/>
-          <dgm:ruleLst/>
-        </dgm:layoutNode>
-      </dgm:forEach>
-    </dgm:forEach>
-  </dgm:layoutNode>
-</dgm:layoutDef>
-</file>
-
-<file path=ppt/diagrams/layout5.xml><?xml version="1.0" encoding="utf-8"?>
 <dgm:layoutDef xmlns:dgm="http://schemas.openxmlformats.org/drawingml/2006/diagram" xmlns:a="http://schemas.openxmlformats.org/drawingml/2006/main" uniqueId="urn:microsoft.com/office/officeart/2024/3/layout/hArchList1">
   <dgm:title val="Horizontal Text Blocks"/>
   <dgm:desc val="Short bits of text with formatted headers. Use as an easier-to-read alternative to a bulleted list."/>
@@ -14148,1040 +11083,6 @@
 </file>
 
 <file path=ppt/diagrams/quickStyle4.xml><?xml version="1.0" encoding="utf-8"?>
-<dgm:styleDef xmlns:dgm="http://schemas.openxmlformats.org/drawingml/2006/diagram" xmlns:a="http://schemas.openxmlformats.org/drawingml/2006/main" uniqueId="urn:microsoft.com/office/officeart/2005/8/quickstyle/simple5">
-  <dgm:title val=""/>
-  <dgm:desc val=""/>
-  <dgm:catLst>
-    <dgm:cat type="simple" pri="10500"/>
-  </dgm:catLst>
-  <dgm:scene3d>
-    <a:camera prst="orthographicFront"/>
-    <a:lightRig rig="threePt" dir="t"/>
-  </dgm:scene3d>
-  <dgm:styleLbl name="node0">
-    <dgm:scene3d>
-      <a:camera prst="orthographicFront"/>
-      <a:lightRig rig="threePt" dir="t"/>
-    </dgm:scene3d>
-    <dgm:sp3d/>
-    <dgm:txPr/>
-    <dgm:style>
-      <a:lnRef idx="0">
-        <a:scrgbClr r="0" g="0" b="0"/>
-      </a:lnRef>
-      <a:fillRef idx="3">
-        <a:scrgbClr r="0" g="0" b="0"/>
-      </a:fillRef>
-      <a:effectRef idx="3">
-        <a:scrgbClr r="0" g="0" b="0"/>
-      </a:effectRef>
-      <a:fontRef idx="minor">
-        <a:schemeClr val="lt1"/>
-      </a:fontRef>
-    </dgm:style>
-  </dgm:styleLbl>
-  <dgm:styleLbl name="lnNode1">
-    <dgm:scene3d>
-      <a:camera prst="orthographicFront"/>
-      <a:lightRig rig="threePt" dir="t"/>
-    </dgm:scene3d>
-    <dgm:sp3d/>
-    <dgm:txPr/>
-    <dgm:style>
-      <a:lnRef idx="0">
-        <a:scrgbClr r="0" g="0" b="0"/>
-      </a:lnRef>
-      <a:fillRef idx="3">
-        <a:scrgbClr r="0" g="0" b="0"/>
-      </a:fillRef>
-      <a:effectRef idx="3">
-        <a:scrgbClr r="0" g="0" b="0"/>
-      </a:effectRef>
-      <a:fontRef idx="minor">
-        <a:schemeClr val="lt1"/>
-      </a:fontRef>
-    </dgm:style>
-  </dgm:styleLbl>
-  <dgm:styleLbl name="vennNode1">
-    <dgm:scene3d>
-      <a:camera prst="orthographicFront"/>
-      <a:lightRig rig="threePt" dir="t"/>
-    </dgm:scene3d>
-    <dgm:sp3d/>
-    <dgm:txPr/>
-    <dgm:style>
-      <a:lnRef idx="0">
-        <a:scrgbClr r="0" g="0" b="0"/>
-      </a:lnRef>
-      <a:fillRef idx="3">
-        <a:scrgbClr r="0" g="0" b="0"/>
-      </a:fillRef>
-      <a:effectRef idx="3">
-        <a:scrgbClr r="0" g="0" b="0"/>
-      </a:effectRef>
-      <a:fontRef idx="minor">
-        <a:schemeClr val="tx1"/>
-      </a:fontRef>
-    </dgm:style>
-  </dgm:styleLbl>
-  <dgm:styleLbl name="alignNode1">
-    <dgm:scene3d>
-      <a:camera prst="orthographicFront"/>
-      <a:lightRig rig="threePt" dir="t"/>
-    </dgm:scene3d>
-    <dgm:sp3d/>
-    <dgm:txPr/>
-    <dgm:style>
-      <a:lnRef idx="1">
-        <a:scrgbClr r="0" g="0" b="0"/>
-      </a:lnRef>
-      <a:fillRef idx="3">
-        <a:scrgbClr r="0" g="0" b="0"/>
-      </a:fillRef>
-      <a:effectRef idx="3">
-        <a:scrgbClr r="0" g="0" b="0"/>
-      </a:effectRef>
-      <a:fontRef idx="minor">
-        <a:schemeClr val="lt1"/>
-      </a:fontRef>
-    </dgm:style>
-  </dgm:styleLbl>
-  <dgm:styleLbl name="node1">
-    <dgm:scene3d>
-      <a:camera prst="orthographicFront"/>
-      <a:lightRig rig="threePt" dir="t"/>
-    </dgm:scene3d>
-    <dgm:sp3d/>
-    <dgm:txPr/>
-    <dgm:style>
-      <a:lnRef idx="0">
-        <a:scrgbClr r="0" g="0" b="0"/>
-      </a:lnRef>
-      <a:fillRef idx="3">
-        <a:scrgbClr r="0" g="0" b="0"/>
-      </a:fillRef>
-      <a:effectRef idx="3">
-        <a:scrgbClr r="0" g="0" b="0"/>
-      </a:effectRef>
-      <a:fontRef idx="minor">
-        <a:schemeClr val="lt1"/>
-      </a:fontRef>
-    </dgm:style>
-  </dgm:styleLbl>
-  <dgm:styleLbl name="node2">
-    <dgm:scene3d>
-      <a:camera prst="orthographicFront"/>
-      <a:lightRig rig="threePt" dir="t"/>
-    </dgm:scene3d>
-    <dgm:sp3d/>
-    <dgm:txPr/>
-    <dgm:style>
-      <a:lnRef idx="0">
-        <a:scrgbClr r="0" g="0" b="0"/>
-      </a:lnRef>
-      <a:fillRef idx="3">
-        <a:scrgbClr r="0" g="0" b="0"/>
-      </a:fillRef>
-      <a:effectRef idx="3">
-        <a:scrgbClr r="0" g="0" b="0"/>
-      </a:effectRef>
-      <a:fontRef idx="minor">
-        <a:schemeClr val="lt1"/>
-      </a:fontRef>
-    </dgm:style>
-  </dgm:styleLbl>
-  <dgm:styleLbl name="node3">
-    <dgm:scene3d>
-      <a:camera prst="orthographicFront"/>
-      <a:lightRig rig="threePt" dir="t"/>
-    </dgm:scene3d>
-    <dgm:sp3d/>
-    <dgm:txPr/>
-    <dgm:style>
-      <a:lnRef idx="0">
-        <a:scrgbClr r="0" g="0" b="0"/>
-      </a:lnRef>
-      <a:fillRef idx="3">
-        <a:scrgbClr r="0" g="0" b="0"/>
-      </a:fillRef>
-      <a:effectRef idx="3">
-        <a:scrgbClr r="0" g="0" b="0"/>
-      </a:effectRef>
-      <a:fontRef idx="minor">
-        <a:schemeClr val="lt1"/>
-      </a:fontRef>
-    </dgm:style>
-  </dgm:styleLbl>
-  <dgm:styleLbl name="node4">
-    <dgm:scene3d>
-      <a:camera prst="orthographicFront"/>
-      <a:lightRig rig="threePt" dir="t"/>
-    </dgm:scene3d>
-    <dgm:sp3d/>
-    <dgm:txPr/>
-    <dgm:style>
-      <a:lnRef idx="0">
-        <a:scrgbClr r="0" g="0" b="0"/>
-      </a:lnRef>
-      <a:fillRef idx="3">
-        <a:scrgbClr r="0" g="0" b="0"/>
-      </a:fillRef>
-      <a:effectRef idx="3">
-        <a:scrgbClr r="0" g="0" b="0"/>
-      </a:effectRef>
-      <a:fontRef idx="minor">
-        <a:schemeClr val="lt1"/>
-      </a:fontRef>
-    </dgm:style>
-  </dgm:styleLbl>
-  <dgm:styleLbl name="fgImgPlace1">
-    <dgm:scene3d>
-      <a:camera prst="orthographicFront"/>
-      <a:lightRig rig="threePt" dir="t"/>
-    </dgm:scene3d>
-    <dgm:sp3d/>
-    <dgm:txPr/>
-    <dgm:style>
-      <a:lnRef idx="0">
-        <a:scrgbClr r="0" g="0" b="0"/>
-      </a:lnRef>
-      <a:fillRef idx="1">
-        <a:scrgbClr r="0" g="0" b="0"/>
-      </a:fillRef>
-      <a:effectRef idx="3">
-        <a:scrgbClr r="0" g="0" b="0"/>
-      </a:effectRef>
-      <a:fontRef idx="minor"/>
-    </dgm:style>
-  </dgm:styleLbl>
-  <dgm:styleLbl name="alignImgPlace1">
-    <dgm:scene3d>
-      <a:camera prst="orthographicFront"/>
-      <a:lightRig rig="threePt" dir="t"/>
-    </dgm:scene3d>
-    <dgm:sp3d/>
-    <dgm:txPr/>
-    <dgm:style>
-      <a:lnRef idx="0">
-        <a:scrgbClr r="0" g="0" b="0"/>
-      </a:lnRef>
-      <a:fillRef idx="1">
-        <a:scrgbClr r="0" g="0" b="0"/>
-      </a:fillRef>
-      <a:effectRef idx="3">
-        <a:scrgbClr r="0" g="0" b="0"/>
-      </a:effectRef>
-      <a:fontRef idx="minor"/>
-    </dgm:style>
-  </dgm:styleLbl>
-  <dgm:styleLbl name="bgImgPlace1">
-    <dgm:scene3d>
-      <a:camera prst="orthographicFront"/>
-      <a:lightRig rig="threePt" dir="t"/>
-    </dgm:scene3d>
-    <dgm:sp3d/>
-    <dgm:txPr/>
-    <dgm:style>
-      <a:lnRef idx="0">
-        <a:scrgbClr r="0" g="0" b="0"/>
-      </a:lnRef>
-      <a:fillRef idx="1">
-        <a:scrgbClr r="0" g="0" b="0"/>
-      </a:fillRef>
-      <a:effectRef idx="3">
-        <a:scrgbClr r="0" g="0" b="0"/>
-      </a:effectRef>
-      <a:fontRef idx="minor"/>
-    </dgm:style>
-  </dgm:styleLbl>
-  <dgm:styleLbl name="sibTrans2D1">
-    <dgm:scene3d>
-      <a:camera prst="orthographicFront"/>
-      <a:lightRig rig="threePt" dir="t"/>
-    </dgm:scene3d>
-    <dgm:sp3d/>
-    <dgm:txPr/>
-    <dgm:style>
-      <a:lnRef idx="0">
-        <a:scrgbClr r="0" g="0" b="0"/>
-      </a:lnRef>
-      <a:fillRef idx="3">
-        <a:scrgbClr r="0" g="0" b="0"/>
-      </a:fillRef>
-      <a:effectRef idx="3">
-        <a:scrgbClr r="0" g="0" b="0"/>
-      </a:effectRef>
-      <a:fontRef idx="minor">
-        <a:schemeClr val="lt1"/>
-      </a:fontRef>
-    </dgm:style>
-  </dgm:styleLbl>
-  <dgm:styleLbl name="fgSibTrans2D1">
-    <dgm:scene3d>
-      <a:camera prst="orthographicFront"/>
-      <a:lightRig rig="threePt" dir="t"/>
-    </dgm:scene3d>
-    <dgm:sp3d/>
-    <dgm:txPr/>
-    <dgm:style>
-      <a:lnRef idx="0">
-        <a:scrgbClr r="0" g="0" b="0"/>
-      </a:lnRef>
-      <a:fillRef idx="3">
-        <a:scrgbClr r="0" g="0" b="0"/>
-      </a:fillRef>
-      <a:effectRef idx="3">
-        <a:scrgbClr r="0" g="0" b="0"/>
-      </a:effectRef>
-      <a:fontRef idx="minor">
-        <a:schemeClr val="lt1"/>
-      </a:fontRef>
-    </dgm:style>
-  </dgm:styleLbl>
-  <dgm:styleLbl name="bgSibTrans2D1">
-    <dgm:scene3d>
-      <a:camera prst="orthographicFront"/>
-      <a:lightRig rig="threePt" dir="t"/>
-    </dgm:scene3d>
-    <dgm:sp3d/>
-    <dgm:txPr/>
-    <dgm:style>
-      <a:lnRef idx="0">
-        <a:scrgbClr r="0" g="0" b="0"/>
-      </a:lnRef>
-      <a:fillRef idx="3">
-        <a:scrgbClr r="0" g="0" b="0"/>
-      </a:fillRef>
-      <a:effectRef idx="3">
-        <a:scrgbClr r="0" g="0" b="0"/>
-      </a:effectRef>
-      <a:fontRef idx="minor">
-        <a:schemeClr val="lt1"/>
-      </a:fontRef>
-    </dgm:style>
-  </dgm:styleLbl>
-  <dgm:styleLbl name="sibTrans1D1">
-    <dgm:scene3d>
-      <a:camera prst="orthographicFront"/>
-      <a:lightRig rig="threePt" dir="t"/>
-    </dgm:scene3d>
-    <dgm:sp3d/>
-    <dgm:txPr/>
-    <dgm:style>
-      <a:lnRef idx="1">
-        <a:scrgbClr r="0" g="0" b="0"/>
-      </a:lnRef>
-      <a:fillRef idx="0">
-        <a:scrgbClr r="0" g="0" b="0"/>
-      </a:fillRef>
-      <a:effectRef idx="0">
-        <a:scrgbClr r="0" g="0" b="0"/>
-      </a:effectRef>
-      <a:fontRef idx="minor"/>
-    </dgm:style>
-  </dgm:styleLbl>
-  <dgm:styleLbl name="callout">
-    <dgm:scene3d>
-      <a:camera prst="orthographicFront"/>
-      <a:lightRig rig="threePt" dir="t"/>
-    </dgm:scene3d>
-    <dgm:sp3d/>
-    <dgm:txPr/>
-    <dgm:style>
-      <a:lnRef idx="1">
-        <a:scrgbClr r="0" g="0" b="0"/>
-      </a:lnRef>
-      <a:fillRef idx="0">
-        <a:scrgbClr r="0" g="0" b="0"/>
-      </a:fillRef>
-      <a:effectRef idx="1">
-        <a:scrgbClr r="0" g="0" b="0"/>
-      </a:effectRef>
-      <a:fontRef idx="minor"/>
-    </dgm:style>
-  </dgm:styleLbl>
-  <dgm:styleLbl name="asst0">
-    <dgm:scene3d>
-      <a:camera prst="orthographicFront"/>
-      <a:lightRig rig="threePt" dir="t"/>
-    </dgm:scene3d>
-    <dgm:sp3d/>
-    <dgm:txPr/>
-    <dgm:style>
-      <a:lnRef idx="0">
-        <a:scrgbClr r="0" g="0" b="0"/>
-      </a:lnRef>
-      <a:fillRef idx="3">
-        <a:scrgbClr r="0" g="0" b="0"/>
-      </a:fillRef>
-      <a:effectRef idx="3">
-        <a:scrgbClr r="0" g="0" b="0"/>
-      </a:effectRef>
-      <a:fontRef idx="minor">
-        <a:schemeClr val="lt1"/>
-      </a:fontRef>
-    </dgm:style>
-  </dgm:styleLbl>
-  <dgm:styleLbl name="asst1">
-    <dgm:scene3d>
-      <a:camera prst="orthographicFront"/>
-      <a:lightRig rig="threePt" dir="t"/>
-    </dgm:scene3d>
-    <dgm:sp3d/>
-    <dgm:txPr/>
-    <dgm:style>
-      <a:lnRef idx="0">
-        <a:scrgbClr r="0" g="0" b="0"/>
-      </a:lnRef>
-      <a:fillRef idx="3">
-        <a:scrgbClr r="0" g="0" b="0"/>
-      </a:fillRef>
-      <a:effectRef idx="3">
-        <a:scrgbClr r="0" g="0" b="0"/>
-      </a:effectRef>
-      <a:fontRef idx="minor">
-        <a:schemeClr val="lt1"/>
-      </a:fontRef>
-    </dgm:style>
-  </dgm:styleLbl>
-  <dgm:styleLbl name="asst2">
-    <dgm:scene3d>
-      <a:camera prst="orthographicFront"/>
-      <a:lightRig rig="threePt" dir="t"/>
-    </dgm:scene3d>
-    <dgm:sp3d/>
-    <dgm:txPr/>
-    <dgm:style>
-      <a:lnRef idx="0">
-        <a:scrgbClr r="0" g="0" b="0"/>
-      </a:lnRef>
-      <a:fillRef idx="3">
-        <a:scrgbClr r="0" g="0" b="0"/>
-      </a:fillRef>
-      <a:effectRef idx="3">
-        <a:scrgbClr r="0" g="0" b="0"/>
-      </a:effectRef>
-      <a:fontRef idx="minor">
-        <a:schemeClr val="lt1"/>
-      </a:fontRef>
-    </dgm:style>
-  </dgm:styleLbl>
-  <dgm:styleLbl name="asst3">
-    <dgm:scene3d>
-      <a:camera prst="orthographicFront"/>
-      <a:lightRig rig="threePt" dir="t"/>
-    </dgm:scene3d>
-    <dgm:sp3d/>
-    <dgm:txPr/>
-    <dgm:style>
-      <a:lnRef idx="0">
-        <a:scrgbClr r="0" g="0" b="0"/>
-      </a:lnRef>
-      <a:fillRef idx="3">
-        <a:scrgbClr r="0" g="0" b="0"/>
-      </a:fillRef>
-      <a:effectRef idx="3">
-        <a:scrgbClr r="0" g="0" b="0"/>
-      </a:effectRef>
-      <a:fontRef idx="minor">
-        <a:schemeClr val="lt1"/>
-      </a:fontRef>
-    </dgm:style>
-  </dgm:styleLbl>
-  <dgm:styleLbl name="asst4">
-    <dgm:scene3d>
-      <a:camera prst="orthographicFront"/>
-      <a:lightRig rig="threePt" dir="t"/>
-    </dgm:scene3d>
-    <dgm:sp3d/>
-    <dgm:txPr/>
-    <dgm:style>
-      <a:lnRef idx="0">
-        <a:scrgbClr r="0" g="0" b="0"/>
-      </a:lnRef>
-      <a:fillRef idx="3">
-        <a:scrgbClr r="0" g="0" b="0"/>
-      </a:fillRef>
-      <a:effectRef idx="3">
-        <a:scrgbClr r="0" g="0" b="0"/>
-      </a:effectRef>
-      <a:fontRef idx="minor">
-        <a:schemeClr val="lt1"/>
-      </a:fontRef>
-    </dgm:style>
-  </dgm:styleLbl>
-  <dgm:styleLbl name="parChTrans2D1">
-    <dgm:scene3d>
-      <a:camera prst="orthographicFront"/>
-      <a:lightRig rig="threePt" dir="t"/>
-    </dgm:scene3d>
-    <dgm:sp3d/>
-    <dgm:txPr/>
-    <dgm:style>
-      <a:lnRef idx="0">
-        <a:scrgbClr r="0" g="0" b="0"/>
-      </a:lnRef>
-      <a:fillRef idx="3">
-        <a:scrgbClr r="0" g="0" b="0"/>
-      </a:fillRef>
-      <a:effectRef idx="3">
-        <a:scrgbClr r="0" g="0" b="0"/>
-      </a:effectRef>
-      <a:fontRef idx="minor">
-        <a:schemeClr val="lt1"/>
-      </a:fontRef>
-    </dgm:style>
-  </dgm:styleLbl>
-  <dgm:styleLbl name="parChTrans2D2">
-    <dgm:scene3d>
-      <a:camera prst="orthographicFront"/>
-      <a:lightRig rig="threePt" dir="t"/>
-    </dgm:scene3d>
-    <dgm:sp3d/>
-    <dgm:txPr/>
-    <dgm:style>
-      <a:lnRef idx="0">
-        <a:scrgbClr r="0" g="0" b="0"/>
-      </a:lnRef>
-      <a:fillRef idx="3">
-        <a:scrgbClr r="0" g="0" b="0"/>
-      </a:fillRef>
-      <a:effectRef idx="3">
-        <a:scrgbClr r="0" g="0" b="0"/>
-      </a:effectRef>
-      <a:fontRef idx="minor">
-        <a:schemeClr val="lt1"/>
-      </a:fontRef>
-    </dgm:style>
-  </dgm:styleLbl>
-  <dgm:styleLbl name="parChTrans2D3">
-    <dgm:scene3d>
-      <a:camera prst="orthographicFront"/>
-      <a:lightRig rig="threePt" dir="t"/>
-    </dgm:scene3d>
-    <dgm:sp3d/>
-    <dgm:txPr/>
-    <dgm:style>
-      <a:lnRef idx="0">
-        <a:scrgbClr r="0" g="0" b="0"/>
-      </a:lnRef>
-      <a:fillRef idx="3">
-        <a:scrgbClr r="0" g="0" b="0"/>
-      </a:fillRef>
-      <a:effectRef idx="3">
-        <a:scrgbClr r="0" g="0" b="0"/>
-      </a:effectRef>
-      <a:fontRef idx="minor">
-        <a:schemeClr val="lt1"/>
-      </a:fontRef>
-    </dgm:style>
-  </dgm:styleLbl>
-  <dgm:styleLbl name="parChTrans2D4">
-    <dgm:scene3d>
-      <a:camera prst="orthographicFront"/>
-      <a:lightRig rig="threePt" dir="t"/>
-    </dgm:scene3d>
-    <dgm:sp3d/>
-    <dgm:txPr/>
-    <dgm:style>
-      <a:lnRef idx="0">
-        <a:scrgbClr r="0" g="0" b="0"/>
-      </a:lnRef>
-      <a:fillRef idx="3">
-        <a:scrgbClr r="0" g="0" b="0"/>
-      </a:fillRef>
-      <a:effectRef idx="3">
-        <a:scrgbClr r="0" g="0" b="0"/>
-      </a:effectRef>
-      <a:fontRef idx="minor">
-        <a:schemeClr val="lt1"/>
-      </a:fontRef>
-    </dgm:style>
-  </dgm:styleLbl>
-  <dgm:styleLbl name="parChTrans1D1">
-    <dgm:scene3d>
-      <a:camera prst="orthographicFront"/>
-      <a:lightRig rig="threePt" dir="t"/>
-    </dgm:scene3d>
-    <dgm:sp3d/>
-    <dgm:txPr/>
-    <dgm:style>
-      <a:lnRef idx="2">
-        <a:scrgbClr r="0" g="0" b="0"/>
-      </a:lnRef>
-      <a:fillRef idx="0">
-        <a:scrgbClr r="0" g="0" b="0"/>
-      </a:fillRef>
-      <a:effectRef idx="0">
-        <a:scrgbClr r="0" g="0" b="0"/>
-      </a:effectRef>
-      <a:fontRef idx="minor"/>
-    </dgm:style>
-  </dgm:styleLbl>
-  <dgm:styleLbl name="parChTrans1D2">
-    <dgm:scene3d>
-      <a:camera prst="orthographicFront"/>
-      <a:lightRig rig="threePt" dir="t"/>
-    </dgm:scene3d>
-    <dgm:sp3d/>
-    <dgm:txPr/>
-    <dgm:style>
-      <a:lnRef idx="2">
-        <a:scrgbClr r="0" g="0" b="0"/>
-      </a:lnRef>
-      <a:fillRef idx="0">
-        <a:scrgbClr r="0" g="0" b="0"/>
-      </a:fillRef>
-      <a:effectRef idx="0">
-        <a:scrgbClr r="0" g="0" b="0"/>
-      </a:effectRef>
-      <a:fontRef idx="minor"/>
-    </dgm:style>
-  </dgm:styleLbl>
-  <dgm:styleLbl name="parChTrans1D3">
-    <dgm:scene3d>
-      <a:camera prst="orthographicFront"/>
-      <a:lightRig rig="threePt" dir="t"/>
-    </dgm:scene3d>
-    <dgm:sp3d/>
-    <dgm:txPr/>
-    <dgm:style>
-      <a:lnRef idx="2">
-        <a:scrgbClr r="0" g="0" b="0"/>
-      </a:lnRef>
-      <a:fillRef idx="0">
-        <a:scrgbClr r="0" g="0" b="0"/>
-      </a:fillRef>
-      <a:effectRef idx="0">
-        <a:scrgbClr r="0" g="0" b="0"/>
-      </a:effectRef>
-      <a:fontRef idx="minor"/>
-    </dgm:style>
-  </dgm:styleLbl>
-  <dgm:styleLbl name="parChTrans1D4">
-    <dgm:scene3d>
-      <a:camera prst="orthographicFront"/>
-      <a:lightRig rig="threePt" dir="t"/>
-    </dgm:scene3d>
-    <dgm:sp3d/>
-    <dgm:txPr/>
-    <dgm:style>
-      <a:lnRef idx="2">
-        <a:scrgbClr r="0" g="0" b="0"/>
-      </a:lnRef>
-      <a:fillRef idx="0">
-        <a:scrgbClr r="0" g="0" b="0"/>
-      </a:fillRef>
-      <a:effectRef idx="0">
-        <a:scrgbClr r="0" g="0" b="0"/>
-      </a:effectRef>
-      <a:fontRef idx="minor"/>
-    </dgm:style>
-  </dgm:styleLbl>
-  <dgm:styleLbl name="fgAcc1">
-    <dgm:scene3d>
-      <a:camera prst="orthographicFront"/>
-      <a:lightRig rig="threePt" dir="t"/>
-    </dgm:scene3d>
-    <dgm:sp3d/>
-    <dgm:txPr/>
-    <dgm:style>
-      <a:lnRef idx="1">
-        <a:scrgbClr r="0" g="0" b="0"/>
-      </a:lnRef>
-      <a:fillRef idx="1">
-        <a:scrgbClr r="0" g="0" b="0"/>
-      </a:fillRef>
-      <a:effectRef idx="2">
-        <a:scrgbClr r="0" g="0" b="0"/>
-      </a:effectRef>
-      <a:fontRef idx="minor"/>
-    </dgm:style>
-  </dgm:styleLbl>
-  <dgm:styleLbl name="conFgAcc1">
-    <dgm:scene3d>
-      <a:camera prst="orthographicFront"/>
-      <a:lightRig rig="threePt" dir="t"/>
-    </dgm:scene3d>
-    <dgm:sp3d/>
-    <dgm:txPr/>
-    <dgm:style>
-      <a:lnRef idx="1">
-        <a:scrgbClr r="0" g="0" b="0"/>
-      </a:lnRef>
-      <a:fillRef idx="1">
-        <a:scrgbClr r="0" g="0" b="0"/>
-      </a:fillRef>
-      <a:effectRef idx="2">
-        <a:scrgbClr r="0" g="0" b="0"/>
-      </a:effectRef>
-      <a:fontRef idx="minor"/>
-    </dgm:style>
-  </dgm:styleLbl>
-  <dgm:styleLbl name="alignAcc1">
-    <dgm:scene3d>
-      <a:camera prst="orthographicFront"/>
-      <a:lightRig rig="threePt" dir="t"/>
-    </dgm:scene3d>
-    <dgm:sp3d/>
-    <dgm:txPr/>
-    <dgm:style>
-      <a:lnRef idx="1">
-        <a:scrgbClr r="0" g="0" b="0"/>
-      </a:lnRef>
-      <a:fillRef idx="1">
-        <a:scrgbClr r="0" g="0" b="0"/>
-      </a:fillRef>
-      <a:effectRef idx="2">
-        <a:scrgbClr r="0" g="0" b="0"/>
-      </a:effectRef>
-      <a:fontRef idx="minor"/>
-    </dgm:style>
-  </dgm:styleLbl>
-  <dgm:styleLbl name="trAlignAcc1">
-    <dgm:scene3d>
-      <a:camera prst="orthographicFront"/>
-      <a:lightRig rig="threePt" dir="t"/>
-    </dgm:scene3d>
-    <dgm:sp3d/>
-    <dgm:txPr/>
-    <dgm:style>
-      <a:lnRef idx="1">
-        <a:scrgbClr r="0" g="0" b="0"/>
-      </a:lnRef>
-      <a:fillRef idx="1">
-        <a:scrgbClr r="0" g="0" b="0"/>
-      </a:fillRef>
-      <a:effectRef idx="0">
-        <a:scrgbClr r="0" g="0" b="0"/>
-      </a:effectRef>
-      <a:fontRef idx="minor"/>
-    </dgm:style>
-  </dgm:styleLbl>
-  <dgm:styleLbl name="bgAcc1">
-    <dgm:scene3d>
-      <a:camera prst="orthographicFront"/>
-      <a:lightRig rig="threePt" dir="t"/>
-    </dgm:scene3d>
-    <dgm:sp3d/>
-    <dgm:txPr/>
-    <dgm:style>
-      <a:lnRef idx="1">
-        <a:scrgbClr r="0" g="0" b="0"/>
-      </a:lnRef>
-      <a:fillRef idx="1">
-        <a:scrgbClr r="0" g="0" b="0"/>
-      </a:fillRef>
-      <a:effectRef idx="2">
-        <a:scrgbClr r="0" g="0" b="0"/>
-      </a:effectRef>
-      <a:fontRef idx="minor"/>
-    </dgm:style>
-  </dgm:styleLbl>
-  <dgm:styleLbl name="solidFgAcc1">
-    <dgm:scene3d>
-      <a:camera prst="orthographicFront"/>
-      <a:lightRig rig="threePt" dir="t"/>
-    </dgm:scene3d>
-    <dgm:sp3d/>
-    <dgm:txPr/>
-    <dgm:style>
-      <a:lnRef idx="1">
-        <a:scrgbClr r="0" g="0" b="0"/>
-      </a:lnRef>
-      <a:fillRef idx="1">
-        <a:scrgbClr r="0" g="0" b="0"/>
-      </a:fillRef>
-      <a:effectRef idx="2">
-        <a:scrgbClr r="0" g="0" b="0"/>
-      </a:effectRef>
-      <a:fontRef idx="minor"/>
-    </dgm:style>
-  </dgm:styleLbl>
-  <dgm:styleLbl name="solidAlignAcc1">
-    <dgm:scene3d>
-      <a:camera prst="orthographicFront"/>
-      <a:lightRig rig="threePt" dir="t"/>
-    </dgm:scene3d>
-    <dgm:sp3d/>
-    <dgm:txPr/>
-    <dgm:style>
-      <a:lnRef idx="1">
-        <a:scrgbClr r="0" g="0" b="0"/>
-      </a:lnRef>
-      <a:fillRef idx="1">
-        <a:scrgbClr r="0" g="0" b="0"/>
-      </a:fillRef>
-      <a:effectRef idx="3">
-        <a:scrgbClr r="0" g="0" b="0"/>
-      </a:effectRef>
-      <a:fontRef idx="minor"/>
-    </dgm:style>
-  </dgm:styleLbl>
-  <dgm:styleLbl name="solidBgAcc1">
-    <dgm:scene3d>
-      <a:camera prst="orthographicFront"/>
-      <a:lightRig rig="threePt" dir="t"/>
-    </dgm:scene3d>
-    <dgm:sp3d/>
-    <dgm:txPr/>
-    <dgm:style>
-      <a:lnRef idx="1">
-        <a:scrgbClr r="0" g="0" b="0"/>
-      </a:lnRef>
-      <a:fillRef idx="1">
-        <a:scrgbClr r="0" g="0" b="0"/>
-      </a:fillRef>
-      <a:effectRef idx="3">
-        <a:scrgbClr r="0" g="0" b="0"/>
-      </a:effectRef>
-      <a:fontRef idx="minor"/>
-    </dgm:style>
-  </dgm:styleLbl>
-  <dgm:styleLbl name="fgAccFollowNode1">
-    <dgm:scene3d>
-      <a:camera prst="orthographicFront"/>
-      <a:lightRig rig="threePt" dir="t"/>
-    </dgm:scene3d>
-    <dgm:sp3d/>
-    <dgm:txPr/>
-    <dgm:style>
-      <a:lnRef idx="1">
-        <a:scrgbClr r="0" g="0" b="0"/>
-      </a:lnRef>
-      <a:fillRef idx="1">
-        <a:scrgbClr r="0" g="0" b="0"/>
-      </a:fillRef>
-      <a:effectRef idx="2">
-        <a:scrgbClr r="0" g="0" b="0"/>
-      </a:effectRef>
-      <a:fontRef idx="minor"/>
-    </dgm:style>
-  </dgm:styleLbl>
-  <dgm:styleLbl name="alignAccFollowNode1">
-    <dgm:scene3d>
-      <a:camera prst="orthographicFront"/>
-      <a:lightRig rig="threePt" dir="t"/>
-    </dgm:scene3d>
-    <dgm:sp3d/>
-    <dgm:txPr/>
-    <dgm:style>
-      <a:lnRef idx="1">
-        <a:scrgbClr r="0" g="0" b="0"/>
-      </a:lnRef>
-      <a:fillRef idx="1">
-        <a:scrgbClr r="0" g="0" b="0"/>
-      </a:fillRef>
-      <a:effectRef idx="2">
-        <a:scrgbClr r="0" g="0" b="0"/>
-      </a:effectRef>
-      <a:fontRef idx="minor"/>
-    </dgm:style>
-  </dgm:styleLbl>
-  <dgm:styleLbl name="bgAccFollowNode1">
-    <dgm:scene3d>
-      <a:camera prst="orthographicFront"/>
-      <a:lightRig rig="threePt" dir="t"/>
-    </dgm:scene3d>
-    <dgm:sp3d/>
-    <dgm:txPr/>
-    <dgm:style>
-      <a:lnRef idx="1">
-        <a:scrgbClr r="0" g="0" b="0"/>
-      </a:lnRef>
-      <a:fillRef idx="1">
-        <a:scrgbClr r="0" g="0" b="0"/>
-      </a:fillRef>
-      <a:effectRef idx="2">
-        <a:scrgbClr r="0" g="0" b="0"/>
-      </a:effectRef>
-      <a:fontRef idx="minor"/>
-    </dgm:style>
-  </dgm:styleLbl>
-  <dgm:styleLbl name="fgAcc0">
-    <dgm:scene3d>
-      <a:camera prst="orthographicFront"/>
-      <a:lightRig rig="threePt" dir="t"/>
-    </dgm:scene3d>
-    <dgm:sp3d/>
-    <dgm:txPr/>
-    <dgm:style>
-      <a:lnRef idx="1">
-        <a:scrgbClr r="0" g="0" b="0"/>
-      </a:lnRef>
-      <a:fillRef idx="1">
-        <a:scrgbClr r="0" g="0" b="0"/>
-      </a:fillRef>
-      <a:effectRef idx="2">
-        <a:scrgbClr r="0" g="0" b="0"/>
-      </a:effectRef>
-      <a:fontRef idx="minor"/>
-    </dgm:style>
-  </dgm:styleLbl>
-  <dgm:styleLbl name="fgAcc2">
-    <dgm:scene3d>
-      <a:camera prst="orthographicFront"/>
-      <a:lightRig rig="threePt" dir="t"/>
-    </dgm:scene3d>
-    <dgm:sp3d/>
-    <dgm:txPr/>
-    <dgm:style>
-      <a:lnRef idx="1">
-        <a:scrgbClr r="0" g="0" b="0"/>
-      </a:lnRef>
-      <a:fillRef idx="1">
-        <a:scrgbClr r="0" g="0" b="0"/>
-      </a:fillRef>
-      <a:effectRef idx="2">
-        <a:scrgbClr r="0" g="0" b="0"/>
-      </a:effectRef>
-      <a:fontRef idx="minor"/>
-    </dgm:style>
-  </dgm:styleLbl>
-  <dgm:styleLbl name="fgAcc3">
-    <dgm:scene3d>
-      <a:camera prst="orthographicFront"/>
-      <a:lightRig rig="threePt" dir="t"/>
-    </dgm:scene3d>
-    <dgm:sp3d/>
-    <dgm:txPr/>
-    <dgm:style>
-      <a:lnRef idx="1">
-        <a:scrgbClr r="0" g="0" b="0"/>
-      </a:lnRef>
-      <a:fillRef idx="1">
-        <a:scrgbClr r="0" g="0" b="0"/>
-      </a:fillRef>
-      <a:effectRef idx="2">
-        <a:scrgbClr r="0" g="0" b="0"/>
-      </a:effectRef>
-      <a:fontRef idx="minor"/>
-    </dgm:style>
-  </dgm:styleLbl>
-  <dgm:styleLbl name="fgAcc4">
-    <dgm:scene3d>
-      <a:camera prst="orthographicFront"/>
-      <a:lightRig rig="threePt" dir="t"/>
-    </dgm:scene3d>
-    <dgm:sp3d/>
-    <dgm:txPr/>
-    <dgm:style>
-      <a:lnRef idx="1">
-        <a:scrgbClr r="0" g="0" b="0"/>
-      </a:lnRef>
-      <a:fillRef idx="1">
-        <a:scrgbClr r="0" g="0" b="0"/>
-      </a:fillRef>
-      <a:effectRef idx="2">
-        <a:scrgbClr r="0" g="0" b="0"/>
-      </a:effectRef>
-      <a:fontRef idx="minor"/>
-    </dgm:style>
-  </dgm:styleLbl>
-  <dgm:styleLbl name="bgShp">
-    <dgm:scene3d>
-      <a:camera prst="orthographicFront"/>
-      <a:lightRig rig="threePt" dir="t"/>
-    </dgm:scene3d>
-    <dgm:sp3d/>
-    <dgm:txPr/>
-    <dgm:style>
-      <a:lnRef idx="0">
-        <a:scrgbClr r="0" g="0" b="0"/>
-      </a:lnRef>
-      <a:fillRef idx="1">
-        <a:scrgbClr r="0" g="0" b="0"/>
-      </a:fillRef>
-      <a:effectRef idx="2">
-        <a:scrgbClr r="0" g="0" b="0"/>
-      </a:effectRef>
-      <a:fontRef idx="minor"/>
-    </dgm:style>
-  </dgm:styleLbl>
-  <dgm:styleLbl name="dkBgShp">
-    <dgm:scene3d>
-      <a:camera prst="orthographicFront"/>
-      <a:lightRig rig="threePt" dir="t"/>
-    </dgm:scene3d>
-    <dgm:sp3d/>
-    <dgm:txPr/>
-    <dgm:style>
-      <a:lnRef idx="0">
-        <a:scrgbClr r="0" g="0" b="0"/>
-      </a:lnRef>
-      <a:fillRef idx="1">
-        <a:scrgbClr r="0" g="0" b="0"/>
-      </a:fillRef>
-      <a:effectRef idx="3">
-        <a:scrgbClr r="0" g="0" b="0"/>
-      </a:effectRef>
-      <a:fontRef idx="minor"/>
-    </dgm:style>
-  </dgm:styleLbl>
-  <dgm:styleLbl name="trBgShp">
-    <dgm:scene3d>
-      <a:camera prst="orthographicFront"/>
-      <a:lightRig rig="threePt" dir="t"/>
-    </dgm:scene3d>
-    <dgm:sp3d/>
-    <dgm:txPr/>
-    <dgm:style>
-      <a:lnRef idx="0">
-        <a:scrgbClr r="0" g="0" b="0"/>
-      </a:lnRef>
-      <a:fillRef idx="1">
-        <a:scrgbClr r="0" g="0" b="0"/>
-      </a:fillRef>
-      <a:effectRef idx="0">
-        <a:scrgbClr r="0" g="0" b="0"/>
-      </a:effectRef>
-      <a:fontRef idx="minor"/>
-    </dgm:style>
-  </dgm:styleLbl>
-  <dgm:styleLbl name="fgShp">
-    <dgm:scene3d>
-      <a:camera prst="orthographicFront"/>
-      <a:lightRig rig="threePt" dir="t"/>
-    </dgm:scene3d>
-    <dgm:sp3d/>
-    <dgm:txPr/>
-    <dgm:style>
-      <a:lnRef idx="0">
-        <a:scrgbClr r="0" g="0" b="0"/>
-      </a:lnRef>
-      <a:fillRef idx="3">
-        <a:scrgbClr r="0" g="0" b="0"/>
-      </a:fillRef>
-      <a:effectRef idx="3">
-        <a:scrgbClr r="0" g="0" b="0"/>
-      </a:effectRef>
-      <a:fontRef idx="minor"/>
-    </dgm:style>
-  </dgm:styleLbl>
-  <dgm:styleLbl name="revTx">
-    <dgm:scene3d>
-      <a:camera prst="orthographicFront"/>
-      <a:lightRig rig="threePt" dir="t"/>
-    </dgm:scene3d>
-    <dgm:sp3d/>
-    <dgm:txPr/>
-    <dgm:style>
-      <a:lnRef idx="0">
-        <a:scrgbClr r="0" g="0" b="0"/>
-      </a:lnRef>
-      <a:fillRef idx="0">
-        <a:scrgbClr r="0" g="0" b="0"/>
-      </a:fillRef>
-      <a:effectRef idx="0">
-        <a:scrgbClr r="0" g="0" b="0"/>
-      </a:effectRef>
-      <a:fontRef idx="minor"/>
-    </dgm:style>
-  </dgm:styleLbl>
-</dgm:styleDef>
-</file>
-
-<file path=ppt/diagrams/quickStyle5.xml><?xml version="1.0" encoding="utf-8"?>
 <dgm:styleDef xmlns:dgm="http://schemas.openxmlformats.org/drawingml/2006/diagram" xmlns:a="http://schemas.openxmlformats.org/drawingml/2006/main" uniqueId="urn:microsoft.com/office/officeart/2005/8/quickstyle/simple1">
   <dgm:title val=""/>
   <dgm:desc val=""/>
@@ -16297,7 +12198,7 @@
           <a:p>
             <a:fld id="{C0A9222C-D0E8-4C9E-962C-98B833B2A5E7}" type="datetimeFigureOut">
               <a:rPr lang="en-US" smtClean="0"/>
-              <a:t>1/9/2026</a:t>
+              <a:t>1/14/2026</a:t>
             </a:fld>
             <a:endParaRPr lang="en-US"/>
           </a:p>
@@ -16736,7 +12637,7 @@
     </p:spTree>
     <p:extLst>
       <p:ext uri="{BB962C8B-B14F-4D97-AF65-F5344CB8AC3E}">
-        <p14:creationId xmlns:p14="http://schemas.microsoft.com/office/powerpoint/2010/main" val="3564022724"/>
+        <p14:creationId xmlns:p14="http://schemas.microsoft.com/office/powerpoint/2010/main" val="3604602861"/>
       </p:ext>
     </p:extLst>
   </p:cSld>
@@ -16827,7 +12728,7 @@
     </p:spTree>
     <p:extLst>
       <p:ext uri="{BB962C8B-B14F-4D97-AF65-F5344CB8AC3E}">
-        <p14:creationId xmlns:p14="http://schemas.microsoft.com/office/powerpoint/2010/main" val="3604602861"/>
+        <p14:creationId xmlns:p14="http://schemas.microsoft.com/office/powerpoint/2010/main" val="3564022724"/>
       </p:ext>
     </p:extLst>
   </p:cSld>
@@ -17012,7 +12913,7 @@
           <a:p>
             <a:fld id="{B04EF954-66B1-4168-AF40-97F3DAF43FC4}" type="datetime1">
               <a:rPr lang="en-US" smtClean="0"/>
-              <a:t>1/9/2026</a:t>
+              <a:t>1/14/2026</a:t>
             </a:fld>
             <a:endParaRPr lang="en-US" dirty="0"/>
           </a:p>
@@ -17410,7 +13311,7 @@
           <a:p>
             <a:fld id="{C747D10D-DAA6-49BD-BCDC-42DE71F72A89}" type="datetime1">
               <a:rPr lang="en-US" smtClean="0"/>
-              <a:t>1/9/2026</a:t>
+              <a:t>1/14/2026</a:t>
             </a:fld>
             <a:endParaRPr lang="en-US" dirty="0"/>
           </a:p>
@@ -17795,7 +13696,7 @@
           <a:p>
             <a:fld id="{9A99C55D-C47D-42B9-AD20-3E2CCE08596C}" type="datetime1">
               <a:rPr lang="en-US" smtClean="0"/>
-              <a:t>1/9/2026</a:t>
+              <a:t>1/14/2026</a:t>
             </a:fld>
             <a:endParaRPr lang="en-US" dirty="0"/>
           </a:p>
@@ -18030,7 +13931,7 @@
           <a:p>
             <a:fld id="{01EA44AD-1FB0-4882-B380-D102D5E41B49}" type="datetime1">
               <a:rPr lang="en-US" smtClean="0"/>
-              <a:t>1/9/2026</a:t>
+              <a:t>1/14/2026</a:t>
             </a:fld>
             <a:endParaRPr lang="en-US" dirty="0"/>
           </a:p>
@@ -18265,7 +14166,7 @@
           <a:p>
             <a:fld id="{C21FD0E9-BB2A-40F4-9FCA-339953EA9BCB}" type="datetime1">
               <a:rPr lang="en-US" smtClean="0"/>
-              <a:t>1/9/2026</a:t>
+              <a:t>1/14/2026</a:t>
             </a:fld>
             <a:endParaRPr lang="en-US" dirty="0"/>
           </a:p>
@@ -18482,7 +14383,7 @@
           <a:p>
             <a:fld id="{B82DCE86-7B4C-43EC-801D-4B957536C306}" type="datetime1">
               <a:rPr lang="en-US" smtClean="0"/>
-              <a:t>1/9/2026</a:t>
+              <a:t>1/14/2026</a:t>
             </a:fld>
             <a:endParaRPr lang="en-US" dirty="0"/>
           </a:p>
@@ -18717,7 +14618,7 @@
           <a:p>
             <a:fld id="{1FD3FCD9-BE24-4676-9D2E-63D9ED82EDA2}" type="datetime1">
               <a:rPr lang="en-US" smtClean="0"/>
-              <a:t>1/9/2026</a:t>
+              <a:t>1/14/2026</a:t>
             </a:fld>
             <a:endParaRPr lang="en-US" dirty="0"/>
           </a:p>
@@ -18934,7 +14835,7 @@
           <a:p>
             <a:fld id="{21CA290A-121B-47D5-B4CD-63E70D76A5D5}" type="datetime1">
               <a:rPr lang="en-US" smtClean="0"/>
-              <a:t>1/9/2026</a:t>
+              <a:t>1/14/2026</a:t>
             </a:fld>
             <a:endParaRPr lang="en-US" dirty="0"/>
           </a:p>
@@ -19250,7 +15151,7 @@
           <a:p>
             <a:fld id="{260A58D8-7EDF-40A6-A98C-8CBDF59A319E}" type="datetime1">
               <a:rPr lang="en-US" smtClean="0"/>
-              <a:t>1/9/2026</a:t>
+              <a:t>1/14/2026</a:t>
             </a:fld>
             <a:endParaRPr lang="en-US" dirty="0"/>
           </a:p>
@@ -19594,7 +15495,7 @@
           <a:p>
             <a:fld id="{16DF7C3E-B5DF-4043-B2F9-CD94B277B81B}" type="datetime1">
               <a:rPr lang="en-US" smtClean="0"/>
-              <a:t>1/9/2026</a:t>
+              <a:t>1/14/2026</a:t>
             </a:fld>
             <a:endParaRPr lang="en-US" dirty="0"/>
           </a:p>
@@ -19937,7 +15838,7 @@
           <a:p>
             <a:fld id="{84F04B89-F088-43E2-8F95-5A2E5E9F612E}" type="datetime1">
               <a:rPr lang="en-US" smtClean="0"/>
-              <a:t>1/9/2026</a:t>
+              <a:t>1/14/2026</a:t>
             </a:fld>
             <a:endParaRPr lang="en-US" dirty="0"/>
           </a:p>
@@ -20222,7 +16123,7 @@
           <a:p>
             <a:fld id="{26233410-150A-4A72-BF63-6D3ACBC30148}" type="datetime1">
               <a:rPr lang="en-US" smtClean="0"/>
-              <a:t>1/9/2026</a:t>
+              <a:t>1/14/2026</a:t>
             </a:fld>
             <a:endParaRPr lang="en-US" dirty="0"/>
           </a:p>
@@ -20570,7 +16471,7 @@
           <a:p>
             <a:fld id="{A0FCFF8D-E3E3-4D6C-85D1-1D24204FD961}" type="datetime1">
               <a:rPr lang="en-US" smtClean="0"/>
-              <a:t>1/9/2026</a:t>
+              <a:t>1/14/2026</a:t>
             </a:fld>
             <a:endParaRPr lang="en-US" dirty="0"/>
           </a:p>
@@ -20920,7 +16821,7 @@
           <a:p>
             <a:fld id="{1479AD81-0F74-4052-9D15-1FCBE10FF531}" type="datetime1">
               <a:rPr lang="en-US" smtClean="0"/>
-              <a:t>1/9/2026</a:t>
+              <a:t>1/14/2026</a:t>
             </a:fld>
             <a:endParaRPr lang="en-US" dirty="0"/>
           </a:p>
@@ -21283,7 +17184,7 @@
           <a:p>
             <a:fld id="{58567813-D47B-4BA9-A366-45E7794B6608}" type="datetime1">
               <a:rPr lang="en-US" smtClean="0"/>
-              <a:t>1/9/2026</a:t>
+              <a:t>1/14/2026</a:t>
             </a:fld>
             <a:endParaRPr lang="en-US" dirty="0"/>
           </a:p>
@@ -21646,7 +17547,7 @@
           <a:p>
             <a:fld id="{D3C75A4F-7395-44C0-9A76-83F0F6EA512A}" type="datetime1">
               <a:rPr lang="en-US" smtClean="0"/>
-              <a:t>1/9/2026</a:t>
+              <a:t>1/14/2026</a:t>
             </a:fld>
             <a:endParaRPr lang="en-US" dirty="0"/>
           </a:p>
@@ -21996,7 +17897,7 @@
           <a:p>
             <a:fld id="{1B2EEDCC-520A-464B-900A-5F7E0E1FFC43}" type="datetime1">
               <a:rPr lang="en-US" smtClean="0"/>
-              <a:t>1/9/2026</a:t>
+              <a:t>1/14/2026</a:t>
             </a:fld>
             <a:endParaRPr lang="en-US" dirty="0"/>
           </a:p>
@@ -22321,7 +18222,7 @@
           <a:p>
             <a:fld id="{B36C1D43-E95A-44CE-BF39-AC264176BC74}" type="datetime1">
               <a:rPr lang="en-US" smtClean="0"/>
-              <a:t>1/9/2026</a:t>
+              <a:t>1/14/2026</a:t>
             </a:fld>
             <a:endParaRPr lang="en-US" dirty="0"/>
           </a:p>
@@ -22637,7 +18538,7 @@
           <a:p>
             <a:fld id="{6F84395D-714C-468A-B505-16E3BDC41D6C}" type="datetime1">
               <a:rPr lang="en-US" smtClean="0"/>
-              <a:t>1/9/2026</a:t>
+              <a:t>1/14/2026</a:t>
             </a:fld>
             <a:endParaRPr lang="en-US" dirty="0"/>
           </a:p>
@@ -22981,7 +18882,7 @@
           <a:p>
             <a:fld id="{4009D615-5030-44BE-B1E7-FCAF557FFC34}" type="datetime1">
               <a:rPr lang="en-US" smtClean="0"/>
-              <a:t>1/9/2026</a:t>
+              <a:t>1/14/2026</a:t>
             </a:fld>
             <a:endParaRPr lang="en-US" dirty="0"/>
           </a:p>
@@ -23297,7 +19198,7 @@
           <a:p>
             <a:fld id="{A65D8DDD-BB5E-4F5B-81F2-5E5F98B403C0}" type="datetime1">
               <a:rPr lang="en-US" smtClean="0"/>
-              <a:t>1/9/2026</a:t>
+              <a:t>1/14/2026</a:t>
             </a:fld>
             <a:endParaRPr lang="en-US" dirty="0"/>
           </a:p>
@@ -23637,7 +19538,7 @@
           <a:p>
             <a:fld id="{083588C5-4E32-4E6E-80AB-32A6125C957F}" type="datetime1">
               <a:rPr lang="en-US" smtClean="0"/>
-              <a:t>1/9/2026</a:t>
+              <a:t>1/14/2026</a:t>
             </a:fld>
             <a:endParaRPr lang="en-US" dirty="0"/>
           </a:p>
@@ -23935,7 +19836,7 @@
           <a:p>
             <a:fld id="{91AF1D09-6B76-4716-AD3D-9F53166D3BF5}" type="datetime1">
               <a:rPr lang="en-US" smtClean="0"/>
-              <a:t>1/9/2026</a:t>
+              <a:t>1/14/2026</a:t>
             </a:fld>
             <a:endParaRPr lang="en-US" dirty="0"/>
           </a:p>
@@ -24265,7 +20166,7 @@
           <a:p>
             <a:fld id="{B337EAFE-6A88-4B1F-9ABC-CA3CFB830DD6}" type="datetime1">
               <a:rPr lang="en-US" smtClean="0"/>
-              <a:t>1/9/2026</a:t>
+              <a:t>1/14/2026</a:t>
             </a:fld>
             <a:endParaRPr lang="en-US" dirty="0"/>
           </a:p>
@@ -24581,7 +20482,7 @@
           <a:p>
             <a:fld id="{9EF70683-5F2F-44F3-8B59-45258C4FD45A}" type="datetime1">
               <a:rPr lang="en-US" smtClean="0"/>
-              <a:t>1/9/2026</a:t>
+              <a:t>1/14/2026</a:t>
             </a:fld>
             <a:endParaRPr lang="en-US" dirty="0"/>
           </a:p>
@@ -24921,7 +20822,7 @@
           <a:p>
             <a:fld id="{813EDC87-0EBE-4D2E-8804-E5F0EDA0B797}" type="datetime1">
               <a:rPr lang="en-US" smtClean="0"/>
-              <a:t>1/9/2026</a:t>
+              <a:t>1/14/2026</a:t>
             </a:fld>
             <a:endParaRPr lang="en-US" dirty="0"/>
           </a:p>
@@ -25248,7 +21149,7 @@
           <a:p>
             <a:fld id="{51CF56A9-FD41-47F4-80A0-DA74EEEC2541}" type="datetime1">
               <a:rPr lang="en-US" smtClean="0"/>
-              <a:t>1/9/2026</a:t>
+              <a:t>1/14/2026</a:t>
             </a:fld>
             <a:endParaRPr lang="en-US" dirty="0"/>
           </a:p>
@@ -25408,7 +21309,7 @@
           <a:p>
             <a:fld id="{A4CBD270-9BF1-4C68-A7FA-BA016D8BB959}" type="datetime1">
               <a:rPr lang="en-US" smtClean="0"/>
-              <a:t>1/9/2026</a:t>
+              <a:t>1/14/2026</a:t>
             </a:fld>
             <a:endParaRPr lang="en-US" dirty="0"/>
           </a:p>
@@ -25666,7 +21567,7 @@
           <a:p>
             <a:fld id="{E023AFB7-90A6-428C-A019-BBE6272496B8}" type="datetime1">
               <a:rPr lang="en-US" smtClean="0"/>
-              <a:t>1/9/2026</a:t>
+              <a:t>1/14/2026</a:t>
             </a:fld>
             <a:endParaRPr lang="en-US" dirty="0"/>
           </a:p>
@@ -26128,7 +22029,7 @@
           <a:p>
             <a:fld id="{09E47A9E-7C3C-4663-841E-C89520FA85A3}" type="datetime1">
               <a:rPr lang="en-US" smtClean="0"/>
-              <a:t>1/9/2026</a:t>
+              <a:t>1/14/2026</a:t>
             </a:fld>
             <a:endParaRPr lang="en-US" dirty="0"/>
           </a:p>
@@ -26409,7 +22310,7 @@
           <a:p>
             <a:fld id="{42FED8FD-3F8D-425F-9991-7FB6FCCEC5A2}" type="datetime1">
               <a:rPr lang="en-US" smtClean="0"/>
-              <a:t>1/9/2026</a:t>
+              <a:t>1/14/2026</a:t>
             </a:fld>
             <a:endParaRPr lang="en-US" dirty="0"/>
           </a:p>
@@ -26795,7 +22696,7 @@
           <a:p>
             <a:fld id="{5BD6B3E3-A05B-4311-9C9A-DA8A512CAB97}" type="datetime1">
               <a:rPr lang="en-US" smtClean="0"/>
-              <a:t>1/9/2026</a:t>
+              <a:t>1/14/2026</a:t>
             </a:fld>
             <a:endParaRPr lang="en-US" dirty="0"/>
           </a:p>
@@ -27181,7 +23082,7 @@
           <a:p>
             <a:fld id="{FAEFBAE2-1C27-41D0-8DBA-D202F753417F}" type="datetime1">
               <a:rPr lang="en-US" smtClean="0"/>
-              <a:t>1/9/2026</a:t>
+              <a:t>1/14/2026</a:t>
             </a:fld>
             <a:endParaRPr lang="en-US" dirty="0"/>
           </a:p>
@@ -27503,7 +23404,7 @@
           <a:p>
             <a:fld id="{FE21D4C7-8630-4B98-978C-30388BBD4EE8}" type="datetime1">
               <a:rPr lang="en-US" smtClean="0"/>
-              <a:t>1/9/2026</a:t>
+              <a:t>1/14/2026</a:t>
             </a:fld>
             <a:endParaRPr lang="en-US" dirty="0"/>
           </a:p>
@@ -27661,7 +23562,7 @@
           <a:p>
             <a:fld id="{6A453612-8941-41EA-ABBA-F717A06C8346}" type="datetime1">
               <a:rPr lang="en-US" smtClean="0"/>
-              <a:t>1/9/2026</a:t>
+              <a:t>1/14/2026</a:t>
             </a:fld>
             <a:endParaRPr lang="en-US" dirty="0"/>
           </a:p>
@@ -28061,7 +23962,7 @@
           <a:p>
             <a:fld id="{73D6CD22-E4B3-48A1-94CA-B89DB574ED80}" type="datetime1">
               <a:rPr lang="en-US" smtClean="0"/>
-              <a:t>1/9/2026</a:t>
+              <a:t>1/14/2026</a:t>
             </a:fld>
             <a:endParaRPr lang="en-US" dirty="0"/>
           </a:p>
@@ -28397,7 +24298,7 @@
           <a:p>
             <a:fld id="{97C38B47-093E-417D-A1C3-81EEF797AC69}" type="datetime1">
               <a:rPr lang="en-US" smtClean="0"/>
-              <a:t>1/9/2026</a:t>
+              <a:t>1/14/2026</a:t>
             </a:fld>
             <a:endParaRPr lang="en-US" dirty="0"/>
           </a:p>
@@ -28642,7 +24543,7 @@
           <a:p>
             <a:fld id="{A250925D-4314-49E4-A383-289640FEB5E3}" type="datetime1">
               <a:rPr lang="en-US" smtClean="0"/>
-              <a:t>1/9/2026</a:t>
+              <a:t>1/14/2026</a:t>
             </a:fld>
             <a:endParaRPr lang="en-US" dirty="0"/>
           </a:p>
@@ -28915,7 +24816,7 @@
           <a:p>
             <a:fld id="{EE2C59E0-667A-459A-BBD1-70DA72C3C576}" type="datetime1">
               <a:rPr lang="en-US" smtClean="0"/>
-              <a:t>1/9/2026</a:t>
+              <a:t>1/14/2026</a:t>
             </a:fld>
             <a:endParaRPr lang="en-US" dirty="0"/>
           </a:p>
@@ -29340,7 +25241,7 @@
           <a:p>
             <a:fld id="{706CC00B-2F01-4379-B0FD-8DA094C16FA4}" type="datetime1">
               <a:rPr lang="en-US" smtClean="0"/>
-              <a:t>1/9/2026</a:t>
+              <a:t>1/14/2026</a:t>
             </a:fld>
             <a:endParaRPr lang="en-US" dirty="0"/>
           </a:p>
@@ -29671,7 +25572,7 @@
           <a:p>
             <a:fld id="{5019F103-9E7C-4D5A-827C-0D2D66EE1CD2}" type="datetime1">
               <a:rPr lang="en-US" smtClean="0"/>
-              <a:t>1/9/2026</a:t>
+              <a:t>1/14/2026</a:t>
             </a:fld>
             <a:endParaRPr lang="en-US" dirty="0"/>
           </a:p>
@@ -30033,7 +25934,7 @@
           <a:p>
             <a:fld id="{8C13480A-5F85-4A30-80F2-F92581C6474C}" type="datetime1">
               <a:rPr lang="en-US" smtClean="0"/>
-              <a:t>1/9/2026</a:t>
+              <a:t>1/14/2026</a:t>
             </a:fld>
             <a:endParaRPr lang="en-US" dirty="0"/>
           </a:p>
@@ -30431,7 +26332,7 @@
           <a:p>
             <a:fld id="{B2BF18D3-87BE-4A2D-AD2C-B21E415FD900}" type="datetime1">
               <a:rPr lang="en-US" smtClean="0"/>
-              <a:t>1/9/2026</a:t>
+              <a:t>1/14/2026</a:t>
             </a:fld>
             <a:endParaRPr lang="en-US" dirty="0"/>
           </a:p>
@@ -30818,7 +26719,7 @@
           <a:p>
             <a:fld id="{73F0B94E-0195-4FC9-AEFD-CCBB878ACEDF}" type="datetime1">
               <a:rPr lang="en-US" smtClean="0"/>
-              <a:t>1/9/2026</a:t>
+              <a:t>1/14/2026</a:t>
             </a:fld>
             <a:endParaRPr lang="en-US" dirty="0"/>
           </a:p>
@@ -31205,7 +27106,7 @@
           <a:p>
             <a:fld id="{9B0F68CC-6BDD-49E7-8971-97164A4B1FA2}" type="datetime1">
               <a:rPr lang="en-US" smtClean="0"/>
-              <a:t>1/9/2026</a:t>
+              <a:t>1/14/2026</a:t>
             </a:fld>
             <a:endParaRPr lang="en-US" dirty="0"/>
           </a:p>
@@ -31488,7 +27389,7 @@
           <a:p>
             <a:fld id="{E244D5D5-F2FF-4BCB-BACC-FA9A736697CB}" type="datetime1">
               <a:rPr lang="en-US" smtClean="0"/>
-              <a:t>1/9/2026</a:t>
+              <a:t>1/14/2026</a:t>
             </a:fld>
             <a:endParaRPr lang="en-US" dirty="0"/>
           </a:p>
@@ -31730,7 +27631,7 @@
           <a:p>
             <a:fld id="{072E1B28-DB45-4001-B295-7D7933E04419}" type="datetime1">
               <a:rPr lang="en-US" smtClean="0"/>
-              <a:t>1/9/2026</a:t>
+              <a:t>1/14/2026</a:t>
             </a:fld>
             <a:endParaRPr lang="en-US" dirty="0"/>
           </a:p>
@@ -32424,7 +28325,7 @@
                   <a:spcPts val="600"/>
                 </a:spcAft>
               </a:pPr>
-              <a:t>1/9/2026</a:t>
+              <a:t>1/14/2026</a:t>
             </a:fld>
             <a:endParaRPr lang="en-US"/>
           </a:p>
@@ -32895,7 +28796,7 @@
             </a:r>
             <a:r>
               <a:rPr lang="en-US" sz="1200" dirty="0" err="1"/>
-              <a:t>etc</a:t>
+              <a:t>e.t.c</a:t>
             </a:r>
             <a:r>
               <a:rPr lang="en-US" sz="1200" dirty="0"/>
@@ -32989,7 +28890,7 @@
                   <a:spcPts val="600"/>
                 </a:spcAft>
               </a:pPr>
-              <a:t>1/9/2026</a:t>
+              <a:t>1/14/2026</a:t>
             </a:fld>
             <a:endParaRPr lang="en-US"/>
           </a:p>
@@ -33090,58 +28991,26 @@
         <p:spPr>
           <a:xfrm>
             <a:off x="429767" y="640079"/>
-            <a:ext cx="4032505" cy="3621024"/>
+            <a:ext cx="4032505" cy="934721"/>
           </a:xfrm>
         </p:spPr>
         <p:txBody>
           <a:bodyPr anchor="t">
-            <a:normAutofit/>
+            <a:normAutofit fontScale="90000"/>
           </a:bodyPr>
           <a:lstStyle/>
           <a:p>
             <a:r>
-              <a:rPr lang="en-US" dirty="0" err="1"/>
-              <a:t>roi</a:t>
-            </a:r>
+              <a:rPr lang="en-US" dirty="0"/>
+              <a:t>Return on investment</a:t>
+            </a:r>
+            <a:br>
+              <a:rPr lang="en-US" dirty="0"/>
+            </a:br>
             <a:endParaRPr lang="en-US" dirty="0"/>
           </a:p>
         </p:txBody>
       </p:sp>
-      <p:pic>
-        <p:nvPicPr>
-          <p:cNvPr id="12" name="Content Placeholder 11" descr="Bar graph with upward trend outline">
-            <a:extLst>
-              <a:ext uri="{FF2B5EF4-FFF2-40B4-BE49-F238E27FC236}">
-                <a16:creationId xmlns:a16="http://schemas.microsoft.com/office/drawing/2014/main" id="{254EAC75-BB82-7207-32D9-018B3F57F591}"/>
-              </a:ext>
-            </a:extLst>
-          </p:cNvPr>
-          <p:cNvPicPr>
-            <a:picLocks noGrp="1" noChangeAspect="1"/>
-          </p:cNvPicPr>
-          <p:nvPr>
-            <p:ph sz="quarter" idx="13"/>
-          </p:nvPr>
-        </p:nvPicPr>
-        <p:blipFill>
-          <a:blip r:embed="rId2">
-            <a:extLst>
-              <a:ext uri="{96DAC541-7B7A-43D3-8B79-37D633B846F1}">
-                <asvg:svgBlip xmlns:asvg="http://schemas.microsoft.com/office/drawing/2016/SVG/main" r:embed="rId3"/>
-              </a:ext>
-            </a:extLst>
-          </a:blip>
-          <a:stretch>
-            <a:fillRect/>
-          </a:stretch>
-        </p:blipFill>
-        <p:spPr>
-          <a:xfrm>
-            <a:off x="5546559" y="640715"/>
-            <a:ext cx="5719763" cy="5719763"/>
-          </a:xfrm>
-        </p:spPr>
-      </p:pic>
       <p:sp>
         <p:nvSpPr>
           <p:cNvPr id="4" name="Date Placeholder 3">
@@ -33182,47 +29051,9 @@
                   <a:spcPts val="600"/>
                 </a:spcAft>
               </a:pPr>
-              <a:t>1/9/2026</a:t>
+              <a:t>1/14/2026</a:t>
             </a:fld>
             <a:endParaRPr lang="en-US"/>
-          </a:p>
-        </p:txBody>
-      </p:sp>
-      <p:sp>
-        <p:nvSpPr>
-          <p:cNvPr id="17" name="Footer Placeholder 4">
-            <a:extLst>
-              <a:ext uri="{FF2B5EF4-FFF2-40B4-BE49-F238E27FC236}">
-                <a16:creationId xmlns:a16="http://schemas.microsoft.com/office/drawing/2014/main" id="{C4A84573-1B06-74B4-E689-F0DA3CAF8573}"/>
-              </a:ext>
-            </a:extLst>
-          </p:cNvPr>
-          <p:cNvSpPr>
-            <a:spLocks noGrp="1"/>
-          </p:cNvSpPr>
-          <p:nvPr>
-            <p:ph type="ftr" sz="quarter" idx="11"/>
-          </p:nvPr>
-        </p:nvSpPr>
-        <p:spPr>
-          <a:xfrm>
-            <a:off x="8893370" y="6490524"/>
-            <a:ext cx="2662834" cy="336141"/>
-          </a:xfrm>
-        </p:spPr>
-        <p:txBody>
-          <a:bodyPr/>
-          <a:lstStyle/>
-          <a:p>
-            <a:pPr>
-              <a:spcAft>
-                <a:spcPts val="600"/>
-              </a:spcAft>
-            </a:pPr>
-            <a:r>
-              <a:rPr lang="en-US"/>
-              <a:t>Sample Footer Text</a:t>
-            </a:r>
           </a:p>
         </p:txBody>
       </p:sp>
@@ -33272,6 +29103,131 @@
           </a:p>
         </p:txBody>
       </p:sp>
+      <p:sp>
+        <p:nvSpPr>
+          <p:cNvPr id="3" name="TextBox 2">
+            <a:extLst>
+              <a:ext uri="{FF2B5EF4-FFF2-40B4-BE49-F238E27FC236}">
+                <a16:creationId xmlns:a16="http://schemas.microsoft.com/office/drawing/2014/main" id="{2DDF9938-E3ED-2308-8A20-9A672014FC33}"/>
+              </a:ext>
+            </a:extLst>
+          </p:cNvPr>
+          <p:cNvSpPr txBox="1"/>
+          <p:nvPr/>
+        </p:nvSpPr>
+        <p:spPr>
+          <a:xfrm>
+            <a:off x="429767" y="1866900"/>
+            <a:ext cx="4032505" cy="4093428"/>
+          </a:xfrm>
+          <a:prstGeom prst="rect">
+            <a:avLst/>
+          </a:prstGeom>
+          <a:noFill/>
+        </p:spPr>
+        <p:txBody>
+          <a:bodyPr wrap="square" rtlCol="0">
+            <a:spAutoFit/>
+          </a:bodyPr>
+          <a:lstStyle/>
+          <a:p>
+            <a:r>
+              <a:rPr lang="en-US" sz="2000" dirty="0"/>
+              <a:t>Through preliminary runs of the app on several platforms, we project that Fashion-Insta will generate:</a:t>
+            </a:r>
+          </a:p>
+          <a:p>
+            <a:endParaRPr lang="en-US" sz="2000" dirty="0"/>
+          </a:p>
+          <a:p>
+            <a:pPr marL="285750" indent="-285750">
+              <a:buFont typeface="Arial" panose="020B0604020202020204" pitchFamily="34" charset="0"/>
+              <a:buChar char="•"/>
+            </a:pPr>
+            <a:r>
+              <a:rPr lang="en-US" sz="2000" dirty="0"/>
+              <a:t>$300MM in year1</a:t>
+            </a:r>
+          </a:p>
+          <a:p>
+            <a:pPr marL="285750" indent="-285750">
+              <a:buFont typeface="Arial" panose="020B0604020202020204" pitchFamily="34" charset="0"/>
+              <a:buChar char="•"/>
+            </a:pPr>
+            <a:endParaRPr lang="en-US" sz="2000" dirty="0"/>
+          </a:p>
+          <a:p>
+            <a:pPr marL="285750" indent="-285750">
+              <a:buFont typeface="Arial" panose="020B0604020202020204" pitchFamily="34" charset="0"/>
+              <a:buChar char="•"/>
+            </a:pPr>
+            <a:r>
+              <a:rPr lang="en-US" sz="2000" dirty="0"/>
+              <a:t>$300MM in year2</a:t>
+            </a:r>
+          </a:p>
+          <a:p>
+            <a:pPr marL="285750" indent="-285750">
+              <a:buFont typeface="Arial" panose="020B0604020202020204" pitchFamily="34" charset="0"/>
+              <a:buChar char="•"/>
+            </a:pPr>
+            <a:endParaRPr lang="en-US" sz="2000" dirty="0"/>
+          </a:p>
+          <a:p>
+            <a:pPr marL="285750" indent="-285750">
+              <a:buFont typeface="Arial" panose="020B0604020202020204" pitchFamily="34" charset="0"/>
+              <a:buChar char="•"/>
+            </a:pPr>
+            <a:r>
+              <a:rPr lang="en-US" sz="2000" dirty="0"/>
+              <a:t>$400MM(year 3). </a:t>
+            </a:r>
+          </a:p>
+          <a:p>
+            <a:pPr marL="285750" indent="-285750">
+              <a:buFont typeface="Arial" panose="020B0604020202020204" pitchFamily="34" charset="0"/>
+              <a:buChar char="•"/>
+            </a:pPr>
+            <a:endParaRPr lang="en-US" sz="2000" dirty="0"/>
+          </a:p>
+          <a:p>
+            <a:r>
+              <a:rPr lang="en-US" sz="2000" dirty="0"/>
+              <a:t>The is a clear pattern in sales and profit growth.</a:t>
+            </a:r>
+          </a:p>
+        </p:txBody>
+      </p:sp>
+      <p:pic>
+        <p:nvPicPr>
+          <p:cNvPr id="9" name="Picture 8">
+            <a:extLst>
+              <a:ext uri="{FF2B5EF4-FFF2-40B4-BE49-F238E27FC236}">
+                <a16:creationId xmlns:a16="http://schemas.microsoft.com/office/drawing/2014/main" id="{E90A4645-E564-AE49-0E23-DA13F31395CA}"/>
+              </a:ext>
+            </a:extLst>
+          </p:cNvPr>
+          <p:cNvPicPr>
+            <a:picLocks noChangeAspect="1"/>
+          </p:cNvPicPr>
+          <p:nvPr/>
+        </p:nvPicPr>
+        <p:blipFill>
+          <a:blip r:embed="rId2"/>
+          <a:stretch>
+            <a:fillRect/>
+          </a:stretch>
+        </p:blipFill>
+        <p:spPr>
+          <a:xfrm>
+            <a:off x="4751033" y="876301"/>
+            <a:ext cx="6897398" cy="5321299"/>
+          </a:xfrm>
+          <a:prstGeom prst="rect">
+            <a:avLst/>
+          </a:prstGeom>
+        </p:spPr>
+      </p:pic>
     </p:spTree>
     <p:extLst>
       <p:ext uri="{BB962C8B-B14F-4D97-AF65-F5344CB8AC3E}">
@@ -33302,12 +29258,45 @@
           <a:chExt cx="0" cy="0"/>
         </a:xfrm>
       </p:grpSpPr>
-      <p:sp>
-        <p:nvSpPr>
-          <p:cNvPr id="2" name="Title 1">
-            <a:extLst>
-              <a:ext uri="{FF2B5EF4-FFF2-40B4-BE49-F238E27FC236}">
-                <a16:creationId xmlns:a16="http://schemas.microsoft.com/office/drawing/2014/main" id="{C7B0527F-A8AB-068C-8F5B-115DCB66A071}"/>
+      <p:pic>
+        <p:nvPicPr>
+          <p:cNvPr id="8" name="Content Placeholder 7">
+            <a:extLst>
+              <a:ext uri="{FF2B5EF4-FFF2-40B4-BE49-F238E27FC236}">
+                <a16:creationId xmlns:a16="http://schemas.microsoft.com/office/drawing/2014/main" id="{B6BD5A05-6230-D62B-6777-84C6A29B3F9A}"/>
+              </a:ext>
+            </a:extLst>
+          </p:cNvPr>
+          <p:cNvPicPr>
+            <a:picLocks noGrp="1" noChangeAspect="1"/>
+          </p:cNvPicPr>
+          <p:nvPr>
+            <p:ph idx="1"/>
+          </p:nvPr>
+        </p:nvPicPr>
+        <p:blipFill>
+          <a:blip r:embed="rId2"/>
+          <a:stretch>
+            <a:fillRect/>
+          </a:stretch>
+        </p:blipFill>
+        <p:spPr>
+          <a:xfrm>
+            <a:off x="1023188" y="68263"/>
+            <a:ext cx="10145624" cy="6721475"/>
+          </a:xfrm>
+          <a:prstGeom prst="rect">
+            <a:avLst/>
+          </a:prstGeom>
+          <a:noFill/>
+        </p:spPr>
+      </p:pic>
+      <p:sp>
+        <p:nvSpPr>
+          <p:cNvPr id="4" name="Date Placeholder 3" hidden="1">
+            <a:extLst>
+              <a:ext uri="{FF2B5EF4-FFF2-40B4-BE49-F238E27FC236}">
+                <a16:creationId xmlns:a16="http://schemas.microsoft.com/office/drawing/2014/main" id="{E2A27FCE-F76A-183B-57D8-F3EFBCEEC802}"/>
               </a:ext>
             </a:extLst>
           </p:cNvPr>
@@ -33315,7 +29304,7 @@
             <a:spLocks noGrp="1"/>
           </p:cNvSpPr>
           <p:nvPr>
-            <p:ph type="title"/>
+            <p:ph type="dt" sz="half" idx="10"/>
           </p:nvPr>
         </p:nvSpPr>
         <p:spPr/>
@@ -33323,6 +29312,114 @@
           <a:bodyPr/>
           <a:lstStyle/>
           <a:p>
+            <a:pPr>
+              <a:spcAft>
+                <a:spcPts val="600"/>
+              </a:spcAft>
+            </a:pPr>
+            <a:fld id="{FE21D4C7-8630-4B98-978C-30388BBD4EE8}" type="datetime1">
+              <a:rPr lang="en-US" smtClean="0"/>
+              <a:pPr>
+                <a:spcAft>
+                  <a:spcPts val="600"/>
+                </a:spcAft>
+              </a:pPr>
+              <a:t>1/14/2026</a:t>
+            </a:fld>
+            <a:endParaRPr lang="en-US"/>
+          </a:p>
+        </p:txBody>
+      </p:sp>
+      <p:sp>
+        <p:nvSpPr>
+          <p:cNvPr id="6" name="Slide Number Placeholder 5" hidden="1">
+            <a:extLst>
+              <a:ext uri="{FF2B5EF4-FFF2-40B4-BE49-F238E27FC236}">
+                <a16:creationId xmlns:a16="http://schemas.microsoft.com/office/drawing/2014/main" id="{1A271809-2016-4388-EE6A-FFBF3E8C05E5}"/>
+              </a:ext>
+            </a:extLst>
+          </p:cNvPr>
+          <p:cNvSpPr>
+            <a:spLocks noGrp="1"/>
+          </p:cNvSpPr>
+          <p:nvPr>
+            <p:ph type="sldNum" sz="quarter" idx="12"/>
+          </p:nvPr>
+        </p:nvSpPr>
+        <p:spPr/>
+        <p:txBody>
+          <a:bodyPr/>
+          <a:lstStyle/>
+          <a:p>
+            <a:pPr>
+              <a:spcAft>
+                <a:spcPts val="600"/>
+              </a:spcAft>
+            </a:pPr>
+            <a:fld id="{84C450F2-3BB4-4AE4-8A35-A9D7AEA4C850}" type="slidenum">
+              <a:rPr lang="en-US" smtClean="0"/>
+              <a:pPr>
+                <a:spcAft>
+                  <a:spcPts val="600"/>
+                </a:spcAft>
+              </a:pPr>
+              <a:t>12</a:t>
+            </a:fld>
+            <a:endParaRPr lang="en-US"/>
+          </a:p>
+        </p:txBody>
+      </p:sp>
+    </p:spTree>
+    <p:extLst>
+      <p:ext uri="{BB962C8B-B14F-4D97-AF65-F5344CB8AC3E}">
+        <p14:creationId xmlns:p14="http://schemas.microsoft.com/office/powerpoint/2010/main" val="881761004"/>
+      </p:ext>
+    </p:extLst>
+  </p:cSld>
+  <p:clrMapOvr>
+    <a:masterClrMapping/>
+  </p:clrMapOvr>
+</p:sld>
+</file>
+
+<file path=ppt/slides/slide13.xml><?xml version="1.0" encoding="utf-8"?>
+<p:sld xmlns:a="http://schemas.openxmlformats.org/drawingml/2006/main" xmlns:r="http://schemas.openxmlformats.org/officeDocument/2006/relationships" xmlns:p="http://schemas.openxmlformats.org/presentationml/2006/main">
+  <p:cSld>
+    <p:spTree>
+      <p:nvGrpSpPr>
+        <p:cNvPr id="1" name=""/>
+        <p:cNvGrpSpPr/>
+        <p:nvPr/>
+      </p:nvGrpSpPr>
+      <p:grpSpPr>
+        <a:xfrm>
+          <a:off x="0" y="0"/>
+          <a:ext cx="0" cy="0"/>
+          <a:chOff x="0" y="0"/>
+          <a:chExt cx="0" cy="0"/>
+        </a:xfrm>
+      </p:grpSpPr>
+      <p:sp>
+        <p:nvSpPr>
+          <p:cNvPr id="2" name="Title 1">
+            <a:extLst>
+              <a:ext uri="{FF2B5EF4-FFF2-40B4-BE49-F238E27FC236}">
+                <a16:creationId xmlns:a16="http://schemas.microsoft.com/office/drawing/2014/main" id="{C7B0527F-A8AB-068C-8F5B-115DCB66A071}"/>
+              </a:ext>
+            </a:extLst>
+          </p:cNvPr>
+          <p:cNvSpPr>
+            <a:spLocks noGrp="1"/>
+          </p:cNvSpPr>
+          <p:nvPr>
+            <p:ph type="title"/>
+          </p:nvPr>
+        </p:nvSpPr>
+        <p:spPr/>
+        <p:txBody>
+          <a:bodyPr/>
+          <a:lstStyle/>
+          <a:p>
             <a:r>
               <a:rPr lang="en-US" dirty="0"/>
               <a:t>milestones</a:t>
@@ -33352,12 +29449,8 @@
           <a:lstStyle/>
           <a:p>
             <a:r>
-              <a:rPr lang="en-US" dirty="0" err="1"/>
-              <a:t>Reasearch</a:t>
-            </a:r>
-            <a:r>
               <a:rPr lang="en-US" dirty="0"/>
-              <a:t> on App design and requirements </a:t>
+              <a:t>Research on App design and requirements  </a:t>
             </a:r>
           </a:p>
           <a:p>
@@ -33374,10 +29467,9 @@
           </a:p>
           <a:p>
             <a:r>
-              <a:rPr lang="en-US"/>
+              <a:rPr lang="en-US" dirty="0"/>
               <a:t>Final Demo</a:t>
             </a:r>
-            <a:endParaRPr lang="en-US" dirty="0"/>
           </a:p>
           <a:p>
             <a:r>
@@ -33428,7 +29520,7 @@
           <a:p>
             <a:fld id="{FE21D4C7-8630-4B98-978C-30388BBD4EE8}" type="datetime1">
               <a:rPr lang="en-US" smtClean="0"/>
-              <a:t>1/9/2026</a:t>
+              <a:t>1/14/2026</a:t>
             </a:fld>
             <a:endParaRPr lang="en-US" dirty="0"/>
           </a:p>
@@ -33457,7 +29549,7 @@
           <a:p>
             <a:fld id="{84C450F2-3BB4-4AE4-8A35-A9D7AEA4C850}" type="slidenum">
               <a:rPr lang="en-US" smtClean="0"/>
-              <a:t>12</a:t>
+              <a:t>13</a:t>
             </a:fld>
             <a:endParaRPr lang="en-US" dirty="0"/>
           </a:p>
@@ -33476,7 +29568,1065 @@
 </p:sld>
 </file>
 
-<file path=ppt/slides/slide13.xml><?xml version="1.0" encoding="utf-8"?>
+<file path=ppt/slides/slide14.xml><?xml version="1.0" encoding="utf-8"?>
+<p:sld xmlns:a="http://schemas.openxmlformats.org/drawingml/2006/main" xmlns:r="http://schemas.openxmlformats.org/officeDocument/2006/relationships" xmlns:p="http://schemas.openxmlformats.org/presentationml/2006/main">
+  <p:cSld>
+    <p:spTree>
+      <p:nvGrpSpPr>
+        <p:cNvPr id="1" name=""/>
+        <p:cNvGrpSpPr/>
+        <p:nvPr/>
+      </p:nvGrpSpPr>
+      <p:grpSpPr>
+        <a:xfrm>
+          <a:off x="0" y="0"/>
+          <a:ext cx="0" cy="0"/>
+          <a:chOff x="0" y="0"/>
+          <a:chExt cx="0" cy="0"/>
+        </a:xfrm>
+      </p:grpSpPr>
+      <p:sp>
+        <p:nvSpPr>
+          <p:cNvPr id="2" name="Title 1">
+            <a:extLst>
+              <a:ext uri="{FF2B5EF4-FFF2-40B4-BE49-F238E27FC236}">
+                <a16:creationId xmlns:a16="http://schemas.microsoft.com/office/drawing/2014/main" id="{DCA7EF93-EC69-D1FA-F75F-7ABC23196D0A}"/>
+              </a:ext>
+            </a:extLst>
+          </p:cNvPr>
+          <p:cNvSpPr>
+            <a:spLocks noGrp="1"/>
+          </p:cNvSpPr>
+          <p:nvPr>
+            <p:ph type="title"/>
+          </p:nvPr>
+        </p:nvSpPr>
+        <p:spPr/>
+        <p:txBody>
+          <a:bodyPr/>
+          <a:lstStyle/>
+          <a:p>
+            <a:r>
+              <a:rPr lang="en-US" dirty="0"/>
+              <a:t>AGILE Methodology</a:t>
+            </a:r>
+          </a:p>
+        </p:txBody>
+      </p:sp>
+      <p:sp>
+        <p:nvSpPr>
+          <p:cNvPr id="3" name="Content Placeholder 2">
+            <a:extLst>
+              <a:ext uri="{FF2B5EF4-FFF2-40B4-BE49-F238E27FC236}">
+                <a16:creationId xmlns:a16="http://schemas.microsoft.com/office/drawing/2014/main" id="{6A624C94-AA80-6DCA-4B0E-A7DF2E716F59}"/>
+              </a:ext>
+            </a:extLst>
+          </p:cNvPr>
+          <p:cNvSpPr>
+            <a:spLocks noGrp="1"/>
+          </p:cNvSpPr>
+          <p:nvPr>
+            <p:ph idx="1"/>
+          </p:nvPr>
+        </p:nvSpPr>
+        <p:spPr>
+          <a:xfrm>
+            <a:off x="352515" y="1258403"/>
+            <a:ext cx="11125032" cy="4905116"/>
+          </a:xfrm>
+        </p:spPr>
+        <p:txBody>
+          <a:bodyPr>
+            <a:normAutofit/>
+          </a:bodyPr>
+          <a:lstStyle/>
+          <a:p>
+            <a:pPr marL="0" indent="0">
+              <a:buNone/>
+            </a:pPr>
+            <a:r>
+              <a:rPr lang="en-US" sz="2000" dirty="0"/>
+              <a:t>A project management framework that emphasizes iterative development, collaboration, flexibility and customer feedback allowing teams to adapt to changing requirements and deliver high-quality products efficiently.</a:t>
+            </a:r>
+          </a:p>
+          <a:p>
+            <a:pPr marL="0" indent="0">
+              <a:buNone/>
+            </a:pPr>
+            <a:r>
+              <a:rPr lang="en-US" sz="2000" dirty="0"/>
+              <a:t>The Agile methodology approach breaks projects into smaller manageable phases also known as sprints.</a:t>
+            </a:r>
+          </a:p>
+          <a:p>
+            <a:pPr marL="0" indent="0">
+              <a:buNone/>
+            </a:pPr>
+            <a:r>
+              <a:rPr lang="en-US" sz="2000" dirty="0"/>
+              <a:t>There are three Agile frameworks</a:t>
+            </a:r>
+          </a:p>
+          <a:p>
+            <a:pPr lvl="1"/>
+            <a:r>
+              <a:rPr lang="en-US" sz="1800" dirty="0"/>
+              <a:t>Scrum</a:t>
+            </a:r>
+          </a:p>
+          <a:p>
+            <a:pPr lvl="1"/>
+            <a:r>
+              <a:rPr lang="en-US" sz="1800" dirty="0"/>
+              <a:t>Kanban</a:t>
+            </a:r>
+          </a:p>
+          <a:p>
+            <a:pPr lvl="1"/>
+            <a:r>
+              <a:rPr lang="en-US" sz="1800" dirty="0"/>
+              <a:t>Extreme Programing (XP)</a:t>
+            </a:r>
+          </a:p>
+        </p:txBody>
+      </p:sp>
+      <p:sp>
+        <p:nvSpPr>
+          <p:cNvPr id="4" name="Date Placeholder 3">
+            <a:extLst>
+              <a:ext uri="{FF2B5EF4-FFF2-40B4-BE49-F238E27FC236}">
+                <a16:creationId xmlns:a16="http://schemas.microsoft.com/office/drawing/2014/main" id="{D13517B7-12FC-AB3D-BFA8-D9D3AD287791}"/>
+              </a:ext>
+            </a:extLst>
+          </p:cNvPr>
+          <p:cNvSpPr>
+            <a:spLocks noGrp="1"/>
+          </p:cNvSpPr>
+          <p:nvPr>
+            <p:ph type="dt" sz="half" idx="10"/>
+          </p:nvPr>
+        </p:nvSpPr>
+        <p:spPr/>
+        <p:txBody>
+          <a:bodyPr/>
+          <a:lstStyle/>
+          <a:p>
+            <a:fld id="{FE21D4C7-8630-4B98-978C-30388BBD4EE8}" type="datetime1">
+              <a:rPr lang="en-US" smtClean="0"/>
+              <a:t>1/14/2026</a:t>
+            </a:fld>
+            <a:endParaRPr lang="en-US" dirty="0"/>
+          </a:p>
+        </p:txBody>
+      </p:sp>
+      <p:sp>
+        <p:nvSpPr>
+          <p:cNvPr id="6" name="Slide Number Placeholder 5">
+            <a:extLst>
+              <a:ext uri="{FF2B5EF4-FFF2-40B4-BE49-F238E27FC236}">
+                <a16:creationId xmlns:a16="http://schemas.microsoft.com/office/drawing/2014/main" id="{AAC84777-4E2C-5339-3B6F-8F21D1BD2F1B}"/>
+              </a:ext>
+            </a:extLst>
+          </p:cNvPr>
+          <p:cNvSpPr>
+            <a:spLocks noGrp="1"/>
+          </p:cNvSpPr>
+          <p:nvPr>
+            <p:ph type="sldNum" sz="quarter" idx="12"/>
+          </p:nvPr>
+        </p:nvSpPr>
+        <p:spPr/>
+        <p:txBody>
+          <a:bodyPr/>
+          <a:lstStyle/>
+          <a:p>
+            <a:fld id="{84C450F2-3BB4-4AE4-8A35-A9D7AEA4C850}" type="slidenum">
+              <a:rPr lang="en-US" smtClean="0"/>
+              <a:t>14</a:t>
+            </a:fld>
+            <a:endParaRPr lang="en-US" dirty="0"/>
+          </a:p>
+        </p:txBody>
+      </p:sp>
+      <p:pic>
+        <p:nvPicPr>
+          <p:cNvPr id="5" name="Picture 2" descr="Agile-Development-Stages">
+            <a:extLst>
+              <a:ext uri="{FF2B5EF4-FFF2-40B4-BE49-F238E27FC236}">
+                <a16:creationId xmlns:a16="http://schemas.microsoft.com/office/drawing/2014/main" id="{778CB172-CC3E-8BC8-F11C-E12F89D8617F}"/>
+              </a:ext>
+            </a:extLst>
+          </p:cNvPr>
+          <p:cNvPicPr>
+            <a:picLocks noChangeAspect="1" noChangeArrowheads="1"/>
+          </p:cNvPicPr>
+          <p:nvPr/>
+        </p:nvPicPr>
+        <p:blipFill>
+          <a:blip r:embed="rId2">
+            <a:extLst>
+              <a:ext uri="{28A0092B-C50C-407E-A947-70E740481C1C}">
+                <a14:useLocalDpi xmlns:a14="http://schemas.microsoft.com/office/drawing/2010/main" val="0"/>
+              </a:ext>
+            </a:extLst>
+          </a:blip>
+          <a:srcRect/>
+          <a:stretch>
+            <a:fillRect/>
+          </a:stretch>
+        </p:blipFill>
+        <p:spPr bwMode="auto">
+          <a:xfrm>
+            <a:off x="5727509" y="3155243"/>
+            <a:ext cx="5615804" cy="3122727"/>
+          </a:xfrm>
+          <a:prstGeom prst="rect">
+            <a:avLst/>
+          </a:prstGeom>
+          <a:noFill/>
+          <a:extLst>
+            <a:ext uri="{909E8E84-426E-40DD-AFC4-6F175D3DCCD1}">
+              <a14:hiddenFill xmlns:a14="http://schemas.microsoft.com/office/drawing/2010/main">
+                <a:solidFill>
+                  <a:srgbClr val="FFFFFF"/>
+                </a:solidFill>
+              </a14:hiddenFill>
+            </a:ext>
+          </a:extLst>
+        </p:spPr>
+      </p:pic>
+    </p:spTree>
+    <p:extLst>
+      <p:ext uri="{BB962C8B-B14F-4D97-AF65-F5344CB8AC3E}">
+        <p14:creationId xmlns:p14="http://schemas.microsoft.com/office/powerpoint/2010/main" val="3673295186"/>
+      </p:ext>
+    </p:extLst>
+  </p:cSld>
+  <p:clrMapOvr>
+    <a:masterClrMapping/>
+  </p:clrMapOvr>
+</p:sld>
+</file>
+
+<file path=ppt/slides/slide15.xml><?xml version="1.0" encoding="utf-8"?>
+<p:sld xmlns:a="http://schemas.openxmlformats.org/drawingml/2006/main" xmlns:r="http://schemas.openxmlformats.org/officeDocument/2006/relationships" xmlns:p="http://schemas.openxmlformats.org/presentationml/2006/main">
+  <p:cSld>
+    <p:spTree>
+      <p:nvGrpSpPr>
+        <p:cNvPr id="1" name=""/>
+        <p:cNvGrpSpPr/>
+        <p:nvPr/>
+      </p:nvGrpSpPr>
+      <p:grpSpPr>
+        <a:xfrm>
+          <a:off x="0" y="0"/>
+          <a:ext cx="0" cy="0"/>
+          <a:chOff x="0" y="0"/>
+          <a:chExt cx="0" cy="0"/>
+        </a:xfrm>
+      </p:grpSpPr>
+      <p:sp>
+        <p:nvSpPr>
+          <p:cNvPr id="2" name="Title 1">
+            <a:extLst>
+              <a:ext uri="{FF2B5EF4-FFF2-40B4-BE49-F238E27FC236}">
+                <a16:creationId xmlns:a16="http://schemas.microsoft.com/office/drawing/2014/main" id="{BE9CBC53-77EE-07E6-6E64-FE1885EFFAAE}"/>
+              </a:ext>
+            </a:extLst>
+          </p:cNvPr>
+          <p:cNvSpPr>
+            <a:spLocks noGrp="1"/>
+          </p:cNvSpPr>
+          <p:nvPr>
+            <p:ph type="title"/>
+          </p:nvPr>
+        </p:nvSpPr>
+        <p:spPr/>
+        <p:txBody>
+          <a:bodyPr/>
+          <a:lstStyle/>
+          <a:p>
+            <a:r>
+              <a:rPr lang="en-US" dirty="0"/>
+              <a:t>Agile manifesto</a:t>
+            </a:r>
+          </a:p>
+        </p:txBody>
+      </p:sp>
+      <p:sp>
+        <p:nvSpPr>
+          <p:cNvPr id="3" name="Content Placeholder 2">
+            <a:extLst>
+              <a:ext uri="{FF2B5EF4-FFF2-40B4-BE49-F238E27FC236}">
+                <a16:creationId xmlns:a16="http://schemas.microsoft.com/office/drawing/2014/main" id="{20B277CA-A1A4-6C92-6349-F9186DFB3572}"/>
+              </a:ext>
+            </a:extLst>
+          </p:cNvPr>
+          <p:cNvSpPr>
+            <a:spLocks noGrp="1"/>
+          </p:cNvSpPr>
+          <p:nvPr>
+            <p:ph idx="1"/>
+          </p:nvPr>
+        </p:nvSpPr>
+        <p:spPr/>
+        <p:txBody>
+          <a:bodyPr>
+            <a:noAutofit/>
+          </a:bodyPr>
+          <a:lstStyle/>
+          <a:p>
+            <a:pPr marL="0" indent="0" fontAlgn="ctr">
+              <a:buNone/>
+            </a:pPr>
+            <a:r>
+              <a:rPr lang="en-US" sz="2000" dirty="0"/>
+              <a:t>The guiding principles of the agile methodology. Consist of the following four principles</a:t>
+            </a:r>
+          </a:p>
+          <a:p>
+            <a:pPr fontAlgn="ctr">
+              <a:buFont typeface="+mj-lt"/>
+              <a:buAutoNum type="arabicPeriod"/>
+            </a:pPr>
+            <a:r>
+              <a:rPr lang="en-US" sz="2000" b="1" dirty="0"/>
+              <a:t>People over Processes</a:t>
+            </a:r>
+          </a:p>
+          <a:p>
+            <a:pPr lvl="1"/>
+            <a:r>
+              <a:rPr lang="en-US" sz="1400" dirty="0"/>
+              <a:t>Individuals and interactions over processes and tools.</a:t>
+            </a:r>
+          </a:p>
+          <a:p>
+            <a:pPr lvl="1"/>
+            <a:r>
+              <a:rPr lang="en-US" sz="1400" dirty="0"/>
+              <a:t>Emphasizes teamwork and collaboration </a:t>
+            </a:r>
+          </a:p>
+          <a:p>
+            <a:pPr fontAlgn="ctr">
+              <a:buFont typeface="+mj-lt"/>
+              <a:buAutoNum type="arabicPeriod"/>
+            </a:pPr>
+            <a:r>
+              <a:rPr lang="en-US" sz="2000" b="1" dirty="0"/>
+              <a:t>Working Software over Documentation</a:t>
+            </a:r>
+          </a:p>
+          <a:p>
+            <a:pPr lvl="1"/>
+            <a:r>
+              <a:rPr lang="en-US" sz="1400" dirty="0"/>
+              <a:t>Working product over comprehensive documentation</a:t>
+            </a:r>
+          </a:p>
+          <a:p>
+            <a:pPr lvl="1"/>
+            <a:r>
+              <a:rPr lang="en-US" sz="1400" dirty="0"/>
+              <a:t>Focus on delivering working/functional products over lengthy documentation. </a:t>
+            </a:r>
+          </a:p>
+          <a:p>
+            <a:pPr fontAlgn="ctr">
+              <a:buFont typeface="+mj-lt"/>
+              <a:buAutoNum type="arabicPeriod"/>
+            </a:pPr>
+            <a:r>
+              <a:rPr lang="en-US" sz="2000" b="1" dirty="0"/>
+              <a:t>Collaboration over Contracts</a:t>
+            </a:r>
+          </a:p>
+          <a:p>
+            <a:pPr lvl="1"/>
+            <a:r>
+              <a:rPr lang="en-US" sz="1400" dirty="0"/>
+              <a:t>Customer collaboration over contract negotiation</a:t>
+            </a:r>
+          </a:p>
+          <a:p>
+            <a:pPr lvl="1"/>
+            <a:r>
+              <a:rPr lang="en-US" sz="1400" dirty="0"/>
+              <a:t>Close engagement with customer to ensure their requirements and needs are met. </a:t>
+            </a:r>
+          </a:p>
+          <a:p>
+            <a:pPr>
+              <a:buFont typeface="+mj-lt"/>
+              <a:buAutoNum type="arabicPeriod"/>
+            </a:pPr>
+            <a:r>
+              <a:rPr lang="en-US" sz="2000" b="1" dirty="0"/>
+              <a:t>Responding to change over following a Plan</a:t>
+            </a:r>
+          </a:p>
+          <a:p>
+            <a:pPr lvl="1"/>
+            <a:r>
+              <a:rPr lang="en-US" sz="1400" dirty="0"/>
+              <a:t>Responding to change over following a plan</a:t>
+            </a:r>
+          </a:p>
+          <a:p>
+            <a:pPr lvl="1"/>
+            <a:r>
+              <a:rPr lang="en-US" sz="1400" dirty="0"/>
+              <a:t>Allows team to shift/pivot as project requirements change without derailing the project.</a:t>
+            </a:r>
+          </a:p>
+        </p:txBody>
+      </p:sp>
+      <p:sp>
+        <p:nvSpPr>
+          <p:cNvPr id="4" name="Date Placeholder 3">
+            <a:extLst>
+              <a:ext uri="{FF2B5EF4-FFF2-40B4-BE49-F238E27FC236}">
+                <a16:creationId xmlns:a16="http://schemas.microsoft.com/office/drawing/2014/main" id="{1B23CB23-8330-A2F6-6E34-CEEF35D497E2}"/>
+              </a:ext>
+            </a:extLst>
+          </p:cNvPr>
+          <p:cNvSpPr>
+            <a:spLocks noGrp="1"/>
+          </p:cNvSpPr>
+          <p:nvPr>
+            <p:ph type="dt" sz="half" idx="10"/>
+          </p:nvPr>
+        </p:nvSpPr>
+        <p:spPr/>
+        <p:txBody>
+          <a:bodyPr/>
+          <a:lstStyle/>
+          <a:p>
+            <a:fld id="{FE21D4C7-8630-4B98-978C-30388BBD4EE8}" type="datetime1">
+              <a:rPr lang="en-US" smtClean="0"/>
+              <a:t>1/14/2026</a:t>
+            </a:fld>
+            <a:endParaRPr lang="en-US" dirty="0"/>
+          </a:p>
+        </p:txBody>
+      </p:sp>
+      <p:sp>
+        <p:nvSpPr>
+          <p:cNvPr id="6" name="Slide Number Placeholder 5">
+            <a:extLst>
+              <a:ext uri="{FF2B5EF4-FFF2-40B4-BE49-F238E27FC236}">
+                <a16:creationId xmlns:a16="http://schemas.microsoft.com/office/drawing/2014/main" id="{A008F10D-56D8-BED0-D780-1ED72032E28A}"/>
+              </a:ext>
+            </a:extLst>
+          </p:cNvPr>
+          <p:cNvSpPr>
+            <a:spLocks noGrp="1"/>
+          </p:cNvSpPr>
+          <p:nvPr>
+            <p:ph type="sldNum" sz="quarter" idx="12"/>
+          </p:nvPr>
+        </p:nvSpPr>
+        <p:spPr/>
+        <p:txBody>
+          <a:bodyPr/>
+          <a:lstStyle/>
+          <a:p>
+            <a:fld id="{84C450F2-3BB4-4AE4-8A35-A9D7AEA4C850}" type="slidenum">
+              <a:rPr lang="en-US" smtClean="0"/>
+              <a:t>15</a:t>
+            </a:fld>
+            <a:endParaRPr lang="en-US" dirty="0"/>
+          </a:p>
+        </p:txBody>
+      </p:sp>
+    </p:spTree>
+    <p:extLst>
+      <p:ext uri="{BB962C8B-B14F-4D97-AF65-F5344CB8AC3E}">
+        <p14:creationId xmlns:p14="http://schemas.microsoft.com/office/powerpoint/2010/main" val="3982136859"/>
+      </p:ext>
+    </p:extLst>
+  </p:cSld>
+  <p:clrMapOvr>
+    <a:masterClrMapping/>
+  </p:clrMapOvr>
+</p:sld>
+</file>
+
+<file path=ppt/slides/slide16.xml><?xml version="1.0" encoding="utf-8"?>
+<p:sld xmlns:a="http://schemas.openxmlformats.org/drawingml/2006/main" xmlns:r="http://schemas.openxmlformats.org/officeDocument/2006/relationships" xmlns:p="http://schemas.openxmlformats.org/presentationml/2006/main">
+  <p:cSld>
+    <p:spTree>
+      <p:nvGrpSpPr>
+        <p:cNvPr id="1" name=""/>
+        <p:cNvGrpSpPr/>
+        <p:nvPr/>
+      </p:nvGrpSpPr>
+      <p:grpSpPr>
+        <a:xfrm>
+          <a:off x="0" y="0"/>
+          <a:ext cx="0" cy="0"/>
+          <a:chOff x="0" y="0"/>
+          <a:chExt cx="0" cy="0"/>
+        </a:xfrm>
+      </p:grpSpPr>
+      <p:sp>
+        <p:nvSpPr>
+          <p:cNvPr id="2" name="Title 1">
+            <a:extLst>
+              <a:ext uri="{FF2B5EF4-FFF2-40B4-BE49-F238E27FC236}">
+                <a16:creationId xmlns:a16="http://schemas.microsoft.com/office/drawing/2014/main" id="{F866BE2D-2CCC-122F-4E3E-03A27967FD7B}"/>
+              </a:ext>
+            </a:extLst>
+          </p:cNvPr>
+          <p:cNvSpPr>
+            <a:spLocks noGrp="1"/>
+          </p:cNvSpPr>
+          <p:nvPr>
+            <p:ph type="title"/>
+          </p:nvPr>
+        </p:nvSpPr>
+        <p:spPr/>
+        <p:txBody>
+          <a:bodyPr/>
+          <a:lstStyle/>
+          <a:p>
+            <a:r>
+              <a:rPr lang="en-US" dirty="0"/>
+              <a:t>12 principles of agile methodology</a:t>
+            </a:r>
+          </a:p>
+        </p:txBody>
+      </p:sp>
+      <p:sp>
+        <p:nvSpPr>
+          <p:cNvPr id="4" name="Date Placeholder 3">
+            <a:extLst>
+              <a:ext uri="{FF2B5EF4-FFF2-40B4-BE49-F238E27FC236}">
+                <a16:creationId xmlns:a16="http://schemas.microsoft.com/office/drawing/2014/main" id="{146A5F9B-06C8-1908-B0C1-931278BC5501}"/>
+              </a:ext>
+            </a:extLst>
+          </p:cNvPr>
+          <p:cNvSpPr>
+            <a:spLocks noGrp="1"/>
+          </p:cNvSpPr>
+          <p:nvPr>
+            <p:ph type="dt" sz="half" idx="10"/>
+          </p:nvPr>
+        </p:nvSpPr>
+        <p:spPr/>
+        <p:txBody>
+          <a:bodyPr/>
+          <a:lstStyle/>
+          <a:p>
+            <a:fld id="{FE21D4C7-8630-4B98-978C-30388BBD4EE8}" type="datetime1">
+              <a:rPr lang="en-US" smtClean="0"/>
+              <a:t>1/14/2026</a:t>
+            </a:fld>
+            <a:endParaRPr lang="en-US" dirty="0"/>
+          </a:p>
+        </p:txBody>
+      </p:sp>
+      <p:sp>
+        <p:nvSpPr>
+          <p:cNvPr id="6" name="Slide Number Placeholder 5">
+            <a:extLst>
+              <a:ext uri="{FF2B5EF4-FFF2-40B4-BE49-F238E27FC236}">
+                <a16:creationId xmlns:a16="http://schemas.microsoft.com/office/drawing/2014/main" id="{400E4FDD-2FBA-9373-9AD3-976A6D23BA84}"/>
+              </a:ext>
+            </a:extLst>
+          </p:cNvPr>
+          <p:cNvSpPr>
+            <a:spLocks noGrp="1"/>
+          </p:cNvSpPr>
+          <p:nvPr>
+            <p:ph type="sldNum" sz="quarter" idx="12"/>
+          </p:nvPr>
+        </p:nvSpPr>
+        <p:spPr/>
+        <p:txBody>
+          <a:bodyPr/>
+          <a:lstStyle/>
+          <a:p>
+            <a:fld id="{84C450F2-3BB4-4AE4-8A35-A9D7AEA4C850}" type="slidenum">
+              <a:rPr lang="en-US" smtClean="0"/>
+              <a:t>16</a:t>
+            </a:fld>
+            <a:endParaRPr lang="en-US" dirty="0"/>
+          </a:p>
+        </p:txBody>
+      </p:sp>
+      <p:pic>
+        <p:nvPicPr>
+          <p:cNvPr id="8" name="Content Placeholder 7">
+            <a:extLst>
+              <a:ext uri="{FF2B5EF4-FFF2-40B4-BE49-F238E27FC236}">
+                <a16:creationId xmlns:a16="http://schemas.microsoft.com/office/drawing/2014/main" id="{5DD9F5DB-0CA8-2CDC-C744-79E7733FDEE6}"/>
+              </a:ext>
+            </a:extLst>
+          </p:cNvPr>
+          <p:cNvPicPr>
+            <a:picLocks noGrp="1" noChangeAspect="1"/>
+          </p:cNvPicPr>
+          <p:nvPr>
+            <p:ph idx="1"/>
+          </p:nvPr>
+        </p:nvPicPr>
+        <p:blipFill>
+          <a:blip r:embed="rId2"/>
+          <a:stretch>
+            <a:fillRect/>
+          </a:stretch>
+        </p:blipFill>
+        <p:spPr>
+          <a:xfrm>
+            <a:off x="1852151" y="1258403"/>
+            <a:ext cx="7993627" cy="4952379"/>
+          </a:xfrm>
+          <a:prstGeom prst="rect">
+            <a:avLst/>
+          </a:prstGeom>
+        </p:spPr>
+      </p:pic>
+      <p:sp>
+        <p:nvSpPr>
+          <p:cNvPr id="9" name="TextBox 8">
+            <a:extLst>
+              <a:ext uri="{FF2B5EF4-FFF2-40B4-BE49-F238E27FC236}">
+                <a16:creationId xmlns:a16="http://schemas.microsoft.com/office/drawing/2014/main" id="{21E1BC4A-DC02-6601-370A-9611DAD60195}"/>
+              </a:ext>
+            </a:extLst>
+          </p:cNvPr>
+          <p:cNvSpPr txBox="1"/>
+          <p:nvPr/>
+        </p:nvSpPr>
+        <p:spPr>
+          <a:xfrm>
+            <a:off x="4424709" y="6210782"/>
+            <a:ext cx="3342582" cy="369332"/>
+          </a:xfrm>
+          <a:prstGeom prst="rect">
+            <a:avLst/>
+          </a:prstGeom>
+          <a:noFill/>
+        </p:spPr>
+        <p:txBody>
+          <a:bodyPr wrap="none" rtlCol="0">
+            <a:spAutoFit/>
+          </a:bodyPr>
+          <a:lstStyle/>
+          <a:p>
+            <a:r>
+              <a:rPr lang="en-US" dirty="0"/>
+              <a:t>Adopted from </a:t>
+            </a:r>
+            <a:r>
+              <a:rPr lang="en-US" dirty="0">
+                <a:hlinkClick r:id="rId3"/>
+              </a:rPr>
+              <a:t>geeksforgeeks</a:t>
+            </a:r>
+            <a:endParaRPr lang="en-US" dirty="0"/>
+          </a:p>
+        </p:txBody>
+      </p:sp>
+    </p:spTree>
+    <p:extLst>
+      <p:ext uri="{BB962C8B-B14F-4D97-AF65-F5344CB8AC3E}">
+        <p14:creationId xmlns:p14="http://schemas.microsoft.com/office/powerpoint/2010/main" val="3275857612"/>
+      </p:ext>
+    </p:extLst>
+  </p:cSld>
+  <p:clrMapOvr>
+    <a:masterClrMapping/>
+  </p:clrMapOvr>
+</p:sld>
+</file>
+
+<file path=ppt/slides/slide17.xml><?xml version="1.0" encoding="utf-8"?>
+<p:sld xmlns:a="http://schemas.openxmlformats.org/drawingml/2006/main" xmlns:r="http://schemas.openxmlformats.org/officeDocument/2006/relationships" xmlns:p="http://schemas.openxmlformats.org/presentationml/2006/main">
+  <p:cSld>
+    <p:spTree>
+      <p:nvGrpSpPr>
+        <p:cNvPr id="1" name=""/>
+        <p:cNvGrpSpPr/>
+        <p:nvPr/>
+      </p:nvGrpSpPr>
+      <p:grpSpPr>
+        <a:xfrm>
+          <a:off x="0" y="0"/>
+          <a:ext cx="0" cy="0"/>
+          <a:chOff x="0" y="0"/>
+          <a:chExt cx="0" cy="0"/>
+        </a:xfrm>
+      </p:grpSpPr>
+      <p:sp>
+        <p:nvSpPr>
+          <p:cNvPr id="2" name="Title 1">
+            <a:extLst>
+              <a:ext uri="{FF2B5EF4-FFF2-40B4-BE49-F238E27FC236}">
+                <a16:creationId xmlns:a16="http://schemas.microsoft.com/office/drawing/2014/main" id="{07638E5D-EF85-5265-BCF1-477AFFB9A476}"/>
+              </a:ext>
+            </a:extLst>
+          </p:cNvPr>
+          <p:cNvSpPr>
+            <a:spLocks noGrp="1"/>
+          </p:cNvSpPr>
+          <p:nvPr>
+            <p:ph type="title"/>
+          </p:nvPr>
+        </p:nvSpPr>
+        <p:spPr/>
+        <p:txBody>
+          <a:bodyPr/>
+          <a:lstStyle/>
+          <a:p>
+            <a:r>
+              <a:rPr lang="en-US" dirty="0"/>
+              <a:t>Benefits of agile</a:t>
+            </a:r>
+          </a:p>
+        </p:txBody>
+      </p:sp>
+      <p:sp>
+        <p:nvSpPr>
+          <p:cNvPr id="3" name="Content Placeholder 2">
+            <a:extLst>
+              <a:ext uri="{FF2B5EF4-FFF2-40B4-BE49-F238E27FC236}">
+                <a16:creationId xmlns:a16="http://schemas.microsoft.com/office/drawing/2014/main" id="{A5253791-1BCA-268D-CC30-73CC319007C3}"/>
+              </a:ext>
+            </a:extLst>
+          </p:cNvPr>
+          <p:cNvSpPr>
+            <a:spLocks noGrp="1"/>
+          </p:cNvSpPr>
+          <p:nvPr>
+            <p:ph idx="1"/>
+          </p:nvPr>
+        </p:nvSpPr>
+        <p:spPr/>
+        <p:txBody>
+          <a:bodyPr/>
+          <a:lstStyle/>
+          <a:p>
+            <a:r>
+              <a:rPr lang="en-US" b="1" dirty="0"/>
+              <a:t>Flexibility and adaptability</a:t>
+            </a:r>
+            <a:r>
+              <a:rPr lang="en-US" dirty="0"/>
+              <a:t>: Agile allows teams to respond to changes in requirements and market conditions swiftly.</a:t>
+            </a:r>
+          </a:p>
+          <a:p>
+            <a:r>
+              <a:rPr lang="en-US" b="1" dirty="0"/>
+              <a:t>Faster Delivery</a:t>
+            </a:r>
+            <a:r>
+              <a:rPr lang="en-US" dirty="0"/>
+              <a:t>: By working in short cycles, teams can deliver functional increments of the product more frequently.</a:t>
+            </a:r>
+          </a:p>
+          <a:p>
+            <a:r>
+              <a:rPr lang="en-US" b="1" dirty="0"/>
+              <a:t>Enhanced Collaboration</a:t>
+            </a:r>
+            <a:r>
+              <a:rPr lang="en-US" dirty="0"/>
+              <a:t>: Agile promotes teamwork and communication, leading to better problem-solving and innovation.</a:t>
+            </a:r>
+          </a:p>
+          <a:p>
+            <a:r>
+              <a:rPr lang="en-US" b="1" dirty="0"/>
+              <a:t>Transparency</a:t>
+            </a:r>
+            <a:r>
+              <a:rPr lang="en-US" dirty="0"/>
+              <a:t>: Agile keeps stakeholders informed at every stage, ensuring clarity and alignment.</a:t>
+            </a:r>
+          </a:p>
+          <a:p>
+            <a:r>
+              <a:rPr lang="en-US" b="1" dirty="0"/>
+              <a:t>Iterative Development</a:t>
+            </a:r>
+            <a:r>
+              <a:rPr lang="en-US" dirty="0"/>
+              <a:t>: Work is done in small, manageable steps, allowing for regular improvements and quick adjustments.</a:t>
+            </a:r>
+          </a:p>
+          <a:p>
+            <a:r>
+              <a:rPr lang="en-US" b="1" dirty="0"/>
+              <a:t>Customer-Centric</a:t>
+            </a:r>
+            <a:r>
+              <a:rPr lang="en-US" dirty="0"/>
+              <a:t>: Continuous feedback from customers ensures that the final product aligns with their needs and expectations</a:t>
+            </a:r>
+          </a:p>
+          <a:p>
+            <a:endParaRPr lang="en-US" dirty="0"/>
+          </a:p>
+        </p:txBody>
+      </p:sp>
+      <p:sp>
+        <p:nvSpPr>
+          <p:cNvPr id="4" name="Date Placeholder 3">
+            <a:extLst>
+              <a:ext uri="{FF2B5EF4-FFF2-40B4-BE49-F238E27FC236}">
+                <a16:creationId xmlns:a16="http://schemas.microsoft.com/office/drawing/2014/main" id="{838D9976-35DD-ABBF-19AC-CBDAAFB8AAD5}"/>
+              </a:ext>
+            </a:extLst>
+          </p:cNvPr>
+          <p:cNvSpPr>
+            <a:spLocks noGrp="1"/>
+          </p:cNvSpPr>
+          <p:nvPr>
+            <p:ph type="dt" sz="half" idx="10"/>
+          </p:nvPr>
+        </p:nvSpPr>
+        <p:spPr/>
+        <p:txBody>
+          <a:bodyPr/>
+          <a:lstStyle/>
+          <a:p>
+            <a:fld id="{FE21D4C7-8630-4B98-978C-30388BBD4EE8}" type="datetime1">
+              <a:rPr lang="en-US" smtClean="0"/>
+              <a:t>1/14/2026</a:t>
+            </a:fld>
+            <a:endParaRPr lang="en-US" dirty="0"/>
+          </a:p>
+        </p:txBody>
+      </p:sp>
+      <p:sp>
+        <p:nvSpPr>
+          <p:cNvPr id="6" name="Slide Number Placeholder 5">
+            <a:extLst>
+              <a:ext uri="{FF2B5EF4-FFF2-40B4-BE49-F238E27FC236}">
+                <a16:creationId xmlns:a16="http://schemas.microsoft.com/office/drawing/2014/main" id="{2B0B98B3-EF09-AD0A-4554-6993E892DA29}"/>
+              </a:ext>
+            </a:extLst>
+          </p:cNvPr>
+          <p:cNvSpPr>
+            <a:spLocks noGrp="1"/>
+          </p:cNvSpPr>
+          <p:nvPr>
+            <p:ph type="sldNum" sz="quarter" idx="12"/>
+          </p:nvPr>
+        </p:nvSpPr>
+        <p:spPr/>
+        <p:txBody>
+          <a:bodyPr/>
+          <a:lstStyle/>
+          <a:p>
+            <a:fld id="{84C450F2-3BB4-4AE4-8A35-A9D7AEA4C850}" type="slidenum">
+              <a:rPr lang="en-US" smtClean="0"/>
+              <a:t>17</a:t>
+            </a:fld>
+            <a:endParaRPr lang="en-US" dirty="0"/>
+          </a:p>
+        </p:txBody>
+      </p:sp>
+    </p:spTree>
+    <p:extLst>
+      <p:ext uri="{BB962C8B-B14F-4D97-AF65-F5344CB8AC3E}">
+        <p14:creationId xmlns:p14="http://schemas.microsoft.com/office/powerpoint/2010/main" val="524967018"/>
+      </p:ext>
+    </p:extLst>
+  </p:cSld>
+  <p:clrMapOvr>
+    <a:masterClrMapping/>
+  </p:clrMapOvr>
+</p:sld>
+</file>
+
+<file path=ppt/slides/slide18.xml><?xml version="1.0" encoding="utf-8"?>
+<p:sld xmlns:a="http://schemas.openxmlformats.org/drawingml/2006/main" xmlns:r="http://schemas.openxmlformats.org/officeDocument/2006/relationships" xmlns:p="http://schemas.openxmlformats.org/presentationml/2006/main">
+  <p:cSld>
+    <p:spTree>
+      <p:nvGrpSpPr>
+        <p:cNvPr id="1" name=""/>
+        <p:cNvGrpSpPr/>
+        <p:nvPr/>
+      </p:nvGrpSpPr>
+      <p:grpSpPr>
+        <a:xfrm>
+          <a:off x="0" y="0"/>
+          <a:ext cx="0" cy="0"/>
+          <a:chOff x="0" y="0"/>
+          <a:chExt cx="0" cy="0"/>
+        </a:xfrm>
+      </p:grpSpPr>
+      <p:sp>
+        <p:nvSpPr>
+          <p:cNvPr id="2" name="Title 1">
+            <a:extLst>
+              <a:ext uri="{FF2B5EF4-FFF2-40B4-BE49-F238E27FC236}">
+                <a16:creationId xmlns:a16="http://schemas.microsoft.com/office/drawing/2014/main" id="{6BB5C688-E2BB-C035-F03F-65029FD3CD50}"/>
+              </a:ext>
+            </a:extLst>
+          </p:cNvPr>
+          <p:cNvSpPr>
+            <a:spLocks noGrp="1"/>
+          </p:cNvSpPr>
+          <p:nvPr>
+            <p:ph type="title"/>
+          </p:nvPr>
+        </p:nvSpPr>
+        <p:spPr>
+          <a:xfrm>
+            <a:off x="431172" y="293303"/>
+            <a:ext cx="11125032" cy="621098"/>
+          </a:xfrm>
+        </p:spPr>
+        <p:txBody>
+          <a:bodyPr/>
+          <a:lstStyle/>
+          <a:p>
+            <a:r>
+              <a:rPr lang="en-US" dirty="0"/>
+              <a:t>Project backlog</a:t>
+            </a:r>
+          </a:p>
+        </p:txBody>
+      </p:sp>
+      <p:pic>
+        <p:nvPicPr>
+          <p:cNvPr id="8" name="Content Placeholder 7">
+            <a:extLst>
+              <a:ext uri="{FF2B5EF4-FFF2-40B4-BE49-F238E27FC236}">
+                <a16:creationId xmlns:a16="http://schemas.microsoft.com/office/drawing/2014/main" id="{CA12E7D4-257F-9EF7-80A3-2ABD847C926C}"/>
+              </a:ext>
+            </a:extLst>
+          </p:cNvPr>
+          <p:cNvPicPr>
+            <a:picLocks noGrp="1" noChangeAspect="1"/>
+          </p:cNvPicPr>
+          <p:nvPr>
+            <p:ph idx="1"/>
+          </p:nvPr>
+        </p:nvPicPr>
+        <p:blipFill>
+          <a:blip r:embed="rId2"/>
+          <a:stretch>
+            <a:fillRect/>
+          </a:stretch>
+        </p:blipFill>
+        <p:spPr>
+          <a:xfrm>
+            <a:off x="280959" y="914401"/>
+            <a:ext cx="11425458" cy="5348288"/>
+          </a:xfrm>
+          <a:prstGeom prst="rect">
+            <a:avLst/>
+          </a:prstGeom>
+        </p:spPr>
+      </p:pic>
+      <p:sp>
+        <p:nvSpPr>
+          <p:cNvPr id="4" name="Date Placeholder 3">
+            <a:extLst>
+              <a:ext uri="{FF2B5EF4-FFF2-40B4-BE49-F238E27FC236}">
+                <a16:creationId xmlns:a16="http://schemas.microsoft.com/office/drawing/2014/main" id="{4F3C900F-7F61-2D7E-4EBD-0CCB5AFE7CD5}"/>
+              </a:ext>
+            </a:extLst>
+          </p:cNvPr>
+          <p:cNvSpPr>
+            <a:spLocks noGrp="1"/>
+          </p:cNvSpPr>
+          <p:nvPr>
+            <p:ph type="dt" sz="half" idx="10"/>
+          </p:nvPr>
+        </p:nvSpPr>
+        <p:spPr/>
+        <p:txBody>
+          <a:bodyPr/>
+          <a:lstStyle/>
+          <a:p>
+            <a:fld id="{FE21D4C7-8630-4B98-978C-30388BBD4EE8}" type="datetime1">
+              <a:rPr lang="en-US" smtClean="0"/>
+              <a:t>1/14/2026</a:t>
+            </a:fld>
+            <a:endParaRPr lang="en-US" dirty="0"/>
+          </a:p>
+        </p:txBody>
+      </p:sp>
+      <p:sp>
+        <p:nvSpPr>
+          <p:cNvPr id="5" name="Footer Placeholder 4">
+            <a:extLst>
+              <a:ext uri="{FF2B5EF4-FFF2-40B4-BE49-F238E27FC236}">
+                <a16:creationId xmlns:a16="http://schemas.microsoft.com/office/drawing/2014/main" id="{F08C4F91-4A4E-E040-27F3-6C408B0A66AE}"/>
+              </a:ext>
+            </a:extLst>
+          </p:cNvPr>
+          <p:cNvSpPr>
+            <a:spLocks noGrp="1"/>
+          </p:cNvSpPr>
+          <p:nvPr>
+            <p:ph type="ftr" sz="quarter" idx="11"/>
+          </p:nvPr>
+        </p:nvSpPr>
+        <p:spPr/>
+        <p:txBody>
+          <a:bodyPr/>
+          <a:lstStyle/>
+          <a:p>
+            <a:r>
+              <a:rPr lang="en-US"/>
+              <a:t>Sample Footer Text</a:t>
+            </a:r>
+            <a:endParaRPr lang="en-US" dirty="0"/>
+          </a:p>
+        </p:txBody>
+      </p:sp>
+      <p:sp>
+        <p:nvSpPr>
+          <p:cNvPr id="6" name="Slide Number Placeholder 5">
+            <a:extLst>
+              <a:ext uri="{FF2B5EF4-FFF2-40B4-BE49-F238E27FC236}">
+                <a16:creationId xmlns:a16="http://schemas.microsoft.com/office/drawing/2014/main" id="{CF27AEA2-AE74-AF45-822C-3D3AA4AF8146}"/>
+              </a:ext>
+            </a:extLst>
+          </p:cNvPr>
+          <p:cNvSpPr>
+            <a:spLocks noGrp="1"/>
+          </p:cNvSpPr>
+          <p:nvPr>
+            <p:ph type="sldNum" sz="quarter" idx="12"/>
+          </p:nvPr>
+        </p:nvSpPr>
+        <p:spPr/>
+        <p:txBody>
+          <a:bodyPr/>
+          <a:lstStyle/>
+          <a:p>
+            <a:fld id="{84C450F2-3BB4-4AE4-8A35-A9D7AEA4C850}" type="slidenum">
+              <a:rPr lang="en-US" smtClean="0"/>
+              <a:t>18</a:t>
+            </a:fld>
+            <a:endParaRPr lang="en-US" dirty="0"/>
+          </a:p>
+        </p:txBody>
+      </p:sp>
+    </p:spTree>
+    <p:extLst>
+      <p:ext uri="{BB962C8B-B14F-4D97-AF65-F5344CB8AC3E}">
+        <p14:creationId xmlns:p14="http://schemas.microsoft.com/office/powerpoint/2010/main" val="3380718082"/>
+      </p:ext>
+    </p:extLst>
+  </p:cSld>
+  <p:clrMapOvr>
+    <a:masterClrMapping/>
+  </p:clrMapOvr>
+</p:sld>
+</file>
+
+<file path=ppt/slides/slide19.xml><?xml version="1.0" encoding="utf-8"?>
 <p:sld xmlns:a="http://schemas.openxmlformats.org/drawingml/2006/main" xmlns:r="http://schemas.openxmlformats.org/officeDocument/2006/relationships" xmlns:p="http://schemas.openxmlformats.org/presentationml/2006/main">
   <p:cSld>
     <p:spTree>
@@ -34381,7 +31531,7 @@
           <a:p>
             <a:fld id="{FE21D4C7-8630-4B98-978C-30388BBD4EE8}" type="datetime1">
               <a:rPr lang="en-US" smtClean="0"/>
-              <a:t>1/9/2026</a:t>
+              <a:t>1/14/2026</a:t>
             </a:fld>
             <a:endParaRPr lang="en-US" dirty="0"/>
           </a:p>
@@ -34410,7 +31560,7 @@
           <a:p>
             <a:fld id="{84C450F2-3BB4-4AE4-8A35-A9D7AEA4C850}" type="slidenum">
               <a:rPr lang="en-US" smtClean="0"/>
-              <a:t>13</a:t>
+              <a:t>19</a:t>
             </a:fld>
             <a:endParaRPr lang="en-US" dirty="0"/>
           </a:p>
@@ -34429,7 +31579,7 @@
 </p:sld>
 </file>
 
-<file path=ppt/slides/slide14.xml><?xml version="1.0" encoding="utf-8"?>
+<file path=ppt/slides/slide2.xml><?xml version="1.0" encoding="utf-8"?>
 <p:sld xmlns:a="http://schemas.openxmlformats.org/drawingml/2006/main" xmlns:r="http://schemas.openxmlformats.org/officeDocument/2006/relationships" xmlns:p="http://schemas.openxmlformats.org/presentationml/2006/main">
   <p:cSld>
     <p:spTree>
@@ -34451,7 +31601,7 @@
           <p:cNvPr id="2" name="Title 1">
             <a:extLst>
               <a:ext uri="{FF2B5EF4-FFF2-40B4-BE49-F238E27FC236}">
-                <a16:creationId xmlns:a16="http://schemas.microsoft.com/office/drawing/2014/main" id="{2FE30896-3623-346D-AC83-32580F8BBD97}"/>
+                <a16:creationId xmlns:a16="http://schemas.microsoft.com/office/drawing/2014/main" id="{B3DE9B2D-51F2-CAE3-E06D-0110EAD8EA44}"/>
               </a:ext>
             </a:extLst>
           </p:cNvPr>
@@ -34464,8 +31614,8 @@
         </p:nvSpPr>
         <p:spPr>
           <a:xfrm>
-            <a:off x="431172" y="293303"/>
-            <a:ext cx="11125032" cy="552272"/>
+            <a:off x="1228707" y="877824"/>
+            <a:ext cx="9593967" cy="855442"/>
           </a:xfrm>
         </p:spPr>
         <p:txBody>
@@ -34474,17 +31624,17 @@
           <a:p>
             <a:r>
               <a:rPr lang="en-US" dirty="0"/>
-              <a:t>Risks and mitigation plans</a:t>
-            </a:r>
-          </a:p>
-        </p:txBody>
-      </p:sp>
-      <p:sp>
-        <p:nvSpPr>
-          <p:cNvPr id="3" name="Content Placeholder 2">
-            <a:extLst>
-              <a:ext uri="{FF2B5EF4-FFF2-40B4-BE49-F238E27FC236}">
-                <a16:creationId xmlns:a16="http://schemas.microsoft.com/office/drawing/2014/main" id="{10358B91-B120-3BCE-0413-DE310654B699}"/>
+              <a:t>ideal customer profile</a:t>
+            </a:r>
+          </a:p>
+        </p:txBody>
+      </p:sp>
+      <p:sp>
+        <p:nvSpPr>
+          <p:cNvPr id="4" name="Content Placeholder 3">
+            <a:extLst>
+              <a:ext uri="{FF2B5EF4-FFF2-40B4-BE49-F238E27FC236}">
+                <a16:creationId xmlns:a16="http://schemas.microsoft.com/office/drawing/2014/main" id="{B7E2D2FD-740A-D3EE-0739-311B0DDD63C6}"/>
               </a:ext>
             </a:extLst>
           </p:cNvPr>
@@ -34492,192 +31642,100 @@
             <a:spLocks noGrp="1"/>
           </p:cNvSpPr>
           <p:nvPr>
-            <p:ph idx="1"/>
+            <p:ph sz="quarter" idx="14"/>
           </p:nvPr>
         </p:nvSpPr>
         <p:spPr>
           <a:xfrm>
-            <a:off x="431172" y="845575"/>
-            <a:ext cx="11125032" cy="5444388"/>
+            <a:off x="914808" y="2071320"/>
+            <a:ext cx="9730445" cy="3908856"/>
           </a:xfrm>
         </p:spPr>
         <p:txBody>
-          <a:bodyPr>
-            <a:normAutofit lnSpcReduction="10000"/>
-          </a:bodyPr>
-          <a:lstStyle/>
-          <a:p>
-            <a:pPr marL="0" indent="0">
-              <a:buNone/>
-            </a:pPr>
-            <a:r>
-              <a:rPr lang="en-US" b="1" dirty="0"/>
-              <a:t>1. Technical Risks</a:t>
-            </a:r>
-          </a:p>
-          <a:p>
-            <a:pPr lvl="2" fontAlgn="ctr"/>
-            <a:r>
-              <a:rPr lang="en-US" b="1" dirty="0"/>
-              <a:t>Software Bugs &amp; Integration Issues:</a:t>
-            </a:r>
-            <a:r>
-              <a:rPr lang="en-US" dirty="0"/>
-              <a:t> Problems with code quality, compatibility across devices, and integration with third-party services (Azure) can lead to crashes, poor performance, or data loss.</a:t>
-            </a:r>
-            <a:endParaRPr lang="en-US" sz="1600" dirty="0"/>
-          </a:p>
-          <a:p>
-            <a:pPr lvl="2" fontAlgn="ctr"/>
-            <a:r>
-              <a:rPr lang="en-US" b="1" dirty="0"/>
-              <a:t>Platform Compatibility:</a:t>
-            </a:r>
-            <a:r>
-              <a:rPr lang="en-US" dirty="0"/>
-              <a:t> Apps must be continually updated to remain compatible with new devices and operating systems.</a:t>
-            </a:r>
-          </a:p>
-          <a:p>
-            <a:pPr marL="0" indent="0">
-              <a:buNone/>
-            </a:pPr>
-            <a:r>
-              <a:rPr lang="en-US" sz="1500" b="1" dirty="0"/>
-              <a:t>   Mitigation:</a:t>
-            </a:r>
-            <a:endParaRPr lang="en-US" sz="1500" dirty="0"/>
-          </a:p>
-          <a:p>
-            <a:pPr lvl="2" fontAlgn="ctr"/>
-            <a:r>
-              <a:rPr lang="en-US" dirty="0"/>
-              <a:t>Comprehensive testing (unit, integration, and user acceptance).</a:t>
-            </a:r>
-            <a:endParaRPr lang="en-US" sz="1600" dirty="0"/>
-          </a:p>
-          <a:p>
-            <a:pPr lvl="2" fontAlgn="ctr"/>
-            <a:r>
-              <a:rPr lang="en-US" dirty="0"/>
-              <a:t>Use agile methodologies for iterative development and rapid bug fixes.</a:t>
-            </a:r>
-            <a:endParaRPr lang="en-US" sz="1600" dirty="0"/>
-          </a:p>
-          <a:p>
-            <a:pPr lvl="2" fontAlgn="ctr"/>
-            <a:r>
-              <a:rPr lang="en-US" dirty="0"/>
-              <a:t>Employ experienced developers and maintain clear documentation.</a:t>
-            </a:r>
-            <a:endParaRPr lang="en-US" sz="1600" dirty="0"/>
-          </a:p>
-          <a:p>
-            <a:pPr marL="0" indent="0">
-              <a:buNone/>
-            </a:pPr>
-            <a:r>
-              <a:rPr lang="en-US" b="1" dirty="0"/>
-              <a:t>2. Security &amp; Privacy Risks</a:t>
-            </a:r>
-          </a:p>
-          <a:p>
-            <a:pPr lvl="2" fontAlgn="ctr"/>
-            <a:r>
-              <a:rPr lang="en-US" b="1" dirty="0"/>
-              <a:t>Data Breaches:</a:t>
-            </a:r>
-            <a:r>
-              <a:rPr lang="en-US" dirty="0"/>
-              <a:t> Mobile apps often handle sensitive user data (personal info, payment details). Insecure data storage, weak encryption, and inadequate authentication can expose users to cyber threats.</a:t>
-            </a:r>
-            <a:endParaRPr lang="en-US" sz="1600" dirty="0"/>
-          </a:p>
-          <a:p>
-            <a:pPr lvl="2" fontAlgn="ctr"/>
-            <a:r>
-              <a:rPr lang="en-US" b="1" dirty="0"/>
-              <a:t>Regulatory Compliance:</a:t>
-            </a:r>
-            <a:r>
-              <a:rPr lang="en-US" dirty="0"/>
-              <a:t> Failure to comply with privacy laws (GDPR, CCPA) can result in legal and financial penalties.</a:t>
-            </a:r>
-            <a:endParaRPr lang="en-US" sz="1600" dirty="0"/>
-          </a:p>
-          <a:p>
-            <a:pPr marL="0" indent="0">
-              <a:buNone/>
-            </a:pPr>
-            <a:r>
-              <a:rPr lang="en-US" sz="1500" b="1" dirty="0"/>
-              <a:t>  Mitigation:</a:t>
-            </a:r>
-          </a:p>
-          <a:p>
-            <a:pPr lvl="2" fontAlgn="ctr"/>
-            <a:r>
-              <a:rPr lang="en-US" dirty="0"/>
-              <a:t>Implement robust encryption and secure data transmission protocols.</a:t>
-            </a:r>
-            <a:endParaRPr lang="en-US" sz="1600" dirty="0"/>
-          </a:p>
-          <a:p>
-            <a:pPr lvl="2" fontAlgn="ctr"/>
-            <a:r>
-              <a:rPr lang="en-US" dirty="0"/>
-              <a:t>Use strong authentication mechanisms (multi-factor authentication example Azure).</a:t>
-            </a:r>
-            <a:endParaRPr lang="en-US" sz="1600" dirty="0"/>
-          </a:p>
-          <a:p>
-            <a:pPr lvl="2" fontAlgn="ctr"/>
-            <a:r>
-              <a:rPr lang="en-US" dirty="0"/>
-              <a:t>Regularly update security protocols and conduct vulnerability assessments.</a:t>
-            </a:r>
-            <a:endParaRPr lang="en-US" sz="1600" dirty="0"/>
-          </a:p>
-          <a:p>
-            <a:pPr lvl="2" fontAlgn="ctr"/>
-            <a:r>
-              <a:rPr lang="en-US" dirty="0"/>
-              <a:t>Ensure compliance with relevant regulations and provide clear privacy policies.</a:t>
-            </a:r>
-            <a:endParaRPr lang="en-US" sz="1600" dirty="0"/>
-          </a:p>
-          <a:p>
-            <a:pPr marL="228600" lvl="1" indent="0" fontAlgn="ctr">
-              <a:buNone/>
-            </a:pPr>
-            <a:endParaRPr lang="en-US" sz="1800" dirty="0"/>
-          </a:p>
-        </p:txBody>
-      </p:sp>
-      <p:sp>
-        <p:nvSpPr>
-          <p:cNvPr id="4" name="Date Placeholder 3">
-            <a:extLst>
-              <a:ext uri="{FF2B5EF4-FFF2-40B4-BE49-F238E27FC236}">
-                <a16:creationId xmlns:a16="http://schemas.microsoft.com/office/drawing/2014/main" id="{7FFC0EC0-4ACF-F6D9-BE44-224BD601DE1E}"/>
-              </a:ext>
-            </a:extLst>
-          </p:cNvPr>
-          <p:cNvSpPr>
-            <a:spLocks noGrp="1"/>
-          </p:cNvSpPr>
-          <p:nvPr>
-            <p:ph type="dt" sz="half" idx="10"/>
-          </p:nvPr>
-        </p:nvSpPr>
-        <p:spPr/>
-        <p:txBody>
           <a:bodyPr/>
           <a:lstStyle/>
           <a:p>
-            <a:fld id="{FE21D4C7-8630-4B98-978C-30388BBD4EE8}" type="datetime1">
+            <a:r>
+              <a:rPr lang="en-US" dirty="0"/>
+              <a:t>Person of target – People who shop at fashion-insta.</a:t>
+            </a:r>
+          </a:p>
+          <a:p>
+            <a:endParaRPr lang="en-US" dirty="0"/>
+          </a:p>
+          <a:p>
+            <a:r>
+              <a:rPr lang="en-US" dirty="0"/>
+              <a:t>The Problem:</a:t>
+            </a:r>
+          </a:p>
+          <a:p>
+            <a:pPr lvl="1"/>
+            <a:r>
+              <a:rPr lang="en-US" dirty="0"/>
+              <a:t>Time consuming and difficult to navigate Fashion-Insta large portfolio selection.</a:t>
+            </a:r>
+          </a:p>
+          <a:p>
+            <a:pPr lvl="1"/>
+            <a:endParaRPr lang="en-US" dirty="0"/>
+          </a:p>
+          <a:p>
+            <a:r>
+              <a:rPr lang="en-US" dirty="0"/>
+              <a:t>The Solution:</a:t>
+            </a:r>
+          </a:p>
+          <a:p>
+            <a:pPr lvl="1"/>
+            <a:r>
+              <a:rPr lang="en-US" dirty="0"/>
+              <a:t>Make navigating Fashion-Insta fashion portfolio easy and enjoyable.</a:t>
+            </a:r>
+          </a:p>
+          <a:p>
+            <a:pPr lvl="1"/>
+            <a:endParaRPr lang="en-US" dirty="0"/>
+          </a:p>
+          <a:p>
+            <a:r>
+              <a:rPr lang="en-US" dirty="0"/>
+              <a:t>The Vision:</a:t>
+            </a:r>
+          </a:p>
+          <a:p>
+            <a:pPr lvl="1"/>
+            <a:r>
+              <a:rPr lang="en-US" dirty="0"/>
+              <a:t>Fashion-Insta your fashion needs at your finger-tips.</a:t>
+            </a:r>
+          </a:p>
+        </p:txBody>
+      </p:sp>
+      <p:sp>
+        <p:nvSpPr>
+          <p:cNvPr id="5" name="Date Placeholder 4">
+            <a:extLst>
+              <a:ext uri="{FF2B5EF4-FFF2-40B4-BE49-F238E27FC236}">
+                <a16:creationId xmlns:a16="http://schemas.microsoft.com/office/drawing/2014/main" id="{A1077CA4-DBDF-B26B-D035-49FB940A2300}"/>
+              </a:ext>
+            </a:extLst>
+          </p:cNvPr>
+          <p:cNvSpPr>
+            <a:spLocks noGrp="1"/>
+          </p:cNvSpPr>
+          <p:nvPr>
+            <p:ph type="dt" sz="half" idx="10"/>
+          </p:nvPr>
+        </p:nvSpPr>
+        <p:spPr/>
+        <p:txBody>
+          <a:bodyPr/>
+          <a:lstStyle/>
+          <a:p>
+            <a:fld id="{D3C75A4F-7395-44C0-9A76-83F0F6EA512A}" type="datetime1">
               <a:rPr lang="en-US" smtClean="0"/>
-              <a:t>1/9/2026</a:t>
+              <a:t>1/14/2026</a:t>
             </a:fld>
             <a:endParaRPr lang="en-US" dirty="0"/>
           </a:p>
@@ -34685,10 +31743,10 @@
       </p:sp>
       <p:sp>
         <p:nvSpPr>
-          <p:cNvPr id="6" name="Slide Number Placeholder 5">
-            <a:extLst>
-              <a:ext uri="{FF2B5EF4-FFF2-40B4-BE49-F238E27FC236}">
-                <a16:creationId xmlns:a16="http://schemas.microsoft.com/office/drawing/2014/main" id="{EED68CAC-2053-ADA6-765B-898870076AA2}"/>
+          <p:cNvPr id="6" name="Footer Placeholder 5">
+            <a:extLst>
+              <a:ext uri="{FF2B5EF4-FFF2-40B4-BE49-F238E27FC236}">
+                <a16:creationId xmlns:a16="http://schemas.microsoft.com/office/drawing/2014/main" id="{8A12F3A3-F783-4FCA-664E-8C2C6C0E9C1B}"/>
               </a:ext>
             </a:extLst>
           </p:cNvPr>
@@ -34696,7 +31754,7 @@
             <a:spLocks noGrp="1"/>
           </p:cNvSpPr>
           <p:nvPr>
-            <p:ph type="sldNum" sz="quarter" idx="12"/>
+            <p:ph type="ftr" sz="quarter" idx="11"/>
           </p:nvPr>
         </p:nvSpPr>
         <p:spPr/>
@@ -34704,9 +31762,38 @@
           <a:bodyPr/>
           <a:lstStyle/>
           <a:p>
-            <a:fld id="{84C450F2-3BB4-4AE4-8A35-A9D7AEA4C850}" type="slidenum">
+            <a:r>
+              <a:rPr lang="en-US"/>
+              <a:t>Sample Footer Text</a:t>
+            </a:r>
+            <a:endParaRPr lang="en-US" dirty="0"/>
+          </a:p>
+        </p:txBody>
+      </p:sp>
+      <p:sp>
+        <p:nvSpPr>
+          <p:cNvPr id="7" name="Slide Number Placeholder 6">
+            <a:extLst>
+              <a:ext uri="{FF2B5EF4-FFF2-40B4-BE49-F238E27FC236}">
+                <a16:creationId xmlns:a16="http://schemas.microsoft.com/office/drawing/2014/main" id="{7657728B-2D3B-B218-791F-13914B3F6DE5}"/>
+              </a:ext>
+            </a:extLst>
+          </p:cNvPr>
+          <p:cNvSpPr>
+            <a:spLocks noGrp="1"/>
+          </p:cNvSpPr>
+          <p:nvPr>
+            <p:ph type="sldNum" sz="quarter" idx="12"/>
+          </p:nvPr>
+        </p:nvSpPr>
+        <p:spPr/>
+        <p:txBody>
+          <a:bodyPr/>
+          <a:lstStyle/>
+          <a:p>
+            <a:fld id="{CC057153-B650-4DEB-B370-79DDCFDCE934}" type="slidenum">
               <a:rPr lang="en-US" smtClean="0"/>
-              <a:t>14</a:t>
+              <a:t>2</a:t>
             </a:fld>
             <a:endParaRPr lang="en-US" dirty="0"/>
           </a:p>
@@ -34715,7 +31802,7 @@
     </p:spTree>
     <p:extLst>
       <p:ext uri="{BB962C8B-B14F-4D97-AF65-F5344CB8AC3E}">
-        <p14:creationId xmlns:p14="http://schemas.microsoft.com/office/powerpoint/2010/main" val="1606169761"/>
+        <p14:creationId xmlns:p14="http://schemas.microsoft.com/office/powerpoint/2010/main" val="1958765134"/>
       </p:ext>
     </p:extLst>
   </p:cSld>
@@ -34725,7 +31812,7 @@
 </p:sld>
 </file>
 
-<file path=ppt/slides/slide15.xml><?xml version="1.0" encoding="utf-8"?>
+<file path=ppt/slides/slide20.xml><?xml version="1.0" encoding="utf-8"?>
 <p:sld xmlns:a="http://schemas.openxmlformats.org/drawingml/2006/main" xmlns:r="http://schemas.openxmlformats.org/officeDocument/2006/relationships" xmlns:p="http://schemas.openxmlformats.org/presentationml/2006/main">
   <p:cSld>
     <p:spTree>
@@ -34747,7 +31834,7 @@
           <p:cNvPr id="2" name="Title 1">
             <a:extLst>
               <a:ext uri="{FF2B5EF4-FFF2-40B4-BE49-F238E27FC236}">
-                <a16:creationId xmlns:a16="http://schemas.microsoft.com/office/drawing/2014/main" id="{9B121F4A-35F4-ECEF-37D0-74CC39589E75}"/>
+                <a16:creationId xmlns:a16="http://schemas.microsoft.com/office/drawing/2014/main" id="{2FE30896-3623-346D-AC83-32580F8BBD97}"/>
               </a:ext>
             </a:extLst>
           </p:cNvPr>
@@ -34760,8 +31847,8 @@
         </p:nvSpPr>
         <p:spPr>
           <a:xfrm>
-            <a:off x="431172" y="293302"/>
-            <a:ext cx="11125032" cy="581769"/>
+            <a:off x="431172" y="293303"/>
+            <a:ext cx="11125032" cy="552272"/>
           </a:xfrm>
         </p:spPr>
         <p:txBody>
@@ -34770,7 +31857,7 @@
           <a:p>
             <a:r>
               <a:rPr lang="en-US" dirty="0"/>
-              <a:t>Risks and mitigation plans (cont.)</a:t>
+              <a:t>Risks and mitigation plans</a:t>
             </a:r>
           </a:p>
         </p:txBody>
@@ -34780,7 +31867,7 @@
           <p:cNvPr id="3" name="Content Placeholder 2">
             <a:extLst>
               <a:ext uri="{FF2B5EF4-FFF2-40B4-BE49-F238E27FC236}">
-                <a16:creationId xmlns:a16="http://schemas.microsoft.com/office/drawing/2014/main" id="{705D928E-60B4-8AA5-0BAE-AB4C38DC2BDB}"/>
+                <a16:creationId xmlns:a16="http://schemas.microsoft.com/office/drawing/2014/main" id="{10358B91-B120-3BCE-0413-DE310654B699}"/>
               </a:ext>
             </a:extLst>
           </p:cNvPr>
@@ -34793,13 +31880,13 @@
         </p:nvSpPr>
         <p:spPr>
           <a:xfrm>
-            <a:off x="431172" y="1032386"/>
-            <a:ext cx="11125032" cy="5532311"/>
+            <a:off x="431172" y="845575"/>
+            <a:ext cx="11125032" cy="5444388"/>
           </a:xfrm>
         </p:spPr>
         <p:txBody>
           <a:bodyPr>
-            <a:normAutofit fontScale="47500" lnSpcReduction="20000"/>
+            <a:normAutofit lnSpcReduction="10000"/>
           </a:bodyPr>
           <a:lstStyle/>
           <a:p>
@@ -34807,30 +31894,31 @@
               <a:buNone/>
             </a:pPr>
             <a:r>
-              <a:rPr lang="en-US" sz="3800" b="1" dirty="0"/>
-              <a:t>3. Project Management Risks</a:t>
+              <a:rPr lang="en-US" b="1" dirty="0"/>
+              <a:t>1. Technical Risks</a:t>
             </a:r>
           </a:p>
           <a:p>
             <a:pPr lvl="2" fontAlgn="ctr"/>
             <a:r>
-              <a:rPr lang="en-US" sz="3500" b="1" dirty="0"/>
-              <a:t>Scope Creep: </a:t>
-            </a:r>
-            <a:r>
-              <a:rPr lang="en-US" sz="3500" dirty="0"/>
-              <a:t>Uncontrolled changes in project scope can lead to delays and budget overruns.</a:t>
-            </a:r>
+              <a:rPr lang="en-US" b="1" dirty="0"/>
+              <a:t>Software Bugs &amp; Integration Issues:</a:t>
+            </a:r>
+            <a:r>
+              <a:rPr lang="en-US" dirty="0"/>
+              <a:t> Problems with code quality, compatibility across devices, and integration with third-party services (Azure) can lead to crashes, poor performance, or data loss.</a:t>
+            </a:r>
+            <a:endParaRPr lang="en-US" sz="1600" dirty="0"/>
           </a:p>
           <a:p>
             <a:pPr lvl="2" fontAlgn="ctr"/>
             <a:r>
-              <a:rPr lang="en-US" sz="3500" b="1" dirty="0"/>
-              <a:t>Budget Overruns: </a:t>
-            </a:r>
-            <a:r>
-              <a:rPr lang="en-US" sz="3500" dirty="0"/>
-              <a:t>Poor planning and estimation can cause costs to spiral out of control.</a:t>
+              <a:rPr lang="en-US" b="1" dirty="0"/>
+              <a:t>Platform Compatibility:</a:t>
+            </a:r>
+            <a:r>
+              <a:rPr lang="en-US" dirty="0"/>
+              <a:t> Apps must be continually updated to remain compatible with new devices and operating systems.</a:t>
             </a:r>
           </a:p>
           <a:p>
@@ -34838,91 +31926,114 @@
               <a:buNone/>
             </a:pPr>
             <a:r>
-              <a:rPr lang="en-US" sz="3800" b="1" dirty="0"/>
-              <a:t>      Mitigation:</a:t>
-            </a:r>
+              <a:rPr lang="en-US" sz="1500" b="1" dirty="0"/>
+              <a:t>   Mitigation:</a:t>
+            </a:r>
+            <a:endParaRPr lang="en-US" sz="1500" dirty="0"/>
           </a:p>
           <a:p>
             <a:pPr lvl="2" fontAlgn="ctr"/>
             <a:r>
-              <a:rPr lang="en-US" sz="3400" dirty="0"/>
-              <a:t>Use a risk assessment matrix to prioritize risks by likelihood and impact.</a:t>
-            </a:r>
+              <a:rPr lang="en-US" dirty="0"/>
+              <a:t>Comprehensive testing (unit, integration, and user acceptance).</a:t>
+            </a:r>
+            <a:endParaRPr lang="en-US" sz="1600" dirty="0"/>
           </a:p>
           <a:p>
             <a:pPr lvl="2" fontAlgn="ctr"/>
             <a:r>
-              <a:rPr lang="en-US" sz="3400" dirty="0"/>
-              <a:t>Maintain transparent communication and regular check-ins with stakeholders.</a:t>
-            </a:r>
+              <a:rPr lang="en-US" dirty="0"/>
+              <a:t>Use agile methodologies for iterative development and rapid bug fixes.</a:t>
+            </a:r>
+            <a:endParaRPr lang="en-US" sz="1600" dirty="0"/>
           </a:p>
           <a:p>
             <a:pPr lvl="2" fontAlgn="ctr"/>
             <a:r>
-              <a:rPr lang="en-US" sz="3400" dirty="0"/>
-              <a:t>Set clear project milestones and monitor progress closely.</a:t>
-            </a:r>
+              <a:rPr lang="en-US" dirty="0"/>
+              <a:t>Employ experienced developers and maintain clear documentation.</a:t>
+            </a:r>
+            <a:endParaRPr lang="en-US" sz="1600" dirty="0"/>
           </a:p>
           <a:p>
             <a:pPr marL="0" indent="0">
               <a:buNone/>
             </a:pPr>
             <a:r>
-              <a:rPr lang="en-US" sz="3800" b="1" dirty="0"/>
-              <a:t>4. Operational Risks</a:t>
+              <a:rPr lang="en-US" b="1" dirty="0"/>
+              <a:t>2. Security &amp; Privacy Risks</a:t>
             </a:r>
           </a:p>
           <a:p>
             <a:pPr lvl="2" fontAlgn="ctr"/>
             <a:r>
-              <a:rPr lang="en-US" sz="3600" b="1" dirty="0"/>
-              <a:t>Resource Allocation: </a:t>
-            </a:r>
-            <a:r>
-              <a:rPr lang="en-US" sz="3600" dirty="0"/>
-              <a:t>Inadequate resources or poor team management can derail development.</a:t>
-            </a:r>
+              <a:rPr lang="en-US" b="1" dirty="0"/>
+              <a:t>Data Breaches:</a:t>
+            </a:r>
+            <a:r>
+              <a:rPr lang="en-US" dirty="0"/>
+              <a:t> Mobile apps often handle sensitive user data (personal info, payment details). Insecure data storage, weak encryption, and inadequate authentication can expose users to cyber threats.</a:t>
+            </a:r>
+            <a:endParaRPr lang="en-US" sz="1600" dirty="0"/>
           </a:p>
           <a:p>
             <a:pPr lvl="2" fontAlgn="ctr"/>
             <a:r>
-              <a:rPr lang="en-US" sz="3600" b="1" dirty="0"/>
-              <a:t>Communication Problems: </a:t>
-            </a:r>
-            <a:r>
-              <a:rPr lang="en-US" sz="3600" dirty="0"/>
-              <a:t>Miscommunication within teams or with stakeholders can result in misaligned objectives.</a:t>
-            </a:r>
+              <a:rPr lang="en-US" b="1" dirty="0"/>
+              <a:t>Regulatory Compliance:</a:t>
+            </a:r>
+            <a:r>
+              <a:rPr lang="en-US" dirty="0"/>
+              <a:t> Failure to comply with privacy laws (GDPR, CCPA) can result in legal and financial penalties.</a:t>
+            </a:r>
+            <a:endParaRPr lang="en-US" sz="1600" dirty="0"/>
           </a:p>
           <a:p>
             <a:pPr marL="0" indent="0">
               <a:buNone/>
             </a:pPr>
             <a:r>
-              <a:rPr lang="en-US" sz="3800" b="1" dirty="0"/>
-              <a:t>     Mitigation:</a:t>
+              <a:rPr lang="en-US" sz="1500" b="1" dirty="0"/>
+              <a:t>  Mitigation:</a:t>
             </a:r>
           </a:p>
           <a:p>
             <a:pPr lvl="2" fontAlgn="ctr"/>
             <a:r>
-              <a:rPr lang="en-US" sz="3400" dirty="0"/>
-              <a:t>Hold frequent, formal check-ins and sprint reviews.</a:t>
-            </a:r>
+              <a:rPr lang="en-US" dirty="0"/>
+              <a:t>Implement robust encryption and secure data transmission protocols.</a:t>
+            </a:r>
+            <a:endParaRPr lang="en-US" sz="1600" dirty="0"/>
           </a:p>
           <a:p>
             <a:pPr lvl="2" fontAlgn="ctr"/>
             <a:r>
-              <a:rPr lang="en-US" sz="3400" dirty="0"/>
-              <a:t>Foster open communication and collaboration among all contributors.</a:t>
-            </a:r>
+              <a:rPr lang="en-US" dirty="0"/>
+              <a:t>Use strong authentication mechanisms (multi-factor authentication example Azure).</a:t>
+            </a:r>
+            <a:endParaRPr lang="en-US" sz="1600" dirty="0"/>
           </a:p>
           <a:p>
             <a:pPr lvl="2" fontAlgn="ctr"/>
             <a:r>
-              <a:rPr lang="en-US" sz="3400" dirty="0"/>
-              <a:t>Assign technical liaisons for outsourced projects.</a:t>
-            </a:r>
+              <a:rPr lang="en-US" dirty="0"/>
+              <a:t>Regularly update security protocols and conduct vulnerability assessments.</a:t>
+            </a:r>
+            <a:endParaRPr lang="en-US" sz="1600" dirty="0"/>
+          </a:p>
+          <a:p>
+            <a:pPr lvl="2" fontAlgn="ctr"/>
+            <a:r>
+              <a:rPr lang="en-US" dirty="0"/>
+              <a:t>Ensure compliance with relevant regulations and provide clear privacy policies.</a:t>
+            </a:r>
+            <a:endParaRPr lang="en-US" sz="1600" dirty="0"/>
+          </a:p>
+          <a:p>
+            <a:pPr marL="228600" lvl="1" indent="0" fontAlgn="ctr">
+              <a:buNone/>
+            </a:pPr>
+            <a:endParaRPr lang="en-US" sz="1800" dirty="0"/>
           </a:p>
         </p:txBody>
       </p:sp>
@@ -34931,7 +32042,7 @@
           <p:cNvPr id="4" name="Date Placeholder 3">
             <a:extLst>
               <a:ext uri="{FF2B5EF4-FFF2-40B4-BE49-F238E27FC236}">
-                <a16:creationId xmlns:a16="http://schemas.microsoft.com/office/drawing/2014/main" id="{E01EC63A-89CA-547C-E8A2-E89CEB452D61}"/>
+                <a16:creationId xmlns:a16="http://schemas.microsoft.com/office/drawing/2014/main" id="{7FFC0EC0-4ACF-F6D9-BE44-224BD601DE1E}"/>
               </a:ext>
             </a:extLst>
           </p:cNvPr>
@@ -34949,7 +32060,7 @@
           <a:p>
             <a:fld id="{FE21D4C7-8630-4B98-978C-30388BBD4EE8}" type="datetime1">
               <a:rPr lang="en-US" smtClean="0"/>
-              <a:t>1/9/2026</a:t>
+              <a:t>1/14/2026</a:t>
             </a:fld>
             <a:endParaRPr lang="en-US" dirty="0"/>
           </a:p>
@@ -34960,7 +32071,7 @@
           <p:cNvPr id="6" name="Slide Number Placeholder 5">
             <a:extLst>
               <a:ext uri="{FF2B5EF4-FFF2-40B4-BE49-F238E27FC236}">
-                <a16:creationId xmlns:a16="http://schemas.microsoft.com/office/drawing/2014/main" id="{E5C53230-6AFA-517F-FE29-6C51769B59BE}"/>
+                <a16:creationId xmlns:a16="http://schemas.microsoft.com/office/drawing/2014/main" id="{EED68CAC-2053-ADA6-765B-898870076AA2}"/>
               </a:ext>
             </a:extLst>
           </p:cNvPr>
@@ -34978,7 +32089,7 @@
           <a:p>
             <a:fld id="{84C450F2-3BB4-4AE4-8A35-A9D7AEA4C850}" type="slidenum">
               <a:rPr lang="en-US" smtClean="0"/>
-              <a:t>15</a:t>
+              <a:t>20</a:t>
             </a:fld>
             <a:endParaRPr lang="en-US" dirty="0"/>
           </a:p>
@@ -34987,7 +32098,7 @@
     </p:spTree>
     <p:extLst>
       <p:ext uri="{BB962C8B-B14F-4D97-AF65-F5344CB8AC3E}">
-        <p14:creationId xmlns:p14="http://schemas.microsoft.com/office/powerpoint/2010/main" val="2571762613"/>
+        <p14:creationId xmlns:p14="http://schemas.microsoft.com/office/powerpoint/2010/main" val="1606169761"/>
       </p:ext>
     </p:extLst>
   </p:cSld>
@@ -34997,7 +32108,7 @@
 </p:sld>
 </file>
 
-<file path=ppt/slides/slide16.xml><?xml version="1.0" encoding="utf-8"?>
+<file path=ppt/slides/slide21.xml><?xml version="1.0" encoding="utf-8"?>
 <p:sld xmlns:a="http://schemas.openxmlformats.org/drawingml/2006/main" xmlns:r="http://schemas.openxmlformats.org/officeDocument/2006/relationships" xmlns:p="http://schemas.openxmlformats.org/presentationml/2006/main">
   <p:cSld>
     <p:spTree>
@@ -35019,6 +32130,278 @@
           <p:cNvPr id="2" name="Title 1">
             <a:extLst>
               <a:ext uri="{FF2B5EF4-FFF2-40B4-BE49-F238E27FC236}">
+                <a16:creationId xmlns:a16="http://schemas.microsoft.com/office/drawing/2014/main" id="{9B121F4A-35F4-ECEF-37D0-74CC39589E75}"/>
+              </a:ext>
+            </a:extLst>
+          </p:cNvPr>
+          <p:cNvSpPr>
+            <a:spLocks noGrp="1"/>
+          </p:cNvSpPr>
+          <p:nvPr>
+            <p:ph type="title"/>
+          </p:nvPr>
+        </p:nvSpPr>
+        <p:spPr>
+          <a:xfrm>
+            <a:off x="431172" y="293302"/>
+            <a:ext cx="11125032" cy="581769"/>
+          </a:xfrm>
+        </p:spPr>
+        <p:txBody>
+          <a:bodyPr/>
+          <a:lstStyle/>
+          <a:p>
+            <a:r>
+              <a:rPr lang="en-US" dirty="0"/>
+              <a:t>Risks and mitigation plans (cont.)</a:t>
+            </a:r>
+          </a:p>
+        </p:txBody>
+      </p:sp>
+      <p:sp>
+        <p:nvSpPr>
+          <p:cNvPr id="3" name="Content Placeholder 2">
+            <a:extLst>
+              <a:ext uri="{FF2B5EF4-FFF2-40B4-BE49-F238E27FC236}">
+                <a16:creationId xmlns:a16="http://schemas.microsoft.com/office/drawing/2014/main" id="{705D928E-60B4-8AA5-0BAE-AB4C38DC2BDB}"/>
+              </a:ext>
+            </a:extLst>
+          </p:cNvPr>
+          <p:cNvSpPr>
+            <a:spLocks noGrp="1"/>
+          </p:cNvSpPr>
+          <p:nvPr>
+            <p:ph idx="1"/>
+          </p:nvPr>
+        </p:nvSpPr>
+        <p:spPr>
+          <a:xfrm>
+            <a:off x="431172" y="1032386"/>
+            <a:ext cx="11125032" cy="5532311"/>
+          </a:xfrm>
+        </p:spPr>
+        <p:txBody>
+          <a:bodyPr>
+            <a:normAutofit fontScale="47500" lnSpcReduction="20000"/>
+          </a:bodyPr>
+          <a:lstStyle/>
+          <a:p>
+            <a:pPr marL="0" indent="0">
+              <a:buNone/>
+            </a:pPr>
+            <a:r>
+              <a:rPr lang="en-US" sz="3800" b="1" dirty="0"/>
+              <a:t>3. Project Management Risks</a:t>
+            </a:r>
+          </a:p>
+          <a:p>
+            <a:pPr lvl="2" fontAlgn="ctr"/>
+            <a:r>
+              <a:rPr lang="en-US" sz="3500" b="1" dirty="0"/>
+              <a:t>Scope Creep: </a:t>
+            </a:r>
+            <a:r>
+              <a:rPr lang="en-US" sz="3500" dirty="0"/>
+              <a:t>Uncontrolled changes in project scope can lead to delays and budget overruns.</a:t>
+            </a:r>
+          </a:p>
+          <a:p>
+            <a:pPr lvl="2" fontAlgn="ctr"/>
+            <a:r>
+              <a:rPr lang="en-US" sz="3500" b="1" dirty="0"/>
+              <a:t>Budget Overruns: </a:t>
+            </a:r>
+            <a:r>
+              <a:rPr lang="en-US" sz="3500" dirty="0"/>
+              <a:t>Poor planning and estimation can cause costs to spiral out of control.</a:t>
+            </a:r>
+          </a:p>
+          <a:p>
+            <a:pPr marL="0" indent="0">
+              <a:buNone/>
+            </a:pPr>
+            <a:r>
+              <a:rPr lang="en-US" sz="3800" b="1" dirty="0"/>
+              <a:t>      Mitigation:</a:t>
+            </a:r>
+          </a:p>
+          <a:p>
+            <a:pPr lvl="2" fontAlgn="ctr"/>
+            <a:r>
+              <a:rPr lang="en-US" sz="3400" dirty="0"/>
+              <a:t>Use a risk assessment matrix to prioritize risks by likelihood and impact.</a:t>
+            </a:r>
+          </a:p>
+          <a:p>
+            <a:pPr lvl="2" fontAlgn="ctr"/>
+            <a:r>
+              <a:rPr lang="en-US" sz="3400" dirty="0"/>
+              <a:t>Maintain transparent communication and regular check-ins with stakeholders.</a:t>
+            </a:r>
+          </a:p>
+          <a:p>
+            <a:pPr lvl="2" fontAlgn="ctr"/>
+            <a:r>
+              <a:rPr lang="en-US" sz="3400" dirty="0"/>
+              <a:t>Set clear project milestones and monitor progress closely.</a:t>
+            </a:r>
+          </a:p>
+          <a:p>
+            <a:pPr marL="0" indent="0">
+              <a:buNone/>
+            </a:pPr>
+            <a:r>
+              <a:rPr lang="en-US" sz="3800" b="1" dirty="0"/>
+              <a:t>4. Operational Risks</a:t>
+            </a:r>
+          </a:p>
+          <a:p>
+            <a:pPr lvl="2" fontAlgn="ctr"/>
+            <a:r>
+              <a:rPr lang="en-US" sz="3600" b="1" dirty="0"/>
+              <a:t>Resource Allocation: </a:t>
+            </a:r>
+            <a:r>
+              <a:rPr lang="en-US" sz="3600" dirty="0"/>
+              <a:t>Inadequate resources or poor team management can derail development.</a:t>
+            </a:r>
+          </a:p>
+          <a:p>
+            <a:pPr lvl="2" fontAlgn="ctr"/>
+            <a:r>
+              <a:rPr lang="en-US" sz="3600" b="1" dirty="0"/>
+              <a:t>Communication Problems: </a:t>
+            </a:r>
+            <a:r>
+              <a:rPr lang="en-US" sz="3600" dirty="0"/>
+              <a:t>Miscommunication within teams or with stakeholders can result in misaligned objectives.</a:t>
+            </a:r>
+          </a:p>
+          <a:p>
+            <a:pPr marL="0" indent="0">
+              <a:buNone/>
+            </a:pPr>
+            <a:r>
+              <a:rPr lang="en-US" sz="3800" b="1" dirty="0"/>
+              <a:t>     Mitigation:</a:t>
+            </a:r>
+          </a:p>
+          <a:p>
+            <a:pPr lvl="2" fontAlgn="ctr"/>
+            <a:r>
+              <a:rPr lang="en-US" sz="3400" dirty="0"/>
+              <a:t>Hold frequent, formal check-ins and sprint reviews.</a:t>
+            </a:r>
+          </a:p>
+          <a:p>
+            <a:pPr lvl="2" fontAlgn="ctr"/>
+            <a:r>
+              <a:rPr lang="en-US" sz="3400" dirty="0"/>
+              <a:t>Foster open communication and collaboration among all contributors.</a:t>
+            </a:r>
+          </a:p>
+          <a:p>
+            <a:pPr lvl="2" fontAlgn="ctr"/>
+            <a:r>
+              <a:rPr lang="en-US" sz="3400" dirty="0"/>
+              <a:t>Assign technical liaisons for outsourced projects.</a:t>
+            </a:r>
+          </a:p>
+        </p:txBody>
+      </p:sp>
+      <p:sp>
+        <p:nvSpPr>
+          <p:cNvPr id="4" name="Date Placeholder 3">
+            <a:extLst>
+              <a:ext uri="{FF2B5EF4-FFF2-40B4-BE49-F238E27FC236}">
+                <a16:creationId xmlns:a16="http://schemas.microsoft.com/office/drawing/2014/main" id="{E01EC63A-89CA-547C-E8A2-E89CEB452D61}"/>
+              </a:ext>
+            </a:extLst>
+          </p:cNvPr>
+          <p:cNvSpPr>
+            <a:spLocks noGrp="1"/>
+          </p:cNvSpPr>
+          <p:nvPr>
+            <p:ph type="dt" sz="half" idx="10"/>
+          </p:nvPr>
+        </p:nvSpPr>
+        <p:spPr/>
+        <p:txBody>
+          <a:bodyPr/>
+          <a:lstStyle/>
+          <a:p>
+            <a:fld id="{FE21D4C7-8630-4B98-978C-30388BBD4EE8}" type="datetime1">
+              <a:rPr lang="en-US" smtClean="0"/>
+              <a:t>1/14/2026</a:t>
+            </a:fld>
+            <a:endParaRPr lang="en-US" dirty="0"/>
+          </a:p>
+        </p:txBody>
+      </p:sp>
+      <p:sp>
+        <p:nvSpPr>
+          <p:cNvPr id="6" name="Slide Number Placeholder 5">
+            <a:extLst>
+              <a:ext uri="{FF2B5EF4-FFF2-40B4-BE49-F238E27FC236}">
+                <a16:creationId xmlns:a16="http://schemas.microsoft.com/office/drawing/2014/main" id="{E5C53230-6AFA-517F-FE29-6C51769B59BE}"/>
+              </a:ext>
+            </a:extLst>
+          </p:cNvPr>
+          <p:cNvSpPr>
+            <a:spLocks noGrp="1"/>
+          </p:cNvSpPr>
+          <p:nvPr>
+            <p:ph type="sldNum" sz="quarter" idx="12"/>
+          </p:nvPr>
+        </p:nvSpPr>
+        <p:spPr/>
+        <p:txBody>
+          <a:bodyPr/>
+          <a:lstStyle/>
+          <a:p>
+            <a:fld id="{84C450F2-3BB4-4AE4-8A35-A9D7AEA4C850}" type="slidenum">
+              <a:rPr lang="en-US" smtClean="0"/>
+              <a:t>21</a:t>
+            </a:fld>
+            <a:endParaRPr lang="en-US" dirty="0"/>
+          </a:p>
+        </p:txBody>
+      </p:sp>
+    </p:spTree>
+    <p:extLst>
+      <p:ext uri="{BB962C8B-B14F-4D97-AF65-F5344CB8AC3E}">
+        <p14:creationId xmlns:p14="http://schemas.microsoft.com/office/powerpoint/2010/main" val="2571762613"/>
+      </p:ext>
+    </p:extLst>
+  </p:cSld>
+  <p:clrMapOvr>
+    <a:masterClrMapping/>
+  </p:clrMapOvr>
+</p:sld>
+</file>
+
+<file path=ppt/slides/slide22.xml><?xml version="1.0" encoding="utf-8"?>
+<p:sld xmlns:a="http://schemas.openxmlformats.org/drawingml/2006/main" xmlns:r="http://schemas.openxmlformats.org/officeDocument/2006/relationships" xmlns:p="http://schemas.openxmlformats.org/presentationml/2006/main">
+  <p:cSld>
+    <p:spTree>
+      <p:nvGrpSpPr>
+        <p:cNvPr id="1" name=""/>
+        <p:cNvGrpSpPr/>
+        <p:nvPr/>
+      </p:nvGrpSpPr>
+      <p:grpSpPr>
+        <a:xfrm>
+          <a:off x="0" y="0"/>
+          <a:ext cx="0" cy="0"/>
+          <a:chOff x="0" y="0"/>
+          <a:chExt cx="0" cy="0"/>
+        </a:xfrm>
+      </p:grpSpPr>
+      <p:sp>
+        <p:nvSpPr>
+          <p:cNvPr id="2" name="Title 1">
+            <a:extLst>
+              <a:ext uri="{FF2B5EF4-FFF2-40B4-BE49-F238E27FC236}">
                 <a16:creationId xmlns:a16="http://schemas.microsoft.com/office/drawing/2014/main" id="{76919DBC-8DEE-A728-EF47-75307C414352}"/>
               </a:ext>
             </a:extLst>
@@ -35181,7 +32564,7 @@
           <a:p>
             <a:fld id="{FE21D4C7-8630-4B98-978C-30388BBD4EE8}" type="datetime1">
               <a:rPr lang="en-US" smtClean="0"/>
-              <a:t>1/9/2026</a:t>
+              <a:t>1/14/2026</a:t>
             </a:fld>
             <a:endParaRPr lang="en-US" dirty="0"/>
           </a:p>
@@ -35210,7 +32593,7 @@
           <a:p>
             <a:fld id="{84C450F2-3BB4-4AE4-8A35-A9D7AEA4C850}" type="slidenum">
               <a:rPr lang="en-US" smtClean="0"/>
-              <a:t>16</a:t>
+              <a:t>22</a:t>
             </a:fld>
             <a:endParaRPr lang="en-US" dirty="0"/>
           </a:p>
@@ -35229,7 +32612,7 @@
 </p:sld>
 </file>
 
-<file path=ppt/slides/slide17.xml><?xml version="1.0" encoding="utf-8"?>
+<file path=ppt/slides/slide23.xml><?xml version="1.0" encoding="utf-8"?>
 <p:sld xmlns:a="http://schemas.openxmlformats.org/drawingml/2006/main" xmlns:r="http://schemas.openxmlformats.org/officeDocument/2006/relationships" xmlns:p="http://schemas.openxmlformats.org/presentationml/2006/main">
   <p:cSld>
     <p:spTree>
@@ -36295,7 +33678,7 @@
           <a:p>
             <a:fld id="{FE21D4C7-8630-4B98-978C-30388BBD4EE8}" type="datetime1">
               <a:rPr lang="en-US" smtClean="0"/>
-              <a:t>1/9/2026</a:t>
+              <a:t>1/14/2026</a:t>
             </a:fld>
             <a:endParaRPr lang="en-US" dirty="0"/>
           </a:p>
@@ -36324,7 +33707,7 @@
           <a:p>
             <a:fld id="{84C450F2-3BB4-4AE4-8A35-A9D7AEA4C850}" type="slidenum">
               <a:rPr lang="en-US" smtClean="0"/>
-              <a:t>17</a:t>
+              <a:t>23</a:t>
             </a:fld>
             <a:endParaRPr lang="en-US" dirty="0"/>
           </a:p>
@@ -36334,1523 +33717,6 @@
     <p:extLst>
       <p:ext uri="{BB962C8B-B14F-4D97-AF65-F5344CB8AC3E}">
         <p14:creationId xmlns:p14="http://schemas.microsoft.com/office/powerpoint/2010/main" val="3540140581"/>
-      </p:ext>
-    </p:extLst>
-  </p:cSld>
-  <p:clrMapOvr>
-    <a:masterClrMapping/>
-  </p:clrMapOvr>
-</p:sld>
-</file>
-
-<file path=ppt/slides/slide18.xml><?xml version="1.0" encoding="utf-8"?>
-<p:sld xmlns:a="http://schemas.openxmlformats.org/drawingml/2006/main" xmlns:r="http://schemas.openxmlformats.org/officeDocument/2006/relationships" xmlns:p="http://schemas.openxmlformats.org/presentationml/2006/main">
-  <p:cSld>
-    <p:spTree>
-      <p:nvGrpSpPr>
-        <p:cNvPr id="1" name=""/>
-        <p:cNvGrpSpPr/>
-        <p:nvPr/>
-      </p:nvGrpSpPr>
-      <p:grpSpPr>
-        <a:xfrm>
-          <a:off x="0" y="0"/>
-          <a:ext cx="0" cy="0"/>
-          <a:chOff x="0" y="0"/>
-          <a:chExt cx="0" cy="0"/>
-        </a:xfrm>
-      </p:grpSpPr>
-      <p:sp>
-        <p:nvSpPr>
-          <p:cNvPr id="2" name="Title 1">
-            <a:extLst>
-              <a:ext uri="{FF2B5EF4-FFF2-40B4-BE49-F238E27FC236}">
-                <a16:creationId xmlns:a16="http://schemas.microsoft.com/office/drawing/2014/main" id="{DCA7EF93-EC69-D1FA-F75F-7ABC23196D0A}"/>
-              </a:ext>
-            </a:extLst>
-          </p:cNvPr>
-          <p:cNvSpPr>
-            <a:spLocks noGrp="1"/>
-          </p:cNvSpPr>
-          <p:nvPr>
-            <p:ph type="title"/>
-          </p:nvPr>
-        </p:nvSpPr>
-        <p:spPr/>
-        <p:txBody>
-          <a:bodyPr/>
-          <a:lstStyle/>
-          <a:p>
-            <a:r>
-              <a:rPr lang="en-US" dirty="0"/>
-              <a:t>AGILE Methodology</a:t>
-            </a:r>
-          </a:p>
-        </p:txBody>
-      </p:sp>
-      <p:sp>
-        <p:nvSpPr>
-          <p:cNvPr id="3" name="Content Placeholder 2">
-            <a:extLst>
-              <a:ext uri="{FF2B5EF4-FFF2-40B4-BE49-F238E27FC236}">
-                <a16:creationId xmlns:a16="http://schemas.microsoft.com/office/drawing/2014/main" id="{6A624C94-AA80-6DCA-4B0E-A7DF2E716F59}"/>
-              </a:ext>
-            </a:extLst>
-          </p:cNvPr>
-          <p:cNvSpPr>
-            <a:spLocks noGrp="1"/>
-          </p:cNvSpPr>
-          <p:nvPr>
-            <p:ph idx="1"/>
-          </p:nvPr>
-        </p:nvSpPr>
-        <p:spPr>
-          <a:xfrm>
-            <a:off x="352515" y="1258403"/>
-            <a:ext cx="11125032" cy="4905116"/>
-          </a:xfrm>
-        </p:spPr>
-        <p:txBody>
-          <a:bodyPr>
-            <a:normAutofit lnSpcReduction="10000"/>
-          </a:bodyPr>
-          <a:lstStyle/>
-          <a:p>
-            <a:pPr marL="0" indent="0">
-              <a:buNone/>
-            </a:pPr>
-            <a:r>
-              <a:rPr lang="en-US" sz="2000" dirty="0"/>
-              <a:t>First came about in February 2001, when a group of leading experts met in Snowbird, Utah, to discuss common ground between their approaches in the quickly developing world of agile.</a:t>
-            </a:r>
-          </a:p>
-          <a:p>
-            <a:pPr marL="0" indent="0">
-              <a:buNone/>
-            </a:pPr>
-            <a:r>
-              <a:rPr lang="en-US" sz="2000" dirty="0"/>
-              <a:t>A project management framework that emphasizes iterative development, collaboration, flexibility and customer feedback allowing teams to adapt to changing requirements and deliver high-quality products efficiently.</a:t>
-            </a:r>
-          </a:p>
-          <a:p>
-            <a:pPr marL="0" indent="0">
-              <a:buNone/>
-            </a:pPr>
-            <a:r>
-              <a:rPr lang="en-US" sz="2000" dirty="0"/>
-              <a:t>The Agile methodology approach breaks projects into smaller manageable phases also known as sprints.</a:t>
-            </a:r>
-          </a:p>
-          <a:p>
-            <a:pPr marL="0" indent="0">
-              <a:buNone/>
-            </a:pPr>
-            <a:r>
-              <a:rPr lang="en-US" sz="2000" dirty="0"/>
-              <a:t>There are three Agile frameworks</a:t>
-            </a:r>
-          </a:p>
-          <a:p>
-            <a:pPr lvl="1"/>
-            <a:r>
-              <a:rPr lang="en-US" sz="1800" dirty="0"/>
-              <a:t>Scrum</a:t>
-            </a:r>
-          </a:p>
-          <a:p>
-            <a:pPr lvl="1"/>
-            <a:r>
-              <a:rPr lang="en-US" sz="1800" dirty="0"/>
-              <a:t>Kanban</a:t>
-            </a:r>
-          </a:p>
-          <a:p>
-            <a:pPr lvl="1"/>
-            <a:r>
-              <a:rPr lang="en-US" sz="1800" dirty="0"/>
-              <a:t>Extreme Programing (XP)</a:t>
-            </a:r>
-          </a:p>
-        </p:txBody>
-      </p:sp>
-      <p:sp>
-        <p:nvSpPr>
-          <p:cNvPr id="4" name="Date Placeholder 3">
-            <a:extLst>
-              <a:ext uri="{FF2B5EF4-FFF2-40B4-BE49-F238E27FC236}">
-                <a16:creationId xmlns:a16="http://schemas.microsoft.com/office/drawing/2014/main" id="{D13517B7-12FC-AB3D-BFA8-D9D3AD287791}"/>
-              </a:ext>
-            </a:extLst>
-          </p:cNvPr>
-          <p:cNvSpPr>
-            <a:spLocks noGrp="1"/>
-          </p:cNvSpPr>
-          <p:nvPr>
-            <p:ph type="dt" sz="half" idx="10"/>
-          </p:nvPr>
-        </p:nvSpPr>
-        <p:spPr/>
-        <p:txBody>
-          <a:bodyPr/>
-          <a:lstStyle/>
-          <a:p>
-            <a:fld id="{FE21D4C7-8630-4B98-978C-30388BBD4EE8}" type="datetime1">
-              <a:rPr lang="en-US" smtClean="0"/>
-              <a:t>1/9/2026</a:t>
-            </a:fld>
-            <a:endParaRPr lang="en-US" dirty="0"/>
-          </a:p>
-        </p:txBody>
-      </p:sp>
-      <p:sp>
-        <p:nvSpPr>
-          <p:cNvPr id="6" name="Slide Number Placeholder 5">
-            <a:extLst>
-              <a:ext uri="{FF2B5EF4-FFF2-40B4-BE49-F238E27FC236}">
-                <a16:creationId xmlns:a16="http://schemas.microsoft.com/office/drawing/2014/main" id="{AAC84777-4E2C-5339-3B6F-8F21D1BD2F1B}"/>
-              </a:ext>
-            </a:extLst>
-          </p:cNvPr>
-          <p:cNvSpPr>
-            <a:spLocks noGrp="1"/>
-          </p:cNvSpPr>
-          <p:nvPr>
-            <p:ph type="sldNum" sz="quarter" idx="12"/>
-          </p:nvPr>
-        </p:nvSpPr>
-        <p:spPr/>
-        <p:txBody>
-          <a:bodyPr/>
-          <a:lstStyle/>
-          <a:p>
-            <a:fld id="{84C450F2-3BB4-4AE4-8A35-A9D7AEA4C850}" type="slidenum">
-              <a:rPr lang="en-US" smtClean="0"/>
-              <a:t>18</a:t>
-            </a:fld>
-            <a:endParaRPr lang="en-US" dirty="0"/>
-          </a:p>
-        </p:txBody>
-      </p:sp>
-    </p:spTree>
-    <p:extLst>
-      <p:ext uri="{BB962C8B-B14F-4D97-AF65-F5344CB8AC3E}">
-        <p14:creationId xmlns:p14="http://schemas.microsoft.com/office/powerpoint/2010/main" val="3673295186"/>
-      </p:ext>
-    </p:extLst>
-  </p:cSld>
-  <p:clrMapOvr>
-    <a:masterClrMapping/>
-  </p:clrMapOvr>
-</p:sld>
-</file>
-
-<file path=ppt/slides/slide19.xml><?xml version="1.0" encoding="utf-8"?>
-<p:sld xmlns:a="http://schemas.openxmlformats.org/drawingml/2006/main" xmlns:r="http://schemas.openxmlformats.org/officeDocument/2006/relationships" xmlns:p="http://schemas.openxmlformats.org/presentationml/2006/main">
-  <p:cSld>
-    <p:spTree>
-      <p:nvGrpSpPr>
-        <p:cNvPr id="1" name=""/>
-        <p:cNvGrpSpPr/>
-        <p:nvPr/>
-      </p:nvGrpSpPr>
-      <p:grpSpPr>
-        <a:xfrm>
-          <a:off x="0" y="0"/>
-          <a:ext cx="0" cy="0"/>
-          <a:chOff x="0" y="0"/>
-          <a:chExt cx="0" cy="0"/>
-        </a:xfrm>
-      </p:grpSpPr>
-      <p:sp>
-        <p:nvSpPr>
-          <p:cNvPr id="4" name="Date Placeholder 3">
-            <a:extLst>
-              <a:ext uri="{FF2B5EF4-FFF2-40B4-BE49-F238E27FC236}">
-                <a16:creationId xmlns:a16="http://schemas.microsoft.com/office/drawing/2014/main" id="{ADAB7437-54E7-69C3-28C5-E939B53A5C1A}"/>
-              </a:ext>
-            </a:extLst>
-          </p:cNvPr>
-          <p:cNvSpPr>
-            <a:spLocks noGrp="1"/>
-          </p:cNvSpPr>
-          <p:nvPr>
-            <p:ph type="dt" sz="half" idx="10"/>
-          </p:nvPr>
-        </p:nvSpPr>
-        <p:spPr/>
-        <p:txBody>
-          <a:bodyPr/>
-          <a:lstStyle/>
-          <a:p>
-            <a:fld id="{FE21D4C7-8630-4B98-978C-30388BBD4EE8}" type="datetime1">
-              <a:rPr lang="en-US" smtClean="0"/>
-              <a:t>1/9/2026</a:t>
-            </a:fld>
-            <a:endParaRPr lang="en-US" dirty="0"/>
-          </a:p>
-        </p:txBody>
-      </p:sp>
-      <p:sp>
-        <p:nvSpPr>
-          <p:cNvPr id="6" name="Slide Number Placeholder 5">
-            <a:extLst>
-              <a:ext uri="{FF2B5EF4-FFF2-40B4-BE49-F238E27FC236}">
-                <a16:creationId xmlns:a16="http://schemas.microsoft.com/office/drawing/2014/main" id="{EAFFC2E2-B096-5F4B-3504-A75C04B53B1B}"/>
-              </a:ext>
-            </a:extLst>
-          </p:cNvPr>
-          <p:cNvSpPr>
-            <a:spLocks noGrp="1"/>
-          </p:cNvSpPr>
-          <p:nvPr>
-            <p:ph type="sldNum" sz="quarter" idx="12"/>
-          </p:nvPr>
-        </p:nvSpPr>
-        <p:spPr/>
-        <p:txBody>
-          <a:bodyPr/>
-          <a:lstStyle/>
-          <a:p>
-            <a:fld id="{84C450F2-3BB4-4AE4-8A35-A9D7AEA4C850}" type="slidenum">
-              <a:rPr lang="en-US" smtClean="0"/>
-              <a:t>19</a:t>
-            </a:fld>
-            <a:endParaRPr lang="en-US" dirty="0"/>
-          </a:p>
-        </p:txBody>
-      </p:sp>
-      <p:pic>
-        <p:nvPicPr>
-          <p:cNvPr id="2050" name="Picture 2" descr="Agile-Development-Stages">
-            <a:extLst>
-              <a:ext uri="{FF2B5EF4-FFF2-40B4-BE49-F238E27FC236}">
-                <a16:creationId xmlns:a16="http://schemas.microsoft.com/office/drawing/2014/main" id="{A4AD84B0-EB8A-B857-13C1-AB0D38AD13F1}"/>
-              </a:ext>
-            </a:extLst>
-          </p:cNvPr>
-          <p:cNvPicPr>
-            <a:picLocks noGrp="1" noChangeAspect="1" noChangeArrowheads="1"/>
-          </p:cNvPicPr>
-          <p:nvPr>
-            <p:ph idx="1"/>
-          </p:nvPr>
-        </p:nvPicPr>
-        <p:blipFill>
-          <a:blip r:embed="rId2">
-            <a:extLst>
-              <a:ext uri="{28A0092B-C50C-407E-A947-70E740481C1C}">
-                <a14:useLocalDpi xmlns:a14="http://schemas.microsoft.com/office/drawing/2010/main" val="0"/>
-              </a:ext>
-            </a:extLst>
-          </a:blip>
-          <a:srcRect/>
-          <a:stretch>
-            <a:fillRect/>
-          </a:stretch>
-        </p:blipFill>
-        <p:spPr bwMode="auto">
-          <a:xfrm>
-            <a:off x="1455175" y="760261"/>
-            <a:ext cx="9419303" cy="5237703"/>
-          </a:xfrm>
-          <a:prstGeom prst="rect">
-            <a:avLst/>
-          </a:prstGeom>
-          <a:noFill/>
-          <a:extLst>
-            <a:ext uri="{909E8E84-426E-40DD-AFC4-6F175D3DCCD1}">
-              <a14:hiddenFill xmlns:a14="http://schemas.microsoft.com/office/drawing/2010/main">
-                <a:solidFill>
-                  <a:srgbClr val="FFFFFF"/>
-                </a:solidFill>
-              </a14:hiddenFill>
-            </a:ext>
-          </a:extLst>
-        </p:spPr>
-      </p:pic>
-      <p:sp>
-        <p:nvSpPr>
-          <p:cNvPr id="7" name="TextBox 6">
-            <a:extLst>
-              <a:ext uri="{FF2B5EF4-FFF2-40B4-BE49-F238E27FC236}">
-                <a16:creationId xmlns:a16="http://schemas.microsoft.com/office/drawing/2014/main" id="{F784D617-69D2-F0FF-41A0-12D8B2D65B45}"/>
-              </a:ext>
-            </a:extLst>
-          </p:cNvPr>
-          <p:cNvSpPr txBox="1"/>
-          <p:nvPr/>
-        </p:nvSpPr>
-        <p:spPr>
-          <a:xfrm>
-            <a:off x="4322397" y="5997964"/>
-            <a:ext cx="3342582" cy="369332"/>
-          </a:xfrm>
-          <a:prstGeom prst="rect">
-            <a:avLst/>
-          </a:prstGeom>
-          <a:noFill/>
-        </p:spPr>
-        <p:txBody>
-          <a:bodyPr wrap="none" rtlCol="0">
-            <a:spAutoFit/>
-          </a:bodyPr>
-          <a:lstStyle/>
-          <a:p>
-            <a:r>
-              <a:rPr lang="en-US" dirty="0"/>
-              <a:t>Adopted from </a:t>
-            </a:r>
-            <a:r>
-              <a:rPr lang="en-US" dirty="0">
-                <a:hlinkClick r:id="rId3"/>
-              </a:rPr>
-              <a:t>geeksforgeeks</a:t>
-            </a:r>
-            <a:endParaRPr lang="en-US" dirty="0"/>
-          </a:p>
-        </p:txBody>
-      </p:sp>
-      <p:sp>
-        <p:nvSpPr>
-          <p:cNvPr id="9" name="Title 1">
-            <a:extLst>
-              <a:ext uri="{FF2B5EF4-FFF2-40B4-BE49-F238E27FC236}">
-                <a16:creationId xmlns:a16="http://schemas.microsoft.com/office/drawing/2014/main" id="{7DAE072F-2CF3-07E1-CEB9-4F3DF20F90E9}"/>
-              </a:ext>
-            </a:extLst>
-          </p:cNvPr>
-          <p:cNvSpPr>
-            <a:spLocks noGrp="1"/>
-          </p:cNvSpPr>
-          <p:nvPr>
-            <p:ph type="title"/>
-          </p:nvPr>
-        </p:nvSpPr>
-        <p:spPr>
-          <a:xfrm>
-            <a:off x="431172" y="293303"/>
-            <a:ext cx="11125032" cy="542440"/>
-          </a:xfrm>
-        </p:spPr>
-        <p:txBody>
-          <a:bodyPr/>
-          <a:lstStyle/>
-          <a:p>
-            <a:r>
-              <a:rPr lang="en-US" dirty="0"/>
-              <a:t>Life cycle of AGILE Methodology</a:t>
-            </a:r>
-          </a:p>
-        </p:txBody>
-      </p:sp>
-    </p:spTree>
-    <p:extLst>
-      <p:ext uri="{BB962C8B-B14F-4D97-AF65-F5344CB8AC3E}">
-        <p14:creationId xmlns:p14="http://schemas.microsoft.com/office/powerpoint/2010/main" val="1850882199"/>
-      </p:ext>
-    </p:extLst>
-  </p:cSld>
-  <p:clrMapOvr>
-    <a:masterClrMapping/>
-  </p:clrMapOvr>
-</p:sld>
-</file>
-
-<file path=ppt/slides/slide2.xml><?xml version="1.0" encoding="utf-8"?>
-<p:sld xmlns:a="http://schemas.openxmlformats.org/drawingml/2006/main" xmlns:r="http://schemas.openxmlformats.org/officeDocument/2006/relationships" xmlns:p="http://schemas.openxmlformats.org/presentationml/2006/main">
-  <p:cSld>
-    <p:spTree>
-      <p:nvGrpSpPr>
-        <p:cNvPr id="1" name=""/>
-        <p:cNvGrpSpPr/>
-        <p:nvPr/>
-      </p:nvGrpSpPr>
-      <p:grpSpPr>
-        <a:xfrm>
-          <a:off x="0" y="0"/>
-          <a:ext cx="0" cy="0"/>
-          <a:chOff x="0" y="0"/>
-          <a:chExt cx="0" cy="0"/>
-        </a:xfrm>
-      </p:grpSpPr>
-      <p:sp>
-        <p:nvSpPr>
-          <p:cNvPr id="2" name="Title 1">
-            <a:extLst>
-              <a:ext uri="{FF2B5EF4-FFF2-40B4-BE49-F238E27FC236}">
-                <a16:creationId xmlns:a16="http://schemas.microsoft.com/office/drawing/2014/main" id="{B3DE9B2D-51F2-CAE3-E06D-0110EAD8EA44}"/>
-              </a:ext>
-            </a:extLst>
-          </p:cNvPr>
-          <p:cNvSpPr>
-            <a:spLocks noGrp="1"/>
-          </p:cNvSpPr>
-          <p:nvPr>
-            <p:ph type="title"/>
-          </p:nvPr>
-        </p:nvSpPr>
-        <p:spPr/>
-        <p:txBody>
-          <a:bodyPr/>
-          <a:lstStyle/>
-          <a:p>
-            <a:r>
-              <a:rPr lang="en-US" dirty="0"/>
-              <a:t>ideal customer profile</a:t>
-            </a:r>
-          </a:p>
-        </p:txBody>
-      </p:sp>
-      <p:sp>
-        <p:nvSpPr>
-          <p:cNvPr id="3" name="Picture Placeholder 2">
-            <a:extLst>
-              <a:ext uri="{FF2B5EF4-FFF2-40B4-BE49-F238E27FC236}">
-                <a16:creationId xmlns:a16="http://schemas.microsoft.com/office/drawing/2014/main" id="{09BE711F-8433-59D1-A4D9-48891D621EF9}"/>
-              </a:ext>
-            </a:extLst>
-          </p:cNvPr>
-          <p:cNvSpPr>
-            <a:spLocks noGrp="1"/>
-          </p:cNvSpPr>
-          <p:nvPr>
-            <p:ph type="pic" sz="quarter" idx="15"/>
-          </p:nvPr>
-        </p:nvSpPr>
-        <p:spPr/>
-        <p:txBody>
-          <a:bodyPr/>
-          <a:lstStyle/>
-          <a:p>
-            <a:endParaRPr lang="en-US"/>
-          </a:p>
-        </p:txBody>
-      </p:sp>
-      <p:sp>
-        <p:nvSpPr>
-          <p:cNvPr id="4" name="Content Placeholder 3">
-            <a:extLst>
-              <a:ext uri="{FF2B5EF4-FFF2-40B4-BE49-F238E27FC236}">
-                <a16:creationId xmlns:a16="http://schemas.microsoft.com/office/drawing/2014/main" id="{B7E2D2FD-740A-D3EE-0739-311B0DDD63C6}"/>
-              </a:ext>
-            </a:extLst>
-          </p:cNvPr>
-          <p:cNvSpPr>
-            <a:spLocks noGrp="1"/>
-          </p:cNvSpPr>
-          <p:nvPr>
-            <p:ph sz="quarter" idx="14"/>
-          </p:nvPr>
-        </p:nvSpPr>
-        <p:spPr/>
-        <p:txBody>
-          <a:bodyPr/>
-          <a:lstStyle/>
-          <a:p>
-            <a:r>
-              <a:rPr lang="en-US" dirty="0"/>
-              <a:t>Person of target (fashion-insta shoppers)</a:t>
-            </a:r>
-          </a:p>
-          <a:p>
-            <a:r>
-              <a:rPr lang="en-US" dirty="0"/>
-              <a:t>Problem we are trying to solve. (problem </a:t>
-            </a:r>
-            <a:r>
-              <a:rPr lang="en-US" dirty="0" err="1"/>
-              <a:t>stmt</a:t>
-            </a:r>
-            <a:r>
-              <a:rPr lang="en-US" dirty="0"/>
-              <a:t>, solution </a:t>
-            </a:r>
-            <a:r>
-              <a:rPr lang="en-US" dirty="0" err="1"/>
-              <a:t>stmt</a:t>
-            </a:r>
-            <a:r>
-              <a:rPr lang="en-US" dirty="0"/>
-              <a:t>, vision </a:t>
-            </a:r>
-            <a:r>
-              <a:rPr lang="en-US" dirty="0" err="1"/>
-              <a:t>stmt</a:t>
-            </a:r>
-            <a:endParaRPr lang="en-US" dirty="0"/>
-          </a:p>
-          <a:p>
-            <a:r>
-              <a:rPr lang="en-US" dirty="0"/>
-              <a:t>serve our customer with relevant portfolio)</a:t>
-            </a:r>
-          </a:p>
-        </p:txBody>
-      </p:sp>
-      <p:sp>
-        <p:nvSpPr>
-          <p:cNvPr id="5" name="Date Placeholder 4">
-            <a:extLst>
-              <a:ext uri="{FF2B5EF4-FFF2-40B4-BE49-F238E27FC236}">
-                <a16:creationId xmlns:a16="http://schemas.microsoft.com/office/drawing/2014/main" id="{A1077CA4-DBDF-B26B-D035-49FB940A2300}"/>
-              </a:ext>
-            </a:extLst>
-          </p:cNvPr>
-          <p:cNvSpPr>
-            <a:spLocks noGrp="1"/>
-          </p:cNvSpPr>
-          <p:nvPr>
-            <p:ph type="dt" sz="half" idx="10"/>
-          </p:nvPr>
-        </p:nvSpPr>
-        <p:spPr/>
-        <p:txBody>
-          <a:bodyPr/>
-          <a:lstStyle/>
-          <a:p>
-            <a:fld id="{D3C75A4F-7395-44C0-9A76-83F0F6EA512A}" type="datetime1">
-              <a:rPr lang="en-US" smtClean="0"/>
-              <a:t>1/9/2026</a:t>
-            </a:fld>
-            <a:endParaRPr lang="en-US" dirty="0"/>
-          </a:p>
-        </p:txBody>
-      </p:sp>
-      <p:sp>
-        <p:nvSpPr>
-          <p:cNvPr id="6" name="Footer Placeholder 5">
-            <a:extLst>
-              <a:ext uri="{FF2B5EF4-FFF2-40B4-BE49-F238E27FC236}">
-                <a16:creationId xmlns:a16="http://schemas.microsoft.com/office/drawing/2014/main" id="{8A12F3A3-F783-4FCA-664E-8C2C6C0E9C1B}"/>
-              </a:ext>
-            </a:extLst>
-          </p:cNvPr>
-          <p:cNvSpPr>
-            <a:spLocks noGrp="1"/>
-          </p:cNvSpPr>
-          <p:nvPr>
-            <p:ph type="ftr" sz="quarter" idx="11"/>
-          </p:nvPr>
-        </p:nvSpPr>
-        <p:spPr/>
-        <p:txBody>
-          <a:bodyPr/>
-          <a:lstStyle/>
-          <a:p>
-            <a:r>
-              <a:rPr lang="en-US"/>
-              <a:t>Sample Footer Text</a:t>
-            </a:r>
-            <a:endParaRPr lang="en-US" dirty="0"/>
-          </a:p>
-        </p:txBody>
-      </p:sp>
-      <p:sp>
-        <p:nvSpPr>
-          <p:cNvPr id="7" name="Slide Number Placeholder 6">
-            <a:extLst>
-              <a:ext uri="{FF2B5EF4-FFF2-40B4-BE49-F238E27FC236}">
-                <a16:creationId xmlns:a16="http://schemas.microsoft.com/office/drawing/2014/main" id="{7657728B-2D3B-B218-791F-13914B3F6DE5}"/>
-              </a:ext>
-            </a:extLst>
-          </p:cNvPr>
-          <p:cNvSpPr>
-            <a:spLocks noGrp="1"/>
-          </p:cNvSpPr>
-          <p:nvPr>
-            <p:ph type="sldNum" sz="quarter" idx="12"/>
-          </p:nvPr>
-        </p:nvSpPr>
-        <p:spPr/>
-        <p:txBody>
-          <a:bodyPr/>
-          <a:lstStyle/>
-          <a:p>
-            <a:fld id="{CC057153-B650-4DEB-B370-79DDCFDCE934}" type="slidenum">
-              <a:rPr lang="en-US" smtClean="0"/>
-              <a:t>2</a:t>
-            </a:fld>
-            <a:endParaRPr lang="en-US" dirty="0"/>
-          </a:p>
-        </p:txBody>
-      </p:sp>
-    </p:spTree>
-    <p:extLst>
-      <p:ext uri="{BB962C8B-B14F-4D97-AF65-F5344CB8AC3E}">
-        <p14:creationId xmlns:p14="http://schemas.microsoft.com/office/powerpoint/2010/main" val="1958765134"/>
-      </p:ext>
-    </p:extLst>
-  </p:cSld>
-  <p:clrMapOvr>
-    <a:masterClrMapping/>
-  </p:clrMapOvr>
-</p:sld>
-</file>
-
-<file path=ppt/slides/slide20.xml><?xml version="1.0" encoding="utf-8"?>
-<p:sld xmlns:a="http://schemas.openxmlformats.org/drawingml/2006/main" xmlns:r="http://schemas.openxmlformats.org/officeDocument/2006/relationships" xmlns:p="http://schemas.openxmlformats.org/presentationml/2006/main">
-  <p:cSld>
-    <p:spTree>
-      <p:nvGrpSpPr>
-        <p:cNvPr id="1" name=""/>
-        <p:cNvGrpSpPr/>
-        <p:nvPr/>
-      </p:nvGrpSpPr>
-      <p:grpSpPr>
-        <a:xfrm>
-          <a:off x="0" y="0"/>
-          <a:ext cx="0" cy="0"/>
-          <a:chOff x="0" y="0"/>
-          <a:chExt cx="0" cy="0"/>
-        </a:xfrm>
-      </p:grpSpPr>
-      <p:sp>
-        <p:nvSpPr>
-          <p:cNvPr id="2" name="Title 1">
-            <a:extLst>
-              <a:ext uri="{FF2B5EF4-FFF2-40B4-BE49-F238E27FC236}">
-                <a16:creationId xmlns:a16="http://schemas.microsoft.com/office/drawing/2014/main" id="{BE9CBC53-77EE-07E6-6E64-FE1885EFFAAE}"/>
-              </a:ext>
-            </a:extLst>
-          </p:cNvPr>
-          <p:cNvSpPr>
-            <a:spLocks noGrp="1"/>
-          </p:cNvSpPr>
-          <p:nvPr>
-            <p:ph type="title"/>
-          </p:nvPr>
-        </p:nvSpPr>
-        <p:spPr/>
-        <p:txBody>
-          <a:bodyPr/>
-          <a:lstStyle/>
-          <a:p>
-            <a:r>
-              <a:rPr lang="en-US" dirty="0"/>
-              <a:t>Agile manifesto</a:t>
-            </a:r>
-          </a:p>
-        </p:txBody>
-      </p:sp>
-      <p:sp>
-        <p:nvSpPr>
-          <p:cNvPr id="3" name="Content Placeholder 2">
-            <a:extLst>
-              <a:ext uri="{FF2B5EF4-FFF2-40B4-BE49-F238E27FC236}">
-                <a16:creationId xmlns:a16="http://schemas.microsoft.com/office/drawing/2014/main" id="{20B277CA-A1A4-6C92-6349-F9186DFB3572}"/>
-              </a:ext>
-            </a:extLst>
-          </p:cNvPr>
-          <p:cNvSpPr>
-            <a:spLocks noGrp="1"/>
-          </p:cNvSpPr>
-          <p:nvPr>
-            <p:ph idx="1"/>
-          </p:nvPr>
-        </p:nvSpPr>
-        <p:spPr/>
-        <p:txBody>
-          <a:bodyPr>
-            <a:noAutofit/>
-          </a:bodyPr>
-          <a:lstStyle/>
-          <a:p>
-            <a:pPr marL="0" indent="0" fontAlgn="ctr">
-              <a:buNone/>
-            </a:pPr>
-            <a:r>
-              <a:rPr lang="en-US" sz="2000" dirty="0"/>
-              <a:t>The guiding principles of the agile methodology. Consist of the following four principles</a:t>
-            </a:r>
-          </a:p>
-          <a:p>
-            <a:pPr fontAlgn="ctr">
-              <a:buFont typeface="+mj-lt"/>
-              <a:buAutoNum type="arabicPeriod"/>
-            </a:pPr>
-            <a:r>
-              <a:rPr lang="en-US" sz="2000" b="1" dirty="0"/>
-              <a:t>People over Processes</a:t>
-            </a:r>
-          </a:p>
-          <a:p>
-            <a:pPr lvl="1"/>
-            <a:r>
-              <a:rPr lang="en-US" sz="1400" dirty="0"/>
-              <a:t>Individuals and interactions over processes and tools.</a:t>
-            </a:r>
-          </a:p>
-          <a:p>
-            <a:pPr lvl="1"/>
-            <a:r>
-              <a:rPr lang="en-US" sz="1400" dirty="0"/>
-              <a:t>Emphasizes teamwork and collaboration </a:t>
-            </a:r>
-          </a:p>
-          <a:p>
-            <a:pPr fontAlgn="ctr">
-              <a:buFont typeface="+mj-lt"/>
-              <a:buAutoNum type="arabicPeriod"/>
-            </a:pPr>
-            <a:r>
-              <a:rPr lang="en-US" sz="2000" b="1" dirty="0"/>
-              <a:t>Working Software over Documentation</a:t>
-            </a:r>
-          </a:p>
-          <a:p>
-            <a:pPr lvl="1"/>
-            <a:r>
-              <a:rPr lang="en-US" sz="1400" dirty="0"/>
-              <a:t>Working product over comprehensive documentation</a:t>
-            </a:r>
-          </a:p>
-          <a:p>
-            <a:pPr lvl="1"/>
-            <a:r>
-              <a:rPr lang="en-US" sz="1400" dirty="0"/>
-              <a:t>Focus on delivering working/functional products over lengthy documentation. </a:t>
-            </a:r>
-          </a:p>
-          <a:p>
-            <a:pPr fontAlgn="ctr">
-              <a:buFont typeface="+mj-lt"/>
-              <a:buAutoNum type="arabicPeriod"/>
-            </a:pPr>
-            <a:r>
-              <a:rPr lang="en-US" sz="2000" b="1" dirty="0"/>
-              <a:t>Collaboration over Contracts</a:t>
-            </a:r>
-          </a:p>
-          <a:p>
-            <a:pPr lvl="1"/>
-            <a:r>
-              <a:rPr lang="en-US" sz="1400" dirty="0"/>
-              <a:t>Customer collaboration over contract negotiation</a:t>
-            </a:r>
-          </a:p>
-          <a:p>
-            <a:pPr lvl="1"/>
-            <a:r>
-              <a:rPr lang="en-US" sz="1400" dirty="0"/>
-              <a:t>Close engagement with customer to ensure their requirements and needs are met. </a:t>
-            </a:r>
-          </a:p>
-          <a:p>
-            <a:pPr>
-              <a:buFont typeface="+mj-lt"/>
-              <a:buAutoNum type="arabicPeriod"/>
-            </a:pPr>
-            <a:r>
-              <a:rPr lang="en-US" sz="2000" b="1" dirty="0"/>
-              <a:t>Responding to change over following a Plan</a:t>
-            </a:r>
-          </a:p>
-          <a:p>
-            <a:pPr lvl="1"/>
-            <a:r>
-              <a:rPr lang="en-US" sz="1400" dirty="0"/>
-              <a:t>Responding to change over following a plan</a:t>
-            </a:r>
-          </a:p>
-          <a:p>
-            <a:pPr lvl="1"/>
-            <a:r>
-              <a:rPr lang="en-US" sz="1400" dirty="0"/>
-              <a:t>Allows team to shift/pivot as project requirements change without derailing the project.</a:t>
-            </a:r>
-          </a:p>
-        </p:txBody>
-      </p:sp>
-      <p:sp>
-        <p:nvSpPr>
-          <p:cNvPr id="4" name="Date Placeholder 3">
-            <a:extLst>
-              <a:ext uri="{FF2B5EF4-FFF2-40B4-BE49-F238E27FC236}">
-                <a16:creationId xmlns:a16="http://schemas.microsoft.com/office/drawing/2014/main" id="{1B23CB23-8330-A2F6-6E34-CEEF35D497E2}"/>
-              </a:ext>
-            </a:extLst>
-          </p:cNvPr>
-          <p:cNvSpPr>
-            <a:spLocks noGrp="1"/>
-          </p:cNvSpPr>
-          <p:nvPr>
-            <p:ph type="dt" sz="half" idx="10"/>
-          </p:nvPr>
-        </p:nvSpPr>
-        <p:spPr/>
-        <p:txBody>
-          <a:bodyPr/>
-          <a:lstStyle/>
-          <a:p>
-            <a:fld id="{FE21D4C7-8630-4B98-978C-30388BBD4EE8}" type="datetime1">
-              <a:rPr lang="en-US" smtClean="0"/>
-              <a:t>1/9/2026</a:t>
-            </a:fld>
-            <a:endParaRPr lang="en-US" dirty="0"/>
-          </a:p>
-        </p:txBody>
-      </p:sp>
-      <p:sp>
-        <p:nvSpPr>
-          <p:cNvPr id="6" name="Slide Number Placeholder 5">
-            <a:extLst>
-              <a:ext uri="{FF2B5EF4-FFF2-40B4-BE49-F238E27FC236}">
-                <a16:creationId xmlns:a16="http://schemas.microsoft.com/office/drawing/2014/main" id="{A008F10D-56D8-BED0-D780-1ED72032E28A}"/>
-              </a:ext>
-            </a:extLst>
-          </p:cNvPr>
-          <p:cNvSpPr>
-            <a:spLocks noGrp="1"/>
-          </p:cNvSpPr>
-          <p:nvPr>
-            <p:ph type="sldNum" sz="quarter" idx="12"/>
-          </p:nvPr>
-        </p:nvSpPr>
-        <p:spPr/>
-        <p:txBody>
-          <a:bodyPr/>
-          <a:lstStyle/>
-          <a:p>
-            <a:fld id="{84C450F2-3BB4-4AE4-8A35-A9D7AEA4C850}" type="slidenum">
-              <a:rPr lang="en-US" smtClean="0"/>
-              <a:t>20</a:t>
-            </a:fld>
-            <a:endParaRPr lang="en-US" dirty="0"/>
-          </a:p>
-        </p:txBody>
-      </p:sp>
-    </p:spTree>
-    <p:extLst>
-      <p:ext uri="{BB962C8B-B14F-4D97-AF65-F5344CB8AC3E}">
-        <p14:creationId xmlns:p14="http://schemas.microsoft.com/office/powerpoint/2010/main" val="3982136859"/>
-      </p:ext>
-    </p:extLst>
-  </p:cSld>
-  <p:clrMapOvr>
-    <a:masterClrMapping/>
-  </p:clrMapOvr>
-</p:sld>
-</file>
-
-<file path=ppt/slides/slide21.xml><?xml version="1.0" encoding="utf-8"?>
-<p:sld xmlns:a="http://schemas.openxmlformats.org/drawingml/2006/main" xmlns:r="http://schemas.openxmlformats.org/officeDocument/2006/relationships" xmlns:p="http://schemas.openxmlformats.org/presentationml/2006/main">
-  <p:cSld>
-    <p:spTree>
-      <p:nvGrpSpPr>
-        <p:cNvPr id="1" name=""/>
-        <p:cNvGrpSpPr/>
-        <p:nvPr/>
-      </p:nvGrpSpPr>
-      <p:grpSpPr>
-        <a:xfrm>
-          <a:off x="0" y="0"/>
-          <a:ext cx="0" cy="0"/>
-          <a:chOff x="0" y="0"/>
-          <a:chExt cx="0" cy="0"/>
-        </a:xfrm>
-      </p:grpSpPr>
-      <p:sp>
-        <p:nvSpPr>
-          <p:cNvPr id="2" name="Title 1">
-            <a:extLst>
-              <a:ext uri="{FF2B5EF4-FFF2-40B4-BE49-F238E27FC236}">
-                <a16:creationId xmlns:a16="http://schemas.microsoft.com/office/drawing/2014/main" id="{F866BE2D-2CCC-122F-4E3E-03A27967FD7B}"/>
-              </a:ext>
-            </a:extLst>
-          </p:cNvPr>
-          <p:cNvSpPr>
-            <a:spLocks noGrp="1"/>
-          </p:cNvSpPr>
-          <p:nvPr>
-            <p:ph type="title"/>
-          </p:nvPr>
-        </p:nvSpPr>
-        <p:spPr/>
-        <p:txBody>
-          <a:bodyPr/>
-          <a:lstStyle/>
-          <a:p>
-            <a:r>
-              <a:rPr lang="en-US" dirty="0"/>
-              <a:t>12 principles of agile methodology</a:t>
-            </a:r>
-          </a:p>
-        </p:txBody>
-      </p:sp>
-      <p:sp>
-        <p:nvSpPr>
-          <p:cNvPr id="4" name="Date Placeholder 3">
-            <a:extLst>
-              <a:ext uri="{FF2B5EF4-FFF2-40B4-BE49-F238E27FC236}">
-                <a16:creationId xmlns:a16="http://schemas.microsoft.com/office/drawing/2014/main" id="{146A5F9B-06C8-1908-B0C1-931278BC5501}"/>
-              </a:ext>
-            </a:extLst>
-          </p:cNvPr>
-          <p:cNvSpPr>
-            <a:spLocks noGrp="1"/>
-          </p:cNvSpPr>
-          <p:nvPr>
-            <p:ph type="dt" sz="half" idx="10"/>
-          </p:nvPr>
-        </p:nvSpPr>
-        <p:spPr/>
-        <p:txBody>
-          <a:bodyPr/>
-          <a:lstStyle/>
-          <a:p>
-            <a:fld id="{FE21D4C7-8630-4B98-978C-30388BBD4EE8}" type="datetime1">
-              <a:rPr lang="en-US" smtClean="0"/>
-              <a:t>1/9/2026</a:t>
-            </a:fld>
-            <a:endParaRPr lang="en-US" dirty="0"/>
-          </a:p>
-        </p:txBody>
-      </p:sp>
-      <p:sp>
-        <p:nvSpPr>
-          <p:cNvPr id="6" name="Slide Number Placeholder 5">
-            <a:extLst>
-              <a:ext uri="{FF2B5EF4-FFF2-40B4-BE49-F238E27FC236}">
-                <a16:creationId xmlns:a16="http://schemas.microsoft.com/office/drawing/2014/main" id="{400E4FDD-2FBA-9373-9AD3-976A6D23BA84}"/>
-              </a:ext>
-            </a:extLst>
-          </p:cNvPr>
-          <p:cNvSpPr>
-            <a:spLocks noGrp="1"/>
-          </p:cNvSpPr>
-          <p:nvPr>
-            <p:ph type="sldNum" sz="quarter" idx="12"/>
-          </p:nvPr>
-        </p:nvSpPr>
-        <p:spPr/>
-        <p:txBody>
-          <a:bodyPr/>
-          <a:lstStyle/>
-          <a:p>
-            <a:fld id="{84C450F2-3BB4-4AE4-8A35-A9D7AEA4C850}" type="slidenum">
-              <a:rPr lang="en-US" smtClean="0"/>
-              <a:t>21</a:t>
-            </a:fld>
-            <a:endParaRPr lang="en-US" dirty="0"/>
-          </a:p>
-        </p:txBody>
-      </p:sp>
-      <p:pic>
-        <p:nvPicPr>
-          <p:cNvPr id="8" name="Content Placeholder 7">
-            <a:extLst>
-              <a:ext uri="{FF2B5EF4-FFF2-40B4-BE49-F238E27FC236}">
-                <a16:creationId xmlns:a16="http://schemas.microsoft.com/office/drawing/2014/main" id="{5DD9F5DB-0CA8-2CDC-C744-79E7733FDEE6}"/>
-              </a:ext>
-            </a:extLst>
-          </p:cNvPr>
-          <p:cNvPicPr>
-            <a:picLocks noGrp="1" noChangeAspect="1"/>
-          </p:cNvPicPr>
-          <p:nvPr>
-            <p:ph idx="1"/>
-          </p:nvPr>
-        </p:nvPicPr>
-        <p:blipFill>
-          <a:blip r:embed="rId2"/>
-          <a:stretch>
-            <a:fillRect/>
-          </a:stretch>
-        </p:blipFill>
-        <p:spPr>
-          <a:xfrm>
-            <a:off x="1852151" y="1258403"/>
-            <a:ext cx="7993627" cy="4952379"/>
-          </a:xfrm>
-          <a:prstGeom prst="rect">
-            <a:avLst/>
-          </a:prstGeom>
-        </p:spPr>
-      </p:pic>
-      <p:sp>
-        <p:nvSpPr>
-          <p:cNvPr id="9" name="TextBox 8">
-            <a:extLst>
-              <a:ext uri="{FF2B5EF4-FFF2-40B4-BE49-F238E27FC236}">
-                <a16:creationId xmlns:a16="http://schemas.microsoft.com/office/drawing/2014/main" id="{21E1BC4A-DC02-6601-370A-9611DAD60195}"/>
-              </a:ext>
-            </a:extLst>
-          </p:cNvPr>
-          <p:cNvSpPr txBox="1"/>
-          <p:nvPr/>
-        </p:nvSpPr>
-        <p:spPr>
-          <a:xfrm>
-            <a:off x="4424709" y="6210782"/>
-            <a:ext cx="3342582" cy="369332"/>
-          </a:xfrm>
-          <a:prstGeom prst="rect">
-            <a:avLst/>
-          </a:prstGeom>
-          <a:noFill/>
-        </p:spPr>
-        <p:txBody>
-          <a:bodyPr wrap="none" rtlCol="0">
-            <a:spAutoFit/>
-          </a:bodyPr>
-          <a:lstStyle/>
-          <a:p>
-            <a:r>
-              <a:rPr lang="en-US" dirty="0"/>
-              <a:t>Adopted from </a:t>
-            </a:r>
-            <a:r>
-              <a:rPr lang="en-US" dirty="0">
-                <a:hlinkClick r:id="rId3"/>
-              </a:rPr>
-              <a:t>geeksforgeeks</a:t>
-            </a:r>
-            <a:endParaRPr lang="en-US" dirty="0"/>
-          </a:p>
-        </p:txBody>
-      </p:sp>
-    </p:spTree>
-    <p:extLst>
-      <p:ext uri="{BB962C8B-B14F-4D97-AF65-F5344CB8AC3E}">
-        <p14:creationId xmlns:p14="http://schemas.microsoft.com/office/powerpoint/2010/main" val="3275857612"/>
-      </p:ext>
-    </p:extLst>
-  </p:cSld>
-  <p:clrMapOvr>
-    <a:masterClrMapping/>
-  </p:clrMapOvr>
-</p:sld>
-</file>
-
-<file path=ppt/slides/slide22.xml><?xml version="1.0" encoding="utf-8"?>
-<p:sld xmlns:a="http://schemas.openxmlformats.org/drawingml/2006/main" xmlns:r="http://schemas.openxmlformats.org/officeDocument/2006/relationships" xmlns:p="http://schemas.openxmlformats.org/presentationml/2006/main">
-  <p:cSld>
-    <p:spTree>
-      <p:nvGrpSpPr>
-        <p:cNvPr id="1" name=""/>
-        <p:cNvGrpSpPr/>
-        <p:nvPr/>
-      </p:nvGrpSpPr>
-      <p:grpSpPr>
-        <a:xfrm>
-          <a:off x="0" y="0"/>
-          <a:ext cx="0" cy="0"/>
-          <a:chOff x="0" y="0"/>
-          <a:chExt cx="0" cy="0"/>
-        </a:xfrm>
-      </p:grpSpPr>
-      <p:sp>
-        <p:nvSpPr>
-          <p:cNvPr id="2" name="Title 1">
-            <a:extLst>
-              <a:ext uri="{FF2B5EF4-FFF2-40B4-BE49-F238E27FC236}">
-                <a16:creationId xmlns:a16="http://schemas.microsoft.com/office/drawing/2014/main" id="{07638E5D-EF85-5265-BCF1-477AFFB9A476}"/>
-              </a:ext>
-            </a:extLst>
-          </p:cNvPr>
-          <p:cNvSpPr>
-            <a:spLocks noGrp="1"/>
-          </p:cNvSpPr>
-          <p:nvPr>
-            <p:ph type="title"/>
-          </p:nvPr>
-        </p:nvSpPr>
-        <p:spPr/>
-        <p:txBody>
-          <a:bodyPr/>
-          <a:lstStyle/>
-          <a:p>
-            <a:r>
-              <a:rPr lang="en-US" dirty="0"/>
-              <a:t>Benefits of agile</a:t>
-            </a:r>
-          </a:p>
-        </p:txBody>
-      </p:sp>
-      <p:sp>
-        <p:nvSpPr>
-          <p:cNvPr id="3" name="Content Placeholder 2">
-            <a:extLst>
-              <a:ext uri="{FF2B5EF4-FFF2-40B4-BE49-F238E27FC236}">
-                <a16:creationId xmlns:a16="http://schemas.microsoft.com/office/drawing/2014/main" id="{A5253791-1BCA-268D-CC30-73CC319007C3}"/>
-              </a:ext>
-            </a:extLst>
-          </p:cNvPr>
-          <p:cNvSpPr>
-            <a:spLocks noGrp="1"/>
-          </p:cNvSpPr>
-          <p:nvPr>
-            <p:ph idx="1"/>
-          </p:nvPr>
-        </p:nvSpPr>
-        <p:spPr/>
-        <p:txBody>
-          <a:bodyPr/>
-          <a:lstStyle/>
-          <a:p>
-            <a:r>
-              <a:rPr lang="en-US" b="1" dirty="0"/>
-              <a:t>Flexibility and adaptability</a:t>
-            </a:r>
-            <a:r>
-              <a:rPr lang="en-US" dirty="0"/>
-              <a:t>: Agile allows teams to respond to changes in requirements and market conditions swiftly.</a:t>
-            </a:r>
-          </a:p>
-          <a:p>
-            <a:r>
-              <a:rPr lang="en-US" b="1" dirty="0"/>
-              <a:t>Faster Delivery</a:t>
-            </a:r>
-            <a:r>
-              <a:rPr lang="en-US" dirty="0"/>
-              <a:t>: By working in short cycles, teams can deliver functional increments of the product more frequently.</a:t>
-            </a:r>
-          </a:p>
-          <a:p>
-            <a:r>
-              <a:rPr lang="en-US" b="1" dirty="0"/>
-              <a:t>Enhanced Collaboration</a:t>
-            </a:r>
-            <a:r>
-              <a:rPr lang="en-US" dirty="0"/>
-              <a:t>: Agile promotes teamwork and communication, leading to better problem-solving and innovation.</a:t>
-            </a:r>
-          </a:p>
-          <a:p>
-            <a:r>
-              <a:rPr lang="en-US" b="1" dirty="0"/>
-              <a:t>Transparency</a:t>
-            </a:r>
-            <a:r>
-              <a:rPr lang="en-US" dirty="0"/>
-              <a:t>: Agile keeps stakeholders informed at every stage, ensuring clarity and alignment.</a:t>
-            </a:r>
-          </a:p>
-          <a:p>
-            <a:r>
-              <a:rPr lang="en-US" b="1" dirty="0"/>
-              <a:t>Iterative Development</a:t>
-            </a:r>
-            <a:r>
-              <a:rPr lang="en-US" dirty="0"/>
-              <a:t>: Work is done in small, manageable steps, allowing for regular improvements and quick adjustments.</a:t>
-            </a:r>
-          </a:p>
-          <a:p>
-            <a:r>
-              <a:rPr lang="en-US" b="1" dirty="0"/>
-              <a:t>Customer-Centric</a:t>
-            </a:r>
-            <a:r>
-              <a:rPr lang="en-US" dirty="0"/>
-              <a:t>: Continuous feedback from customers ensures that the final product aligns with their needs and expectations</a:t>
-            </a:r>
-          </a:p>
-          <a:p>
-            <a:endParaRPr lang="en-US" dirty="0"/>
-          </a:p>
-        </p:txBody>
-      </p:sp>
-      <p:sp>
-        <p:nvSpPr>
-          <p:cNvPr id="4" name="Date Placeholder 3">
-            <a:extLst>
-              <a:ext uri="{FF2B5EF4-FFF2-40B4-BE49-F238E27FC236}">
-                <a16:creationId xmlns:a16="http://schemas.microsoft.com/office/drawing/2014/main" id="{838D9976-35DD-ABBF-19AC-CBDAAFB8AAD5}"/>
-              </a:ext>
-            </a:extLst>
-          </p:cNvPr>
-          <p:cNvSpPr>
-            <a:spLocks noGrp="1"/>
-          </p:cNvSpPr>
-          <p:nvPr>
-            <p:ph type="dt" sz="half" idx="10"/>
-          </p:nvPr>
-        </p:nvSpPr>
-        <p:spPr/>
-        <p:txBody>
-          <a:bodyPr/>
-          <a:lstStyle/>
-          <a:p>
-            <a:fld id="{FE21D4C7-8630-4B98-978C-30388BBD4EE8}" type="datetime1">
-              <a:rPr lang="en-US" smtClean="0"/>
-              <a:t>1/9/2026</a:t>
-            </a:fld>
-            <a:endParaRPr lang="en-US" dirty="0"/>
-          </a:p>
-        </p:txBody>
-      </p:sp>
-      <p:sp>
-        <p:nvSpPr>
-          <p:cNvPr id="6" name="Slide Number Placeholder 5">
-            <a:extLst>
-              <a:ext uri="{FF2B5EF4-FFF2-40B4-BE49-F238E27FC236}">
-                <a16:creationId xmlns:a16="http://schemas.microsoft.com/office/drawing/2014/main" id="{2B0B98B3-EF09-AD0A-4554-6993E892DA29}"/>
-              </a:ext>
-            </a:extLst>
-          </p:cNvPr>
-          <p:cNvSpPr>
-            <a:spLocks noGrp="1"/>
-          </p:cNvSpPr>
-          <p:nvPr>
-            <p:ph type="sldNum" sz="quarter" idx="12"/>
-          </p:nvPr>
-        </p:nvSpPr>
-        <p:spPr/>
-        <p:txBody>
-          <a:bodyPr/>
-          <a:lstStyle/>
-          <a:p>
-            <a:fld id="{84C450F2-3BB4-4AE4-8A35-A9D7AEA4C850}" type="slidenum">
-              <a:rPr lang="en-US" smtClean="0"/>
-              <a:t>22</a:t>
-            </a:fld>
-            <a:endParaRPr lang="en-US" dirty="0"/>
-          </a:p>
-        </p:txBody>
-      </p:sp>
-    </p:spTree>
-    <p:extLst>
-      <p:ext uri="{BB962C8B-B14F-4D97-AF65-F5344CB8AC3E}">
-        <p14:creationId xmlns:p14="http://schemas.microsoft.com/office/powerpoint/2010/main" val="524967018"/>
-      </p:ext>
-    </p:extLst>
-  </p:cSld>
-  <p:clrMapOvr>
-    <a:masterClrMapping/>
-  </p:clrMapOvr>
-</p:sld>
-</file>
-
-<file path=ppt/slides/slide23.xml><?xml version="1.0" encoding="utf-8"?>
-<p:sld xmlns:a="http://schemas.openxmlformats.org/drawingml/2006/main" xmlns:r="http://schemas.openxmlformats.org/officeDocument/2006/relationships" xmlns:p="http://schemas.openxmlformats.org/presentationml/2006/main">
-  <p:cSld>
-    <p:spTree>
-      <p:nvGrpSpPr>
-        <p:cNvPr id="1" name=""/>
-        <p:cNvGrpSpPr/>
-        <p:nvPr/>
-      </p:nvGrpSpPr>
-      <p:grpSpPr>
-        <a:xfrm>
-          <a:off x="0" y="0"/>
-          <a:ext cx="0" cy="0"/>
-          <a:chOff x="0" y="0"/>
-          <a:chExt cx="0" cy="0"/>
-        </a:xfrm>
-      </p:grpSpPr>
-      <p:sp>
-        <p:nvSpPr>
-          <p:cNvPr id="2" name="Title 1">
-            <a:extLst>
-              <a:ext uri="{FF2B5EF4-FFF2-40B4-BE49-F238E27FC236}">
-                <a16:creationId xmlns:a16="http://schemas.microsoft.com/office/drawing/2014/main" id="{78ADA91B-2FCB-30FF-6AA4-F06EEBA2C94B}"/>
-              </a:ext>
-            </a:extLst>
-          </p:cNvPr>
-          <p:cNvSpPr>
-            <a:spLocks noGrp="1"/>
-          </p:cNvSpPr>
-          <p:nvPr>
-            <p:ph type="title"/>
-          </p:nvPr>
-        </p:nvSpPr>
-        <p:spPr>
-          <a:xfrm>
-            <a:off x="431172" y="293302"/>
-            <a:ext cx="11125032" cy="965101"/>
-          </a:xfrm>
-        </p:spPr>
-        <p:txBody>
-          <a:bodyPr anchor="b">
-            <a:normAutofit/>
-          </a:bodyPr>
-          <a:lstStyle/>
-          <a:p>
-            <a:r>
-              <a:rPr lang="en-US"/>
-              <a:t>EU Data Privacy requirements (</a:t>
-            </a:r>
-            <a:r>
-              <a:rPr lang="en-US" err="1"/>
-              <a:t>gdpr</a:t>
-            </a:r>
-            <a:r>
-              <a:rPr lang="en-US"/>
-              <a:t>)</a:t>
-            </a:r>
-          </a:p>
-        </p:txBody>
-      </p:sp>
-      <p:sp>
-        <p:nvSpPr>
-          <p:cNvPr id="4" name="Date Placeholder 3">
-            <a:extLst>
-              <a:ext uri="{FF2B5EF4-FFF2-40B4-BE49-F238E27FC236}">
-                <a16:creationId xmlns:a16="http://schemas.microsoft.com/office/drawing/2014/main" id="{B311C537-DDB5-5FD6-B661-B39889440990}"/>
-              </a:ext>
-            </a:extLst>
-          </p:cNvPr>
-          <p:cNvSpPr>
-            <a:spLocks noGrp="1"/>
-          </p:cNvSpPr>
-          <p:nvPr>
-            <p:ph type="dt" sz="half" idx="10"/>
-          </p:nvPr>
-        </p:nvSpPr>
-        <p:spPr>
-          <a:xfrm>
-            <a:off x="431172" y="6490524"/>
-            <a:ext cx="2841959" cy="336141"/>
-          </a:xfrm>
-        </p:spPr>
-        <p:txBody>
-          <a:bodyPr anchor="ctr">
-            <a:normAutofit/>
-          </a:bodyPr>
-          <a:lstStyle/>
-          <a:p>
-            <a:pPr>
-              <a:spcAft>
-                <a:spcPts val="600"/>
-              </a:spcAft>
-            </a:pPr>
-            <a:fld id="{FE21D4C7-8630-4B98-978C-30388BBD4EE8}" type="datetime1">
-              <a:rPr lang="en-US" smtClean="0"/>
-              <a:pPr>
-                <a:spcAft>
-                  <a:spcPts val="600"/>
-                </a:spcAft>
-              </a:pPr>
-              <a:t>1/9/2026</a:t>
-            </a:fld>
-            <a:endParaRPr lang="en-US"/>
-          </a:p>
-        </p:txBody>
-      </p:sp>
-      <p:sp>
-        <p:nvSpPr>
-          <p:cNvPr id="17" name="Footer Placeholder 5">
-            <a:extLst>
-              <a:ext uri="{FF2B5EF4-FFF2-40B4-BE49-F238E27FC236}">
-                <a16:creationId xmlns:a16="http://schemas.microsoft.com/office/drawing/2014/main" id="{3C0783FD-3ED7-B387-2478-4AE4EC340542}"/>
-              </a:ext>
-            </a:extLst>
-          </p:cNvPr>
-          <p:cNvSpPr>
-            <a:spLocks noGrp="1"/>
-          </p:cNvSpPr>
-          <p:nvPr>
-            <p:ph type="ftr" sz="quarter" idx="11"/>
-          </p:nvPr>
-        </p:nvSpPr>
-        <p:spPr>
-          <a:xfrm>
-            <a:off x="8893370" y="6490524"/>
-            <a:ext cx="2662834" cy="336141"/>
-          </a:xfrm>
-        </p:spPr>
-        <p:txBody>
-          <a:bodyPr anchor="ctr">
-            <a:normAutofit/>
-          </a:bodyPr>
-          <a:lstStyle/>
-          <a:p>
-            <a:pPr>
-              <a:spcAft>
-                <a:spcPts val="600"/>
-              </a:spcAft>
-            </a:pPr>
-            <a:r>
-              <a:rPr lang="en-US"/>
-              <a:t>Sample Footer Text</a:t>
-            </a:r>
-          </a:p>
-        </p:txBody>
-      </p:sp>
-      <p:sp>
-        <p:nvSpPr>
-          <p:cNvPr id="6" name="Slide Number Placeholder 5">
-            <a:extLst>
-              <a:ext uri="{FF2B5EF4-FFF2-40B4-BE49-F238E27FC236}">
-                <a16:creationId xmlns:a16="http://schemas.microsoft.com/office/drawing/2014/main" id="{72116399-E2E1-A106-2D4B-C903FB076A2B}"/>
-              </a:ext>
-            </a:extLst>
-          </p:cNvPr>
-          <p:cNvSpPr>
-            <a:spLocks noGrp="1"/>
-          </p:cNvSpPr>
-          <p:nvPr>
-            <p:ph type="sldNum" sz="quarter" idx="12"/>
-          </p:nvPr>
-        </p:nvSpPr>
-        <p:spPr>
-          <a:xfrm>
-            <a:off x="11648431" y="6490524"/>
-            <a:ext cx="457200" cy="336141"/>
-          </a:xfrm>
-        </p:spPr>
-        <p:txBody>
-          <a:bodyPr anchor="ctr">
-            <a:normAutofit/>
-          </a:bodyPr>
-          <a:lstStyle/>
-          <a:p>
-            <a:pPr>
-              <a:spcAft>
-                <a:spcPts val="600"/>
-              </a:spcAft>
-            </a:pPr>
-            <a:fld id="{84C450F2-3BB4-4AE4-8A35-A9D7AEA4C850}" type="slidenum">
-              <a:rPr lang="en-US" smtClean="0"/>
-              <a:pPr>
-                <a:spcAft>
-                  <a:spcPts val="600"/>
-                </a:spcAft>
-              </a:pPr>
-              <a:t>23</a:t>
-            </a:fld>
-            <a:endParaRPr lang="en-US"/>
-          </a:p>
-        </p:txBody>
-      </p:sp>
-      <p:graphicFrame>
-        <p:nvGraphicFramePr>
-          <p:cNvPr id="11" name="Content Placeholder 8">
-            <a:extLst>
-              <a:ext uri="{FF2B5EF4-FFF2-40B4-BE49-F238E27FC236}">
-                <a16:creationId xmlns:a16="http://schemas.microsoft.com/office/drawing/2014/main" id="{26FE2DBD-0348-B393-B839-9A24733DBFB5}"/>
-              </a:ext>
-            </a:extLst>
-          </p:cNvPr>
-          <p:cNvGraphicFramePr>
-            <a:graphicFrameLocks noGrp="1"/>
-          </p:cNvGraphicFramePr>
-          <p:nvPr>
-            <p:ph idx="1"/>
-            <p:extLst>
-              <p:ext uri="{D42A27DB-BD31-4B8C-83A1-F6EECF244321}">
-                <p14:modId xmlns:p14="http://schemas.microsoft.com/office/powerpoint/2010/main" val="465911837"/>
-              </p:ext>
-            </p:extLst>
-          </p:nvPr>
-        </p:nvGraphicFramePr>
-        <p:xfrm>
-          <a:off x="431172" y="1384847"/>
-          <a:ext cx="11125032" cy="4905116"/>
-        </p:xfrm>
-        <a:graphic>
-          <a:graphicData uri="http://schemas.openxmlformats.org/drawingml/2006/diagram">
-            <dgm:relIds xmlns:dgm="http://schemas.openxmlformats.org/drawingml/2006/diagram" xmlns:r="http://schemas.openxmlformats.org/officeDocument/2006/relationships" r:dm="rId2" r:lo="rId3" r:qs="rId4" r:cs="rId5"/>
-          </a:graphicData>
-        </a:graphic>
-      </p:graphicFrame>
-    </p:spTree>
-    <p:extLst>
-      <p:ext uri="{BB962C8B-B14F-4D97-AF65-F5344CB8AC3E}">
-        <p14:creationId xmlns:p14="http://schemas.microsoft.com/office/powerpoint/2010/main" val="2769828718"/>
       </p:ext>
     </p:extLst>
   </p:cSld>
@@ -37882,6 +33748,205 @@
           <p:cNvPr id="2" name="Title 1">
             <a:extLst>
               <a:ext uri="{FF2B5EF4-FFF2-40B4-BE49-F238E27FC236}">
+                <a16:creationId xmlns:a16="http://schemas.microsoft.com/office/drawing/2014/main" id="{F6456D4F-2062-B3C3-5677-726CCDD7EFCD}"/>
+              </a:ext>
+            </a:extLst>
+          </p:cNvPr>
+          <p:cNvSpPr>
+            <a:spLocks noGrp="1"/>
+          </p:cNvSpPr>
+          <p:nvPr>
+            <p:ph type="title"/>
+          </p:nvPr>
+        </p:nvSpPr>
+        <p:spPr>
+          <a:xfrm>
+            <a:off x="429768" y="429768"/>
+            <a:ext cx="10890374" cy="1627632"/>
+          </a:xfrm>
+        </p:spPr>
+        <p:txBody>
+          <a:bodyPr anchor="t">
+            <a:normAutofit/>
+          </a:bodyPr>
+          <a:lstStyle/>
+          <a:p>
+            <a:r>
+              <a:rPr lang="en-US"/>
+              <a:t>Conclusion</a:t>
+            </a:r>
+          </a:p>
+        </p:txBody>
+      </p:sp>
+      <p:graphicFrame>
+        <p:nvGraphicFramePr>
+          <p:cNvPr id="10" name="Content Placeholder 2">
+            <a:extLst>
+              <a:ext uri="{FF2B5EF4-FFF2-40B4-BE49-F238E27FC236}">
+                <a16:creationId xmlns:a16="http://schemas.microsoft.com/office/drawing/2014/main" id="{58DFE8CC-8232-B300-1A4F-F93DBCB42F4F}"/>
+              </a:ext>
+            </a:extLst>
+          </p:cNvPr>
+          <p:cNvGraphicFramePr>
+            <a:graphicFrameLocks noGrp="1"/>
+          </p:cNvGraphicFramePr>
+          <p:nvPr>
+            <p:ph sz="quarter" idx="13"/>
+            <p:extLst>
+              <p:ext uri="{D42A27DB-BD31-4B8C-83A1-F6EECF244321}">
+                <p14:modId xmlns:p14="http://schemas.microsoft.com/office/powerpoint/2010/main" val="2829773912"/>
+              </p:ext>
+              <p:ext uri="{E7BDC344-281C-4309-B0C6-D0EE65EED2A8}">
+                <p202:designPr xmlns:p202="http://schemas.microsoft.com/office/powerpoint/2020/02/main">
+                  <p202:designTagLst>
+                    <p202:designTag name="ARCH:1:CLS" val="InformationBlock"/>
+                    <p202:designTag name="ARCH:1:VSVAR" val="TitledTextBox"/>
+                  </p202:designTagLst>
+                </p202:designPr>
+              </p:ext>
+            </p:extLst>
+          </p:nvPr>
+        </p:nvGraphicFramePr>
+        <p:xfrm>
+          <a:off x="429768" y="3264408"/>
+          <a:ext cx="10890374" cy="2834640"/>
+        </p:xfrm>
+        <a:graphic>
+          <a:graphicData uri="http://schemas.openxmlformats.org/drawingml/2006/diagram">
+            <dgm:relIds xmlns:dgm="http://schemas.openxmlformats.org/drawingml/2006/diagram" xmlns:r="http://schemas.openxmlformats.org/officeDocument/2006/relationships" r:dm="rId3" r:lo="rId4" r:qs="rId5" r:cs="rId6"/>
+          </a:graphicData>
+        </a:graphic>
+      </p:graphicFrame>
+      <p:sp>
+        <p:nvSpPr>
+          <p:cNvPr id="4" name="Date Placeholder 3">
+            <a:extLst>
+              <a:ext uri="{FF2B5EF4-FFF2-40B4-BE49-F238E27FC236}">
+                <a16:creationId xmlns:a16="http://schemas.microsoft.com/office/drawing/2014/main" id="{BFCD6AE8-998A-10B1-9BE7-D437988994D4}"/>
+              </a:ext>
+            </a:extLst>
+          </p:cNvPr>
+          <p:cNvSpPr>
+            <a:spLocks noGrp="1"/>
+          </p:cNvSpPr>
+          <p:nvPr>
+            <p:ph type="dt" sz="half" idx="10"/>
+          </p:nvPr>
+        </p:nvSpPr>
+        <p:spPr>
+          <a:xfrm>
+            <a:off x="431172" y="6490524"/>
+            <a:ext cx="2841959" cy="336141"/>
+          </a:xfrm>
+        </p:spPr>
+        <p:txBody>
+          <a:bodyPr anchor="ctr">
+            <a:normAutofit/>
+          </a:bodyPr>
+          <a:lstStyle/>
+          <a:p>
+            <a:pPr>
+              <a:spcAft>
+                <a:spcPts val="600"/>
+              </a:spcAft>
+            </a:pPr>
+            <a:fld id="{FE21D4C7-8630-4B98-978C-30388BBD4EE8}" type="datetime1">
+              <a:rPr lang="en-US" smtClean="0"/>
+              <a:pPr>
+                <a:spcAft>
+                  <a:spcPts val="600"/>
+                </a:spcAft>
+              </a:pPr>
+              <a:t>1/14/2026</a:t>
+            </a:fld>
+            <a:endParaRPr lang="en-US"/>
+          </a:p>
+        </p:txBody>
+      </p:sp>
+      <p:sp>
+        <p:nvSpPr>
+          <p:cNvPr id="6" name="Slide Number Placeholder 5">
+            <a:extLst>
+              <a:ext uri="{FF2B5EF4-FFF2-40B4-BE49-F238E27FC236}">
+                <a16:creationId xmlns:a16="http://schemas.microsoft.com/office/drawing/2014/main" id="{5AB8B199-EE78-8565-9C38-B24F2F5AEE78}"/>
+              </a:ext>
+            </a:extLst>
+          </p:cNvPr>
+          <p:cNvSpPr>
+            <a:spLocks noGrp="1"/>
+          </p:cNvSpPr>
+          <p:nvPr>
+            <p:ph type="sldNum" sz="quarter" idx="12"/>
+          </p:nvPr>
+        </p:nvSpPr>
+        <p:spPr>
+          <a:xfrm>
+            <a:off x="11648431" y="6490524"/>
+            <a:ext cx="457200" cy="336141"/>
+          </a:xfrm>
+        </p:spPr>
+        <p:txBody>
+          <a:bodyPr anchor="ctr">
+            <a:normAutofit/>
+          </a:bodyPr>
+          <a:lstStyle/>
+          <a:p>
+            <a:pPr>
+              <a:spcAft>
+                <a:spcPts val="600"/>
+              </a:spcAft>
+            </a:pPr>
+            <a:fld id="{84C450F2-3BB4-4AE4-8A35-A9D7AEA4C850}" type="slidenum">
+              <a:rPr lang="en-US" smtClean="0"/>
+              <a:pPr>
+                <a:spcAft>
+                  <a:spcPts val="600"/>
+                </a:spcAft>
+              </a:pPr>
+              <a:t>24</a:t>
+            </a:fld>
+            <a:endParaRPr lang="en-US"/>
+          </a:p>
+        </p:txBody>
+      </p:sp>
+    </p:spTree>
+    <p:extLst>
+      <p:ext uri="{BB962C8B-B14F-4D97-AF65-F5344CB8AC3E}">
+        <p14:creationId xmlns:p14="http://schemas.microsoft.com/office/powerpoint/2010/main" val="898968854"/>
+      </p:ext>
+    </p:extLst>
+  </p:cSld>
+  <p:clrMapOvr>
+    <a:masterClrMapping/>
+  </p:clrMapOvr>
+  <p:transition>
+    <p:fade/>
+  </p:transition>
+</p:sld>
+</file>
+
+<file path=ppt/slides/slide25.xml><?xml version="1.0" encoding="utf-8"?>
+<p:sld xmlns:a="http://schemas.openxmlformats.org/drawingml/2006/main" xmlns:r="http://schemas.openxmlformats.org/officeDocument/2006/relationships" xmlns:p="http://schemas.openxmlformats.org/presentationml/2006/main">
+  <p:cSld>
+    <p:spTree>
+      <p:nvGrpSpPr>
+        <p:cNvPr id="1" name=""/>
+        <p:cNvGrpSpPr/>
+        <p:nvPr/>
+      </p:nvGrpSpPr>
+      <p:grpSpPr>
+        <a:xfrm>
+          <a:off x="0" y="0"/>
+          <a:ext cx="0" cy="0"/>
+          <a:chOff x="0" y="0"/>
+          <a:chExt cx="0" cy="0"/>
+        </a:xfrm>
+      </p:grpSpPr>
+      <p:sp>
+        <p:nvSpPr>
+          <p:cNvPr id="2" name="Title 1">
+            <a:extLst>
+              <a:ext uri="{FF2B5EF4-FFF2-40B4-BE49-F238E27FC236}">
                 <a16:creationId xmlns:a16="http://schemas.microsoft.com/office/drawing/2014/main" id="{BAA6160A-935D-AD89-4A63-1DEA5D9B455E}"/>
               </a:ext>
             </a:extLst>
@@ -38153,7 +34218,7 @@
                   <a:spcPts val="600"/>
                 </a:spcAft>
               </a:pPr>
-              <a:t>1/9/2026</a:t>
+              <a:t>1/14/2026</a:t>
             </a:fld>
             <a:endParaRPr lang="en-US"/>
           </a:p>
@@ -38199,7 +34264,7 @@
                   <a:spcPts val="600"/>
                 </a:spcAft>
               </a:pPr>
-              <a:t>24</a:t>
+              <a:t>25</a:t>
             </a:fld>
             <a:endParaRPr lang="en-US"/>
           </a:p>
@@ -38313,205 +34378,6 @@
 </p:sld>
 </file>
 
-<file path=ppt/slides/slide25.xml><?xml version="1.0" encoding="utf-8"?>
-<p:sld xmlns:a="http://schemas.openxmlformats.org/drawingml/2006/main" xmlns:r="http://schemas.openxmlformats.org/officeDocument/2006/relationships" xmlns:p="http://schemas.openxmlformats.org/presentationml/2006/main">
-  <p:cSld>
-    <p:spTree>
-      <p:nvGrpSpPr>
-        <p:cNvPr id="1" name=""/>
-        <p:cNvGrpSpPr/>
-        <p:nvPr/>
-      </p:nvGrpSpPr>
-      <p:grpSpPr>
-        <a:xfrm>
-          <a:off x="0" y="0"/>
-          <a:ext cx="0" cy="0"/>
-          <a:chOff x="0" y="0"/>
-          <a:chExt cx="0" cy="0"/>
-        </a:xfrm>
-      </p:grpSpPr>
-      <p:sp>
-        <p:nvSpPr>
-          <p:cNvPr id="2" name="Title 1">
-            <a:extLst>
-              <a:ext uri="{FF2B5EF4-FFF2-40B4-BE49-F238E27FC236}">
-                <a16:creationId xmlns:a16="http://schemas.microsoft.com/office/drawing/2014/main" id="{F6456D4F-2062-B3C3-5677-726CCDD7EFCD}"/>
-              </a:ext>
-            </a:extLst>
-          </p:cNvPr>
-          <p:cNvSpPr>
-            <a:spLocks noGrp="1"/>
-          </p:cNvSpPr>
-          <p:nvPr>
-            <p:ph type="title"/>
-          </p:nvPr>
-        </p:nvSpPr>
-        <p:spPr>
-          <a:xfrm>
-            <a:off x="429768" y="429768"/>
-            <a:ext cx="10890374" cy="1627632"/>
-          </a:xfrm>
-        </p:spPr>
-        <p:txBody>
-          <a:bodyPr anchor="t">
-            <a:normAutofit/>
-          </a:bodyPr>
-          <a:lstStyle/>
-          <a:p>
-            <a:r>
-              <a:rPr lang="en-US"/>
-              <a:t>Conclusion</a:t>
-            </a:r>
-          </a:p>
-        </p:txBody>
-      </p:sp>
-      <p:graphicFrame>
-        <p:nvGraphicFramePr>
-          <p:cNvPr id="10" name="Content Placeholder 2">
-            <a:extLst>
-              <a:ext uri="{FF2B5EF4-FFF2-40B4-BE49-F238E27FC236}">
-                <a16:creationId xmlns:a16="http://schemas.microsoft.com/office/drawing/2014/main" id="{58DFE8CC-8232-B300-1A4F-F93DBCB42F4F}"/>
-              </a:ext>
-            </a:extLst>
-          </p:cNvPr>
-          <p:cNvGraphicFramePr>
-            <a:graphicFrameLocks noGrp="1"/>
-          </p:cNvGraphicFramePr>
-          <p:nvPr>
-            <p:ph sz="quarter" idx="13"/>
-            <p:extLst>
-              <p:ext uri="{D42A27DB-BD31-4B8C-83A1-F6EECF244321}">
-                <p14:modId xmlns:p14="http://schemas.microsoft.com/office/powerpoint/2010/main" val="2829773912"/>
-              </p:ext>
-              <p:ext uri="{E7BDC344-281C-4309-B0C6-D0EE65EED2A8}">
-                <p202:designPr xmlns:p202="http://schemas.microsoft.com/office/powerpoint/2020/02/main">
-                  <p202:designTagLst>
-                    <p202:designTag name="ARCH:1:CLS" val="InformationBlock"/>
-                    <p202:designTag name="ARCH:1:VSVAR" val="TitledTextBox"/>
-                  </p202:designTagLst>
-                </p202:designPr>
-              </p:ext>
-            </p:extLst>
-          </p:nvPr>
-        </p:nvGraphicFramePr>
-        <p:xfrm>
-          <a:off x="429768" y="3264408"/>
-          <a:ext cx="10890374" cy="2834640"/>
-        </p:xfrm>
-        <a:graphic>
-          <a:graphicData uri="http://schemas.openxmlformats.org/drawingml/2006/diagram">
-            <dgm:relIds xmlns:dgm="http://schemas.openxmlformats.org/drawingml/2006/diagram" xmlns:r="http://schemas.openxmlformats.org/officeDocument/2006/relationships" r:dm="rId3" r:lo="rId4" r:qs="rId5" r:cs="rId6"/>
-          </a:graphicData>
-        </a:graphic>
-      </p:graphicFrame>
-      <p:sp>
-        <p:nvSpPr>
-          <p:cNvPr id="4" name="Date Placeholder 3">
-            <a:extLst>
-              <a:ext uri="{FF2B5EF4-FFF2-40B4-BE49-F238E27FC236}">
-                <a16:creationId xmlns:a16="http://schemas.microsoft.com/office/drawing/2014/main" id="{BFCD6AE8-998A-10B1-9BE7-D437988994D4}"/>
-              </a:ext>
-            </a:extLst>
-          </p:cNvPr>
-          <p:cNvSpPr>
-            <a:spLocks noGrp="1"/>
-          </p:cNvSpPr>
-          <p:nvPr>
-            <p:ph type="dt" sz="half" idx="10"/>
-          </p:nvPr>
-        </p:nvSpPr>
-        <p:spPr>
-          <a:xfrm>
-            <a:off x="431172" y="6490524"/>
-            <a:ext cx="2841959" cy="336141"/>
-          </a:xfrm>
-        </p:spPr>
-        <p:txBody>
-          <a:bodyPr anchor="ctr">
-            <a:normAutofit/>
-          </a:bodyPr>
-          <a:lstStyle/>
-          <a:p>
-            <a:pPr>
-              <a:spcAft>
-                <a:spcPts val="600"/>
-              </a:spcAft>
-            </a:pPr>
-            <a:fld id="{FE21D4C7-8630-4B98-978C-30388BBD4EE8}" type="datetime1">
-              <a:rPr lang="en-US" smtClean="0"/>
-              <a:pPr>
-                <a:spcAft>
-                  <a:spcPts val="600"/>
-                </a:spcAft>
-              </a:pPr>
-              <a:t>1/9/2026</a:t>
-            </a:fld>
-            <a:endParaRPr lang="en-US"/>
-          </a:p>
-        </p:txBody>
-      </p:sp>
-      <p:sp>
-        <p:nvSpPr>
-          <p:cNvPr id="6" name="Slide Number Placeholder 5">
-            <a:extLst>
-              <a:ext uri="{FF2B5EF4-FFF2-40B4-BE49-F238E27FC236}">
-                <a16:creationId xmlns:a16="http://schemas.microsoft.com/office/drawing/2014/main" id="{5AB8B199-EE78-8565-9C38-B24F2F5AEE78}"/>
-              </a:ext>
-            </a:extLst>
-          </p:cNvPr>
-          <p:cNvSpPr>
-            <a:spLocks noGrp="1"/>
-          </p:cNvSpPr>
-          <p:nvPr>
-            <p:ph type="sldNum" sz="quarter" idx="12"/>
-          </p:nvPr>
-        </p:nvSpPr>
-        <p:spPr>
-          <a:xfrm>
-            <a:off x="11648431" y="6490524"/>
-            <a:ext cx="457200" cy="336141"/>
-          </a:xfrm>
-        </p:spPr>
-        <p:txBody>
-          <a:bodyPr anchor="ctr">
-            <a:normAutofit/>
-          </a:bodyPr>
-          <a:lstStyle/>
-          <a:p>
-            <a:pPr>
-              <a:spcAft>
-                <a:spcPts val="600"/>
-              </a:spcAft>
-            </a:pPr>
-            <a:fld id="{84C450F2-3BB4-4AE4-8A35-A9D7AEA4C850}" type="slidenum">
-              <a:rPr lang="en-US" smtClean="0"/>
-              <a:pPr>
-                <a:spcAft>
-                  <a:spcPts val="600"/>
-                </a:spcAft>
-              </a:pPr>
-              <a:t>25</a:t>
-            </a:fld>
-            <a:endParaRPr lang="en-US"/>
-          </a:p>
-        </p:txBody>
-      </p:sp>
-    </p:spTree>
-    <p:extLst>
-      <p:ext uri="{BB962C8B-B14F-4D97-AF65-F5344CB8AC3E}">
-        <p14:creationId xmlns:p14="http://schemas.microsoft.com/office/powerpoint/2010/main" val="898968854"/>
-      </p:ext>
-    </p:extLst>
-  </p:cSld>
-  <p:clrMapOvr>
-    <a:masterClrMapping/>
-  </p:clrMapOvr>
-  <p:transition>
-    <p:fade/>
-  </p:transition>
-</p:sld>
-</file>
-
 <file path=ppt/slides/slide3.xml><?xml version="1.0" encoding="utf-8"?>
 <p:sld xmlns:a="http://schemas.openxmlformats.org/drawingml/2006/main" xmlns:r="http://schemas.openxmlformats.org/officeDocument/2006/relationships" xmlns:p="http://schemas.openxmlformats.org/presentationml/2006/main">
   <p:cSld>
@@ -38608,7 +34474,7 @@
                   <a:spcPts val="600"/>
                 </a:spcAft>
               </a:pPr>
-              <a:t>1/9/2026</a:t>
+              <a:t>1/14/2026</a:t>
             </a:fld>
             <a:endParaRPr lang="en-US"/>
           </a:p>
@@ -38793,7 +34659,7 @@
                   <a:spcPts val="600"/>
                 </a:spcAft>
               </a:pPr>
-              <a:t>1/9/2026</a:t>
+              <a:t>1/14/2026</a:t>
             </a:fld>
             <a:endParaRPr lang="en-US"/>
           </a:p>
@@ -38901,14 +34767,14 @@
             <p:ph sz="quarter" idx="13"/>
             <p:extLst>
               <p:ext uri="{D42A27DB-BD31-4B8C-83A1-F6EECF244321}">
-                <p14:modId xmlns:p14="http://schemas.microsoft.com/office/powerpoint/2010/main" val="736977769"/>
+                <p14:modId xmlns:p14="http://schemas.microsoft.com/office/powerpoint/2010/main" val="1209609089"/>
               </p:ext>
             </p:extLst>
           </p:nvPr>
         </p:nvGraphicFramePr>
         <p:xfrm>
-          <a:off x="429768" y="3264408"/>
-          <a:ext cx="10890374" cy="2834640"/>
+          <a:off x="429768" y="1290919"/>
+          <a:ext cx="10890374" cy="4808130"/>
         </p:xfrm>
         <a:graphic>
           <a:graphicData uri="http://schemas.openxmlformats.org/drawingml/2006/diagram">
@@ -38964,8 +34830,8 @@
         </p:nvSpPr>
         <p:spPr>
           <a:xfrm>
-            <a:off x="431173" y="603504"/>
-            <a:ext cx="11291436" cy="761272"/>
+            <a:off x="429768" y="603504"/>
+            <a:ext cx="6618732" cy="768096"/>
           </a:xfrm>
         </p:spPr>
         <p:txBody>
@@ -38975,134 +34841,44 @@
           <a:lstStyle/>
           <a:p>
             <a:r>
-              <a:rPr lang="en-US"/>
+              <a:rPr lang="en-US" dirty="0"/>
               <a:t>Solution statement</a:t>
             </a:r>
-            <a:endParaRPr lang="en-US" dirty="0"/>
-          </a:p>
-        </p:txBody>
-      </p:sp>
-      <p:pic>
-        <p:nvPicPr>
-          <p:cNvPr id="8" name="Picture 7" descr="Abstract blurred background of department store">
-            <a:extLst>
-              <a:ext uri="{FF2B5EF4-FFF2-40B4-BE49-F238E27FC236}">
-                <a16:creationId xmlns:a16="http://schemas.microsoft.com/office/drawing/2014/main" id="{E1AD7A2C-5608-1A51-DCE3-525AE4686D61}"/>
-              </a:ext>
-            </a:extLst>
-          </p:cNvPr>
-          <p:cNvPicPr>
-            <a:picLocks noChangeAspect="1"/>
-          </p:cNvPicPr>
-          <p:nvPr/>
-        </p:nvPicPr>
-        <p:blipFill>
-          <a:blip r:embed="rId2"/>
-          <a:srcRect l="3705" r="15619" b="1"/>
-          <a:stretch>
-            <a:fillRect/>
-          </a:stretch>
-        </p:blipFill>
+          </a:p>
+        </p:txBody>
+      </p:sp>
+      <p:sp>
+        <p:nvSpPr>
+          <p:cNvPr id="3" name="Content Placeholder 2">
+            <a:extLst>
+              <a:ext uri="{FF2B5EF4-FFF2-40B4-BE49-F238E27FC236}">
+                <a16:creationId xmlns:a16="http://schemas.microsoft.com/office/drawing/2014/main" id="{438127BE-1A04-AEA9-9BDB-D68E69C38F64}"/>
+              </a:ext>
+            </a:extLst>
+          </p:cNvPr>
+          <p:cNvSpPr>
+            <a:spLocks noGrp="1"/>
+          </p:cNvSpPr>
+          <p:nvPr>
+            <p:ph sz="quarter" idx="14"/>
+          </p:nvPr>
+        </p:nvSpPr>
         <p:spPr>
           <a:xfrm>
-            <a:off x="0" y="2988460"/>
-            <a:ext cx="3780410" cy="3330044"/>
-          </a:xfrm>
-          <a:custGeom>
-            <a:avLst/>
-            <a:gdLst>
-              <a:gd name="connsiteX0" fmla="*/ 0 w 7734300"/>
-              <a:gd name="connsiteY0" fmla="*/ 0 h 6399152"/>
-              <a:gd name="connsiteX1" fmla="*/ 7734300 w 7734300"/>
-              <a:gd name="connsiteY1" fmla="*/ 0 h 6399152"/>
-              <a:gd name="connsiteX2" fmla="*/ 7734300 w 7734300"/>
-              <a:gd name="connsiteY2" fmla="*/ 5797156 h 6399152"/>
-              <a:gd name="connsiteX3" fmla="*/ 7132304 w 7734300"/>
-              <a:gd name="connsiteY3" fmla="*/ 6399152 h 6399152"/>
-              <a:gd name="connsiteX4" fmla="*/ 0 w 7734300"/>
-              <a:gd name="connsiteY4" fmla="*/ 6399152 h 6399152"/>
-            </a:gdLst>
-            <a:ahLst/>
-            <a:cxnLst>
-              <a:cxn ang="0">
-                <a:pos x="connsiteX0" y="connsiteY0"/>
-              </a:cxn>
-              <a:cxn ang="0">
-                <a:pos x="connsiteX1" y="connsiteY1"/>
-              </a:cxn>
-              <a:cxn ang="0">
-                <a:pos x="connsiteX2" y="connsiteY2"/>
-              </a:cxn>
-              <a:cxn ang="0">
-                <a:pos x="connsiteX3" y="connsiteY3"/>
-              </a:cxn>
-              <a:cxn ang="0">
-                <a:pos x="connsiteX4" y="connsiteY4"/>
-              </a:cxn>
-            </a:cxnLst>
-            <a:rect l="l" t="t" r="r" b="b"/>
-            <a:pathLst>
-              <a:path w="7734300" h="6399152">
-                <a:moveTo>
-                  <a:pt x="0" y="0"/>
-                </a:moveTo>
-                <a:lnTo>
-                  <a:pt x="7734300" y="0"/>
-                </a:lnTo>
-                <a:lnTo>
-                  <a:pt x="7734300" y="5797156"/>
-                </a:lnTo>
-                <a:cubicBezTo>
-                  <a:pt x="7734300" y="6129629"/>
-                  <a:pt x="7464777" y="6399152"/>
-                  <a:pt x="7132304" y="6399152"/>
-                </a:cubicBezTo>
-                <a:lnTo>
-                  <a:pt x="0" y="6399152"/>
-                </a:lnTo>
-                <a:close/>
-              </a:path>
-            </a:pathLst>
-          </a:custGeom>
-          <a:noFill/>
-        </p:spPr>
-      </p:pic>
-      <p:sp>
-        <p:nvSpPr>
-          <p:cNvPr id="3" name="Content Placeholder 2">
-            <a:extLst>
-              <a:ext uri="{FF2B5EF4-FFF2-40B4-BE49-F238E27FC236}">
-                <a16:creationId xmlns:a16="http://schemas.microsoft.com/office/drawing/2014/main" id="{438127BE-1A04-AEA9-9BDB-D68E69C38F64}"/>
-              </a:ext>
-            </a:extLst>
-          </p:cNvPr>
-          <p:cNvSpPr>
-            <a:spLocks noGrp="1"/>
-          </p:cNvSpPr>
-          <p:nvPr>
-            <p:ph sz="quarter" idx="14"/>
-          </p:nvPr>
-        </p:nvSpPr>
-        <p:spPr>
-          <a:xfrm>
-            <a:off x="3957851" y="1555845"/>
-            <a:ext cx="7764757" cy="4762659"/>
+            <a:off x="429766" y="2276856"/>
+            <a:ext cx="9781033" cy="4041648"/>
           </a:xfrm>
         </p:spPr>
         <p:txBody>
-          <a:bodyPr>
+          <a:bodyPr spcFirstLastPara="0" vert="horz" lIns="121920" tIns="121920" rIns="121920" bIns="121920" numCol="1" spcCol="1270" anchorCtr="0">
             <a:normAutofit/>
           </a:bodyPr>
           <a:lstStyle/>
           <a:p>
-            <a:pPr marL="0" indent="0">
-              <a:buNone/>
-            </a:pPr>
-            <a:r>
-              <a:rPr lang="en-US" sz="3600"/>
+            <a:r>
+              <a:rPr lang="en-US" sz="4000" dirty="0"/>
               <a:t>Improve user experience by creating an app where a customer can upload a photo and get digitally curated fashion recommendations based on the photo.</a:t>
             </a:r>
-            <a:endParaRPr lang="en-US" sz="3600" dirty="0"/>
           </a:p>
         </p:txBody>
       </p:sp>
@@ -39146,9 +34922,49 @@
                   <a:spcPts val="600"/>
                 </a:spcAft>
               </a:pPr>
-              <a:t>1/9/2026</a:t>
+              <a:t>1/14/2026</a:t>
             </a:fld>
             <a:endParaRPr lang="en-US"/>
+          </a:p>
+        </p:txBody>
+      </p:sp>
+      <p:sp>
+        <p:nvSpPr>
+          <p:cNvPr id="15" name="Footer Placeholder 5">
+            <a:extLst>
+              <a:ext uri="{FF2B5EF4-FFF2-40B4-BE49-F238E27FC236}">
+                <a16:creationId xmlns:a16="http://schemas.microsoft.com/office/drawing/2014/main" id="{EC3160FD-FE84-3183-966F-F8C684D18A59}"/>
+              </a:ext>
+            </a:extLst>
+          </p:cNvPr>
+          <p:cNvSpPr>
+            <a:spLocks noGrp="1"/>
+          </p:cNvSpPr>
+          <p:nvPr>
+            <p:ph type="ftr" sz="quarter" idx="11"/>
+          </p:nvPr>
+        </p:nvSpPr>
+        <p:spPr>
+          <a:xfrm>
+            <a:off x="8893370" y="6490524"/>
+            <a:ext cx="2662834" cy="336141"/>
+          </a:xfrm>
+        </p:spPr>
+        <p:txBody>
+          <a:bodyPr anchor="ctr">
+            <a:normAutofit/>
+          </a:bodyPr>
+          <a:lstStyle/>
+          <a:p>
+            <a:pPr>
+              <a:spcAft>
+                <a:spcPts val="600"/>
+              </a:spcAft>
+            </a:pPr>
+            <a:r>
+              <a:rPr lang="en-US"/>
+              <a:t>Sample Footer Text</a:t>
+            </a:r>
           </a:p>
         </p:txBody>
       </p:sp>
@@ -39502,7 +35318,7 @@
                   <a:spcPts val="600"/>
                 </a:spcAft>
               </a:pPr>
-              <a:t>1/9/2026</a:t>
+              <a:t>1/14/2026</a:t>
             </a:fld>
             <a:endParaRPr lang="en-US"/>
           </a:p>
@@ -39614,7 +35430,7 @@
           <a:p>
             <a:r>
               <a:rPr lang="en-US" dirty="0"/>
-              <a:t>Solutions</a:t>
+              <a:t>Solutions(optional)</a:t>
             </a:r>
           </a:p>
         </p:txBody>
@@ -39659,7 +35475,7 @@
                   <a:spcPts val="600"/>
                 </a:spcAft>
               </a:pPr>
-              <a:t>1/9/2026</a:t>
+              <a:t>1/14/2026</a:t>
             </a:fld>
             <a:endParaRPr lang="en-US"/>
           </a:p>
@@ -39869,7 +35685,7 @@
         </p:spPr>
         <p:txBody>
           <a:bodyPr>
-            <a:normAutofit fontScale="92500" lnSpcReduction="20000"/>
+            <a:normAutofit fontScale="92500" lnSpcReduction="10000"/>
           </a:bodyPr>
           <a:lstStyle/>
           <a:p>
@@ -39879,7 +35695,7 @@
               </a:lnSpc>
             </a:pPr>
             <a:r>
-              <a:rPr lang="en-US" sz="1600" b="1"/>
+              <a:rPr lang="en-US" sz="1600" b="1" dirty="0"/>
               <a:t>Engineering</a:t>
             </a:r>
           </a:p>
@@ -39890,8 +35706,8 @@
               </a:lnSpc>
             </a:pPr>
             <a:r>
-              <a:rPr lang="en-US"/>
-              <a:t>Mobile app development frameworks (e.g. Azure, React Native, Flutter, Swift, Kotlin)</a:t>
+              <a:rPr lang="en-US" dirty="0"/>
+              <a:t>Mobile app development frameworks (e.g. Azure,)</a:t>
             </a:r>
           </a:p>
           <a:p>
@@ -39901,7 +35717,7 @@
               </a:lnSpc>
             </a:pPr>
             <a:r>
-              <a:rPr lang="en-US"/>
+              <a:rPr lang="en-US" dirty="0"/>
               <a:t>Backend infrastructure for user accounts, product catalog, and order management.</a:t>
             </a:r>
           </a:p>
@@ -39912,7 +35728,7 @@
               </a:lnSpc>
             </a:pPr>
             <a:r>
-              <a:rPr lang="en-US"/>
+              <a:rPr lang="en-US" dirty="0"/>
               <a:t>API integration for payment gateways and third-party services.</a:t>
             </a:r>
           </a:p>
@@ -39923,7 +35739,7 @@
               </a:lnSpc>
             </a:pPr>
             <a:r>
-              <a:rPr lang="en-US" sz="1600" b="1"/>
+              <a:rPr lang="en-US" sz="1600" b="1" dirty="0"/>
               <a:t>Data Team</a:t>
             </a:r>
           </a:p>
@@ -39934,7 +35750,7 @@
               </a:lnSpc>
             </a:pPr>
             <a:r>
-              <a:rPr lang="en-US"/>
+              <a:rPr lang="en-US" dirty="0"/>
               <a:t>Database design for storing user profiles, product information, and transaction history.</a:t>
             </a:r>
           </a:p>
@@ -39945,8 +35761,8 @@
               </a:lnSpc>
             </a:pPr>
             <a:r>
-              <a:rPr lang="en-US"/>
-              <a:t>Data analytics for tracking user behavior and app performance.</a:t>
+              <a:rPr lang="en-US" dirty="0"/>
+              <a:t>Data analytics for tracking user behavior and app performance. (Azure Analytics)</a:t>
             </a:r>
           </a:p>
           <a:p>
@@ -39956,7 +35772,7 @@
               </a:lnSpc>
             </a:pPr>
             <a:r>
-              <a:rPr lang="en-US"/>
+              <a:rPr lang="en-US" dirty="0"/>
               <a:t>Machine learning models for personalized recommendations and fashion trend analysis.</a:t>
             </a:r>
           </a:p>
@@ -39967,7 +35783,7 @@
               </a:lnSpc>
             </a:pPr>
             <a:r>
-              <a:rPr lang="en-US" sz="1600" b="1"/>
+              <a:rPr lang="en-US" sz="1600" b="1" dirty="0"/>
               <a:t>UX</a:t>
             </a:r>
           </a:p>
@@ -39978,7 +35794,7 @@
               </a:lnSpc>
             </a:pPr>
             <a:r>
-              <a:rPr lang="en-US"/>
+              <a:rPr lang="en-US" dirty="0"/>
               <a:t>Intuitive and user-friendly interface design.</a:t>
             </a:r>
           </a:p>
@@ -39989,7 +35805,7 @@
               </a:lnSpc>
             </a:pPr>
             <a:r>
-              <a:rPr lang="en-US"/>
+              <a:rPr lang="en-US" dirty="0"/>
               <a:t>Responsive layouts for various device sizes.</a:t>
             </a:r>
           </a:p>
@@ -40000,7 +35816,7 @@
               </a:lnSpc>
             </a:pPr>
             <a:r>
-              <a:rPr lang="en-US"/>
+              <a:rPr lang="en-US" dirty="0"/>
               <a:t>Acceptability features for inclusive shopping experiences.</a:t>
             </a:r>
           </a:p>
@@ -40011,7 +35827,7 @@
               </a:lnSpc>
             </a:pPr>
             <a:r>
-              <a:rPr lang="en-US" sz="1600" b="1"/>
+              <a:rPr lang="en-US" sz="1600" b="1" dirty="0"/>
               <a:t>Software</a:t>
             </a:r>
           </a:p>
@@ -40022,7 +35838,7 @@
               </a:lnSpc>
             </a:pPr>
             <a:r>
-              <a:rPr lang="en-US"/>
+              <a:rPr lang="en-US" dirty="0"/>
               <a:t>Secure authentication and authorization mechanisms through Azure.</a:t>
             </a:r>
           </a:p>
@@ -40033,7 +35849,7 @@
               </a:lnSpc>
             </a:pPr>
             <a:r>
-              <a:rPr lang="en-US"/>
+              <a:rPr lang="en-US" dirty="0"/>
               <a:t>Reliable cloud hosting and scalability solutions .</a:t>
             </a:r>
           </a:p>
@@ -40044,7 +35860,7 @@
               </a:lnSpc>
             </a:pPr>
             <a:r>
-              <a:rPr lang="en-US"/>
+              <a:rPr lang="en-US" dirty="0"/>
               <a:t>Continuous integration and deployment pipelines for app updates.</a:t>
             </a:r>
           </a:p>
@@ -40098,7 +35914,7 @@
                   <a:spcPts val="600"/>
                 </a:spcAft>
               </a:pPr>
-              <a:t>1/9/2026</a:t>
+              <a:t>1/14/2026</a:t>
             </a:fld>
             <a:endParaRPr lang="en-US"/>
           </a:p>
@@ -40285,8 +36101,8 @@
               </a:lnSpc>
             </a:pPr>
             <a:r>
-              <a:rPr lang="en-US"/>
-              <a:t>Software Engineers</a:t>
+              <a:rPr lang="en-US" dirty="0"/>
+              <a:t>Software Engineers(X1)</a:t>
             </a:r>
           </a:p>
           <a:p>
@@ -40296,7 +36112,7 @@
               </a:lnSpc>
             </a:pPr>
             <a:r>
-              <a:rPr lang="en-US" sz="1800"/>
+              <a:rPr lang="en-US" sz="1800" dirty="0"/>
               <a:t>Responsible for developing the mobile app, backend systems, and integrating APIs for payments and third-party services.</a:t>
             </a:r>
           </a:p>
@@ -40307,8 +36123,8 @@
               </a:lnSpc>
             </a:pPr>
             <a:r>
-              <a:rPr lang="en-US"/>
-              <a:t>Data Analysts/ Scientists</a:t>
+              <a:rPr lang="en-US" dirty="0"/>
+              <a:t>Data Analysts/ Scientists(X2)</a:t>
             </a:r>
           </a:p>
           <a:p>
@@ -40318,7 +36134,7 @@
               </a:lnSpc>
             </a:pPr>
             <a:r>
-              <a:rPr lang="en-US" sz="1800"/>
+              <a:rPr lang="en-US" sz="1800" dirty="0"/>
               <a:t>Design and manage databases, analyze user behavior, and build machine learning models for personalized recommendations and fashion trend analysis.</a:t>
             </a:r>
           </a:p>
@@ -40329,8 +36145,8 @@
               </a:lnSpc>
             </a:pPr>
             <a:r>
-              <a:rPr lang="en-US"/>
-              <a:t>Product Managers</a:t>
+              <a:rPr lang="en-US" dirty="0"/>
+              <a:t>Product Managers(X1)</a:t>
             </a:r>
           </a:p>
           <a:p>
@@ -40340,7 +36156,7 @@
               </a:lnSpc>
             </a:pPr>
             <a:r>
-              <a:rPr lang="en-US" sz="1800"/>
+              <a:rPr lang="en-US" sz="1800" dirty="0"/>
               <a:t>Oversee project scope, timeline, and ensure alignment with business goals and user needs.</a:t>
             </a:r>
           </a:p>
@@ -40351,8 +36167,8 @@
               </a:lnSpc>
             </a:pPr>
             <a:r>
-              <a:rPr lang="en-US"/>
-              <a:t>AI/ML Engineers</a:t>
+              <a:rPr lang="en-US" dirty="0"/>
+              <a:t>AI/ML Engineers(X2)</a:t>
             </a:r>
           </a:p>
           <a:p>
@@ -40362,7 +36178,7 @@
               </a:lnSpc>
             </a:pPr>
             <a:r>
-              <a:rPr lang="en-US" sz="1800"/>
+              <a:rPr lang="en-US" sz="1800" dirty="0"/>
               <a:t>Develop and implement machine learning algorithms for predictability and recommendation features.</a:t>
             </a:r>
           </a:p>
@@ -40373,8 +36189,8 @@
               </a:lnSpc>
             </a:pPr>
             <a:r>
-              <a:rPr lang="en-US"/>
-              <a:t>UX/UI Engineers</a:t>
+              <a:rPr lang="en-US" dirty="0"/>
+              <a:t>UX/UI Engineers(X2)</a:t>
             </a:r>
           </a:p>
           <a:p>
@@ -40384,10 +36200,9 @@
               </a:lnSpc>
             </a:pPr>
             <a:r>
-              <a:rPr lang="en-US" sz="1800"/>
+              <a:rPr lang="en-US" sz="1800" dirty="0"/>
               <a:t>Desing intuitive, user-friendly, and accessible interfaces for seamless shopping experience.</a:t>
             </a:r>
-            <a:endParaRPr lang="en-US" sz="1800" dirty="0"/>
           </a:p>
         </p:txBody>
       </p:sp>
